--- a/template/identity_academy_vc課題_A班.pptx
+++ b/template/identity_academy_vc課題_A班.pptx
@@ -9,6 +9,7 @@
   </p:notesMasterIdLst>
   <p:sldIdLst>
     <p:sldId id="256" r:id="rId5"/>
+    <p:sldId id="267" r:id="rId16"/>
     <p:sldId id="257" r:id="rId6"/>
     <p:sldId id="258" r:id="rId7"/>
     <p:sldId id="259" r:id="rId8"/>
@@ -4416,14 +4417,10 @@
   <p:cSld>
     <p:bg>
       <p:bgPr>
-        <a:blipFill>
-          <a:blip r:embed="rId3">
-            <a:alphaModFix/>
-          </a:blip>
-          <a:stretch>
-            <a:fillRect/>
-          </a:stretch>
-        </a:blipFill>
+        <a:solidFill>
+          <a:srgbClr val="FFFFFF"/>
+        </a:solidFill>
+        <a:effectLst/>
       </p:bgPr>
     </p:bg>
     <p:spTree>
@@ -4442,14 +4439,14 @@
       </p:grpSpPr>
       <p:sp>
         <p:nvSpPr>
-          <p:cNvPr id="220" name="Google Shape;220;p12"/>
-          <p:cNvSpPr/>
-          <p:nvPr/>
-        </p:nvSpPr>
-        <p:spPr>
-          <a:xfrm>
-            <a:off x="548640" y="365760"/>
-            <a:ext cx="8046720" cy="274320"/>
+          <p:cNvPr id="221" name="Google Shape;221;p12"/>
+          <p:cNvSpPr/>
+          <p:nvPr/>
+        </p:nvSpPr>
+        <p:spPr>
+          <a:xfrm>
+            <a:off x="548640" y="367200"/>
+            <a:ext cx="8046720" cy="566928"/>
           </a:xfrm>
           <a:prstGeom prst="rect">
             <a:avLst/>
@@ -4473,70 +4470,7 @@
                 <a:spcPts val="0"/>
               </a:spcAft>
               <a:buClr>
-                <a:srgbClr val="5BC8FF"/>
-              </a:buClr>
-              <a:buSzPts val="1100"/>
-              <a:buFont typeface="Arial"/>
-              <a:buNone/>
-            </a:pPr>
-            <a:r>
-              <a:rPr b="1" i="0" lang="en-US" sz="1100" u="none" cap="none" strike="noStrike">
-                <a:solidFill>
-                  <a:srgbClr val="5BC8FF"/>
-                </a:solidFill>
-                <a:latin typeface="Arial"/>
-                <a:ea typeface="Arial"/>
-                <a:cs typeface="Arial"/>
-                <a:sym typeface="Arial"/>
-              </a:rPr>
-              <a:t>RISK ・ リスクと備え</a:t>
-            </a:r>
-            <a:endParaRPr b="0" i="0" sz="1100" u="none" cap="none" strike="noStrike">
-              <a:solidFill>
-                <a:schemeClr val="dk1"/>
-              </a:solidFill>
-              <a:latin typeface="Calibri"/>
-              <a:ea typeface="Calibri"/>
-              <a:cs typeface="Calibri"/>
-              <a:sym typeface="Calibri"/>
-            </a:endParaRPr>
-          </a:p>
-        </p:txBody>
-      </p:sp>
-      <p:sp>
-        <p:nvSpPr>
-          <p:cNvPr id="221" name="Google Shape;221;p12"/>
-          <p:cNvSpPr/>
-          <p:nvPr/>
-        </p:nvSpPr>
-        <p:spPr>
-          <a:xfrm>
-            <a:off x="548640" y="603504"/>
-            <a:ext cx="8046720" cy="566928"/>
-          </a:xfrm>
-          <a:prstGeom prst="rect">
-            <a:avLst/>
-          </a:prstGeom>
-          <a:noFill/>
-          <a:ln>
-            <a:noFill/>
-          </a:ln>
-        </p:spPr>
-        <p:txBody>
-          <a:bodyPr anchorCtr="0" anchor="ctr" bIns="0" lIns="0" spcFirstLastPara="1" rIns="0" wrap="square" tIns="0">
-            <a:noAutofit/>
-          </a:bodyPr>
-          <a:lstStyle/>
-          <a:p>
-            <a:pPr indent="0" lvl="0" marL="0" marR="0" rtl="0" algn="l">
-              <a:spcBef>
-                <a:spcPts val="0"/>
-              </a:spcBef>
-              <a:spcAft>
-                <a:spcPts val="0"/>
-              </a:spcAft>
-              <a:buClr>
-                <a:srgbClr val="EAF1FF"/>
+                <a:srgbClr val="16263F"/>
               </a:buClr>
               <a:buSzPts val="2900"/>
               <a:buFont typeface="Arial"/>
@@ -4545,7 +4479,7 @@
             <a:r>
               <a:rPr b="1" i="0" lang="en-US" sz="2900" u="none" cap="none" strike="noStrike">
                 <a:solidFill>
-                  <a:srgbClr val="EAF1FF"/>
+                  <a:srgbClr val="16263F"/>
                 </a:solidFill>
                 <a:latin typeface="Arial"/>
                 <a:ea typeface="Arial"/>
@@ -4574,7 +4508,7 @@
         </p:nvSpPr>
         <p:spPr>
           <a:xfrm>
-            <a:off x="548640" y="1600200"/>
+            <a:off x="548640" y="1800000"/>
             <a:ext cx="3886200" cy="1280160"/>
           </a:xfrm>
           <a:prstGeom prst="roundRect">
@@ -4583,11 +4517,11 @@
             </a:avLst>
           </a:prstGeom>
           <a:solidFill>
-            <a:srgbClr val="111C3C"/>
+            <a:srgbClr val="EEF3FB"/>
           </a:solidFill>
           <a:ln cap="flat" cmpd="sng" w="12700">
             <a:solidFill>
-              <a:srgbClr val="2A3B66"/>
+              <a:srgbClr val="D5DEEC"/>
             </a:solidFill>
             <a:prstDash val="solid"/>
             <a:round/>
@@ -4596,8 +4530,8 @@
           </a:ln>
           <a:effectLst>
             <a:outerShdw blurRad="114300" rotWithShape="0" algn="bl" dir="5400000" dist="38100">
-              <a:srgbClr val="000000">
-                <a:alpha val="45098"/>
+              <a:srgbClr val="16263F">
+                <a:alpha val="13000"/>
               </a:srgbClr>
             </a:outerShdw>
           </a:effectLst>
@@ -4639,7 +4573,7 @@
         </p:blipFill>
         <p:spPr>
           <a:xfrm>
-            <a:off x="777240" y="1828800"/>
+            <a:off x="777240" y="2028600"/>
             <a:ext cx="292608" cy="292608"/>
           </a:xfrm>
           <a:prstGeom prst="rect">
@@ -4659,7 +4593,7 @@
         </p:nvSpPr>
         <p:spPr>
           <a:xfrm>
-            <a:off x="1170432" y="1801368"/>
+            <a:off x="1170432" y="2001168"/>
             <a:ext cx="3108960" cy="365760"/>
           </a:xfrm>
           <a:prstGeom prst="rect">
@@ -4684,7 +4618,7 @@
                 <a:spcPts val="0"/>
               </a:spcAft>
               <a:buClr>
-                <a:srgbClr val="F5B454"/>
+                <a:srgbClr val="D9881C"/>
               </a:buClr>
               <a:buSzPts val="1400"/>
               <a:buFont typeface="Arial"/>
@@ -4693,7 +4627,7 @@
             <a:r>
               <a:rPr b="1" i="0" lang="en-US" sz="1400" u="none" cap="none" strike="noStrike">
                 <a:solidFill>
-                  <a:srgbClr val="F5B454"/>
+                  <a:srgbClr val="D9881C"/>
                 </a:solidFill>
                 <a:latin typeface="Arial"/>
                 <a:ea typeface="Arial"/>
@@ -4722,7 +4656,7 @@
         </p:nvSpPr>
         <p:spPr>
           <a:xfrm>
-            <a:off x="777240" y="2221992"/>
+            <a:off x="777240" y="2421792"/>
             <a:ext cx="3474720" cy="548640"/>
           </a:xfrm>
           <a:prstGeom prst="rect">
@@ -4747,7 +4681,7 @@
                 <a:spcPts val="0"/>
               </a:spcAft>
               <a:buClr>
-                <a:srgbClr val="9DB0D0"/>
+                <a:srgbClr val="56627A"/>
               </a:buClr>
               <a:buSzPts val="1150"/>
               <a:buFont typeface="Arial"/>
@@ -4756,7 +4690,7 @@
             <a:r>
               <a:rPr b="0" i="0" lang="en-US" sz="1150" u="none" cap="none" strike="noStrike">
                 <a:solidFill>
-                  <a:srgbClr val="9DB0D0"/>
+                  <a:srgbClr val="56627A"/>
                 </a:solidFill>
                 <a:latin typeface="Arial"/>
                 <a:ea typeface="Arial"/>
@@ -4785,7 +4719,7 @@
         </p:nvSpPr>
         <p:spPr>
           <a:xfrm>
-            <a:off x="4663440" y="1600200"/>
+            <a:off x="4663440" y="1800000"/>
             <a:ext cx="3886200" cy="1280160"/>
           </a:xfrm>
           <a:prstGeom prst="roundRect">
@@ -4794,11 +4728,11 @@
             </a:avLst>
           </a:prstGeom>
           <a:solidFill>
-            <a:srgbClr val="111C3C"/>
+            <a:srgbClr val="EEF3FB"/>
           </a:solidFill>
           <a:ln cap="flat" cmpd="sng" w="12700">
             <a:solidFill>
-              <a:srgbClr val="2A3B66"/>
+              <a:srgbClr val="D5DEEC"/>
             </a:solidFill>
             <a:prstDash val="solid"/>
             <a:round/>
@@ -4807,8 +4741,8 @@
           </a:ln>
           <a:effectLst>
             <a:outerShdw blurRad="114300" rotWithShape="0" algn="bl" dir="5400000" dist="38100">
-              <a:srgbClr val="000000">
-                <a:alpha val="45098"/>
+              <a:srgbClr val="16263F">
+                <a:alpha val="13000"/>
               </a:srgbClr>
             </a:outerShdw>
           </a:effectLst>
@@ -4850,7 +4784,7 @@
         </p:blipFill>
         <p:spPr>
           <a:xfrm>
-            <a:off x="4892040" y="1828800"/>
+            <a:off x="4892040" y="2028600"/>
             <a:ext cx="292608" cy="292608"/>
           </a:xfrm>
           <a:prstGeom prst="rect">
@@ -4870,7 +4804,7 @@
         </p:nvSpPr>
         <p:spPr>
           <a:xfrm>
-            <a:off x="5285232" y="1801368"/>
+            <a:off x="5285232" y="2001168"/>
             <a:ext cx="3108960" cy="365760"/>
           </a:xfrm>
           <a:prstGeom prst="rect">
@@ -4895,7 +4829,7 @@
                 <a:spcPts val="0"/>
               </a:spcAft>
               <a:buClr>
-                <a:srgbClr val="F5B454"/>
+                <a:srgbClr val="D9881C"/>
               </a:buClr>
               <a:buSzPts val="1400"/>
               <a:buFont typeface="Arial"/>
@@ -4904,7 +4838,7 @@
             <a:r>
               <a:rPr b="1" i="0" lang="en-US" sz="1400" u="none" cap="none" strike="noStrike">
                 <a:solidFill>
-                  <a:srgbClr val="F5B454"/>
+                  <a:srgbClr val="D9881C"/>
                 </a:solidFill>
                 <a:latin typeface="Arial"/>
                 <a:ea typeface="Arial"/>
@@ -4933,7 +4867,7 @@
         </p:nvSpPr>
         <p:spPr>
           <a:xfrm>
-            <a:off x="4892040" y="2221992"/>
+            <a:off x="4892040" y="2421792"/>
             <a:ext cx="3474720" cy="548640"/>
           </a:xfrm>
           <a:prstGeom prst="rect">
@@ -4958,7 +4892,7 @@
                 <a:spcPts val="0"/>
               </a:spcAft>
               <a:buClr>
-                <a:srgbClr val="9DB0D0"/>
+                <a:srgbClr val="56627A"/>
               </a:buClr>
               <a:buSzPts val="1150"/>
               <a:buFont typeface="Arial"/>
@@ -4967,7 +4901,7 @@
             <a:r>
               <a:rPr b="0" i="0" lang="en-US" sz="1150" u="none" cap="none" strike="noStrike">
                 <a:solidFill>
-                  <a:srgbClr val="9DB0D0"/>
+                  <a:srgbClr val="56627A"/>
                 </a:solidFill>
                 <a:latin typeface="Arial"/>
                 <a:ea typeface="Arial"/>
@@ -4996,7 +4930,7 @@
         </p:nvSpPr>
         <p:spPr>
           <a:xfrm>
-            <a:off x="548640" y="3063240"/>
+            <a:off x="548640" y="3263040"/>
             <a:ext cx="3886200" cy="1280160"/>
           </a:xfrm>
           <a:prstGeom prst="roundRect">
@@ -5005,11 +4939,11 @@
             </a:avLst>
           </a:prstGeom>
           <a:solidFill>
-            <a:srgbClr val="111C3C"/>
+            <a:srgbClr val="EEF3FB"/>
           </a:solidFill>
           <a:ln cap="flat" cmpd="sng" w="12700">
             <a:solidFill>
-              <a:srgbClr val="2A3B66"/>
+              <a:srgbClr val="D5DEEC"/>
             </a:solidFill>
             <a:prstDash val="solid"/>
             <a:round/>
@@ -5018,8 +4952,8 @@
           </a:ln>
           <a:effectLst>
             <a:outerShdw blurRad="114300" rotWithShape="0" algn="bl" dir="5400000" dist="38100">
-              <a:srgbClr val="000000">
-                <a:alpha val="45098"/>
+              <a:srgbClr val="16263F">
+                <a:alpha val="13000"/>
               </a:srgbClr>
             </a:outerShdw>
           </a:effectLst>
@@ -5061,7 +4995,7 @@
         </p:blipFill>
         <p:spPr>
           <a:xfrm>
-            <a:off x="777240" y="3291840"/>
+            <a:off x="777240" y="3491640"/>
             <a:ext cx="292608" cy="292608"/>
           </a:xfrm>
           <a:prstGeom prst="rect">
@@ -5081,7 +5015,7 @@
         </p:nvSpPr>
         <p:spPr>
           <a:xfrm>
-            <a:off x="1170432" y="3264408"/>
+            <a:off x="1170432" y="3464208"/>
             <a:ext cx="3108960" cy="365760"/>
           </a:xfrm>
           <a:prstGeom prst="rect">
@@ -5106,7 +5040,7 @@
                 <a:spcPts val="0"/>
               </a:spcAft>
               <a:buClr>
-                <a:srgbClr val="F5B454"/>
+                <a:srgbClr val="D9881C"/>
               </a:buClr>
               <a:buSzPts val="1400"/>
               <a:buFont typeface="Arial"/>
@@ -5115,7 +5049,7 @@
             <a:r>
               <a:rPr b="1" i="0" lang="en-US" sz="1400" u="none" cap="none" strike="noStrike">
                 <a:solidFill>
-                  <a:srgbClr val="F5B454"/>
+                  <a:srgbClr val="D9881C"/>
                 </a:solidFill>
                 <a:latin typeface="Arial"/>
                 <a:ea typeface="Arial"/>
@@ -5144,7 +5078,7 @@
         </p:nvSpPr>
         <p:spPr>
           <a:xfrm>
-            <a:off x="777240" y="3685032"/>
+            <a:off x="777240" y="3884832"/>
             <a:ext cx="3474720" cy="548640"/>
           </a:xfrm>
           <a:prstGeom prst="rect">
@@ -5169,7 +5103,7 @@
                 <a:spcPts val="0"/>
               </a:spcAft>
               <a:buClr>
-                <a:srgbClr val="9DB0D0"/>
+                <a:srgbClr val="56627A"/>
               </a:buClr>
               <a:buSzPts val="1150"/>
               <a:buFont typeface="Arial"/>
@@ -5178,7 +5112,7 @@
             <a:r>
               <a:rPr b="0" i="0" lang="en-US" sz="1150" u="none" cap="none" strike="noStrike">
                 <a:solidFill>
-                  <a:srgbClr val="9DB0D0"/>
+                  <a:srgbClr val="56627A"/>
                 </a:solidFill>
                 <a:latin typeface="Arial"/>
                 <a:ea typeface="Arial"/>
@@ -5207,7 +5141,7 @@
         </p:nvSpPr>
         <p:spPr>
           <a:xfrm>
-            <a:off x="4663440" y="3063240"/>
+            <a:off x="4663440" y="3263040"/>
             <a:ext cx="3886200" cy="1280160"/>
           </a:xfrm>
           <a:prstGeom prst="roundRect">
@@ -5216,11 +5150,11 @@
             </a:avLst>
           </a:prstGeom>
           <a:solidFill>
-            <a:srgbClr val="111C3C"/>
+            <a:srgbClr val="EEF3FB"/>
           </a:solidFill>
           <a:ln cap="flat" cmpd="sng" w="12700">
             <a:solidFill>
-              <a:srgbClr val="2A3B66"/>
+              <a:srgbClr val="D5DEEC"/>
             </a:solidFill>
             <a:prstDash val="solid"/>
             <a:round/>
@@ -5229,8 +5163,8 @@
           </a:ln>
           <a:effectLst>
             <a:outerShdw blurRad="114300" rotWithShape="0" algn="bl" dir="5400000" dist="38100">
-              <a:srgbClr val="000000">
-                <a:alpha val="45098"/>
+              <a:srgbClr val="16263F">
+                <a:alpha val="13000"/>
               </a:srgbClr>
             </a:outerShdw>
           </a:effectLst>
@@ -5272,7 +5206,7 @@
         </p:blipFill>
         <p:spPr>
           <a:xfrm>
-            <a:off x="4892040" y="3291840"/>
+            <a:off x="4892040" y="3491640"/>
             <a:ext cx="292608" cy="292608"/>
           </a:xfrm>
           <a:prstGeom prst="rect">
@@ -5292,7 +5226,7 @@
         </p:nvSpPr>
         <p:spPr>
           <a:xfrm>
-            <a:off x="5285232" y="3264408"/>
+            <a:off x="5285232" y="3464208"/>
             <a:ext cx="3108960" cy="365760"/>
           </a:xfrm>
           <a:prstGeom prst="rect">
@@ -5317,7 +5251,7 @@
                 <a:spcPts val="0"/>
               </a:spcAft>
               <a:buClr>
-                <a:srgbClr val="F5B454"/>
+                <a:srgbClr val="D9881C"/>
               </a:buClr>
               <a:buSzPts val="1400"/>
               <a:buFont typeface="Arial"/>
@@ -5326,7 +5260,7 @@
             <a:r>
               <a:rPr b="1" i="0" lang="en-US" sz="1400" u="none" cap="none" strike="noStrike">
                 <a:solidFill>
-                  <a:srgbClr val="F5B454"/>
+                  <a:srgbClr val="D9881C"/>
                 </a:solidFill>
                 <a:latin typeface="Arial"/>
                 <a:ea typeface="Arial"/>
@@ -5355,7 +5289,7 @@
         </p:nvSpPr>
         <p:spPr>
           <a:xfrm>
-            <a:off x="4892040" y="3685032"/>
+            <a:off x="4892040" y="3884832"/>
             <a:ext cx="3474720" cy="548640"/>
           </a:xfrm>
           <a:prstGeom prst="rect">
@@ -5380,7 +5314,7 @@
                 <a:spcPts val="0"/>
               </a:spcAft>
               <a:buClr>
-                <a:srgbClr val="9DB0D0"/>
+                <a:srgbClr val="56627A"/>
               </a:buClr>
               <a:buSzPts val="1150"/>
               <a:buFont typeface="Arial"/>
@@ -5389,7 +5323,7 @@
             <a:r>
               <a:rPr b="0" i="0" lang="en-US" sz="1150" u="none" cap="none" strike="noStrike">
                 <a:solidFill>
-                  <a:srgbClr val="9DB0D0"/>
+                  <a:srgbClr val="56627A"/>
                 </a:solidFill>
                 <a:latin typeface="Arial"/>
                 <a:ea typeface="Arial"/>
@@ -5407,6 +5341,181 @@
               <a:cs typeface="Calibri"/>
               <a:sym typeface="Calibri"/>
             </a:endParaRPr>
+          </a:p>
+        </p:txBody>
+      </p:sp>
+      <p:cxnSp>
+        <p:nvCxnSpPr>
+          <p:cNvPr id="238" name="Rule10"/>
+          <p:cNvCxnSpPr/>
+          <p:nvPr/>
+        </p:nvCxnSpPr>
+        <p:spPr>
+          <a:xfrm>
+            <a:off x="548640" y="957600"/>
+            <a:ext cx="8046720" cy="0"/>
+          </a:xfrm>
+          <a:prstGeom prst="line">
+            <a:avLst/>
+          </a:prstGeom>
+          <a:ln w="19050">
+            <a:solidFill>
+              <a:srgbClr val="9FAEC6"/>
+            </a:solidFill>
+          </a:ln>
+        </p:spPr>
+        <p:style>
+          <a:lnRef idx="2">
+            <a:schemeClr val="accent1"/>
+          </a:lnRef>
+          <a:fillRef idx="0">
+            <a:schemeClr val="accent1"/>
+          </a:fillRef>
+          <a:effectRef idx="1">
+            <a:schemeClr val="accent1"/>
+          </a:effectRef>
+          <a:fontRef idx="minor">
+            <a:schemeClr val="tx1"/>
+          </a:fontRef>
+        </p:style>
+      </p:cxnSp>
+      <p:sp>
+        <p:nvSpPr>
+          <p:cNvPr id="239" name="KeyBox10"/>
+          <p:cNvSpPr/>
+          <p:nvPr/>
+        </p:nvSpPr>
+        <p:spPr>
+          <a:xfrm>
+            <a:off x="548640" y="1029600"/>
+            <a:ext cx="8046720" cy="691200"/>
+          </a:xfrm>
+          <a:prstGeom prst="rect">
+            <a:avLst/>
+          </a:prstGeom>
+          <a:solidFill>
+            <a:srgbClr val="EEF0F4"/>
+          </a:solidFill>
+          <a:ln w="9525">
+            <a:solidFill>
+              <a:srgbClr val="D7DCE5"/>
+            </a:solidFill>
+          </a:ln>
+          <a:effectLst/>
+        </p:spPr>
+        <p:txBody>
+          <a:bodyPr rtlCol="0" anchor="ctr" wrap="square" lIns="216000" rIns="108000" tIns="28800" bIns="28800"/>
+          <a:lstStyle/>
+          <a:p>
+            <a:pPr algn="l" marL="198000" indent="-162000">
+              <a:lnSpc>
+                <a:spcPct val="105000"/>
+              </a:lnSpc>
+              <a:spcBef>
+                <a:spcPts val="300"/>
+              </a:spcBef>
+              <a:spcAft>
+                <a:spcPts val="300"/>
+              </a:spcAft>
+              <a:buClr>
+                <a:srgbClr val="1488C2"/>
+              </a:buClr>
+              <a:buFont typeface="Arial"/>
+              <a:buChar char="▪"/>
+            </a:pPr>
+            <a:r>
+              <a:rPr sz="1100" b="0">
+                <a:solidFill>
+                  <a:srgbClr val="16263F"/>
+                </a:solidFill>
+                <a:latin typeface="Arial"/>
+              </a:rPr>
+              <a:t>出口未実証は、上場済み宇宙SU（Synspective等）の実証と日本IPO波で対応。</a:t>
+            </a:r>
+          </a:p>
+          <a:p>
+            <a:pPr algn="l" marL="198000" indent="-162000">
+              <a:lnSpc>
+                <a:spcPct val="105000"/>
+              </a:lnSpc>
+              <a:spcBef>
+                <a:spcPts val="300"/>
+              </a:spcBef>
+              <a:spcAft>
+                <a:spcPts val="300"/>
+              </a:spcAft>
+              <a:buClr>
+                <a:srgbClr val="1488C2"/>
+              </a:buClr>
+              <a:buFont typeface="Arial"/>
+              <a:buChar char="▪"/>
+            </a:pPr>
+            <a:r>
+              <a:rPr sz="1100" b="0">
+                <a:solidFill>
+                  <a:srgbClr val="16263F"/>
+                </a:solidFill>
+                <a:latin typeface="Arial"/>
+              </a:rPr>
+              <a:t>政府依存・調達変動は、マイルストン連動＋同志国横展開でリカーリング化。</a:t>
+            </a:r>
+          </a:p>
+          <a:p>
+            <a:pPr algn="l" marL="198000" indent="-162000">
+              <a:lnSpc>
+                <a:spcPct val="105000"/>
+              </a:lnSpc>
+              <a:spcBef>
+                <a:spcPts val="300"/>
+              </a:spcBef>
+              <a:spcAft>
+                <a:spcPts val="300"/>
+              </a:spcAft>
+              <a:buClr>
+                <a:srgbClr val="1488C2"/>
+              </a:buClr>
+              <a:buFont typeface="Arial"/>
+              <a:buChar char="▪"/>
+            </a:pPr>
+            <a:r>
+              <a:rPr sz="1100" b="0">
+                <a:solidFill>
+                  <a:srgbClr val="16263F"/>
+                </a:solidFill>
+                <a:latin typeface="Arial"/>
+              </a:rPr>
+              <a:t>評価/バブル懸念は、保守的マルチプル(15〜18倍)と契約条項で吸収。</a:t>
+            </a:r>
+          </a:p>
+        </p:txBody>
+      </p:sp>
+      <p:sp>
+        <p:nvSpPr>
+          <p:cNvPr id="240" name="KeyBar10"/>
+          <p:cNvSpPr/>
+          <p:nvPr/>
+        </p:nvSpPr>
+        <p:spPr>
+          <a:xfrm>
+            <a:off x="548640" y="1029600"/>
+            <a:ext cx="54000" cy="691200"/>
+          </a:xfrm>
+          <a:prstGeom prst="rect">
+            <a:avLst/>
+          </a:prstGeom>
+          <a:solidFill>
+            <a:srgbClr val="1488C2"/>
+          </a:solidFill>
+          <a:ln>
+            <a:noFill/>
+          </a:ln>
+          <a:effectLst/>
+        </p:spPr>
+        <p:txBody>
+          <a:bodyPr rtlCol="0" anchor="ctr"/>
+          <a:lstStyle/>
+          <a:p>
+            <a:pPr algn="ctr"/>
           </a:p>
         </p:txBody>
       </p:sp>
@@ -5750,19 +5859,905 @@
 </p:sld>
 </file>
 
+<file path=ppt/slides/slide12.xml><?xml version="1.0" encoding="utf-8"?>
+<p:sld xmlns:a="http://schemas.openxmlformats.org/drawingml/2006/main" xmlns:p="http://schemas.openxmlformats.org/presentationml/2006/main" xmlns:r="http://schemas.openxmlformats.org/officeDocument/2006/relationships">
+  <p:cSld>
+    <p:bg>
+      <p:bgPr>
+        <a:solidFill>
+          <a:srgbClr val="FFFFFF"/>
+        </a:solidFill>
+        <a:effectLst/>
+      </p:bgPr>
+    </p:bg>
+    <p:spTree>
+      <p:nvGrpSpPr>
+        <p:cNvPr id="1" name=""/>
+        <p:cNvGrpSpPr/>
+        <p:nvPr/>
+      </p:nvGrpSpPr>
+      <p:grpSpPr/>
+      <p:sp>
+        <p:nvSpPr>
+          <p:cNvPr id="950" name="ExecTitle"/>
+          <p:cNvSpPr/>
+          <p:nvPr/>
+        </p:nvSpPr>
+        <p:spPr>
+          <a:xfrm>
+            <a:off x="548640" y="367200"/>
+            <a:ext cx="8046720" cy="566928"/>
+          </a:xfrm>
+          <a:prstGeom prst="rect">
+            <a:avLst/>
+          </a:prstGeom>
+          <a:noFill/>
+          <a:ln>
+            <a:noFill/>
+          </a:ln>
+        </p:spPr>
+        <p:txBody>
+          <a:bodyPr anchorCtr="0" anchor="ctr" bIns="0" lIns="0" spcFirstLastPara="1" rIns="0" wrap="square" tIns="0">
+            <a:noAutofit/>
+          </a:bodyPr>
+          <a:lstStyle/>
+          <a:p>
+            <a:pPr indent="0" lvl="0" marL="0" marR="0" rtl="0" algn="l">
+              <a:spcBef>
+                <a:spcPts val="0"/>
+              </a:spcBef>
+              <a:spcAft>
+                <a:spcPts val="0"/>
+              </a:spcAft>
+              <a:buClr>
+                <a:srgbClr val="16263F"/>
+              </a:buClr>
+              <a:buSzPts val="2900"/>
+              <a:buFont typeface="Arial"/>
+              <a:buNone/>
+            </a:pPr>
+            <a:r>
+              <a:rPr b="1" i="0" lang="en-US" sz="2900" u="none" cap="none" strike="noStrike">
+                <a:solidFill>
+                  <a:srgbClr val="16263F"/>
+                </a:solidFill>
+                <a:latin typeface="Arial"/>
+                <a:ea typeface="Arial"/>
+                <a:cs typeface="Arial"/>
+                <a:sym typeface="Arial"/>
+              </a:rPr>
+              <a:t>エグゼクティブサマリー</a:t>
+            </a:r>
+            <a:endParaRPr b="0" i="0" sz="2900" u="none" cap="none" strike="noStrike">
+              <a:solidFill>
+                <a:schemeClr val="dk1"/>
+              </a:solidFill>
+              <a:latin typeface="Calibri"/>
+              <a:ea typeface="Calibri"/>
+              <a:cs typeface="Calibri"/>
+              <a:sym typeface="Calibri"/>
+            </a:endParaRPr>
+          </a:p>
+        </p:txBody>
+      </p:sp>
+      <p:cxnSp>
+        <p:nvCxnSpPr>
+          <p:cNvPr id="951" name="Rule1"/>
+          <p:cNvCxnSpPr/>
+          <p:nvPr/>
+        </p:nvCxnSpPr>
+        <p:spPr>
+          <a:xfrm>
+            <a:off x="548640" y="957600"/>
+            <a:ext cx="8046720" cy="0"/>
+          </a:xfrm>
+          <a:prstGeom prst="line">
+            <a:avLst/>
+          </a:prstGeom>
+          <a:ln w="19050">
+            <a:solidFill>
+              <a:srgbClr val="9FAEC6"/>
+            </a:solidFill>
+          </a:ln>
+        </p:spPr>
+        <p:style>
+          <a:lnRef idx="2">
+            <a:schemeClr val="accent1"/>
+          </a:lnRef>
+          <a:fillRef idx="0">
+            <a:schemeClr val="accent1"/>
+          </a:fillRef>
+          <a:effectRef idx="1">
+            <a:schemeClr val="accent1"/>
+          </a:effectRef>
+          <a:fontRef idx="minor">
+            <a:schemeClr val="tx1"/>
+          </a:fontRef>
+        </p:style>
+      </p:cxnSp>
+      <p:sp>
+        <p:nvSpPr>
+          <p:cNvPr id="952" name="ExecThesis"/>
+          <p:cNvSpPr/>
+          <p:nvPr/>
+        </p:nvSpPr>
+        <p:spPr>
+          <a:xfrm>
+            <a:off x="548640" y="1029600"/>
+            <a:ext cx="8046720" cy="468000"/>
+          </a:xfrm>
+          <a:prstGeom prst="rect">
+            <a:avLst/>
+          </a:prstGeom>
+          <a:solidFill>
+            <a:srgbClr val="EEF0F4"/>
+          </a:solidFill>
+          <a:ln w="9525">
+            <a:solidFill>
+              <a:srgbClr val="D7DCE5"/>
+            </a:solidFill>
+          </a:ln>
+          <a:effectLst/>
+        </p:spPr>
+        <p:txBody>
+          <a:bodyPr rtlCol="0" anchor="ctr" wrap="square" lIns="216000" rIns="108000" tIns="21600" bIns="21600"/>
+          <a:lstStyle/>
+          <a:p>
+            <a:pPr algn="l"/>
+            <a:r>
+              <a:rPr sz="1300" b="1">
+                <a:solidFill>
+                  <a:srgbClr val="16263F"/>
+                </a:solidFill>
+                <a:latin typeface="Arial"/>
+              </a:rPr>
+              <a:t>経済安全保障 × 宇宙 × AI に「狭く深く」張る集中型ファンドで、Solafune にリードで投資する。</a:t>
+            </a:r>
+          </a:p>
+        </p:txBody>
+      </p:sp>
+      <p:sp>
+        <p:nvSpPr>
+          <p:cNvPr id="953" name="ExecThesisBar"/>
+          <p:cNvSpPr/>
+          <p:nvPr/>
+        </p:nvSpPr>
+        <p:spPr>
+          <a:xfrm>
+            <a:off x="548640" y="1029600"/>
+            <a:ext cx="54000" cy="468000"/>
+          </a:xfrm>
+          <a:prstGeom prst="rect">
+            <a:avLst/>
+          </a:prstGeom>
+          <a:solidFill>
+            <a:srgbClr val="1488C2"/>
+          </a:solidFill>
+          <a:ln>
+            <a:noFill/>
+          </a:ln>
+          <a:effectLst/>
+        </p:spPr>
+        <p:txBody>
+          <a:bodyPr rtlCol="0" anchor="ctr"/>
+          <a:lstStyle/>
+          <a:p>
+            <a:pPr algn="ctr"/>
+          </a:p>
+        </p:txBody>
+      </p:sp>
+      <p:sp>
+        <p:nvSpPr>
+          <p:cNvPr id="954" name="ExecRow0"/>
+          <p:cNvSpPr/>
+          <p:nvPr/>
+        </p:nvSpPr>
+        <p:spPr>
+          <a:xfrm>
+            <a:off x="548640" y="1655999"/>
+            <a:ext cx="8046720" cy="511200"/>
+          </a:xfrm>
+          <a:prstGeom prst="rect">
+            <a:avLst/>
+          </a:prstGeom>
+          <a:solidFill>
+            <a:srgbClr val="EEF3FB"/>
+          </a:solidFill>
+          <a:ln w="9525">
+            <a:solidFill>
+              <a:srgbClr val="D5DEEC"/>
+            </a:solidFill>
+          </a:ln>
+          <a:effectLst/>
+        </p:spPr>
+        <p:txBody>
+          <a:bodyPr rtlCol="0" anchor="ctr"/>
+          <a:lstStyle/>
+          <a:p>
+            <a:pPr algn="ctr"/>
+          </a:p>
+        </p:txBody>
+      </p:sp>
+      <p:sp>
+        <p:nvSpPr>
+          <p:cNvPr id="955" name="ExecRowBar0"/>
+          <p:cNvSpPr/>
+          <p:nvPr/>
+        </p:nvSpPr>
+        <p:spPr>
+          <a:xfrm>
+            <a:off x="548640" y="1655999"/>
+            <a:ext cx="54000" cy="511200"/>
+          </a:xfrm>
+          <a:prstGeom prst="rect">
+            <a:avLst/>
+          </a:prstGeom>
+          <a:solidFill>
+            <a:srgbClr val="1488C2"/>
+          </a:solidFill>
+          <a:ln>
+            <a:noFill/>
+          </a:ln>
+          <a:effectLst/>
+        </p:spPr>
+        <p:txBody>
+          <a:bodyPr rtlCol="0" anchor="ctr"/>
+          <a:lstStyle/>
+          <a:p>
+            <a:pPr algn="ctr"/>
+          </a:p>
+        </p:txBody>
+      </p:sp>
+      <p:sp>
+        <p:nvSpPr>
+          <p:cNvPr id="956" name="TextBox 955"/>
+          <p:cNvSpPr txBox="1"/>
+          <p:nvPr/>
+        </p:nvSpPr>
+        <p:spPr>
+          <a:xfrm>
+            <a:off x="692640" y="1655999"/>
+            <a:ext cx="1044000" cy="511200"/>
+          </a:xfrm>
+          <a:prstGeom prst="rect">
+            <a:avLst/>
+          </a:prstGeom>
+          <a:noFill/>
+        </p:spPr>
+        <p:txBody>
+          <a:bodyPr wrap="square" anchor="ctr" lIns="54000" rIns="0" tIns="0" bIns="0">
+            <a:spAutoFit/>
+          </a:bodyPr>
+          <a:lstStyle/>
+          <a:p>
+            <a:pPr algn="l"/>
+            <a:r>
+              <a:rPr sz="1300" b="1">
+                <a:solidFill>
+                  <a:srgbClr val="1488C2"/>
+                </a:solidFill>
+                <a:latin typeface="Arial"/>
+              </a:rPr>
+              <a:t>ファンド</a:t>
+            </a:r>
+          </a:p>
+        </p:txBody>
+      </p:sp>
+      <p:sp>
+        <p:nvSpPr>
+          <p:cNvPr id="957" name="TextBox 956"/>
+          <p:cNvSpPr txBox="1"/>
+          <p:nvPr/>
+        </p:nvSpPr>
+        <p:spPr>
+          <a:xfrm>
+            <a:off x="1682640" y="1655999"/>
+            <a:ext cx="6912720" cy="511200"/>
+          </a:xfrm>
+          <a:prstGeom prst="rect">
+            <a:avLst/>
+          </a:prstGeom>
+          <a:noFill/>
+        </p:spPr>
+        <p:txBody>
+          <a:bodyPr wrap="square" anchor="ctr" lIns="0" rIns="72000" tIns="0" bIns="0">
+            <a:spAutoFit/>
+          </a:bodyPr>
+          <a:lstStyle/>
+          <a:p>
+            <a:pPr algn="l"/>
+            <a:r>
+              <a:rPr sz="1150">
+                <a:solidFill>
+                  <a:srgbClr val="16263F"/>
+                </a:solidFill>
+                <a:latin typeface="Arial"/>
+              </a:rPr>
+              <a:t>総額150億円・集中10〜12社・運用10年の日本登記3号。目標ネットDPI 3.0X（グロス約4.3X）。</a:t>
+            </a:r>
+          </a:p>
+        </p:txBody>
+      </p:sp>
+      <p:sp>
+        <p:nvSpPr>
+          <p:cNvPr id="958" name="ExecRow1"/>
+          <p:cNvSpPr/>
+          <p:nvPr/>
+        </p:nvSpPr>
+        <p:spPr>
+          <a:xfrm>
+            <a:off x="548640" y="2239199"/>
+            <a:ext cx="8046720" cy="511200"/>
+          </a:xfrm>
+          <a:prstGeom prst="rect">
+            <a:avLst/>
+          </a:prstGeom>
+          <a:solidFill>
+            <a:srgbClr val="EEF3FB"/>
+          </a:solidFill>
+          <a:ln w="9525">
+            <a:solidFill>
+              <a:srgbClr val="D5DEEC"/>
+            </a:solidFill>
+          </a:ln>
+          <a:effectLst/>
+        </p:spPr>
+        <p:txBody>
+          <a:bodyPr rtlCol="0" anchor="ctr"/>
+          <a:lstStyle/>
+          <a:p>
+            <a:pPr algn="ctr"/>
+          </a:p>
+        </p:txBody>
+      </p:sp>
+      <p:sp>
+        <p:nvSpPr>
+          <p:cNvPr id="959" name="ExecRowBar1"/>
+          <p:cNvSpPr/>
+          <p:nvPr/>
+        </p:nvSpPr>
+        <p:spPr>
+          <a:xfrm>
+            <a:off x="548640" y="2239199"/>
+            <a:ext cx="54000" cy="511200"/>
+          </a:xfrm>
+          <a:prstGeom prst="rect">
+            <a:avLst/>
+          </a:prstGeom>
+          <a:solidFill>
+            <a:srgbClr val="1488C2"/>
+          </a:solidFill>
+          <a:ln>
+            <a:noFill/>
+          </a:ln>
+          <a:effectLst/>
+        </p:spPr>
+        <p:txBody>
+          <a:bodyPr rtlCol="0" anchor="ctr"/>
+          <a:lstStyle/>
+          <a:p>
+            <a:pPr algn="ctr"/>
+          </a:p>
+        </p:txBody>
+      </p:sp>
+      <p:sp>
+        <p:nvSpPr>
+          <p:cNvPr id="960" name="TextBox 959"/>
+          <p:cNvSpPr txBox="1"/>
+          <p:nvPr/>
+        </p:nvSpPr>
+        <p:spPr>
+          <a:xfrm>
+            <a:off x="692640" y="2239199"/>
+            <a:ext cx="1044000" cy="511200"/>
+          </a:xfrm>
+          <a:prstGeom prst="rect">
+            <a:avLst/>
+          </a:prstGeom>
+          <a:noFill/>
+        </p:spPr>
+        <p:txBody>
+          <a:bodyPr wrap="square" anchor="ctr" lIns="54000" rIns="0" tIns="0" bIns="0">
+            <a:spAutoFit/>
+          </a:bodyPr>
+          <a:lstStyle/>
+          <a:p>
+            <a:pPr algn="l"/>
+            <a:r>
+              <a:rPr sz="1300" b="1">
+                <a:solidFill>
+                  <a:srgbClr val="1488C2"/>
+                </a:solidFill>
+                <a:latin typeface="Arial"/>
+              </a:rPr>
+              <a:t>なぜ今</a:t>
+            </a:r>
+          </a:p>
+        </p:txBody>
+      </p:sp>
+      <p:sp>
+        <p:nvSpPr>
+          <p:cNvPr id="961" name="TextBox 960"/>
+          <p:cNvSpPr txBox="1"/>
+          <p:nvPr/>
+        </p:nvSpPr>
+        <p:spPr>
+          <a:xfrm>
+            <a:off x="1682640" y="2239199"/>
+            <a:ext cx="6912720" cy="511200"/>
+          </a:xfrm>
+          <a:prstGeom prst="rect">
+            <a:avLst/>
+          </a:prstGeom>
+          <a:noFill/>
+        </p:spPr>
+        <p:txBody>
+          <a:bodyPr wrap="square" anchor="ctr" lIns="0" rIns="72000" tIns="0" bIns="0">
+            <a:spAutoFit/>
+          </a:bodyPr>
+          <a:lstStyle/>
+          <a:p>
+            <a:pPr algn="l"/>
+            <a:r>
+              <a:rPr sz="1150">
+                <a:solidFill>
+                  <a:srgbClr val="16263F"/>
+                </a:solidFill>
+                <a:latin typeface="Arial"/>
+              </a:rPr>
+              <a:t>重要鉱物の主権争いで、防衛・宇宙の公的需要が構造的に拡大（防衛8.8兆円・宇宙戦略基金1兆円）。</a:t>
+            </a:r>
+          </a:p>
+        </p:txBody>
+      </p:sp>
+      <p:sp>
+        <p:nvSpPr>
+          <p:cNvPr id="962" name="ExecRow2"/>
+          <p:cNvSpPr/>
+          <p:nvPr/>
+        </p:nvSpPr>
+        <p:spPr>
+          <a:xfrm>
+            <a:off x="548640" y="2822399"/>
+            <a:ext cx="8046720" cy="511200"/>
+          </a:xfrm>
+          <a:prstGeom prst="rect">
+            <a:avLst/>
+          </a:prstGeom>
+          <a:solidFill>
+            <a:srgbClr val="EEF3FB"/>
+          </a:solidFill>
+          <a:ln w="9525">
+            <a:solidFill>
+              <a:srgbClr val="D5DEEC"/>
+            </a:solidFill>
+          </a:ln>
+          <a:effectLst/>
+        </p:spPr>
+        <p:txBody>
+          <a:bodyPr rtlCol="0" anchor="ctr"/>
+          <a:lstStyle/>
+          <a:p>
+            <a:pPr algn="ctr"/>
+          </a:p>
+        </p:txBody>
+      </p:sp>
+      <p:sp>
+        <p:nvSpPr>
+          <p:cNvPr id="963" name="ExecRowBar2"/>
+          <p:cNvSpPr/>
+          <p:nvPr/>
+        </p:nvSpPr>
+        <p:spPr>
+          <a:xfrm>
+            <a:off x="548640" y="2822399"/>
+            <a:ext cx="54000" cy="511200"/>
+          </a:xfrm>
+          <a:prstGeom prst="rect">
+            <a:avLst/>
+          </a:prstGeom>
+          <a:solidFill>
+            <a:srgbClr val="1488C2"/>
+          </a:solidFill>
+          <a:ln>
+            <a:noFill/>
+          </a:ln>
+          <a:effectLst/>
+        </p:spPr>
+        <p:txBody>
+          <a:bodyPr rtlCol="0" anchor="ctr"/>
+          <a:lstStyle/>
+          <a:p>
+            <a:pPr algn="ctr"/>
+          </a:p>
+        </p:txBody>
+      </p:sp>
+      <p:sp>
+        <p:nvSpPr>
+          <p:cNvPr id="964" name="TextBox 963"/>
+          <p:cNvSpPr txBox="1"/>
+          <p:nvPr/>
+        </p:nvSpPr>
+        <p:spPr>
+          <a:xfrm>
+            <a:off x="692640" y="2822399"/>
+            <a:ext cx="1044000" cy="511200"/>
+          </a:xfrm>
+          <a:prstGeom prst="rect">
+            <a:avLst/>
+          </a:prstGeom>
+          <a:noFill/>
+        </p:spPr>
+        <p:txBody>
+          <a:bodyPr wrap="square" anchor="ctr" lIns="54000" rIns="0" tIns="0" bIns="0">
+            <a:spAutoFit/>
+          </a:bodyPr>
+          <a:lstStyle/>
+          <a:p>
+            <a:pPr algn="l"/>
+            <a:r>
+              <a:rPr sz="1300" b="1">
+                <a:solidFill>
+                  <a:srgbClr val="1488C2"/>
+                </a:solidFill>
+                <a:latin typeface="Arial"/>
+              </a:rPr>
+              <a:t>投資対象</a:t>
+            </a:r>
+          </a:p>
+        </p:txBody>
+      </p:sp>
+      <p:sp>
+        <p:nvSpPr>
+          <p:cNvPr id="965" name="TextBox 964"/>
+          <p:cNvSpPr txBox="1"/>
+          <p:nvPr/>
+        </p:nvSpPr>
+        <p:spPr>
+          <a:xfrm>
+            <a:off x="1682640" y="2822399"/>
+            <a:ext cx="6912720" cy="511200"/>
+          </a:xfrm>
+          <a:prstGeom prst="rect">
+            <a:avLst/>
+          </a:prstGeom>
+          <a:noFill/>
+        </p:spPr>
+        <p:txBody>
+          <a:bodyPr wrap="square" anchor="ctr" lIns="0" rIns="72000" tIns="0" bIns="0">
+            <a:spAutoFit/>
+          </a:bodyPr>
+          <a:lstStyle/>
+          <a:p>
+            <a:pPr algn="l"/>
+            <a:r>
+              <a:rPr sz="1150">
+                <a:solidFill>
+                  <a:srgbClr val="16263F"/>
+                </a:solidFill>
+                <a:latin typeface="Arial"/>
+              </a:rPr>
+              <a:t>Solafune＝衛星×AIで地球を解析する「Planetary Intelligence OS」。120カ国超の開発者基盤。</a:t>
+            </a:r>
+          </a:p>
+        </p:txBody>
+      </p:sp>
+      <p:sp>
+        <p:nvSpPr>
+          <p:cNvPr id="966" name="ExecRow3"/>
+          <p:cNvSpPr/>
+          <p:nvPr/>
+        </p:nvSpPr>
+        <p:spPr>
+          <a:xfrm>
+            <a:off x="548640" y="3405599"/>
+            <a:ext cx="8046720" cy="511200"/>
+          </a:xfrm>
+          <a:prstGeom prst="rect">
+            <a:avLst/>
+          </a:prstGeom>
+          <a:solidFill>
+            <a:srgbClr val="EEF3FB"/>
+          </a:solidFill>
+          <a:ln w="9525">
+            <a:solidFill>
+              <a:srgbClr val="D5DEEC"/>
+            </a:solidFill>
+          </a:ln>
+          <a:effectLst/>
+        </p:spPr>
+        <p:txBody>
+          <a:bodyPr rtlCol="0" anchor="ctr"/>
+          <a:lstStyle/>
+          <a:p>
+            <a:pPr algn="ctr"/>
+          </a:p>
+        </p:txBody>
+      </p:sp>
+      <p:sp>
+        <p:nvSpPr>
+          <p:cNvPr id="967" name="ExecRowBar3"/>
+          <p:cNvSpPr/>
+          <p:nvPr/>
+        </p:nvSpPr>
+        <p:spPr>
+          <a:xfrm>
+            <a:off x="548640" y="3405599"/>
+            <a:ext cx="54000" cy="511200"/>
+          </a:xfrm>
+          <a:prstGeom prst="rect">
+            <a:avLst/>
+          </a:prstGeom>
+          <a:solidFill>
+            <a:srgbClr val="1488C2"/>
+          </a:solidFill>
+          <a:ln>
+            <a:noFill/>
+          </a:ln>
+          <a:effectLst/>
+        </p:spPr>
+        <p:txBody>
+          <a:bodyPr rtlCol="0" anchor="ctr"/>
+          <a:lstStyle/>
+          <a:p>
+            <a:pPr algn="ctr"/>
+          </a:p>
+        </p:txBody>
+      </p:sp>
+      <p:sp>
+        <p:nvSpPr>
+          <p:cNvPr id="968" name="TextBox 967"/>
+          <p:cNvSpPr txBox="1"/>
+          <p:nvPr/>
+        </p:nvSpPr>
+        <p:spPr>
+          <a:xfrm>
+            <a:off x="692640" y="3405599"/>
+            <a:ext cx="1044000" cy="511200"/>
+          </a:xfrm>
+          <a:prstGeom prst="rect">
+            <a:avLst/>
+          </a:prstGeom>
+          <a:noFill/>
+        </p:spPr>
+        <p:txBody>
+          <a:bodyPr wrap="square" anchor="ctr" lIns="54000" rIns="0" tIns="0" bIns="0">
+            <a:spAutoFit/>
+          </a:bodyPr>
+          <a:lstStyle/>
+          <a:p>
+            <a:pPr algn="l"/>
+            <a:r>
+              <a:rPr sz="1300" b="1">
+                <a:solidFill>
+                  <a:srgbClr val="1488C2"/>
+                </a:solidFill>
+                <a:latin typeface="Arial"/>
+              </a:rPr>
+              <a:t>勝ち筋</a:t>
+            </a:r>
+          </a:p>
+        </p:txBody>
+      </p:sp>
+      <p:sp>
+        <p:nvSpPr>
+          <p:cNvPr id="969" name="TextBox 968"/>
+          <p:cNvSpPr txBox="1"/>
+          <p:nvPr/>
+        </p:nvSpPr>
+        <p:spPr>
+          <a:xfrm>
+            <a:off x="1682640" y="3405599"/>
+            <a:ext cx="6912720" cy="511200"/>
+          </a:xfrm>
+          <a:prstGeom prst="rect">
+            <a:avLst/>
+          </a:prstGeom>
+          <a:noFill/>
+        </p:spPr>
+        <p:txBody>
+          <a:bodyPr wrap="square" anchor="ctr" lIns="0" rIns="72000" tIns="0" bIns="0">
+            <a:spAutoFit/>
+          </a:bodyPr>
+          <a:lstStyle/>
+          <a:p>
+            <a:pPr algn="l"/>
+            <a:r>
+              <a:rPr sz="1150">
+                <a:solidFill>
+                  <a:srgbClr val="16263F"/>
+                </a:solidFill>
+                <a:latin typeface="Arial"/>
+              </a:rPr>
+              <a:t>衛星を持たず解析レイヤーに特化。ネットワーク効果と政府・国際機関の信認が参入障壁。</a:t>
+            </a:r>
+          </a:p>
+        </p:txBody>
+      </p:sp>
+      <p:sp>
+        <p:nvSpPr>
+          <p:cNvPr id="970" name="ExecRow4"/>
+          <p:cNvSpPr/>
+          <p:nvPr/>
+        </p:nvSpPr>
+        <p:spPr>
+          <a:xfrm>
+            <a:off x="548640" y="3988799"/>
+            <a:ext cx="8046720" cy="511200"/>
+          </a:xfrm>
+          <a:prstGeom prst="rect">
+            <a:avLst/>
+          </a:prstGeom>
+          <a:solidFill>
+            <a:srgbClr val="EEF3FB"/>
+          </a:solidFill>
+          <a:ln w="9525">
+            <a:solidFill>
+              <a:srgbClr val="D5DEEC"/>
+            </a:solidFill>
+          </a:ln>
+          <a:effectLst/>
+        </p:spPr>
+        <p:txBody>
+          <a:bodyPr rtlCol="0" anchor="ctr"/>
+          <a:lstStyle/>
+          <a:p>
+            <a:pPr algn="ctr"/>
+          </a:p>
+        </p:txBody>
+      </p:sp>
+      <p:sp>
+        <p:nvSpPr>
+          <p:cNvPr id="971" name="ExecRowBar4"/>
+          <p:cNvSpPr/>
+          <p:nvPr/>
+        </p:nvSpPr>
+        <p:spPr>
+          <a:xfrm>
+            <a:off x="548640" y="3988799"/>
+            <a:ext cx="54000" cy="511200"/>
+          </a:xfrm>
+          <a:prstGeom prst="rect">
+            <a:avLst/>
+          </a:prstGeom>
+          <a:solidFill>
+            <a:srgbClr val="1488C2"/>
+          </a:solidFill>
+          <a:ln>
+            <a:noFill/>
+          </a:ln>
+          <a:effectLst/>
+        </p:spPr>
+        <p:txBody>
+          <a:bodyPr rtlCol="0" anchor="ctr"/>
+          <a:lstStyle/>
+          <a:p>
+            <a:pPr algn="ctr"/>
+          </a:p>
+        </p:txBody>
+      </p:sp>
+      <p:sp>
+        <p:nvSpPr>
+          <p:cNvPr id="972" name="TextBox 971"/>
+          <p:cNvSpPr txBox="1"/>
+          <p:nvPr/>
+        </p:nvSpPr>
+        <p:spPr>
+          <a:xfrm>
+            <a:off x="692640" y="3988799"/>
+            <a:ext cx="1044000" cy="511200"/>
+          </a:xfrm>
+          <a:prstGeom prst="rect">
+            <a:avLst/>
+          </a:prstGeom>
+          <a:noFill/>
+        </p:spPr>
+        <p:txBody>
+          <a:bodyPr wrap="square" anchor="ctr" lIns="54000" rIns="0" tIns="0" bIns="0">
+            <a:spAutoFit/>
+          </a:bodyPr>
+          <a:lstStyle/>
+          <a:p>
+            <a:pPr algn="l"/>
+            <a:r>
+              <a:rPr sz="1300" b="1">
+                <a:solidFill>
+                  <a:srgbClr val="1488C2"/>
+                </a:solidFill>
+                <a:latin typeface="Arial"/>
+              </a:rPr>
+              <a:t>リターン</a:t>
+            </a:r>
+          </a:p>
+        </p:txBody>
+      </p:sp>
+      <p:sp>
+        <p:nvSpPr>
+          <p:cNvPr id="973" name="TextBox 972"/>
+          <p:cNvSpPr txBox="1"/>
+          <p:nvPr/>
+        </p:nvSpPr>
+        <p:spPr>
+          <a:xfrm>
+            <a:off x="1682640" y="3988799"/>
+            <a:ext cx="6912720" cy="511200"/>
+          </a:xfrm>
+          <a:prstGeom prst="rect">
+            <a:avLst/>
+          </a:prstGeom>
+          <a:noFill/>
+        </p:spPr>
+        <p:txBody>
+          <a:bodyPr wrap="square" anchor="ctr" lIns="0" rIns="72000" tIns="0" bIns="0">
+            <a:spAutoFit/>
+          </a:bodyPr>
+          <a:lstStyle/>
+          <a:p>
+            <a:pPr algn="l"/>
+            <a:r>
+              <a:rPr sz="1150">
+                <a:solidFill>
+                  <a:srgbClr val="16263F"/>
+                </a:solidFill>
+                <a:latin typeface="Arial"/>
+              </a:rPr>
+              <a:t>Solafune 1社のExit（企業価値1,500〜1,800億円）で150億円ファンドを回収（約1.3X）。</a:t>
+            </a:r>
+          </a:p>
+        </p:txBody>
+      </p:sp>
+      <p:sp>
+        <p:nvSpPr>
+          <p:cNvPr id="974" name="TextBox 973"/>
+          <p:cNvSpPr txBox="1"/>
+          <p:nvPr/>
+        </p:nvSpPr>
+        <p:spPr>
+          <a:xfrm>
+            <a:off x="548640" y="4589999"/>
+            <a:ext cx="8046720" cy="251999"/>
+          </a:xfrm>
+          <a:prstGeom prst="rect">
+            <a:avLst/>
+          </a:prstGeom>
+          <a:noFill/>
+        </p:spPr>
+        <p:txBody>
+          <a:bodyPr wrap="square" anchor="ctr" lIns="18000" rIns="0" tIns="0" bIns="0">
+            <a:spAutoFit/>
+          </a:bodyPr>
+          <a:lstStyle/>
+          <a:p>
+            <a:pPr algn="l"/>
+            <a:r>
+              <a:rPr sz="1000">
+                <a:solidFill>
+                  <a:srgbClr val="56627A"/>
+                </a:solidFill>
+                <a:latin typeface="Arial"/>
+              </a:rPr>
+              <a:t>守り：出口未実証・政府依存・評価非開示のリスクは、契約条項（トランシェ払込・希薄化防止・取締役指名権）と保守的前提で先回りして潰す。</a:t>
+            </a:r>
+          </a:p>
+        </p:txBody>
+      </p:sp>
+    </p:spTree>
+  </p:cSld>
+  <p:clrMapOvr>
+    <a:masterClrMapping/>
+  </p:clrMapOvr>
+</p:sld>
+</file>
+
 <file path=ppt/slides/slide2.xml><?xml version="1.0" encoding="utf-8"?>
 <p:sld xmlns:a="http://schemas.openxmlformats.org/drawingml/2006/main" xmlns:r="http://schemas.openxmlformats.org/officeDocument/2006/relationships" xmlns:mc="http://schemas.openxmlformats.org/markup-compatibility/2006" xmlns:mv="urn:schemas-microsoft-com:mac:vml" xmlns:p="http://schemas.openxmlformats.org/presentationml/2006/main" xmlns:c="http://schemas.openxmlformats.org/drawingml/2006/chart" xmlns:dgm="http://schemas.openxmlformats.org/drawingml/2006/diagram" xmlns:o="urn:schemas-microsoft-com:office:office" xmlns:v="urn:schemas-microsoft-com:vml" xmlns:pvml="urn:schemas-microsoft-com:office:powerpoint" xmlns:com="http://schemas.openxmlformats.org/drawingml/2006/compatibility" xmlns:p14="http://schemas.microsoft.com/office/powerpoint/2010/main" xmlns:p15="http://schemas.microsoft.com/office/powerpoint/2012/main" xmlns:ahyp="http://schemas.microsoft.com/office/drawing/2018/hyperlinkcolor">
   <p:cSld>
     <p:bg>
       <p:bgPr>
-        <a:blipFill>
-          <a:blip r:embed="rId3">
-            <a:alphaModFix/>
-          </a:blip>
-          <a:stretch>
-            <a:fillRect/>
-          </a:stretch>
-        </a:blipFill>
+        <a:solidFill>
+          <a:srgbClr val="FFFFFF"/>
+        </a:solidFill>
+        <a:effectLst/>
       </p:bgPr>
     </p:bg>
     <p:spTree>
@@ -5781,14 +6776,14 @@
       </p:grpSpPr>
       <p:sp>
         <p:nvSpPr>
-          <p:cNvPr id="28" name="Google Shape;28;p4"/>
-          <p:cNvSpPr/>
-          <p:nvPr/>
-        </p:nvSpPr>
-        <p:spPr>
-          <a:xfrm>
-            <a:off x="548640" y="365760"/>
-            <a:ext cx="8046720" cy="274320"/>
+          <p:cNvPr id="29" name="Google Shape;29;p4"/>
+          <p:cNvSpPr/>
+          <p:nvPr/>
+        </p:nvSpPr>
+        <p:spPr>
+          <a:xfrm>
+            <a:off x="548640" y="367200"/>
+            <a:ext cx="8046720" cy="566928"/>
           </a:xfrm>
           <a:prstGeom prst="rect">
             <a:avLst/>
@@ -5812,70 +6807,7 @@
                 <a:spcPts val="0"/>
               </a:spcAft>
               <a:buClr>
-                <a:srgbClr val="5BC8FF"/>
-              </a:buClr>
-              <a:buSzPts val="1100"/>
-              <a:buFont typeface="Arial"/>
-              <a:buNone/>
-            </a:pPr>
-            <a:r>
-              <a:rPr b="1" i="0" lang="en-US" sz="1100" u="none" cap="none" strike="noStrike">
-                <a:solidFill>
-                  <a:srgbClr val="5BC8FF"/>
-                </a:solidFill>
-                <a:latin typeface="Arial"/>
-                <a:ea typeface="Arial"/>
-                <a:cs typeface="Arial"/>
-                <a:sym typeface="Arial"/>
-              </a:rPr>
-              <a:t>OUR EDGE ・ 勝ち筋</a:t>
-            </a:r>
-            <a:endParaRPr b="0" i="0" sz="1100" u="none" cap="none" strike="noStrike">
-              <a:solidFill>
-                <a:schemeClr val="dk1"/>
-              </a:solidFill>
-              <a:latin typeface="Calibri"/>
-              <a:ea typeface="Calibri"/>
-              <a:cs typeface="Calibri"/>
-              <a:sym typeface="Calibri"/>
-            </a:endParaRPr>
-          </a:p>
-        </p:txBody>
-      </p:sp>
-      <p:sp>
-        <p:nvSpPr>
-          <p:cNvPr id="29" name="Google Shape;29;p4"/>
-          <p:cNvSpPr/>
-          <p:nvPr/>
-        </p:nvSpPr>
-        <p:spPr>
-          <a:xfrm>
-            <a:off x="548640" y="603504"/>
-            <a:ext cx="8046720" cy="566928"/>
-          </a:xfrm>
-          <a:prstGeom prst="rect">
-            <a:avLst/>
-          </a:prstGeom>
-          <a:noFill/>
-          <a:ln>
-            <a:noFill/>
-          </a:ln>
-        </p:spPr>
-        <p:txBody>
-          <a:bodyPr anchorCtr="0" anchor="ctr" bIns="0" lIns="0" spcFirstLastPara="1" rIns="0" wrap="square" tIns="0">
-            <a:noAutofit/>
-          </a:bodyPr>
-          <a:lstStyle/>
-          <a:p>
-            <a:pPr indent="0" lvl="0" marL="0" marR="0" rtl="0" algn="l">
-              <a:spcBef>
-                <a:spcPts val="0"/>
-              </a:spcBef>
-              <a:spcAft>
-                <a:spcPts val="0"/>
-              </a:spcAft>
-              <a:buClr>
-                <a:srgbClr val="EAF1FF"/>
+                <a:srgbClr val="16263F"/>
               </a:buClr>
               <a:buSzPts val="2900"/>
               <a:buFont typeface="Arial"/>
@@ -5884,7 +6816,7 @@
             <a:r>
               <a:rPr b="1" i="0" lang="en-US" sz="2900" u="none" cap="none" strike="noStrike">
                 <a:solidFill>
-                  <a:srgbClr val="EAF1FF"/>
+                  <a:srgbClr val="16263F"/>
                 </a:solidFill>
                 <a:latin typeface="Arial"/>
                 <a:ea typeface="Arial"/>
@@ -5907,76 +6839,13 @@
       </p:sp>
       <p:sp>
         <p:nvSpPr>
-          <p:cNvPr id="30" name="Google Shape;30;p4"/>
-          <p:cNvSpPr/>
-          <p:nvPr/>
-        </p:nvSpPr>
-        <p:spPr>
-          <a:xfrm>
-            <a:off x="548640" y="1298448"/>
-            <a:ext cx="8046720" cy="365760"/>
-          </a:xfrm>
-          <a:prstGeom prst="rect">
-            <a:avLst/>
-          </a:prstGeom>
-          <a:noFill/>
-          <a:ln>
-            <a:noFill/>
-          </a:ln>
-        </p:spPr>
-        <p:txBody>
-          <a:bodyPr anchorCtr="0" anchor="ctr" bIns="0" lIns="0" spcFirstLastPara="1" rIns="0" wrap="square" tIns="0">
-            <a:noAutofit/>
-          </a:bodyPr>
-          <a:lstStyle/>
-          <a:p>
-            <a:pPr indent="0" lvl="0" marL="0" marR="0" rtl="0" algn="l">
-              <a:spcBef>
-                <a:spcPts val="0"/>
-              </a:spcBef>
-              <a:spcAft>
-                <a:spcPts val="0"/>
-              </a:spcAft>
-              <a:buClr>
-                <a:srgbClr val="9DB0D0"/>
-              </a:buClr>
-              <a:buSzPts val="1600"/>
-              <a:buFont typeface="Arial"/>
-              <a:buNone/>
-            </a:pPr>
-            <a:r>
-              <a:rPr b="0" i="0" lang="en-US" sz="1600" u="none" cap="none" strike="noStrike">
-                <a:solidFill>
-                  <a:srgbClr val="9DB0D0"/>
-                </a:solidFill>
-                <a:latin typeface="Arial"/>
-                <a:ea typeface="Arial"/>
-                <a:cs typeface="Arial"/>
-                <a:sym typeface="Arial"/>
-              </a:rPr>
-              <a:t>重要鉱物・資源安全保障のデュアルユースに、狭く深く張る集中型ファンド。</a:t>
-            </a:r>
-            <a:endParaRPr b="0" i="0" sz="1600" u="none" cap="none" strike="noStrike">
-              <a:solidFill>
-                <a:schemeClr val="dk1"/>
-              </a:solidFill>
-              <a:latin typeface="Calibri"/>
-              <a:ea typeface="Calibri"/>
-              <a:cs typeface="Calibri"/>
-              <a:sym typeface="Calibri"/>
-            </a:endParaRPr>
-          </a:p>
-        </p:txBody>
-      </p:sp>
-      <p:sp>
-        <p:nvSpPr>
           <p:cNvPr id="31" name="Google Shape;31;p4"/>
           <p:cNvSpPr/>
           <p:nvPr/>
         </p:nvSpPr>
         <p:spPr>
           <a:xfrm>
-            <a:off x="548640" y="1920240"/>
+            <a:off x="548640" y="1800000"/>
             <a:ext cx="2468880" cy="2468880"/>
           </a:xfrm>
           <a:prstGeom prst="roundRect">
@@ -5985,11 +6854,11 @@
             </a:avLst>
           </a:prstGeom>
           <a:solidFill>
-            <a:srgbClr val="111C3C"/>
+            <a:srgbClr val="EEF3FB"/>
           </a:solidFill>
           <a:ln cap="flat" cmpd="sng" w="12700">
             <a:solidFill>
-              <a:srgbClr val="2A3B66"/>
+              <a:srgbClr val="D5DEEC"/>
             </a:solidFill>
             <a:prstDash val="solid"/>
             <a:round/>
@@ -5998,8 +6867,8 @@
           </a:ln>
           <a:effectLst>
             <a:outerShdw blurRad="114300" rotWithShape="0" algn="bl" dir="5400000" dist="38100">
-              <a:srgbClr val="000000">
-                <a:alpha val="45098"/>
+              <a:srgbClr val="16263F">
+                <a:alpha val="13000"/>
               </a:srgbClr>
             </a:outerShdw>
           </a:effectLst>
@@ -6034,18 +6903,18 @@
         </p:nvSpPr>
         <p:spPr>
           <a:xfrm>
-            <a:off x="804672" y="2194560"/>
+            <a:off x="804672" y="2074320"/>
             <a:ext cx="713232" cy="713232"/>
           </a:xfrm>
           <a:prstGeom prst="ellipse">
             <a:avLst/>
           </a:prstGeom>
           <a:solidFill>
-            <a:srgbClr val="16244A"/>
+            <a:srgbClr val="E4ECF8"/>
           </a:solidFill>
           <a:ln cap="flat" cmpd="sng" w="15875">
             <a:solidFill>
-              <a:srgbClr val="5BC8FF"/>
+              <a:srgbClr val="1488C2"/>
             </a:solidFill>
             <a:prstDash val="solid"/>
             <a:round/>
@@ -6090,7 +6959,7 @@
         </p:blipFill>
         <p:spPr>
           <a:xfrm>
-            <a:off x="969264" y="2359152"/>
+            <a:off x="969264" y="2238912"/>
             <a:ext cx="384048" cy="384048"/>
           </a:xfrm>
           <a:prstGeom prst="rect">
@@ -6110,7 +6979,7 @@
         </p:nvSpPr>
         <p:spPr>
           <a:xfrm>
-            <a:off x="804672" y="3108960"/>
+            <a:off x="804672" y="2988720"/>
             <a:ext cx="2011680" cy="457200"/>
           </a:xfrm>
           <a:prstGeom prst="rect">
@@ -6135,7 +7004,7 @@
                 <a:spcPts val="0"/>
               </a:spcAft>
               <a:buClr>
-                <a:srgbClr val="EAF1FF"/>
+                <a:srgbClr val="16263F"/>
               </a:buClr>
               <a:buSzPts val="1450"/>
               <a:buFont typeface="Arial"/>
@@ -6144,7 +7013,7 @@
             <a:r>
               <a:rPr b="1" i="0" lang="en-US" sz="1450" u="none" cap="none" strike="noStrike">
                 <a:solidFill>
-                  <a:srgbClr val="EAF1FF"/>
+                  <a:srgbClr val="16263F"/>
                 </a:solidFill>
                 <a:latin typeface="Arial"/>
                 <a:ea typeface="Arial"/>
@@ -6173,7 +7042,7 @@
         </p:nvSpPr>
         <p:spPr>
           <a:xfrm>
-            <a:off x="804672" y="3584448"/>
+            <a:off x="804672" y="3464208"/>
             <a:ext cx="1975104" cy="731520"/>
           </a:xfrm>
           <a:prstGeom prst="rect">
@@ -6198,7 +7067,7 @@
                 <a:spcPts val="0"/>
               </a:spcAft>
               <a:buClr>
-                <a:srgbClr val="9DB0D0"/>
+                <a:srgbClr val="56627A"/>
               </a:buClr>
               <a:buSzPts val="1200"/>
               <a:buFont typeface="Arial"/>
@@ -6207,7 +7076,7 @@
             <a:r>
               <a:rPr i="0" lang="en-US" sz="1200" u="none" cap="none" strike="noStrike">
                 <a:solidFill>
-                  <a:srgbClr val="9DB0D0"/>
+                  <a:srgbClr val="56627A"/>
                 </a:solidFill>
               </a:rPr>
               <a:t>国産・データ主権が不可欠な領域に、政府アンカーで張る</a:t>
@@ -6232,7 +7101,7 @@
         </p:nvSpPr>
         <p:spPr>
           <a:xfrm>
-            <a:off x="3246120" y="1920240"/>
+            <a:off x="3246120" y="1800000"/>
             <a:ext cx="2468880" cy="2468880"/>
           </a:xfrm>
           <a:prstGeom prst="roundRect">
@@ -6241,11 +7110,11 @@
             </a:avLst>
           </a:prstGeom>
           <a:solidFill>
-            <a:srgbClr val="111C3C"/>
+            <a:srgbClr val="EEF3FB"/>
           </a:solidFill>
           <a:ln cap="flat" cmpd="sng" w="12700">
             <a:solidFill>
-              <a:srgbClr val="2A3B66"/>
+              <a:srgbClr val="D5DEEC"/>
             </a:solidFill>
             <a:prstDash val="solid"/>
             <a:round/>
@@ -6254,8 +7123,8 @@
           </a:ln>
           <a:effectLst>
             <a:outerShdw blurRad="114300" rotWithShape="0" algn="bl" dir="5400000" dist="38100">
-              <a:srgbClr val="000000">
-                <a:alpha val="45098"/>
+              <a:srgbClr val="16263F">
+                <a:alpha val="13000"/>
               </a:srgbClr>
             </a:outerShdw>
           </a:effectLst>
@@ -6290,18 +7159,18 @@
         </p:nvSpPr>
         <p:spPr>
           <a:xfrm>
-            <a:off x="3502152" y="2194560"/>
+            <a:off x="3502152" y="2074320"/>
             <a:ext cx="713232" cy="713232"/>
           </a:xfrm>
           <a:prstGeom prst="ellipse">
             <a:avLst/>
           </a:prstGeom>
           <a:solidFill>
-            <a:srgbClr val="16244A"/>
+            <a:srgbClr val="E4ECF8"/>
           </a:solidFill>
           <a:ln cap="flat" cmpd="sng" w="15875">
             <a:solidFill>
-              <a:srgbClr val="F5B454"/>
+              <a:srgbClr val="D9881C"/>
             </a:solidFill>
             <a:prstDash val="solid"/>
             <a:round/>
@@ -6346,7 +7215,7 @@
         </p:blipFill>
         <p:spPr>
           <a:xfrm>
-            <a:off x="3666744" y="2359152"/>
+            <a:off x="3666744" y="2238912"/>
             <a:ext cx="384048" cy="384048"/>
           </a:xfrm>
           <a:prstGeom prst="rect">
@@ -6366,7 +7235,7 @@
         </p:nvSpPr>
         <p:spPr>
           <a:xfrm>
-            <a:off x="3502152" y="3108960"/>
+            <a:off x="3502152" y="2988720"/>
             <a:ext cx="2011680" cy="457200"/>
           </a:xfrm>
           <a:prstGeom prst="rect">
@@ -6391,7 +7260,7 @@
                 <a:spcPts val="0"/>
               </a:spcAft>
               <a:buClr>
-                <a:srgbClr val="EAF1FF"/>
+                <a:srgbClr val="16263F"/>
               </a:buClr>
               <a:buSzPts val="1450"/>
               <a:buFont typeface="Arial"/>
@@ -6400,7 +7269,7 @@
             <a:r>
               <a:rPr b="1" i="0" lang="en-US" sz="1450" u="none" cap="none" strike="noStrike">
                 <a:solidFill>
-                  <a:srgbClr val="EAF1FF"/>
+                  <a:srgbClr val="16263F"/>
                 </a:solidFill>
                 <a:latin typeface="Arial"/>
                 <a:ea typeface="Arial"/>
@@ -6429,7 +7298,7 @@
         </p:nvSpPr>
         <p:spPr>
           <a:xfrm>
-            <a:off x="3502152" y="3584448"/>
+            <a:off x="3502152" y="3464208"/>
             <a:ext cx="1975104" cy="731520"/>
           </a:xfrm>
           <a:prstGeom prst="rect">
@@ -6454,7 +7323,7 @@
                 <a:spcPts val="0"/>
               </a:spcAft>
               <a:buClr>
-                <a:srgbClr val="9DB0D0"/>
+                <a:srgbClr val="56627A"/>
               </a:buClr>
               <a:buSzPts val="1200"/>
               <a:buFont typeface="Arial"/>
@@ -6463,7 +7332,7 @@
             <a:r>
               <a:rPr b="0" i="0" lang="en-US" sz="1200" u="none" cap="none" strike="noStrike">
                 <a:solidFill>
-                  <a:srgbClr val="9DB0D0"/>
+                  <a:srgbClr val="56627A"/>
                 </a:solidFill>
                 <a:latin typeface="Arial"/>
                 <a:ea typeface="Arial"/>
@@ -6492,7 +7361,7 @@
         </p:nvSpPr>
         <p:spPr>
           <a:xfrm>
-            <a:off x="5943600" y="1920240"/>
+            <a:off x="5943600" y="1800000"/>
             <a:ext cx="2468880" cy="2468880"/>
           </a:xfrm>
           <a:prstGeom prst="roundRect">
@@ -6501,11 +7370,11 @@
             </a:avLst>
           </a:prstGeom>
           <a:solidFill>
-            <a:srgbClr val="111C3C"/>
+            <a:srgbClr val="EEF3FB"/>
           </a:solidFill>
           <a:ln cap="flat" cmpd="sng" w="12700">
             <a:solidFill>
-              <a:srgbClr val="2A3B66"/>
+              <a:srgbClr val="D5DEEC"/>
             </a:solidFill>
             <a:prstDash val="solid"/>
             <a:round/>
@@ -6514,8 +7383,8 @@
           </a:ln>
           <a:effectLst>
             <a:outerShdw blurRad="114300" rotWithShape="0" algn="bl" dir="5400000" dist="38100">
-              <a:srgbClr val="000000">
-                <a:alpha val="45098"/>
+              <a:srgbClr val="16263F">
+                <a:alpha val="13000"/>
               </a:srgbClr>
             </a:outerShdw>
           </a:effectLst>
@@ -6550,18 +7419,18 @@
         </p:nvSpPr>
         <p:spPr>
           <a:xfrm>
-            <a:off x="6199632" y="2194560"/>
+            <a:off x="6199632" y="2074320"/>
             <a:ext cx="713232" cy="713232"/>
           </a:xfrm>
           <a:prstGeom prst="ellipse">
             <a:avLst/>
           </a:prstGeom>
           <a:solidFill>
-            <a:srgbClr val="16244A"/>
+            <a:srgbClr val="E4ECF8"/>
           </a:solidFill>
           <a:ln cap="flat" cmpd="sng" w="15875">
             <a:solidFill>
-              <a:srgbClr val="9C8CFF"/>
+              <a:srgbClr val="6E5AD9"/>
             </a:solidFill>
             <a:prstDash val="solid"/>
             <a:round/>
@@ -6606,7 +7475,7 @@
         </p:blipFill>
         <p:spPr>
           <a:xfrm>
-            <a:off x="6364224" y="2359152"/>
+            <a:off x="6364224" y="2238912"/>
             <a:ext cx="384048" cy="384048"/>
           </a:xfrm>
           <a:prstGeom prst="rect">
@@ -6626,7 +7495,7 @@
         </p:nvSpPr>
         <p:spPr>
           <a:xfrm>
-            <a:off x="6199632" y="3108960"/>
+            <a:off x="6199632" y="2988720"/>
             <a:ext cx="2011680" cy="457200"/>
           </a:xfrm>
           <a:prstGeom prst="rect">
@@ -6651,7 +7520,7 @@
                 <a:spcPts val="0"/>
               </a:spcAft>
               <a:buClr>
-                <a:srgbClr val="EAF1FF"/>
+                <a:srgbClr val="16263F"/>
               </a:buClr>
               <a:buSzPts val="1450"/>
               <a:buFont typeface="Arial"/>
@@ -6660,7 +7529,7 @@
             <a:r>
               <a:rPr b="1" i="0" lang="en-US" sz="1450" u="none" cap="none" strike="noStrike">
                 <a:solidFill>
-                  <a:srgbClr val="EAF1FF"/>
+                  <a:srgbClr val="16263F"/>
                 </a:solidFill>
                 <a:latin typeface="Arial"/>
                 <a:ea typeface="Arial"/>
@@ -6689,7 +7558,7 @@
         </p:nvSpPr>
         <p:spPr>
           <a:xfrm>
-            <a:off x="6199632" y="3584448"/>
+            <a:off x="6199632" y="3464208"/>
             <a:ext cx="1975104" cy="731520"/>
           </a:xfrm>
           <a:prstGeom prst="rect">
@@ -6714,7 +7583,7 @@
                 <a:spcPts val="0"/>
               </a:spcAft>
               <a:buClr>
-                <a:srgbClr val="9DB0D0"/>
+                <a:srgbClr val="56627A"/>
               </a:buClr>
               <a:buSzPts val="1200"/>
               <a:buFont typeface="Arial"/>
@@ -6723,7 +7592,7 @@
             <a:r>
               <a:rPr b="0" i="0" lang="en-US" sz="1200" u="none" cap="none" strike="noStrike">
                 <a:solidFill>
-                  <a:srgbClr val="9DB0D0"/>
+                  <a:srgbClr val="56627A"/>
                 </a:solidFill>
                 <a:latin typeface="Arial"/>
                 <a:ea typeface="Arial"/>
@@ -6741,6 +7610,181 @@
               <a:cs typeface="Calibri"/>
               <a:sym typeface="Calibri"/>
             </a:endParaRPr>
+          </a:p>
+        </p:txBody>
+      </p:sp>
+      <p:cxnSp>
+        <p:nvCxnSpPr>
+          <p:cNvPr id="46" name="Rule2"/>
+          <p:cNvCxnSpPr/>
+          <p:nvPr/>
+        </p:nvCxnSpPr>
+        <p:spPr>
+          <a:xfrm>
+            <a:off x="548640" y="957600"/>
+            <a:ext cx="8046720" cy="0"/>
+          </a:xfrm>
+          <a:prstGeom prst="line">
+            <a:avLst/>
+          </a:prstGeom>
+          <a:ln w="19050">
+            <a:solidFill>
+              <a:srgbClr val="9FAEC6"/>
+            </a:solidFill>
+          </a:ln>
+        </p:spPr>
+        <p:style>
+          <a:lnRef idx="2">
+            <a:schemeClr val="accent1"/>
+          </a:lnRef>
+          <a:fillRef idx="0">
+            <a:schemeClr val="accent1"/>
+          </a:fillRef>
+          <a:effectRef idx="1">
+            <a:schemeClr val="accent1"/>
+          </a:effectRef>
+          <a:fontRef idx="minor">
+            <a:schemeClr val="tx1"/>
+          </a:fontRef>
+        </p:style>
+      </p:cxnSp>
+      <p:sp>
+        <p:nvSpPr>
+          <p:cNvPr id="47" name="KeyBox2"/>
+          <p:cNvSpPr/>
+          <p:nvPr/>
+        </p:nvSpPr>
+        <p:spPr>
+          <a:xfrm>
+            <a:off x="548640" y="1029600"/>
+            <a:ext cx="8046720" cy="691200"/>
+          </a:xfrm>
+          <a:prstGeom prst="rect">
+            <a:avLst/>
+          </a:prstGeom>
+          <a:solidFill>
+            <a:srgbClr val="EEF0F4"/>
+          </a:solidFill>
+          <a:ln w="9525">
+            <a:solidFill>
+              <a:srgbClr val="D7DCE5"/>
+            </a:solidFill>
+          </a:ln>
+          <a:effectLst/>
+        </p:spPr>
+        <p:txBody>
+          <a:bodyPr rtlCol="0" anchor="ctr" wrap="square" lIns="216000" rIns="108000" tIns="28800" bIns="28800"/>
+          <a:lstStyle/>
+          <a:p>
+            <a:pPr algn="l" marL="198000" indent="-162000">
+              <a:lnSpc>
+                <a:spcPct val="105000"/>
+              </a:lnSpc>
+              <a:spcBef>
+                <a:spcPts val="300"/>
+              </a:spcBef>
+              <a:spcAft>
+                <a:spcPts val="300"/>
+              </a:spcAft>
+              <a:buClr>
+                <a:srgbClr val="1488C2"/>
+              </a:buClr>
+              <a:buFont typeface="Arial"/>
+              <a:buChar char="▪"/>
+            </a:pPr>
+            <a:r>
+              <a:rPr sz="1100" b="0">
+                <a:solidFill>
+                  <a:srgbClr val="16263F"/>
+                </a:solidFill>
+                <a:latin typeface="Arial"/>
+              </a:rPr>
+              <a:t>重要鉱物・資源安全保障のデュアルユースに、狭く深く張る集中型ファンド。</a:t>
+            </a:r>
+          </a:p>
+          <a:p>
+            <a:pPr algn="l" marL="198000" indent="-162000">
+              <a:lnSpc>
+                <a:spcPct val="105000"/>
+              </a:lnSpc>
+              <a:spcBef>
+                <a:spcPts val="300"/>
+              </a:spcBef>
+              <a:spcAft>
+                <a:spcPts val="300"/>
+              </a:spcAft>
+              <a:buClr>
+                <a:srgbClr val="1488C2"/>
+              </a:buClr>
+              <a:buFont typeface="Arial"/>
+              <a:buChar char="▪"/>
+            </a:pPr>
+            <a:r>
+              <a:rPr sz="1100" b="0">
+                <a:solidFill>
+                  <a:srgbClr val="16263F"/>
+                </a:solidFill>
+                <a:latin typeface="Arial"/>
+              </a:rPr>
+              <a:t>主権・データが不可欠な領域を、政府アンカーで10〜12社に集中投資。</a:t>
+            </a:r>
+          </a:p>
+          <a:p>
+            <a:pPr algn="l" marL="198000" indent="-162000">
+              <a:lnSpc>
+                <a:spcPct val="105000"/>
+              </a:lnSpc>
+              <a:spcBef>
+                <a:spcPts val="300"/>
+              </a:spcBef>
+              <a:spcAft>
+                <a:spcPts val="300"/>
+              </a:spcAft>
+              <a:buClr>
+                <a:srgbClr val="1488C2"/>
+              </a:buClr>
+              <a:buFont typeface="Arial"/>
+              <a:buChar char="▪"/>
+            </a:pPr>
+            <a:r>
+              <a:rPr sz="1100" b="0">
+                <a:solidFill>
+                  <a:srgbClr val="16263F"/>
+                </a:solidFill>
+                <a:latin typeface="Arial"/>
+              </a:rPr>
+              <a:t>衛星×AIの解析レイヤーに絞り、1社でファンドを返す設計に徹する。</a:t>
+            </a:r>
+          </a:p>
+        </p:txBody>
+      </p:sp>
+      <p:sp>
+        <p:nvSpPr>
+          <p:cNvPr id="48" name="KeyBar2"/>
+          <p:cNvSpPr/>
+          <p:nvPr/>
+        </p:nvSpPr>
+        <p:spPr>
+          <a:xfrm>
+            <a:off x="548640" y="1029600"/>
+            <a:ext cx="54000" cy="691200"/>
+          </a:xfrm>
+          <a:prstGeom prst="rect">
+            <a:avLst/>
+          </a:prstGeom>
+          <a:solidFill>
+            <a:srgbClr val="1488C2"/>
+          </a:solidFill>
+          <a:ln>
+            <a:noFill/>
+          </a:ln>
+          <a:effectLst/>
+        </p:spPr>
+        <p:txBody>
+          <a:bodyPr rtlCol="0" anchor="ctr"/>
+          <a:lstStyle/>
+          <a:p>
+            <a:pPr algn="ctr"/>
           </a:p>
         </p:txBody>
       </p:sp>
@@ -6757,14 +7801,10 @@
   <p:cSld>
     <p:bg>
       <p:bgPr>
-        <a:blipFill>
-          <a:blip r:embed="rId3">
-            <a:alphaModFix/>
-          </a:blip>
-          <a:stretch>
-            <a:fillRect/>
-          </a:stretch>
-        </a:blipFill>
+        <a:solidFill>
+          <a:srgbClr val="FFFFFF"/>
+        </a:solidFill>
+        <a:effectLst/>
       </p:bgPr>
     </p:bg>
     <p:spTree>
@@ -6783,14 +7823,14 @@
       </p:grpSpPr>
       <p:sp>
         <p:nvSpPr>
-          <p:cNvPr id="51" name="Google Shape;51;p5"/>
-          <p:cNvSpPr/>
-          <p:nvPr/>
-        </p:nvSpPr>
-        <p:spPr>
-          <a:xfrm>
-            <a:off x="548640" y="365760"/>
-            <a:ext cx="8046720" cy="274320"/>
+          <p:cNvPr id="52" name="Google Shape;52;p5"/>
+          <p:cNvSpPr/>
+          <p:nvPr/>
+        </p:nvSpPr>
+        <p:spPr>
+          <a:xfrm>
+            <a:off x="548640" y="367200"/>
+            <a:ext cx="8046720" cy="566928"/>
           </a:xfrm>
           <a:prstGeom prst="rect">
             <a:avLst/>
@@ -6814,70 +7854,7 @@
                 <a:spcPts val="0"/>
               </a:spcAft>
               <a:buClr>
-                <a:srgbClr val="5BC8FF"/>
-              </a:buClr>
-              <a:buSzPts val="1100"/>
-              <a:buFont typeface="Arial"/>
-              <a:buNone/>
-            </a:pPr>
-            <a:r>
-              <a:rPr b="1" i="0" lang="en-US" sz="1100" u="none" cap="none" strike="noStrike">
-                <a:solidFill>
-                  <a:srgbClr val="5BC8FF"/>
-                </a:solidFill>
-                <a:latin typeface="Arial"/>
-                <a:ea typeface="Arial"/>
-                <a:cs typeface="Arial"/>
-                <a:sym typeface="Arial"/>
-              </a:rPr>
-              <a:t>FUND DESIGN ・ ファンド設計</a:t>
-            </a:r>
-            <a:endParaRPr b="0" i="0" sz="1100" u="none" cap="none" strike="noStrike">
-              <a:solidFill>
-                <a:schemeClr val="dk1"/>
-              </a:solidFill>
-              <a:latin typeface="Calibri"/>
-              <a:ea typeface="Calibri"/>
-              <a:cs typeface="Calibri"/>
-              <a:sym typeface="Calibri"/>
-            </a:endParaRPr>
-          </a:p>
-        </p:txBody>
-      </p:sp>
-      <p:sp>
-        <p:nvSpPr>
-          <p:cNvPr id="52" name="Google Shape;52;p5"/>
-          <p:cNvSpPr/>
-          <p:nvPr/>
-        </p:nvSpPr>
-        <p:spPr>
-          <a:xfrm>
-            <a:off x="548640" y="603504"/>
-            <a:ext cx="8046720" cy="566928"/>
-          </a:xfrm>
-          <a:prstGeom prst="rect">
-            <a:avLst/>
-          </a:prstGeom>
-          <a:noFill/>
-          <a:ln>
-            <a:noFill/>
-          </a:ln>
-        </p:spPr>
-        <p:txBody>
-          <a:bodyPr anchorCtr="0" anchor="ctr" bIns="0" lIns="0" spcFirstLastPara="1" rIns="0" wrap="square" tIns="0">
-            <a:noAutofit/>
-          </a:bodyPr>
-          <a:lstStyle/>
-          <a:p>
-            <a:pPr indent="0" lvl="0" marL="0" marR="0" rtl="0" algn="l">
-              <a:spcBef>
-                <a:spcPts val="0"/>
-              </a:spcBef>
-              <a:spcAft>
-                <a:spcPts val="0"/>
-              </a:spcAft>
-              <a:buClr>
-                <a:srgbClr val="EAF1FF"/>
+                <a:srgbClr val="16263F"/>
               </a:buClr>
               <a:buSzPts val="2900"/>
               <a:buFont typeface="Arial"/>
@@ -6886,7 +7863,7 @@
             <a:r>
               <a:rPr b="1" i="0" lang="en-US" sz="2900" u="none" cap="none" strike="noStrike">
                 <a:solidFill>
-                  <a:srgbClr val="EAF1FF"/>
+                  <a:srgbClr val="16263F"/>
                 </a:solidFill>
                 <a:latin typeface="Arial"/>
                 <a:ea typeface="Arial"/>
@@ -6915,7 +7892,7 @@
         </p:nvSpPr>
         <p:spPr>
           <a:xfrm>
-            <a:off x="548640" y="1554480"/>
+            <a:off x="548640" y="1620000"/>
             <a:ext cx="2468880" cy="1170432"/>
           </a:xfrm>
           <a:prstGeom prst="roundRect">
@@ -6924,11 +7901,11 @@
             </a:avLst>
           </a:prstGeom>
           <a:solidFill>
-            <a:srgbClr val="111C3C"/>
+            <a:srgbClr val="EEF3FB"/>
           </a:solidFill>
           <a:ln cap="flat" cmpd="sng" w="12700">
             <a:solidFill>
-              <a:srgbClr val="2A3B66"/>
+              <a:srgbClr val="D5DEEC"/>
             </a:solidFill>
             <a:prstDash val="solid"/>
             <a:round/>
@@ -6937,8 +7914,8 @@
           </a:ln>
           <a:effectLst>
             <a:outerShdw blurRad="114300" rotWithShape="0" algn="bl" dir="5400000" dist="38100">
-              <a:srgbClr val="000000">
-                <a:alpha val="45098"/>
+              <a:srgbClr val="16263F">
+                <a:alpha val="13000"/>
               </a:srgbClr>
             </a:outerShdw>
           </a:effectLst>
@@ -6973,7 +7950,7 @@
         </p:nvSpPr>
         <p:spPr>
           <a:xfrm>
-            <a:off x="777240" y="1719072"/>
+            <a:off x="777240" y="1784592"/>
             <a:ext cx="2103120" cy="548640"/>
           </a:xfrm>
           <a:prstGeom prst="rect">
@@ -6998,7 +7975,7 @@
                 <a:spcPts val="0"/>
               </a:spcAft>
               <a:buClr>
-                <a:srgbClr val="5BC8FF"/>
+                <a:srgbClr val="1488C2"/>
               </a:buClr>
               <a:buSzPts val="3300"/>
               <a:buFont typeface="Arial"/>
@@ -7007,7 +7984,7 @@
             <a:r>
               <a:rPr b="1" i="0" lang="en-US" sz="3300" u="none" cap="none" strike="noStrike">
                 <a:solidFill>
-                  <a:srgbClr val="5BC8FF"/>
+                  <a:srgbClr val="1488C2"/>
                 </a:solidFill>
                 <a:latin typeface="Arial"/>
                 <a:ea typeface="Arial"/>
@@ -7036,7 +8013,7 @@
         </p:nvSpPr>
         <p:spPr>
           <a:xfrm>
-            <a:off x="795528" y="2322576"/>
+            <a:off x="795528" y="2388096"/>
             <a:ext cx="2103120" cy="320040"/>
           </a:xfrm>
           <a:prstGeom prst="rect">
@@ -7061,7 +8038,7 @@
                 <a:spcPts val="0"/>
               </a:spcAft>
               <a:buClr>
-                <a:srgbClr val="9DB0D0"/>
+                <a:srgbClr val="56627A"/>
               </a:buClr>
               <a:buSzPts val="1150"/>
               <a:buFont typeface="Arial"/>
@@ -7070,7 +8047,7 @@
             <a:r>
               <a:rPr b="0" i="0" lang="en-US" sz="1150" u="none" cap="none" strike="noStrike">
                 <a:solidFill>
-                  <a:srgbClr val="9DB0D0"/>
+                  <a:srgbClr val="56627A"/>
                 </a:solidFill>
                 <a:latin typeface="Arial"/>
                 <a:ea typeface="Arial"/>
@@ -7099,7 +8076,7 @@
         </p:nvSpPr>
         <p:spPr>
           <a:xfrm>
-            <a:off x="3246120" y="1554480"/>
+            <a:off x="3246120" y="1620000"/>
             <a:ext cx="2468880" cy="1170432"/>
           </a:xfrm>
           <a:prstGeom prst="roundRect">
@@ -7108,11 +8085,11 @@
             </a:avLst>
           </a:prstGeom>
           <a:solidFill>
-            <a:srgbClr val="111C3C"/>
+            <a:srgbClr val="EEF3FB"/>
           </a:solidFill>
           <a:ln cap="flat" cmpd="sng" w="12700">
             <a:solidFill>
-              <a:srgbClr val="2A3B66"/>
+              <a:srgbClr val="D5DEEC"/>
             </a:solidFill>
             <a:prstDash val="solid"/>
             <a:round/>
@@ -7121,8 +8098,8 @@
           </a:ln>
           <a:effectLst>
             <a:outerShdw blurRad="114300" rotWithShape="0" algn="bl" dir="5400000" dist="38100">
-              <a:srgbClr val="000000">
-                <a:alpha val="45098"/>
+              <a:srgbClr val="16263F">
+                <a:alpha val="13000"/>
               </a:srgbClr>
             </a:outerShdw>
           </a:effectLst>
@@ -7157,7 +8134,7 @@
         </p:nvSpPr>
         <p:spPr>
           <a:xfrm>
-            <a:off x="3474720" y="1719072"/>
+            <a:off x="3474720" y="1784592"/>
             <a:ext cx="2103120" cy="548640"/>
           </a:xfrm>
           <a:prstGeom prst="rect">
@@ -7182,7 +8159,7 @@
                 <a:spcPts val="0"/>
               </a:spcAft>
               <a:buClr>
-                <a:srgbClr val="F5B454"/>
+                <a:srgbClr val="D9881C"/>
               </a:buClr>
               <a:buSzPts val="3300"/>
               <a:buFont typeface="Arial"/>
@@ -7191,7 +8168,7 @@
             <a:r>
               <a:rPr b="1" i="0" lang="en-US" sz="3300" u="none" cap="none" strike="noStrike">
                 <a:solidFill>
-                  <a:srgbClr val="F5B454"/>
+                  <a:srgbClr val="D9881C"/>
                 </a:solidFill>
                 <a:latin typeface="Arial"/>
                 <a:ea typeface="Arial"/>
@@ -7220,7 +8197,7 @@
         </p:nvSpPr>
         <p:spPr>
           <a:xfrm>
-            <a:off x="3493008" y="2322576"/>
+            <a:off x="3493008" y="2388096"/>
             <a:ext cx="2103120" cy="320040"/>
           </a:xfrm>
           <a:prstGeom prst="rect">
@@ -7245,7 +8222,7 @@
                 <a:spcPts val="0"/>
               </a:spcAft>
               <a:buClr>
-                <a:srgbClr val="9DB0D0"/>
+                <a:srgbClr val="56627A"/>
               </a:buClr>
               <a:buSzPts val="1150"/>
               <a:buFont typeface="Arial"/>
@@ -7254,7 +8231,7 @@
             <a:r>
               <a:rPr b="0" i="0" lang="en-US" sz="1150" u="none" cap="none" strike="noStrike">
                 <a:solidFill>
-                  <a:srgbClr val="9DB0D0"/>
+                  <a:srgbClr val="56627A"/>
                 </a:solidFill>
                 <a:latin typeface="Arial"/>
                 <a:ea typeface="Arial"/>
@@ -7283,7 +8260,7 @@
         </p:nvSpPr>
         <p:spPr>
           <a:xfrm>
-            <a:off x="5943600" y="1554480"/>
+            <a:off x="5943600" y="1620000"/>
             <a:ext cx="2468880" cy="1170432"/>
           </a:xfrm>
           <a:prstGeom prst="roundRect">
@@ -7292,11 +8269,11 @@
             </a:avLst>
           </a:prstGeom>
           <a:solidFill>
-            <a:srgbClr val="111C3C"/>
+            <a:srgbClr val="EEF3FB"/>
           </a:solidFill>
           <a:ln cap="flat" cmpd="sng" w="12700">
             <a:solidFill>
-              <a:srgbClr val="2A3B66"/>
+              <a:srgbClr val="D5DEEC"/>
             </a:solidFill>
             <a:prstDash val="solid"/>
             <a:round/>
@@ -7305,8 +8282,8 @@
           </a:ln>
           <a:effectLst>
             <a:outerShdw blurRad="114300" rotWithShape="0" algn="bl" dir="5400000" dist="38100">
-              <a:srgbClr val="000000">
-                <a:alpha val="45098"/>
+              <a:srgbClr val="16263F">
+                <a:alpha val="13000"/>
               </a:srgbClr>
             </a:outerShdw>
           </a:effectLst>
@@ -7341,7 +8318,7 @@
         </p:nvSpPr>
         <p:spPr>
           <a:xfrm>
-            <a:off x="6172200" y="1719072"/>
+            <a:off x="6172200" y="1784592"/>
             <a:ext cx="2103120" cy="548640"/>
           </a:xfrm>
           <a:prstGeom prst="rect">
@@ -7366,7 +8343,7 @@
                 <a:spcPts val="0"/>
               </a:spcAft>
               <a:buClr>
-                <a:srgbClr val="5BC8FF"/>
+                <a:srgbClr val="1488C2"/>
               </a:buClr>
               <a:buSzPts val="3300"/>
               <a:buFont typeface="Arial"/>
@@ -7375,7 +8352,7 @@
             <a:r>
               <a:rPr b="1" i="0" lang="en-US" sz="3300" u="none" cap="none" strike="noStrike">
                 <a:solidFill>
-                  <a:srgbClr val="5BC8FF"/>
+                  <a:srgbClr val="1488C2"/>
                 </a:solidFill>
                 <a:latin typeface="Arial"/>
                 <a:ea typeface="Arial"/>
@@ -7404,7 +8381,7 @@
         </p:nvSpPr>
         <p:spPr>
           <a:xfrm>
-            <a:off x="6190488" y="2322576"/>
+            <a:off x="6190488" y="2388096"/>
             <a:ext cx="2103120" cy="320040"/>
           </a:xfrm>
           <a:prstGeom prst="rect">
@@ -7429,7 +8406,7 @@
                 <a:spcPts val="0"/>
               </a:spcAft>
               <a:buClr>
-                <a:srgbClr val="9DB0D0"/>
+                <a:srgbClr val="56627A"/>
               </a:buClr>
               <a:buSzPts val="1150"/>
               <a:buFont typeface="Arial"/>
@@ -7438,7 +8415,7 @@
             <a:r>
               <a:rPr b="0" i="0" lang="en-US" sz="1150" u="none" cap="none" strike="noStrike">
                 <a:solidFill>
-                  <a:srgbClr val="9DB0D0"/>
+                  <a:srgbClr val="56627A"/>
                 </a:solidFill>
                 <a:latin typeface="Arial"/>
                 <a:ea typeface="Arial"/>
@@ -7467,7 +8444,7 @@
         </p:nvSpPr>
         <p:spPr>
           <a:xfrm>
-            <a:off x="548640" y="2926080"/>
+            <a:off x="548640" y="2991600"/>
             <a:ext cx="2468880" cy="1170432"/>
           </a:xfrm>
           <a:prstGeom prst="roundRect">
@@ -7476,11 +8453,11 @@
             </a:avLst>
           </a:prstGeom>
           <a:solidFill>
-            <a:srgbClr val="111C3C"/>
+            <a:srgbClr val="EEF3FB"/>
           </a:solidFill>
           <a:ln cap="flat" cmpd="sng" w="12700">
             <a:solidFill>
-              <a:srgbClr val="2A3B66"/>
+              <a:srgbClr val="D5DEEC"/>
             </a:solidFill>
             <a:prstDash val="solid"/>
             <a:round/>
@@ -7489,8 +8466,8 @@
           </a:ln>
           <a:effectLst>
             <a:outerShdw blurRad="114300" rotWithShape="0" algn="bl" dir="5400000" dist="38100">
-              <a:srgbClr val="000000">
-                <a:alpha val="45098"/>
+              <a:srgbClr val="16263F">
+                <a:alpha val="13000"/>
               </a:srgbClr>
             </a:outerShdw>
           </a:effectLst>
@@ -7525,7 +8502,7 @@
         </p:nvSpPr>
         <p:spPr>
           <a:xfrm>
-            <a:off x="777240" y="3090672"/>
+            <a:off x="777240" y="3156192"/>
             <a:ext cx="2103120" cy="548640"/>
           </a:xfrm>
           <a:prstGeom prst="rect">
@@ -7550,7 +8527,7 @@
                 <a:spcPts val="0"/>
               </a:spcAft>
               <a:buClr>
-                <a:srgbClr val="F5B454"/>
+                <a:srgbClr val="D9881C"/>
               </a:buClr>
               <a:buSzPts val="3300"/>
               <a:buFont typeface="Arial"/>
@@ -7559,7 +8536,7 @@
             <a:r>
               <a:rPr b="1" i="0" lang="en-US" sz="3300" u="none" cap="none" strike="noStrike">
                 <a:solidFill>
-                  <a:srgbClr val="F5B454"/>
+                  <a:srgbClr val="D9881C"/>
                 </a:solidFill>
                 <a:latin typeface="Arial"/>
                 <a:ea typeface="Arial"/>
@@ -7588,7 +8565,7 @@
         </p:nvSpPr>
         <p:spPr>
           <a:xfrm>
-            <a:off x="795528" y="3694176"/>
+            <a:off x="795528" y="3759696"/>
             <a:ext cx="2103120" cy="320040"/>
           </a:xfrm>
           <a:prstGeom prst="rect">
@@ -7613,7 +8590,7 @@
                 <a:spcPts val="0"/>
               </a:spcAft>
               <a:buClr>
-                <a:srgbClr val="9DB0D0"/>
+                <a:srgbClr val="56627A"/>
               </a:buClr>
               <a:buSzPts val="1150"/>
               <a:buFont typeface="Arial"/>
@@ -7622,7 +8599,7 @@
             <a:r>
               <a:rPr b="0" i="0" lang="en-US" sz="1150" u="none" cap="none" strike="noStrike">
                 <a:solidFill>
-                  <a:srgbClr val="9DB0D0"/>
+                  <a:srgbClr val="56627A"/>
                 </a:solidFill>
                 <a:latin typeface="Arial"/>
                 <a:ea typeface="Arial"/>
@@ -7651,7 +8628,7 @@
         </p:nvSpPr>
         <p:spPr>
           <a:xfrm>
-            <a:off x="3246120" y="2926080"/>
+            <a:off x="3246120" y="2991600"/>
             <a:ext cx="2468880" cy="1170432"/>
           </a:xfrm>
           <a:prstGeom prst="roundRect">
@@ -7660,11 +8637,11 @@
             </a:avLst>
           </a:prstGeom>
           <a:solidFill>
-            <a:srgbClr val="111C3C"/>
+            <a:srgbClr val="EEF3FB"/>
           </a:solidFill>
           <a:ln cap="flat" cmpd="sng" w="12700">
             <a:solidFill>
-              <a:srgbClr val="2A3B66"/>
+              <a:srgbClr val="D5DEEC"/>
             </a:solidFill>
             <a:prstDash val="solid"/>
             <a:round/>
@@ -7673,8 +8650,8 @@
           </a:ln>
           <a:effectLst>
             <a:outerShdw blurRad="114300" rotWithShape="0" algn="bl" dir="5400000" dist="38100">
-              <a:srgbClr val="000000">
-                <a:alpha val="45098"/>
+              <a:srgbClr val="16263F">
+                <a:alpha val="13000"/>
               </a:srgbClr>
             </a:outerShdw>
           </a:effectLst>
@@ -7709,7 +8686,7 @@
         </p:nvSpPr>
         <p:spPr>
           <a:xfrm>
-            <a:off x="3474720" y="3090672"/>
+            <a:off x="3474720" y="3156192"/>
             <a:ext cx="2103120" cy="548640"/>
           </a:xfrm>
           <a:prstGeom prst="rect">
@@ -7734,7 +8711,7 @@
                 <a:spcPts val="0"/>
               </a:spcAft>
               <a:buClr>
-                <a:srgbClr val="5BC8FF"/>
+                <a:srgbClr val="1488C2"/>
               </a:buClr>
               <a:buSzPts val="3300"/>
               <a:buFont typeface="Arial"/>
@@ -7743,7 +8720,7 @@
             <a:r>
               <a:rPr b="1" i="0" lang="en-US" sz="3300" u="none" cap="none" strike="noStrike">
                 <a:solidFill>
-                  <a:srgbClr val="5BC8FF"/>
+                  <a:srgbClr val="1488C2"/>
                 </a:solidFill>
                 <a:latin typeface="Arial"/>
                 <a:ea typeface="Arial"/>
@@ -7772,7 +8749,7 @@
         </p:nvSpPr>
         <p:spPr>
           <a:xfrm>
-            <a:off x="3493008" y="3694176"/>
+            <a:off x="3493008" y="3759696"/>
             <a:ext cx="2103120" cy="320040"/>
           </a:xfrm>
           <a:prstGeom prst="rect">
@@ -7797,7 +8774,7 @@
                 <a:spcPts val="0"/>
               </a:spcAft>
               <a:buClr>
-                <a:srgbClr val="9DB0D0"/>
+                <a:srgbClr val="56627A"/>
               </a:buClr>
               <a:buSzPts val="1150"/>
               <a:buFont typeface="Arial"/>
@@ -7806,7 +8783,7 @@
             <a:r>
               <a:rPr b="0" i="0" lang="en-US" sz="1150" u="none" cap="none" strike="noStrike">
                 <a:solidFill>
-                  <a:srgbClr val="9DB0D0"/>
+                  <a:srgbClr val="56627A"/>
                 </a:solidFill>
                 <a:latin typeface="Arial"/>
                 <a:ea typeface="Arial"/>
@@ -7835,7 +8812,7 @@
         </p:nvSpPr>
         <p:spPr>
           <a:xfrm>
-            <a:off x="5943600" y="2926080"/>
+            <a:off x="5943600" y="2991600"/>
             <a:ext cx="2468880" cy="1170432"/>
           </a:xfrm>
           <a:prstGeom prst="roundRect">
@@ -7844,11 +8821,11 @@
             </a:avLst>
           </a:prstGeom>
           <a:solidFill>
-            <a:srgbClr val="111C3C"/>
+            <a:srgbClr val="EEF3FB"/>
           </a:solidFill>
           <a:ln cap="flat" cmpd="sng" w="12700">
             <a:solidFill>
-              <a:srgbClr val="2A3B66"/>
+              <a:srgbClr val="D5DEEC"/>
             </a:solidFill>
             <a:prstDash val="solid"/>
             <a:round/>
@@ -7857,8 +8834,8 @@
           </a:ln>
           <a:effectLst>
             <a:outerShdw blurRad="114300" rotWithShape="0" algn="bl" dir="5400000" dist="38100">
-              <a:srgbClr val="000000">
-                <a:alpha val="45098"/>
+              <a:srgbClr val="16263F">
+                <a:alpha val="13000"/>
               </a:srgbClr>
             </a:outerShdw>
           </a:effectLst>
@@ -7893,7 +8870,7 @@
         </p:nvSpPr>
         <p:spPr>
           <a:xfrm>
-            <a:off x="6172200" y="3090672"/>
+            <a:off x="6172200" y="3156192"/>
             <a:ext cx="2103120" cy="548640"/>
           </a:xfrm>
           <a:prstGeom prst="rect">
@@ -7918,7 +8895,7 @@
                 <a:spcPts val="0"/>
               </a:spcAft>
               <a:buClr>
-                <a:srgbClr val="F5B454"/>
+                <a:srgbClr val="D9881C"/>
               </a:buClr>
               <a:buSzPts val="3300"/>
               <a:buFont typeface="Arial"/>
@@ -7927,7 +8904,7 @@
             <a:r>
               <a:rPr b="1" i="0" lang="en-US" sz="3300" u="none" cap="none" strike="noStrike">
                 <a:solidFill>
-                  <a:srgbClr val="F5B454"/>
+                  <a:srgbClr val="D9881C"/>
                 </a:solidFill>
                 <a:latin typeface="Arial"/>
                 <a:ea typeface="Arial"/>
@@ -7956,7 +8933,7 @@
         </p:nvSpPr>
         <p:spPr>
           <a:xfrm>
-            <a:off x="6190488" y="3694176"/>
+            <a:off x="6190488" y="3759696"/>
             <a:ext cx="2103120" cy="320040"/>
           </a:xfrm>
           <a:prstGeom prst="rect">
@@ -7981,7 +8958,7 @@
                 <a:spcPts val="0"/>
               </a:spcAft>
               <a:buClr>
-                <a:srgbClr val="9DB0D0"/>
+                <a:srgbClr val="56627A"/>
               </a:buClr>
               <a:buSzPts val="1150"/>
               <a:buFont typeface="Arial"/>
@@ -7990,7 +8967,7 @@
             <a:r>
               <a:rPr b="0" i="0" lang="en-US" sz="1150" u="none" cap="none" strike="noStrike">
                 <a:solidFill>
-                  <a:srgbClr val="9DB0D0"/>
+                  <a:srgbClr val="56627A"/>
                 </a:solidFill>
                 <a:latin typeface="Arial"/>
                 <a:ea typeface="Arial"/>
@@ -8019,7 +8996,7 @@
         </p:nvSpPr>
         <p:spPr>
           <a:xfrm>
-            <a:off x="548640" y="4434840"/>
+            <a:off x="548640" y="4500360"/>
             <a:ext cx="8138160" cy="365760"/>
           </a:xfrm>
           <a:prstGeom prst="rect">
@@ -8044,7 +9021,7 @@
                 <a:spcPts val="0"/>
               </a:spcAft>
               <a:buClr>
-                <a:srgbClr val="EAF1FF"/>
+                <a:srgbClr val="16263F"/>
               </a:buClr>
               <a:buSzPts val="1350"/>
               <a:buFont typeface="Arial"/>
@@ -8053,7 +9030,7 @@
             <a:r>
               <a:rPr b="1" i="0" lang="en-US" sz="1350" u="none" cap="none" strike="noStrike">
                 <a:solidFill>
-                  <a:srgbClr val="EAF1FF"/>
+                  <a:srgbClr val="16263F"/>
                 </a:solidFill>
                 <a:latin typeface="Arial"/>
                 <a:ea typeface="Arial"/>
@@ -8065,7 +9042,7 @@
             <a:r>
               <a:rPr b="0" i="0" lang="en-US" sz="1350" u="none" cap="none" strike="noStrike">
                 <a:solidFill>
-                  <a:srgbClr val="9DB0D0"/>
+                  <a:srgbClr val="56627A"/>
                 </a:solidFill>
                 <a:latin typeface="Arial"/>
                 <a:ea typeface="Arial"/>
@@ -8077,7 +9054,7 @@
             <a:r>
               <a:rPr b="1" i="0" lang="en-US" sz="1350" u="none" cap="none" strike="noStrike">
                 <a:solidFill>
-                  <a:srgbClr val="F5B454"/>
+                  <a:srgbClr val="D9881C"/>
                 </a:solidFill>
                 <a:latin typeface="Arial"/>
                 <a:ea typeface="Arial"/>
@@ -8089,7 +9066,7 @@
             <a:r>
               <a:rPr b="0" i="0" lang="en-US" sz="1350" u="none" cap="none" strike="noStrike">
                 <a:solidFill>
-                  <a:srgbClr val="9DB0D0"/>
+                  <a:srgbClr val="56627A"/>
                 </a:solidFill>
                 <a:latin typeface="Arial"/>
                 <a:ea typeface="Arial"/>
@@ -8107,6 +9084,154 @@
               <a:cs typeface="Calibri"/>
               <a:sym typeface="Calibri"/>
             </a:endParaRPr>
+          </a:p>
+        </p:txBody>
+      </p:sp>
+      <p:cxnSp>
+        <p:nvCxnSpPr>
+          <p:cNvPr id="72" name="Rule3"/>
+          <p:cNvCxnSpPr/>
+          <p:nvPr/>
+        </p:nvCxnSpPr>
+        <p:spPr>
+          <a:xfrm>
+            <a:off x="548640" y="957600"/>
+            <a:ext cx="8046720" cy="0"/>
+          </a:xfrm>
+          <a:prstGeom prst="line">
+            <a:avLst/>
+          </a:prstGeom>
+          <a:ln w="19050">
+            <a:solidFill>
+              <a:srgbClr val="9FAEC6"/>
+            </a:solidFill>
+          </a:ln>
+        </p:spPr>
+        <p:style>
+          <a:lnRef idx="2">
+            <a:schemeClr val="accent1"/>
+          </a:lnRef>
+          <a:fillRef idx="0">
+            <a:schemeClr val="accent1"/>
+          </a:fillRef>
+          <a:effectRef idx="1">
+            <a:schemeClr val="accent1"/>
+          </a:effectRef>
+          <a:fontRef idx="minor">
+            <a:schemeClr val="tx1"/>
+          </a:fontRef>
+        </p:style>
+      </p:cxnSp>
+      <p:sp>
+        <p:nvSpPr>
+          <p:cNvPr id="73" name="KeyBox3"/>
+          <p:cNvSpPr/>
+          <p:nvPr/>
+        </p:nvSpPr>
+        <p:spPr>
+          <a:xfrm>
+            <a:off x="548640" y="1029600"/>
+            <a:ext cx="8046720" cy="511200"/>
+          </a:xfrm>
+          <a:prstGeom prst="rect">
+            <a:avLst/>
+          </a:prstGeom>
+          <a:solidFill>
+            <a:srgbClr val="EEF0F4"/>
+          </a:solidFill>
+          <a:ln w="9525">
+            <a:solidFill>
+              <a:srgbClr val="D7DCE5"/>
+            </a:solidFill>
+          </a:ln>
+          <a:effectLst/>
+        </p:spPr>
+        <p:txBody>
+          <a:bodyPr rtlCol="0" anchor="ctr" wrap="square" lIns="216000" rIns="108000" tIns="28800" bIns="28800"/>
+          <a:lstStyle/>
+          <a:p>
+            <a:pPr algn="l" marL="198000" indent="-162000">
+              <a:lnSpc>
+                <a:spcPct val="105000"/>
+              </a:lnSpc>
+              <a:spcBef>
+                <a:spcPts val="300"/>
+              </a:spcBef>
+              <a:spcAft>
+                <a:spcPts val="300"/>
+              </a:spcAft>
+              <a:buClr>
+                <a:srgbClr val="1488C2"/>
+              </a:buClr>
+              <a:buFont typeface="Arial"/>
+              <a:buChar char="▪"/>
+            </a:pPr>
+            <a:r>
+              <a:rPr sz="1100" b="0">
+                <a:solidFill>
+                  <a:srgbClr val="16263F"/>
+                </a:solidFill>
+                <a:latin typeface="Arial"/>
+              </a:rPr>
+              <a:t>総額150億円・集中10〜12社・運用10年（投資5＋回収5）の日本登記3号ファンド。</a:t>
+            </a:r>
+          </a:p>
+          <a:p>
+            <a:pPr algn="l" marL="198000" indent="-162000">
+              <a:lnSpc>
+                <a:spcPct val="105000"/>
+              </a:lnSpc>
+              <a:spcBef>
+                <a:spcPts val="300"/>
+              </a:spcBef>
+              <a:spcAft>
+                <a:spcPts val="300"/>
+              </a:spcAft>
+              <a:buClr>
+                <a:srgbClr val="1488C2"/>
+              </a:buClr>
+              <a:buFont typeface="Arial"/>
+              <a:buChar char="▪"/>
+            </a:pPr>
+            <a:r>
+              <a:rPr sz="1100" b="0">
+                <a:solidFill>
+                  <a:srgbClr val="16263F"/>
+                </a:solidFill>
+                <a:latin typeface="Arial"/>
+              </a:rPr>
+              <a:t>目標はネットDPI 3.0X（グロス約4.3X）。1社・約1,360億円のExitがファンドを返す。</a:t>
+            </a:r>
+          </a:p>
+        </p:txBody>
+      </p:sp>
+      <p:sp>
+        <p:nvSpPr>
+          <p:cNvPr id="74" name="KeyBar3"/>
+          <p:cNvSpPr/>
+          <p:nvPr/>
+        </p:nvSpPr>
+        <p:spPr>
+          <a:xfrm>
+            <a:off x="548640" y="1029600"/>
+            <a:ext cx="54000" cy="511200"/>
+          </a:xfrm>
+          <a:prstGeom prst="rect">
+            <a:avLst/>
+          </a:prstGeom>
+          <a:solidFill>
+            <a:srgbClr val="1488C2"/>
+          </a:solidFill>
+          <a:ln>
+            <a:noFill/>
+          </a:ln>
+          <a:effectLst/>
+        </p:spPr>
+        <p:txBody>
+          <a:bodyPr rtlCol="0" anchor="ctr"/>
+          <a:lstStyle/>
+          <a:p>
+            <a:pPr algn="ctr"/>
           </a:p>
         </p:txBody>
       </p:sp>
@@ -8123,14 +9248,10 @@
   <p:cSld>
     <p:bg>
       <p:bgPr>
-        <a:blipFill>
-          <a:blip r:embed="rId3">
-            <a:alphaModFix/>
-          </a:blip>
-          <a:stretch>
-            <a:fillRect/>
-          </a:stretch>
-        </a:blipFill>
+        <a:solidFill>
+          <a:srgbClr val="FFFFFF"/>
+        </a:solidFill>
+        <a:effectLst/>
       </p:bgPr>
     </p:bg>
     <p:spTree>
@@ -8149,14 +9270,14 @@
       </p:grpSpPr>
       <p:sp>
         <p:nvSpPr>
-          <p:cNvPr id="77" name="Google Shape;77;p6"/>
-          <p:cNvSpPr/>
-          <p:nvPr/>
-        </p:nvSpPr>
-        <p:spPr>
-          <a:xfrm>
-            <a:off x="548640" y="365760"/>
-            <a:ext cx="8046720" cy="274320"/>
+          <p:cNvPr id="78" name="Google Shape;78;p6"/>
+          <p:cNvSpPr/>
+          <p:nvPr/>
+        </p:nvSpPr>
+        <p:spPr>
+          <a:xfrm>
+            <a:off x="548640" y="367200"/>
+            <a:ext cx="8046720" cy="566928"/>
           </a:xfrm>
           <a:prstGeom prst="rect">
             <a:avLst/>
@@ -8180,70 +9301,7 @@
                 <a:spcPts val="0"/>
               </a:spcAft>
               <a:buClr>
-                <a:srgbClr val="5BC8FF"/>
-              </a:buClr>
-              <a:buSzPts val="1100"/>
-              <a:buFont typeface="Arial"/>
-              <a:buNone/>
-            </a:pPr>
-            <a:r>
-              <a:rPr b="1" i="0" lang="en-US" sz="1100" u="none" cap="none" strike="noStrike">
-                <a:solidFill>
-                  <a:srgbClr val="5BC8FF"/>
-                </a:solidFill>
-                <a:latin typeface="Arial"/>
-                <a:ea typeface="Arial"/>
-                <a:cs typeface="Arial"/>
-                <a:sym typeface="Arial"/>
-              </a:rPr>
-              <a:t>WHY NOW ・ なぜ今</a:t>
-            </a:r>
-            <a:endParaRPr b="0" i="0" sz="1100" u="none" cap="none" strike="noStrike">
-              <a:solidFill>
-                <a:schemeClr val="dk1"/>
-              </a:solidFill>
-              <a:latin typeface="Calibri"/>
-              <a:ea typeface="Calibri"/>
-              <a:cs typeface="Calibri"/>
-              <a:sym typeface="Calibri"/>
-            </a:endParaRPr>
-          </a:p>
-        </p:txBody>
-      </p:sp>
-      <p:sp>
-        <p:nvSpPr>
-          <p:cNvPr id="78" name="Google Shape;78;p6"/>
-          <p:cNvSpPr/>
-          <p:nvPr/>
-        </p:nvSpPr>
-        <p:spPr>
-          <a:xfrm>
-            <a:off x="548640" y="603504"/>
-            <a:ext cx="8046720" cy="566928"/>
-          </a:xfrm>
-          <a:prstGeom prst="rect">
-            <a:avLst/>
-          </a:prstGeom>
-          <a:noFill/>
-          <a:ln>
-            <a:noFill/>
-          </a:ln>
-        </p:spPr>
-        <p:txBody>
-          <a:bodyPr anchorCtr="0" anchor="ctr" bIns="0" lIns="0" spcFirstLastPara="1" rIns="0" wrap="square" tIns="0">
-            <a:noAutofit/>
-          </a:bodyPr>
-          <a:lstStyle/>
-          <a:p>
-            <a:pPr indent="0" lvl="0" marL="0" marR="0" rtl="0" algn="l">
-              <a:spcBef>
-                <a:spcPts val="0"/>
-              </a:spcBef>
-              <a:spcAft>
-                <a:spcPts val="0"/>
-              </a:spcAft>
-              <a:buClr>
-                <a:srgbClr val="EAF1FF"/>
+                <a:srgbClr val="16263F"/>
               </a:buClr>
               <a:buSzPts val="2900"/>
               <a:buFont typeface="Arial"/>
@@ -8252,7 +9310,7 @@
             <a:r>
               <a:rPr b="1" i="0" lang="en-US" sz="2900" u="none" cap="none" strike="noStrike">
                 <a:solidFill>
-                  <a:srgbClr val="EAF1FF"/>
+                  <a:srgbClr val="16263F"/>
                 </a:solidFill>
                 <a:latin typeface="Arial"/>
                 <a:ea typeface="Arial"/>
@@ -8281,7 +9339,7 @@
         </p:nvSpPr>
         <p:spPr>
           <a:xfrm>
-            <a:off x="548640" y="1508760"/>
+            <a:off x="548640" y="1800000"/>
             <a:ext cx="4160520" cy="3108960"/>
           </a:xfrm>
           <a:prstGeom prst="roundRect">
@@ -8290,11 +9348,11 @@
             </a:avLst>
           </a:prstGeom>
           <a:solidFill>
-            <a:srgbClr val="111C3C"/>
+            <a:srgbClr val="EEF3FB"/>
           </a:solidFill>
           <a:ln cap="flat" cmpd="sng" w="12700">
             <a:solidFill>
-              <a:srgbClr val="2A3B66"/>
+              <a:srgbClr val="D5DEEC"/>
             </a:solidFill>
             <a:prstDash val="solid"/>
             <a:round/>
@@ -8303,8 +9361,8 @@
           </a:ln>
           <a:effectLst>
             <a:outerShdw blurRad="114300" rotWithShape="0" algn="bl" dir="5400000" dist="38100">
-              <a:srgbClr val="000000">
-                <a:alpha val="45098"/>
+              <a:srgbClr val="16263F">
+                <a:alpha val="13000"/>
               </a:srgbClr>
             </a:outerShdw>
           </a:effectLst>
@@ -8346,7 +9404,7 @@
         </p:blipFill>
         <p:spPr>
           <a:xfrm>
-            <a:off x="822960" y="1783080"/>
+            <a:off x="822960" y="2074320"/>
             <a:ext cx="365760" cy="365760"/>
           </a:xfrm>
           <a:prstGeom prst="rect">
@@ -8366,7 +9424,7 @@
         </p:nvSpPr>
         <p:spPr>
           <a:xfrm>
-            <a:off x="1325880" y="1810512"/>
+            <a:off x="1325880" y="2101752"/>
             <a:ext cx="3200400" cy="365760"/>
           </a:xfrm>
           <a:prstGeom prst="rect">
@@ -8391,7 +9449,7 @@
                 <a:spcPts val="0"/>
               </a:spcAft>
               <a:buClr>
-                <a:srgbClr val="EAF1FF"/>
+                <a:srgbClr val="16263F"/>
               </a:buClr>
               <a:buSzPts val="1600"/>
               <a:buFont typeface="Arial"/>
@@ -8400,7 +9458,7 @@
             <a:r>
               <a:rPr b="1" i="0" lang="en-US" sz="1600" u="none" cap="none" strike="noStrike">
                 <a:solidFill>
-                  <a:srgbClr val="EAF1FF"/>
+                  <a:srgbClr val="16263F"/>
                 </a:solidFill>
                 <a:latin typeface="Arial"/>
                 <a:ea typeface="Arial"/>
@@ -8429,7 +9487,7 @@
         </p:nvSpPr>
         <p:spPr>
           <a:xfrm>
-            <a:off x="822960" y="2377440"/>
+            <a:off x="822960" y="2668680"/>
             <a:ext cx="3703320" cy="2103120"/>
           </a:xfrm>
           <a:prstGeom prst="rect">
@@ -8457,7 +9515,7 @@
                 <a:spcPts val="0"/>
               </a:spcAft>
               <a:buClr>
-                <a:srgbClr val="9DB0D0"/>
+                <a:srgbClr val="56627A"/>
               </a:buClr>
               <a:buSzPts val="1300"/>
               <a:buFont typeface="Arial"/>
@@ -8466,7 +9524,7 @@
             <a:r>
               <a:rPr b="0" i="0" lang="en-US" sz="1300" u="none" cap="none" strike="noStrike">
                 <a:solidFill>
-                  <a:srgbClr val="9DB0D0"/>
+                  <a:srgbClr val="56627A"/>
                 </a:solidFill>
                 <a:latin typeface="Arial"/>
                 <a:ea typeface="Arial"/>
@@ -8497,7 +9555,7 @@
                 <a:spcPts val="0"/>
               </a:spcAft>
               <a:buClr>
-                <a:srgbClr val="9DB0D0"/>
+                <a:srgbClr val="56627A"/>
               </a:buClr>
               <a:buSzPts val="1300"/>
               <a:buFont typeface="Arial"/>
@@ -8506,7 +9564,7 @@
             <a:r>
               <a:rPr b="0" i="0" lang="en-US" sz="1300" u="none" cap="none" strike="noStrike">
                 <a:solidFill>
-                  <a:srgbClr val="9DB0D0"/>
+                  <a:srgbClr val="56627A"/>
                 </a:solidFill>
                 <a:latin typeface="Arial"/>
                 <a:ea typeface="Arial"/>
@@ -8537,7 +9595,7 @@
                 <a:spcPts val="0"/>
               </a:spcAft>
               <a:buClr>
-                <a:srgbClr val="5BC8FF"/>
+                <a:srgbClr val="1488C2"/>
               </a:buClr>
               <a:buSzPts val="1300"/>
               <a:buFont typeface="Arial"/>
@@ -8546,7 +9604,7 @@
             <a:r>
               <a:rPr b="0" i="0" lang="en-US" sz="1300" u="none" cap="none" strike="noStrike">
                 <a:solidFill>
-                  <a:srgbClr val="5BC8FF"/>
+                  <a:srgbClr val="1488C2"/>
                 </a:solidFill>
                 <a:latin typeface="Arial"/>
                 <a:ea typeface="Arial"/>
@@ -8575,7 +9633,7 @@
         </p:nvSpPr>
         <p:spPr>
           <a:xfrm>
-            <a:off x="5074920" y="1508760"/>
+            <a:off x="5074920" y="1800000"/>
             <a:ext cx="3657600" cy="365760"/>
           </a:xfrm>
           <a:prstGeom prst="rect">
@@ -8600,7 +9658,7 @@
                 <a:spcPts val="0"/>
               </a:spcAft>
               <a:buClr>
-                <a:srgbClr val="EAF1FF"/>
+                <a:srgbClr val="16263F"/>
               </a:buClr>
               <a:buSzPts val="1300"/>
               <a:buFont typeface="Arial"/>
@@ -8609,7 +9667,7 @@
             <a:r>
               <a:rPr b="1" i="0" lang="en-US" sz="1300" u="none" cap="none" strike="noStrike">
                 <a:solidFill>
-                  <a:srgbClr val="EAF1FF"/>
+                  <a:srgbClr val="16263F"/>
                 </a:solidFill>
                 <a:latin typeface="Arial"/>
                 <a:ea typeface="Arial"/>
@@ -8638,7 +9696,7 @@
         </p:nvSpPr>
         <p:spPr>
           <a:xfrm>
-            <a:off x="5074920" y="1965960"/>
+            <a:off x="5074920" y="2257200"/>
             <a:ext cx="3520440" cy="777240"/>
           </a:xfrm>
           <a:prstGeom prst="roundRect">
@@ -8647,11 +9705,11 @@
             </a:avLst>
           </a:prstGeom>
           <a:solidFill>
-            <a:srgbClr val="111C3C"/>
+            <a:srgbClr val="EEF3FB"/>
           </a:solidFill>
           <a:ln cap="flat" cmpd="sng" w="12700">
             <a:solidFill>
-              <a:srgbClr val="2A3B66"/>
+              <a:srgbClr val="D5DEEC"/>
             </a:solidFill>
             <a:prstDash val="solid"/>
             <a:round/>
@@ -8660,8 +9718,8 @@
           </a:ln>
           <a:effectLst>
             <a:outerShdw blurRad="114300" rotWithShape="0" algn="bl" dir="5400000" dist="38100">
-              <a:srgbClr val="000000">
-                <a:alpha val="45098"/>
+              <a:srgbClr val="16263F">
+                <a:alpha val="13000"/>
               </a:srgbClr>
             </a:outerShdw>
           </a:effectLst>
@@ -8696,7 +9754,7 @@
         </p:nvSpPr>
         <p:spPr>
           <a:xfrm>
-            <a:off x="5285232" y="2093976"/>
+            <a:off x="5285232" y="2385216"/>
             <a:ext cx="1554480" cy="548640"/>
           </a:xfrm>
           <a:prstGeom prst="rect">
@@ -8721,7 +9779,7 @@
                 <a:spcPts val="0"/>
               </a:spcAft>
               <a:buClr>
-                <a:srgbClr val="5BC8FF"/>
+                <a:srgbClr val="1488C2"/>
               </a:buClr>
               <a:buSzPts val="2600"/>
               <a:buFont typeface="Arial"/>
@@ -8730,7 +9788,7 @@
             <a:r>
               <a:rPr b="1" i="0" lang="en-US" sz="2600" u="none" cap="none" strike="noStrike">
                 <a:solidFill>
-                  <a:srgbClr val="5BC8FF"/>
+                  <a:srgbClr val="1488C2"/>
                 </a:solidFill>
                 <a:latin typeface="Arial"/>
                 <a:ea typeface="Arial"/>
@@ -8759,7 +9817,7 @@
         </p:nvSpPr>
         <p:spPr>
           <a:xfrm>
-            <a:off x="6720840" y="2203704"/>
+            <a:off x="6720840" y="2494944"/>
             <a:ext cx="1783080" cy="457200"/>
           </a:xfrm>
           <a:prstGeom prst="rect">
@@ -8784,7 +9842,7 @@
                 <a:spcPts val="0"/>
               </a:spcAft>
               <a:buClr>
-                <a:srgbClr val="9DB0D0"/>
+                <a:srgbClr val="56627A"/>
               </a:buClr>
               <a:buSzPts val="1150"/>
               <a:buFont typeface="Arial"/>
@@ -8793,7 +9851,7 @@
             <a:r>
               <a:rPr b="0" i="0" lang="en-US" sz="1150" u="none" cap="none" strike="noStrike">
                 <a:solidFill>
-                  <a:srgbClr val="9DB0D0"/>
+                  <a:srgbClr val="56627A"/>
                 </a:solidFill>
                 <a:latin typeface="Arial"/>
                 <a:ea typeface="Arial"/>
@@ -8822,7 +9880,7 @@
         </p:nvSpPr>
         <p:spPr>
           <a:xfrm>
-            <a:off x="5074920" y="2862072"/>
+            <a:off x="5074920" y="3153312"/>
             <a:ext cx="3520440" cy="777240"/>
           </a:xfrm>
           <a:prstGeom prst="roundRect">
@@ -8831,11 +9889,11 @@
             </a:avLst>
           </a:prstGeom>
           <a:solidFill>
-            <a:srgbClr val="111C3C"/>
+            <a:srgbClr val="EEF3FB"/>
           </a:solidFill>
           <a:ln cap="flat" cmpd="sng" w="12700">
             <a:solidFill>
-              <a:srgbClr val="2A3B66"/>
+              <a:srgbClr val="D5DEEC"/>
             </a:solidFill>
             <a:prstDash val="solid"/>
             <a:round/>
@@ -8844,8 +9902,8 @@
           </a:ln>
           <a:effectLst>
             <a:outerShdw blurRad="114300" rotWithShape="0" algn="bl" dir="5400000" dist="38100">
-              <a:srgbClr val="000000">
-                <a:alpha val="45098"/>
+              <a:srgbClr val="16263F">
+                <a:alpha val="13000"/>
               </a:srgbClr>
             </a:outerShdw>
           </a:effectLst>
@@ -8880,7 +9938,7 @@
         </p:nvSpPr>
         <p:spPr>
           <a:xfrm>
-            <a:off x="5285232" y="2990088"/>
+            <a:off x="5285232" y="3281328"/>
             <a:ext cx="1554480" cy="548640"/>
           </a:xfrm>
           <a:prstGeom prst="rect">
@@ -8905,7 +9963,7 @@
                 <a:spcPts val="0"/>
               </a:spcAft>
               <a:buClr>
-                <a:srgbClr val="F5B454"/>
+                <a:srgbClr val="D9881C"/>
               </a:buClr>
               <a:buSzPts val="2600"/>
               <a:buFont typeface="Arial"/>
@@ -8914,7 +9972,7 @@
             <a:r>
               <a:rPr b="1" i="0" lang="en-US" sz="2600" u="none" cap="none" strike="noStrike">
                 <a:solidFill>
-                  <a:srgbClr val="F5B454"/>
+                  <a:srgbClr val="D9881C"/>
                 </a:solidFill>
                 <a:latin typeface="Arial"/>
                 <a:ea typeface="Arial"/>
@@ -8943,7 +10001,7 @@
         </p:nvSpPr>
         <p:spPr>
           <a:xfrm>
-            <a:off x="6720840" y="3099816"/>
+            <a:off x="6720840" y="3391056"/>
             <a:ext cx="1783080" cy="457200"/>
           </a:xfrm>
           <a:prstGeom prst="rect">
@@ -8968,7 +10026,7 @@
                 <a:spcPts val="0"/>
               </a:spcAft>
               <a:buClr>
-                <a:srgbClr val="9DB0D0"/>
+                <a:srgbClr val="56627A"/>
               </a:buClr>
               <a:buSzPts val="1150"/>
               <a:buFont typeface="Arial"/>
@@ -8977,7 +10035,7 @@
             <a:r>
               <a:rPr b="0" i="0" lang="en-US" sz="1150" u="none" cap="none" strike="noStrike">
                 <a:solidFill>
-                  <a:srgbClr val="9DB0D0"/>
+                  <a:srgbClr val="56627A"/>
                 </a:solidFill>
                 <a:latin typeface="Arial"/>
                 <a:ea typeface="Arial"/>
@@ -9006,7 +10064,7 @@
         </p:nvSpPr>
         <p:spPr>
           <a:xfrm>
-            <a:off x="5074920" y="3758184"/>
+            <a:off x="5074920" y="4049424"/>
             <a:ext cx="3520440" cy="777240"/>
           </a:xfrm>
           <a:prstGeom prst="roundRect">
@@ -9015,11 +10073,11 @@
             </a:avLst>
           </a:prstGeom>
           <a:solidFill>
-            <a:srgbClr val="111C3C"/>
+            <a:srgbClr val="EEF3FB"/>
           </a:solidFill>
           <a:ln cap="flat" cmpd="sng" w="12700">
             <a:solidFill>
-              <a:srgbClr val="2A3B66"/>
+              <a:srgbClr val="D5DEEC"/>
             </a:solidFill>
             <a:prstDash val="solid"/>
             <a:round/>
@@ -9028,8 +10086,8 @@
           </a:ln>
           <a:effectLst>
             <a:outerShdw blurRad="114300" rotWithShape="0" algn="bl" dir="5400000" dist="38100">
-              <a:srgbClr val="000000">
-                <a:alpha val="45098"/>
+              <a:srgbClr val="16263F">
+                <a:alpha val="13000"/>
               </a:srgbClr>
             </a:outerShdw>
           </a:effectLst>
@@ -9064,7 +10122,7 @@
         </p:nvSpPr>
         <p:spPr>
           <a:xfrm>
-            <a:off x="5285232" y="3886200"/>
+            <a:off x="5285232" y="4177440"/>
             <a:ext cx="1554480" cy="548640"/>
           </a:xfrm>
           <a:prstGeom prst="rect">
@@ -9089,7 +10147,7 @@
                 <a:spcPts val="0"/>
               </a:spcAft>
               <a:buClr>
-                <a:srgbClr val="9C8CFF"/>
+                <a:srgbClr val="6E5AD9"/>
               </a:buClr>
               <a:buSzPts val="2600"/>
               <a:buFont typeface="Arial"/>
@@ -9098,7 +10156,7 @@
             <a:r>
               <a:rPr b="1" i="0" lang="en-US" sz="2600" u="none" cap="none" strike="noStrike">
                 <a:solidFill>
-                  <a:srgbClr val="9C8CFF"/>
+                  <a:srgbClr val="6E5AD9"/>
                 </a:solidFill>
                 <a:latin typeface="Arial"/>
                 <a:ea typeface="Arial"/>
@@ -9127,7 +10185,7 @@
         </p:nvSpPr>
         <p:spPr>
           <a:xfrm>
-            <a:off x="6720840" y="3995928"/>
+            <a:off x="6720840" y="4287168"/>
             <a:ext cx="1783080" cy="457200"/>
           </a:xfrm>
           <a:prstGeom prst="rect">
@@ -9152,7 +10210,7 @@
                 <a:spcPts val="0"/>
               </a:spcAft>
               <a:buClr>
-                <a:srgbClr val="9DB0D0"/>
+                <a:srgbClr val="56627A"/>
               </a:buClr>
               <a:buSzPts val="1150"/>
               <a:buFont typeface="Arial"/>
@@ -9161,7 +10219,7 @@
             <a:r>
               <a:rPr b="0" i="0" lang="en-US" sz="1150" u="none" cap="none" strike="noStrike">
                 <a:solidFill>
-                  <a:srgbClr val="9DB0D0"/>
+                  <a:srgbClr val="56627A"/>
                 </a:solidFill>
                 <a:latin typeface="Arial"/>
                 <a:ea typeface="Arial"/>
@@ -9179,6 +10237,181 @@
               <a:cs typeface="Calibri"/>
               <a:sym typeface="Calibri"/>
             </a:endParaRPr>
+          </a:p>
+        </p:txBody>
+      </p:sp>
+      <p:cxnSp>
+        <p:nvCxnSpPr>
+          <p:cNvPr id="93" name="Rule4"/>
+          <p:cNvCxnSpPr/>
+          <p:nvPr/>
+        </p:nvCxnSpPr>
+        <p:spPr>
+          <a:xfrm>
+            <a:off x="548640" y="957600"/>
+            <a:ext cx="8046720" cy="0"/>
+          </a:xfrm>
+          <a:prstGeom prst="line">
+            <a:avLst/>
+          </a:prstGeom>
+          <a:ln w="19050">
+            <a:solidFill>
+              <a:srgbClr val="9FAEC6"/>
+            </a:solidFill>
+          </a:ln>
+        </p:spPr>
+        <p:style>
+          <a:lnRef idx="2">
+            <a:schemeClr val="accent1"/>
+          </a:lnRef>
+          <a:fillRef idx="0">
+            <a:schemeClr val="accent1"/>
+          </a:fillRef>
+          <a:effectRef idx="1">
+            <a:schemeClr val="accent1"/>
+          </a:effectRef>
+          <a:fontRef idx="minor">
+            <a:schemeClr val="tx1"/>
+          </a:fontRef>
+        </p:style>
+      </p:cxnSp>
+      <p:sp>
+        <p:nvSpPr>
+          <p:cNvPr id="94" name="KeyBox4"/>
+          <p:cNvSpPr/>
+          <p:nvPr/>
+        </p:nvSpPr>
+        <p:spPr>
+          <a:xfrm>
+            <a:off x="548640" y="1029600"/>
+            <a:ext cx="8046720" cy="691200"/>
+          </a:xfrm>
+          <a:prstGeom prst="rect">
+            <a:avLst/>
+          </a:prstGeom>
+          <a:solidFill>
+            <a:srgbClr val="EEF0F4"/>
+          </a:solidFill>
+          <a:ln w="9525">
+            <a:solidFill>
+              <a:srgbClr val="D7DCE5"/>
+            </a:solidFill>
+          </a:ln>
+          <a:effectLst/>
+        </p:spPr>
+        <p:txBody>
+          <a:bodyPr rtlCol="0" anchor="ctr" wrap="square" lIns="216000" rIns="108000" tIns="28800" bIns="28800"/>
+          <a:lstStyle/>
+          <a:p>
+            <a:pPr algn="l" marL="198000" indent="-162000">
+              <a:lnSpc>
+                <a:spcPct val="105000"/>
+              </a:lnSpc>
+              <a:spcBef>
+                <a:spcPts val="300"/>
+              </a:spcBef>
+              <a:spcAft>
+                <a:spcPts val="300"/>
+              </a:spcAft>
+              <a:buClr>
+                <a:srgbClr val="1488C2"/>
+              </a:buClr>
+              <a:buFont typeface="Arial"/>
+              <a:buChar char="▪"/>
+            </a:pPr>
+            <a:r>
+              <a:rPr sz="1100" b="0">
+                <a:solidFill>
+                  <a:srgbClr val="16263F"/>
+                </a:solidFill>
+                <a:latin typeface="Arial"/>
+              </a:rPr>
+              <a:t>中国のレアアース管理強化で、サプライチェーン途絶リスクが顕在化。</a:t>
+            </a:r>
+          </a:p>
+          <a:p>
+            <a:pPr algn="l" marL="198000" indent="-162000">
+              <a:lnSpc>
+                <a:spcPct val="105000"/>
+              </a:lnSpc>
+              <a:spcBef>
+                <a:spcPts val="300"/>
+              </a:spcBef>
+              <a:spcAft>
+                <a:spcPts val="300"/>
+              </a:spcAft>
+              <a:buClr>
+                <a:srgbClr val="1488C2"/>
+              </a:buClr>
+              <a:buFont typeface="Arial"/>
+              <a:buChar char="▪"/>
+            </a:pPr>
+            <a:r>
+              <a:rPr sz="1100" b="0">
+                <a:solidFill>
+                  <a:srgbClr val="16263F"/>
+                </a:solidFill>
+                <a:latin typeface="Arial"/>
+              </a:rPr>
+              <a:t>重要鉱物の主権争いが、国産インテリジェンス需要を構造的に押し上げる。</a:t>
+            </a:r>
+          </a:p>
+          <a:p>
+            <a:pPr algn="l" marL="198000" indent="-162000">
+              <a:lnSpc>
+                <a:spcPct val="105000"/>
+              </a:lnSpc>
+              <a:spcBef>
+                <a:spcPts val="300"/>
+              </a:spcBef>
+              <a:spcAft>
+                <a:spcPts val="300"/>
+              </a:spcAft>
+              <a:buClr>
+                <a:srgbClr val="1488C2"/>
+              </a:buClr>
+              <a:buFont typeface="Arial"/>
+              <a:buChar char="▪"/>
+            </a:pPr>
+            <a:r>
+              <a:rPr sz="1100" b="0">
+                <a:solidFill>
+                  <a:srgbClr val="16263F"/>
+                </a:solidFill>
+                <a:latin typeface="Arial"/>
+              </a:rPr>
+              <a:t>防衛8.8兆円・宇宙戦略基金1兆円など、公的需要プールが追い風。</a:t>
+            </a:r>
+          </a:p>
+        </p:txBody>
+      </p:sp>
+      <p:sp>
+        <p:nvSpPr>
+          <p:cNvPr id="95" name="KeyBar4"/>
+          <p:cNvSpPr/>
+          <p:nvPr/>
+        </p:nvSpPr>
+        <p:spPr>
+          <a:xfrm>
+            <a:off x="548640" y="1029600"/>
+            <a:ext cx="54000" cy="691200"/>
+          </a:xfrm>
+          <a:prstGeom prst="rect">
+            <a:avLst/>
+          </a:prstGeom>
+          <a:solidFill>
+            <a:srgbClr val="1488C2"/>
+          </a:solidFill>
+          <a:ln>
+            <a:noFill/>
+          </a:ln>
+          <a:effectLst/>
+        </p:spPr>
+        <p:txBody>
+          <a:bodyPr rtlCol="0" anchor="ctr"/>
+          <a:lstStyle/>
+          <a:p>
+            <a:pPr algn="ctr"/>
           </a:p>
         </p:txBody>
       </p:sp>
@@ -9195,14 +10428,10 @@
   <p:cSld>
     <p:bg>
       <p:bgPr>
-        <a:blipFill>
-          <a:blip r:embed="rId3">
-            <a:alphaModFix/>
-          </a:blip>
-          <a:stretch>
-            <a:fillRect/>
-          </a:stretch>
-        </a:blipFill>
+        <a:solidFill>
+          <a:srgbClr val="FFFFFF"/>
+        </a:solidFill>
+        <a:effectLst/>
       </p:bgPr>
     </p:bg>
     <p:spTree>
@@ -9221,14 +10450,14 @@
       </p:grpSpPr>
       <p:sp>
         <p:nvSpPr>
-          <p:cNvPr id="98" name="Google Shape;98;p7"/>
-          <p:cNvSpPr/>
-          <p:nvPr/>
-        </p:nvSpPr>
-        <p:spPr>
-          <a:xfrm>
-            <a:off x="548640" y="365760"/>
-            <a:ext cx="8046720" cy="274320"/>
+          <p:cNvPr id="99" name="Google Shape;99;p7"/>
+          <p:cNvSpPr/>
+          <p:nvPr/>
+        </p:nvSpPr>
+        <p:spPr>
+          <a:xfrm>
+            <a:off x="548640" y="367200"/>
+            <a:ext cx="8046720" cy="566928"/>
           </a:xfrm>
           <a:prstGeom prst="rect">
             <a:avLst/>
@@ -9252,70 +10481,7 @@
                 <a:spcPts val="0"/>
               </a:spcAft>
               <a:buClr>
-                <a:srgbClr val="5BC8FF"/>
-              </a:buClr>
-              <a:buSzPts val="1100"/>
-              <a:buFont typeface="Arial"/>
-              <a:buNone/>
-            </a:pPr>
-            <a:r>
-              <a:rPr b="1" i="0" lang="en-US" sz="1100" u="none" cap="none" strike="noStrike">
-                <a:solidFill>
-                  <a:srgbClr val="5BC8FF"/>
-                </a:solidFill>
-                <a:latin typeface="Arial"/>
-                <a:ea typeface="Arial"/>
-                <a:cs typeface="Arial"/>
-                <a:sym typeface="Arial"/>
-              </a:rPr>
-              <a:t>THE TARGET ・ 投資対象</a:t>
-            </a:r>
-            <a:endParaRPr b="0" i="0" sz="1100" u="none" cap="none" strike="noStrike">
-              <a:solidFill>
-                <a:schemeClr val="dk1"/>
-              </a:solidFill>
-              <a:latin typeface="Calibri"/>
-              <a:ea typeface="Calibri"/>
-              <a:cs typeface="Calibri"/>
-              <a:sym typeface="Calibri"/>
-            </a:endParaRPr>
-          </a:p>
-        </p:txBody>
-      </p:sp>
-      <p:sp>
-        <p:nvSpPr>
-          <p:cNvPr id="99" name="Google Shape;99;p7"/>
-          <p:cNvSpPr/>
-          <p:nvPr/>
-        </p:nvSpPr>
-        <p:spPr>
-          <a:xfrm>
-            <a:off x="548640" y="603504"/>
-            <a:ext cx="8046720" cy="566928"/>
-          </a:xfrm>
-          <a:prstGeom prst="rect">
-            <a:avLst/>
-          </a:prstGeom>
-          <a:noFill/>
-          <a:ln>
-            <a:noFill/>
-          </a:ln>
-        </p:spPr>
-        <p:txBody>
-          <a:bodyPr anchorCtr="0" anchor="ctr" bIns="0" lIns="0" spcFirstLastPara="1" rIns="0" wrap="square" tIns="0">
-            <a:noAutofit/>
-          </a:bodyPr>
-          <a:lstStyle/>
-          <a:p>
-            <a:pPr indent="0" lvl="0" marL="0" marR="0" rtl="0" algn="l">
-              <a:spcBef>
-                <a:spcPts val="0"/>
-              </a:spcBef>
-              <a:spcAft>
-                <a:spcPts val="0"/>
-              </a:spcAft>
-              <a:buClr>
-                <a:srgbClr val="EAF1FF"/>
+                <a:srgbClr val="16263F"/>
               </a:buClr>
               <a:buSzPts val="2900"/>
               <a:buFont typeface="Arial"/>
@@ -9324,7 +10490,7 @@
             <a:r>
               <a:rPr b="1" i="0" lang="en-US" sz="2900" u="none" cap="none" strike="noStrike">
                 <a:solidFill>
-                  <a:srgbClr val="EAF1FF"/>
+                  <a:srgbClr val="16263F"/>
                 </a:solidFill>
                 <a:latin typeface="Arial"/>
                 <a:ea typeface="Arial"/>
@@ -9347,76 +10513,13 @@
       </p:sp>
       <p:sp>
         <p:nvSpPr>
-          <p:cNvPr id="100" name="Google Shape;100;p7"/>
-          <p:cNvSpPr/>
-          <p:nvPr/>
-        </p:nvSpPr>
-        <p:spPr>
-          <a:xfrm>
-            <a:off x="548640" y="1280160"/>
-            <a:ext cx="8046720" cy="365760"/>
-          </a:xfrm>
-          <a:prstGeom prst="rect">
-            <a:avLst/>
-          </a:prstGeom>
-          <a:noFill/>
-          <a:ln>
-            <a:noFill/>
-          </a:ln>
-        </p:spPr>
-        <p:txBody>
-          <a:bodyPr anchorCtr="0" anchor="ctr" bIns="0" lIns="0" spcFirstLastPara="1" rIns="0" wrap="square" tIns="0">
-            <a:noAutofit/>
-          </a:bodyPr>
-          <a:lstStyle/>
-          <a:p>
-            <a:pPr indent="0" lvl="0" marL="0" marR="0" rtl="0" algn="l">
-              <a:spcBef>
-                <a:spcPts val="0"/>
-              </a:spcBef>
-              <a:spcAft>
-                <a:spcPts val="0"/>
-              </a:spcAft>
-              <a:buClr>
-                <a:srgbClr val="5BC8FF"/>
-              </a:buClr>
-              <a:buSzPts val="1500"/>
-              <a:buFont typeface="Arial"/>
-              <a:buNone/>
-            </a:pPr>
-            <a:r>
-              <a:rPr b="0" i="0" lang="en-US" sz="1500" u="none" cap="none" strike="noStrike">
-                <a:solidFill>
-                  <a:srgbClr val="5BC8FF"/>
-                </a:solidFill>
-                <a:latin typeface="Arial"/>
-                <a:ea typeface="Arial"/>
-                <a:cs typeface="Arial"/>
-                <a:sym typeface="Arial"/>
-              </a:rPr>
-              <a:t>Planetary Intelligence OS ／ 衛星 × AI で地球を解析する</a:t>
-            </a:r>
-            <a:endParaRPr b="0" i="0" sz="1500" u="none" cap="none" strike="noStrike">
-              <a:solidFill>
-                <a:schemeClr val="dk1"/>
-              </a:solidFill>
-              <a:latin typeface="Calibri"/>
-              <a:ea typeface="Calibri"/>
-              <a:cs typeface="Calibri"/>
-              <a:sym typeface="Calibri"/>
-            </a:endParaRPr>
-          </a:p>
-        </p:txBody>
-      </p:sp>
-      <p:sp>
-        <p:nvSpPr>
           <p:cNvPr id="101" name="Google Shape;101;p7"/>
           <p:cNvSpPr/>
           <p:nvPr/>
         </p:nvSpPr>
         <p:spPr>
           <a:xfrm>
-            <a:off x="548640" y="1965960"/>
+            <a:off x="548640" y="1800000"/>
             <a:ext cx="2011680" cy="603504"/>
           </a:xfrm>
           <a:prstGeom prst="roundRect">
@@ -9425,11 +10528,11 @@
             </a:avLst>
           </a:prstGeom>
           <a:solidFill>
-            <a:srgbClr val="111C3C"/>
+            <a:srgbClr val="EEF3FB"/>
           </a:solidFill>
           <a:ln cap="flat" cmpd="sng" w="12700">
             <a:solidFill>
-              <a:srgbClr val="2A3B66"/>
+              <a:srgbClr val="D5DEEC"/>
             </a:solidFill>
             <a:prstDash val="solid"/>
             <a:round/>
@@ -9438,8 +10541,8 @@
           </a:ln>
           <a:effectLst>
             <a:outerShdw blurRad="114300" rotWithShape="0" algn="bl" dir="5400000" dist="38100">
-              <a:srgbClr val="000000">
-                <a:alpha val="45098"/>
+              <a:srgbClr val="16263F">
+                <a:alpha val="13000"/>
               </a:srgbClr>
             </a:outerShdw>
           </a:effectLst>
@@ -9474,7 +10577,7 @@
         </p:nvSpPr>
         <p:spPr>
           <a:xfrm>
-            <a:off x="731520" y="2039112"/>
+            <a:off x="731520" y="1873152"/>
             <a:ext cx="1737360" cy="274320"/>
           </a:xfrm>
           <a:prstGeom prst="rect">
@@ -9499,7 +10602,7 @@
                 <a:spcPts val="0"/>
               </a:spcAft>
               <a:buClr>
-                <a:srgbClr val="EAF1FF"/>
+                <a:srgbClr val="16263F"/>
               </a:buClr>
               <a:buSzPts val="1400"/>
               <a:buFont typeface="Arial"/>
@@ -9508,7 +10611,7 @@
             <a:r>
               <a:rPr b="1" i="0" lang="en-US" sz="1400" u="none" cap="none" strike="noStrike">
                 <a:solidFill>
-                  <a:srgbClr val="EAF1FF"/>
+                  <a:srgbClr val="16263F"/>
                 </a:solidFill>
                 <a:latin typeface="Arial"/>
                 <a:ea typeface="Arial"/>
@@ -9537,7 +10640,7 @@
         </p:nvSpPr>
         <p:spPr>
           <a:xfrm>
-            <a:off x="731520" y="2295144"/>
+            <a:off x="731520" y="2129184"/>
             <a:ext cx="1737360" cy="228600"/>
           </a:xfrm>
           <a:prstGeom prst="rect">
@@ -9562,7 +10665,7 @@
                 <a:spcPts val="0"/>
               </a:spcAft>
               <a:buClr>
-                <a:srgbClr val="9DB0D0"/>
+                <a:srgbClr val="56627A"/>
               </a:buClr>
               <a:buSzPts val="950"/>
               <a:buFont typeface="Arial"/>
@@ -9571,7 +10674,7 @@
             <a:r>
               <a:rPr b="0" i="0" lang="en-US" sz="950" u="none" cap="none" strike="noStrike">
                 <a:solidFill>
-                  <a:srgbClr val="9DB0D0"/>
+                  <a:srgbClr val="56627A"/>
                 </a:solidFill>
                 <a:latin typeface="Arial"/>
                 <a:ea typeface="Arial"/>
@@ -9600,7 +10703,7 @@
         </p:nvSpPr>
         <p:spPr>
           <a:xfrm>
-            <a:off x="548640" y="2724912"/>
+            <a:off x="548640" y="2558952"/>
             <a:ext cx="2011680" cy="603504"/>
           </a:xfrm>
           <a:prstGeom prst="roundRect">
@@ -9609,11 +10712,11 @@
             </a:avLst>
           </a:prstGeom>
           <a:solidFill>
-            <a:srgbClr val="111C3C"/>
+            <a:srgbClr val="EEF3FB"/>
           </a:solidFill>
           <a:ln cap="flat" cmpd="sng" w="12700">
             <a:solidFill>
-              <a:srgbClr val="2A3B66"/>
+              <a:srgbClr val="D5DEEC"/>
             </a:solidFill>
             <a:prstDash val="solid"/>
             <a:round/>
@@ -9622,8 +10725,8 @@
           </a:ln>
           <a:effectLst>
             <a:outerShdw blurRad="114300" rotWithShape="0" algn="bl" dir="5400000" dist="38100">
-              <a:srgbClr val="000000">
-                <a:alpha val="45098"/>
+              <a:srgbClr val="16263F">
+                <a:alpha val="13000"/>
               </a:srgbClr>
             </a:outerShdw>
           </a:effectLst>
@@ -9658,7 +10761,7 @@
         </p:nvSpPr>
         <p:spPr>
           <a:xfrm>
-            <a:off x="731520" y="2798064"/>
+            <a:off x="731520" y="2632104"/>
             <a:ext cx="1737360" cy="274320"/>
           </a:xfrm>
           <a:prstGeom prst="rect">
@@ -9683,7 +10786,7 @@
                 <a:spcPts val="0"/>
               </a:spcAft>
               <a:buClr>
-                <a:srgbClr val="EAF1FF"/>
+                <a:srgbClr val="16263F"/>
               </a:buClr>
               <a:buSzPts val="1400"/>
               <a:buFont typeface="Arial"/>
@@ -9692,7 +10795,7 @@
             <a:r>
               <a:rPr b="1" i="0" lang="en-US" sz="1400" u="none" cap="none" strike="noStrike">
                 <a:solidFill>
-                  <a:srgbClr val="EAF1FF"/>
+                  <a:srgbClr val="16263F"/>
                 </a:solidFill>
                 <a:latin typeface="Arial"/>
                 <a:ea typeface="Arial"/>
@@ -9721,7 +10824,7 @@
         </p:nvSpPr>
         <p:spPr>
           <a:xfrm>
-            <a:off x="731520" y="3054096"/>
+            <a:off x="731520" y="2888136"/>
             <a:ext cx="1737360" cy="228600"/>
           </a:xfrm>
           <a:prstGeom prst="rect">
@@ -9746,7 +10849,7 @@
                 <a:spcPts val="0"/>
               </a:spcAft>
               <a:buClr>
-                <a:srgbClr val="9DB0D0"/>
+                <a:srgbClr val="56627A"/>
               </a:buClr>
               <a:buSzPts val="950"/>
               <a:buFont typeface="Arial"/>
@@ -9755,7 +10858,7 @@
             <a:r>
               <a:rPr b="0" i="0" lang="en-US" sz="950" u="none" cap="none" strike="noStrike">
                 <a:solidFill>
-                  <a:srgbClr val="9DB0D0"/>
+                  <a:srgbClr val="56627A"/>
                 </a:solidFill>
                 <a:latin typeface="Arial"/>
                 <a:ea typeface="Arial"/>
@@ -9784,7 +10887,7 @@
         </p:nvSpPr>
         <p:spPr>
           <a:xfrm>
-            <a:off x="548640" y="3483864"/>
+            <a:off x="548640" y="3317904"/>
             <a:ext cx="2011680" cy="603504"/>
           </a:xfrm>
           <a:prstGeom prst="roundRect">
@@ -9793,11 +10896,11 @@
             </a:avLst>
           </a:prstGeom>
           <a:solidFill>
-            <a:srgbClr val="111C3C"/>
+            <a:srgbClr val="EEF3FB"/>
           </a:solidFill>
           <a:ln cap="flat" cmpd="sng" w="12700">
             <a:solidFill>
-              <a:srgbClr val="2A3B66"/>
+              <a:srgbClr val="D5DEEC"/>
             </a:solidFill>
             <a:prstDash val="solid"/>
             <a:round/>
@@ -9806,8 +10909,8 @@
           </a:ln>
           <a:effectLst>
             <a:outerShdw blurRad="114300" rotWithShape="0" algn="bl" dir="5400000" dist="38100">
-              <a:srgbClr val="000000">
-                <a:alpha val="45098"/>
+              <a:srgbClr val="16263F">
+                <a:alpha val="13000"/>
               </a:srgbClr>
             </a:outerShdw>
           </a:effectLst>
@@ -9842,7 +10945,7 @@
         </p:nvSpPr>
         <p:spPr>
           <a:xfrm>
-            <a:off x="731520" y="3557016"/>
+            <a:off x="731520" y="3391056"/>
             <a:ext cx="1737360" cy="274320"/>
           </a:xfrm>
           <a:prstGeom prst="rect">
@@ -9867,7 +10970,7 @@
                 <a:spcPts val="0"/>
               </a:spcAft>
               <a:buClr>
-                <a:srgbClr val="EAF1FF"/>
+                <a:srgbClr val="16263F"/>
               </a:buClr>
               <a:buSzPts val="1400"/>
               <a:buFont typeface="Arial"/>
@@ -9876,7 +10979,7 @@
             <a:r>
               <a:rPr b="1" i="0" lang="en-US" sz="1400" u="none" cap="none" strike="noStrike">
                 <a:solidFill>
-                  <a:srgbClr val="EAF1FF"/>
+                  <a:srgbClr val="16263F"/>
                 </a:solidFill>
                 <a:latin typeface="Arial"/>
                 <a:ea typeface="Arial"/>
@@ -9905,7 +11008,7 @@
         </p:nvSpPr>
         <p:spPr>
           <a:xfrm>
-            <a:off x="731520" y="3813048"/>
+            <a:off x="731520" y="3647088"/>
             <a:ext cx="1737360" cy="228600"/>
           </a:xfrm>
           <a:prstGeom prst="rect">
@@ -9930,7 +11033,7 @@
                 <a:spcPts val="0"/>
               </a:spcAft>
               <a:buClr>
-                <a:srgbClr val="9DB0D0"/>
+                <a:srgbClr val="56627A"/>
               </a:buClr>
               <a:buSzPts val="950"/>
               <a:buFont typeface="Arial"/>
@@ -9939,7 +11042,7 @@
             <a:r>
               <a:rPr b="0" i="0" lang="en-US" sz="950" u="none" cap="none" strike="noStrike">
                 <a:solidFill>
-                  <a:srgbClr val="9DB0D0"/>
+                  <a:srgbClr val="56627A"/>
                 </a:solidFill>
                 <a:latin typeface="Arial"/>
                 <a:ea typeface="Arial"/>
@@ -9968,7 +11071,7 @@
         </p:nvCxnSpPr>
         <p:spPr>
           <a:xfrm>
-            <a:off x="2560320" y="2267712"/>
+            <a:off x="2560320" y="2101752"/>
             <a:ext cx="411480" cy="640080"/>
           </a:xfrm>
           <a:prstGeom prst="straightConnector1">
@@ -9977,7 +11080,7 @@
           <a:noFill/>
           <a:ln cap="flat" cmpd="sng" w="15875">
             <a:solidFill>
-              <a:srgbClr val="3A5088"/>
+              <a:srgbClr val="D5DEEC"/>
             </a:solidFill>
             <a:prstDash val="solid"/>
             <a:round/>
@@ -9994,7 +11097,7 @@
         </p:nvCxnSpPr>
         <p:spPr>
           <a:xfrm>
-            <a:off x="2560320" y="3026664"/>
+            <a:off x="2560320" y="2860704"/>
             <a:ext cx="411480" cy="18288"/>
           </a:xfrm>
           <a:prstGeom prst="straightConnector1">
@@ -10003,7 +11106,7 @@
           <a:noFill/>
           <a:ln cap="flat" cmpd="sng" w="15875">
             <a:solidFill>
-              <a:srgbClr val="3A5088"/>
+              <a:srgbClr val="D5DEEC"/>
             </a:solidFill>
             <a:prstDash val="solid"/>
             <a:round/>
@@ -10020,7 +11123,7 @@
         </p:nvCxnSpPr>
         <p:spPr>
           <a:xfrm flipH="1" rot="10800000">
-            <a:off x="2560320" y="3182112"/>
+            <a:off x="2560320" y="3016152"/>
             <a:ext cx="411480" cy="603504"/>
           </a:xfrm>
           <a:prstGeom prst="straightConnector1">
@@ -10029,7 +11132,7 @@
           <a:noFill/>
           <a:ln cap="flat" cmpd="sng" w="15875">
             <a:solidFill>
-              <a:srgbClr val="3A5088"/>
+              <a:srgbClr val="D5DEEC"/>
             </a:solidFill>
             <a:prstDash val="solid"/>
             <a:round/>
@@ -10046,18 +11149,18 @@
         </p:nvSpPr>
         <p:spPr>
           <a:xfrm>
-            <a:off x="2880360" y="2148840"/>
+            <a:off x="2880360" y="1982880"/>
             <a:ext cx="1783080" cy="1783080"/>
           </a:xfrm>
           <a:prstGeom prst="ellipse">
             <a:avLst/>
           </a:prstGeom>
           <a:solidFill>
-            <a:srgbClr val="16244A"/>
+            <a:srgbClr val="E4ECF8"/>
           </a:solidFill>
           <a:ln cap="flat" cmpd="sng" w="25400">
             <a:solidFill>
-              <a:srgbClr val="5BC8FF"/>
+              <a:srgbClr val="1488C2"/>
             </a:solidFill>
             <a:prstDash val="solid"/>
             <a:round/>
@@ -10066,8 +11169,8 @@
           </a:ln>
           <a:effectLst>
             <a:outerShdw blurRad="114300" rotWithShape="0" algn="bl" dir="5400000" dist="38100">
-              <a:srgbClr val="000000">
-                <a:alpha val="45098"/>
+              <a:srgbClr val="16263F">
+                <a:alpha val="13000"/>
               </a:srgbClr>
             </a:outerShdw>
           </a:effectLst>
@@ -10109,7 +11212,7 @@
         </p:blipFill>
         <p:spPr>
           <a:xfrm>
-            <a:off x="3529584" y="2468880"/>
+            <a:off x="3529584" y="2302920"/>
             <a:ext cx="457200" cy="457200"/>
           </a:xfrm>
           <a:prstGeom prst="rect">
@@ -10129,7 +11232,7 @@
         </p:nvSpPr>
         <p:spPr>
           <a:xfrm>
-            <a:off x="2880360" y="2999232"/>
+            <a:off x="2880360" y="2833272"/>
             <a:ext cx="1783080" cy="274320"/>
           </a:xfrm>
           <a:prstGeom prst="rect">
@@ -10154,7 +11257,7 @@
                 <a:spcPts val="0"/>
               </a:spcAft>
               <a:buClr>
-                <a:srgbClr val="EAF1FF"/>
+                <a:srgbClr val="16263F"/>
               </a:buClr>
               <a:buSzPts val="1300"/>
               <a:buFont typeface="Arial"/>
@@ -10163,7 +11266,7 @@
             <a:r>
               <a:rPr b="1" i="0" lang="en-US" sz="1300" u="none" cap="none" strike="noStrike">
                 <a:solidFill>
-                  <a:srgbClr val="EAF1FF"/>
+                  <a:srgbClr val="16263F"/>
                 </a:solidFill>
                 <a:latin typeface="Arial"/>
                 <a:ea typeface="Arial"/>
@@ -10192,7 +11295,7 @@
         </p:nvSpPr>
         <p:spPr>
           <a:xfrm>
-            <a:off x="2880360" y="3255264"/>
+            <a:off x="2880360" y="3089304"/>
             <a:ext cx="1783080" cy="274320"/>
           </a:xfrm>
           <a:prstGeom prst="rect">
@@ -10217,7 +11320,7 @@
                 <a:spcPts val="0"/>
               </a:spcAft>
               <a:buClr>
-                <a:srgbClr val="5BC8FF"/>
+                <a:srgbClr val="1488C2"/>
               </a:buClr>
               <a:buSzPts val="1300"/>
               <a:buFont typeface="Arial"/>
@@ -10226,7 +11329,7 @@
             <a:r>
               <a:rPr b="1" i="0" lang="en-US" sz="1300" u="none" cap="none" strike="noStrike">
                 <a:solidFill>
-                  <a:srgbClr val="5BC8FF"/>
+                  <a:srgbClr val="1488C2"/>
                 </a:solidFill>
                 <a:latin typeface="Arial"/>
                 <a:ea typeface="Arial"/>
@@ -10255,7 +11358,7 @@
         </p:nvSpPr>
         <p:spPr>
           <a:xfrm>
-            <a:off x="4983480" y="2011680"/>
+            <a:off x="4983480" y="1845720"/>
             <a:ext cx="3611880" cy="603504"/>
           </a:xfrm>
           <a:prstGeom prst="roundRect">
@@ -10264,11 +11367,11 @@
             </a:avLst>
           </a:prstGeom>
           <a:solidFill>
-            <a:srgbClr val="111C3C"/>
+            <a:srgbClr val="EEF3FB"/>
           </a:solidFill>
           <a:ln cap="flat" cmpd="sng" w="12700">
             <a:solidFill>
-              <a:srgbClr val="2A3B66"/>
+              <a:srgbClr val="D5DEEC"/>
             </a:solidFill>
             <a:prstDash val="solid"/>
             <a:round/>
@@ -10277,8 +11380,8 @@
           </a:ln>
           <a:effectLst>
             <a:outerShdw blurRad="114300" rotWithShape="0" algn="bl" dir="5400000" dist="38100">
-              <a:srgbClr val="000000">
-                <a:alpha val="45098"/>
+              <a:srgbClr val="16263F">
+                <a:alpha val="13000"/>
               </a:srgbClr>
             </a:outerShdw>
           </a:effectLst>
@@ -10320,7 +11423,7 @@
         </p:blipFill>
         <p:spPr>
           <a:xfrm>
-            <a:off x="5166360" y="2185416"/>
+            <a:off x="5166360" y="2019456"/>
             <a:ext cx="274320" cy="274320"/>
           </a:xfrm>
           <a:prstGeom prst="rect">
@@ -10340,7 +11443,7 @@
         </p:nvSpPr>
         <p:spPr>
           <a:xfrm>
-            <a:off x="5532120" y="2057400"/>
+            <a:off x="5532120" y="1891440"/>
             <a:ext cx="2971800" cy="512064"/>
           </a:xfrm>
           <a:prstGeom prst="rect">
@@ -10365,7 +11468,7 @@
                 <a:spcPts val="0"/>
               </a:spcAft>
               <a:buClr>
-                <a:srgbClr val="9DB0D0"/>
+                <a:srgbClr val="56627A"/>
               </a:buClr>
               <a:buSzPts val="1150"/>
               <a:buFont typeface="Arial"/>
@@ -10374,7 +11477,7 @@
             <a:r>
               <a:rPr b="0" i="0" lang="en-US" sz="1150" u="none" cap="none" strike="noStrike">
                 <a:solidFill>
-                  <a:srgbClr val="9DB0D0"/>
+                  <a:srgbClr val="56627A"/>
                 </a:solidFill>
                 <a:latin typeface="Arial"/>
                 <a:ea typeface="Arial"/>
@@ -10403,7 +11506,7 @@
         </p:nvSpPr>
         <p:spPr>
           <a:xfrm>
-            <a:off x="4983480" y="2770632"/>
+            <a:off x="4983480" y="2604672"/>
             <a:ext cx="3611880" cy="603504"/>
           </a:xfrm>
           <a:prstGeom prst="roundRect">
@@ -10412,11 +11515,11 @@
             </a:avLst>
           </a:prstGeom>
           <a:solidFill>
-            <a:srgbClr val="111C3C"/>
+            <a:srgbClr val="EEF3FB"/>
           </a:solidFill>
           <a:ln cap="flat" cmpd="sng" w="12700">
             <a:solidFill>
-              <a:srgbClr val="2A3B66"/>
+              <a:srgbClr val="D5DEEC"/>
             </a:solidFill>
             <a:prstDash val="solid"/>
             <a:round/>
@@ -10425,8 +11528,8 @@
           </a:ln>
           <a:effectLst>
             <a:outerShdw blurRad="114300" rotWithShape="0" algn="bl" dir="5400000" dist="38100">
-              <a:srgbClr val="000000">
-                <a:alpha val="45098"/>
+              <a:srgbClr val="16263F">
+                <a:alpha val="13000"/>
               </a:srgbClr>
             </a:outerShdw>
           </a:effectLst>
@@ -10468,7 +11571,7 @@
         </p:blipFill>
         <p:spPr>
           <a:xfrm>
-            <a:off x="5166360" y="2944368"/>
+            <a:off x="5166360" y="2778408"/>
             <a:ext cx="274320" cy="274320"/>
           </a:xfrm>
           <a:prstGeom prst="rect">
@@ -10488,7 +11591,7 @@
         </p:nvSpPr>
         <p:spPr>
           <a:xfrm>
-            <a:off x="5532120" y="2816352"/>
+            <a:off x="5532120" y="2650392"/>
             <a:ext cx="2971800" cy="512064"/>
           </a:xfrm>
           <a:prstGeom prst="rect">
@@ -10513,7 +11616,7 @@
                 <a:spcPts val="0"/>
               </a:spcAft>
               <a:buClr>
-                <a:srgbClr val="9DB0D0"/>
+                <a:srgbClr val="56627A"/>
               </a:buClr>
               <a:buSzPts val="1150"/>
               <a:buFont typeface="Arial"/>
@@ -10522,7 +11625,7 @@
             <a:r>
               <a:rPr b="0" i="0" lang="en-US" sz="1150" u="none" cap="none" strike="noStrike">
                 <a:solidFill>
-                  <a:srgbClr val="9DB0D0"/>
+                  <a:srgbClr val="56627A"/>
                 </a:solidFill>
                 <a:latin typeface="Arial"/>
                 <a:ea typeface="Arial"/>
@@ -10551,7 +11654,7 @@
         </p:nvSpPr>
         <p:spPr>
           <a:xfrm>
-            <a:off x="4983480" y="3529584"/>
+            <a:off x="4983480" y="3363624"/>
             <a:ext cx="3611880" cy="603504"/>
           </a:xfrm>
           <a:prstGeom prst="roundRect">
@@ -10560,11 +11663,11 @@
             </a:avLst>
           </a:prstGeom>
           <a:solidFill>
-            <a:srgbClr val="111C3C"/>
+            <a:srgbClr val="EEF3FB"/>
           </a:solidFill>
           <a:ln cap="flat" cmpd="sng" w="12700">
             <a:solidFill>
-              <a:srgbClr val="2A3B66"/>
+              <a:srgbClr val="D5DEEC"/>
             </a:solidFill>
             <a:prstDash val="solid"/>
             <a:round/>
@@ -10573,8 +11676,8 @@
           </a:ln>
           <a:effectLst>
             <a:outerShdw blurRad="114300" rotWithShape="0" algn="bl" dir="5400000" dist="38100">
-              <a:srgbClr val="000000">
-                <a:alpha val="45098"/>
+              <a:srgbClr val="16263F">
+                <a:alpha val="13000"/>
               </a:srgbClr>
             </a:outerShdw>
           </a:effectLst>
@@ -10616,7 +11719,7 @@
         </p:blipFill>
         <p:spPr>
           <a:xfrm>
-            <a:off x="5166360" y="3703320"/>
+            <a:off x="5166360" y="3537360"/>
             <a:ext cx="274320" cy="274320"/>
           </a:xfrm>
           <a:prstGeom prst="rect">
@@ -10636,7 +11739,7 @@
         </p:nvSpPr>
         <p:spPr>
           <a:xfrm>
-            <a:off x="5532120" y="3575304"/>
+            <a:off x="5532120" y="3409344"/>
             <a:ext cx="2971800" cy="512064"/>
           </a:xfrm>
           <a:prstGeom prst="rect">
@@ -10661,7 +11764,7 @@
                 <a:spcPts val="0"/>
               </a:spcAft>
               <a:buClr>
-                <a:srgbClr val="9DB0D0"/>
+                <a:srgbClr val="56627A"/>
               </a:buClr>
               <a:buSzPts val="1150"/>
               <a:buFont typeface="Arial"/>
@@ -10670,7 +11773,7 @@
             <a:r>
               <a:rPr b="0" i="0" lang="en-US" sz="1150" u="none" cap="none" strike="noStrike">
                 <a:solidFill>
-                  <a:srgbClr val="9DB0D0"/>
+                  <a:srgbClr val="56627A"/>
                 </a:solidFill>
                 <a:latin typeface="Arial"/>
                 <a:ea typeface="Arial"/>
@@ -10688,6 +11791,181 @@
               <a:cs typeface="Calibri"/>
               <a:sym typeface="Calibri"/>
             </a:endParaRPr>
+          </a:p>
+        </p:txBody>
+      </p:sp>
+      <p:cxnSp>
+        <p:nvCxnSpPr>
+          <p:cNvPr id="126" name="Rule5"/>
+          <p:cNvCxnSpPr/>
+          <p:nvPr/>
+        </p:nvCxnSpPr>
+        <p:spPr>
+          <a:xfrm>
+            <a:off x="548640" y="957600"/>
+            <a:ext cx="8046720" cy="0"/>
+          </a:xfrm>
+          <a:prstGeom prst="line">
+            <a:avLst/>
+          </a:prstGeom>
+          <a:ln w="19050">
+            <a:solidFill>
+              <a:srgbClr val="9FAEC6"/>
+            </a:solidFill>
+          </a:ln>
+        </p:spPr>
+        <p:style>
+          <a:lnRef idx="2">
+            <a:schemeClr val="accent1"/>
+          </a:lnRef>
+          <a:fillRef idx="0">
+            <a:schemeClr val="accent1"/>
+          </a:fillRef>
+          <a:effectRef idx="1">
+            <a:schemeClr val="accent1"/>
+          </a:effectRef>
+          <a:fontRef idx="minor">
+            <a:schemeClr val="tx1"/>
+          </a:fontRef>
+        </p:style>
+      </p:cxnSp>
+      <p:sp>
+        <p:nvSpPr>
+          <p:cNvPr id="127" name="KeyBox5"/>
+          <p:cNvSpPr/>
+          <p:nvPr/>
+        </p:nvSpPr>
+        <p:spPr>
+          <a:xfrm>
+            <a:off x="548640" y="1029600"/>
+            <a:ext cx="8046720" cy="691200"/>
+          </a:xfrm>
+          <a:prstGeom prst="rect">
+            <a:avLst/>
+          </a:prstGeom>
+          <a:solidFill>
+            <a:srgbClr val="EEF0F4"/>
+          </a:solidFill>
+          <a:ln w="9525">
+            <a:solidFill>
+              <a:srgbClr val="D7DCE5"/>
+            </a:solidFill>
+          </a:ln>
+          <a:effectLst/>
+        </p:spPr>
+        <p:txBody>
+          <a:bodyPr rtlCol="0" anchor="ctr" wrap="square" lIns="216000" rIns="108000" tIns="28800" bIns="28800"/>
+          <a:lstStyle/>
+          <a:p>
+            <a:pPr algn="l" marL="198000" indent="-162000">
+              <a:lnSpc>
+                <a:spcPct val="105000"/>
+              </a:lnSpc>
+              <a:spcBef>
+                <a:spcPts val="300"/>
+              </a:spcBef>
+              <a:spcAft>
+                <a:spcPts val="300"/>
+              </a:spcAft>
+              <a:buClr>
+                <a:srgbClr val="1488C2"/>
+              </a:buClr>
+              <a:buFont typeface="Arial"/>
+              <a:buChar char="▪"/>
+            </a:pPr>
+            <a:r>
+              <a:rPr sz="1100" b="0">
+                <a:solidFill>
+                  <a:srgbClr val="16263F"/>
+                </a:solidFill>
+                <a:latin typeface="Arial"/>
+              </a:rPr>
+              <a:t>衛星×AIで地球を解析する「Planetary Intelligence OS」。</a:t>
+            </a:r>
+          </a:p>
+          <a:p>
+            <a:pPr algn="l" marL="198000" indent="-162000">
+              <a:lnSpc>
+                <a:spcPct val="105000"/>
+              </a:lnSpc>
+              <a:spcBef>
+                <a:spcPts val="300"/>
+              </a:spcBef>
+              <a:spcAft>
+                <a:spcPts val="300"/>
+              </a:spcAft>
+              <a:buClr>
+                <a:srgbClr val="1488C2"/>
+              </a:buClr>
+              <a:buFont typeface="Arial"/>
+              <a:buChar char="▪"/>
+            </a:pPr>
+            <a:r>
+              <a:rPr sz="1100" b="0">
+                <a:solidFill>
+                  <a:srgbClr val="16263F"/>
+                </a:solidFill>
+                <a:latin typeface="Arial"/>
+              </a:rPr>
+              <a:t>GEOINT/OSINT/SIGINTを統合し、資源探査から防衛モニタリングまで提供。</a:t>
+            </a:r>
+          </a:p>
+          <a:p>
+            <a:pPr algn="l" marL="198000" indent="-162000">
+              <a:lnSpc>
+                <a:spcPct val="105000"/>
+              </a:lnSpc>
+              <a:spcBef>
+                <a:spcPts val="300"/>
+              </a:spcBef>
+              <a:spcAft>
+                <a:spcPts val="300"/>
+              </a:spcAft>
+              <a:buClr>
+                <a:srgbClr val="1488C2"/>
+              </a:buClr>
+              <a:buFont typeface="Arial"/>
+              <a:buChar char="▪"/>
+            </a:pPr>
+            <a:r>
+              <a:rPr sz="1100" b="0">
+                <a:solidFill>
+                  <a:srgbClr val="16263F"/>
+                </a:solidFill>
+                <a:latin typeface="Arial"/>
+              </a:rPr>
+              <a:t>120カ国超の開発者コミュニティが解析を供給する基盤を持つ。</a:t>
+            </a:r>
+          </a:p>
+        </p:txBody>
+      </p:sp>
+      <p:sp>
+        <p:nvSpPr>
+          <p:cNvPr id="128" name="KeyBar5"/>
+          <p:cNvSpPr/>
+          <p:nvPr/>
+        </p:nvSpPr>
+        <p:spPr>
+          <a:xfrm>
+            <a:off x="548640" y="1029600"/>
+            <a:ext cx="54000" cy="691200"/>
+          </a:xfrm>
+          <a:prstGeom prst="rect">
+            <a:avLst/>
+          </a:prstGeom>
+          <a:solidFill>
+            <a:srgbClr val="1488C2"/>
+          </a:solidFill>
+          <a:ln>
+            <a:noFill/>
+          </a:ln>
+          <a:effectLst/>
+        </p:spPr>
+        <p:txBody>
+          <a:bodyPr rtlCol="0" anchor="ctr"/>
+          <a:lstStyle/>
+          <a:p>
+            <a:pPr algn="ctr"/>
           </a:p>
         </p:txBody>
       </p:sp>
@@ -10704,14 +11982,10 @@
   <p:cSld>
     <p:bg>
       <p:bgPr>
-        <a:blipFill>
-          <a:blip r:embed="rId3">
-            <a:alphaModFix/>
-          </a:blip>
-          <a:stretch>
-            <a:fillRect/>
-          </a:stretch>
-        </a:blipFill>
+        <a:solidFill>
+          <a:srgbClr val="FFFFFF"/>
+        </a:solidFill>
+        <a:effectLst/>
       </p:bgPr>
     </p:bg>
     <p:spTree>
@@ -10730,14 +12004,14 @@
       </p:grpSpPr>
       <p:sp>
         <p:nvSpPr>
-          <p:cNvPr id="131" name="Google Shape;131;p8"/>
-          <p:cNvSpPr/>
-          <p:nvPr/>
-        </p:nvSpPr>
-        <p:spPr>
-          <a:xfrm>
-            <a:off x="548640" y="365760"/>
-            <a:ext cx="8046720" cy="274320"/>
+          <p:cNvPr id="132" name="Google Shape;132;p8"/>
+          <p:cNvSpPr/>
+          <p:nvPr/>
+        </p:nvSpPr>
+        <p:spPr>
+          <a:xfrm>
+            <a:off x="548640" y="367200"/>
+            <a:ext cx="8046720" cy="566928"/>
           </a:xfrm>
           <a:prstGeom prst="rect">
             <a:avLst/>
@@ -10761,23 +12035,207 @@
                 <a:spcPts val="0"/>
               </a:spcAft>
               <a:buClr>
-                <a:srgbClr val="5BC8FF"/>
+                <a:srgbClr val="16263F"/>
               </a:buClr>
-              <a:buSzPts val="1100"/>
+              <a:buSzPts val="2900"/>
               <a:buFont typeface="Arial"/>
               <a:buNone/>
             </a:pPr>
             <a:r>
-              <a:rPr b="1" i="0" lang="en-US" sz="1100" u="none" cap="none" strike="noStrike">
-                <a:solidFill>
-                  <a:srgbClr val="5BC8FF"/>
+              <a:rPr b="1" i="0" lang="en-US" sz="2900" u="none" cap="none" strike="noStrike">
+                <a:solidFill>
+                  <a:srgbClr val="16263F"/>
                 </a:solidFill>
                 <a:latin typeface="Arial"/>
                 <a:ea typeface="Arial"/>
                 <a:cs typeface="Arial"/>
                 <a:sym typeface="Arial"/>
               </a:rPr>
-              <a:t>MOAT ・ 競争優位</a:t>
+              <a:t>なぜ Solafune が勝てるか</a:t>
+            </a:r>
+            <a:endParaRPr b="0" i="0" sz="2900" u="none" cap="none" strike="noStrike">
+              <a:solidFill>
+                <a:schemeClr val="dk1"/>
+              </a:solidFill>
+              <a:latin typeface="Calibri"/>
+              <a:ea typeface="Calibri"/>
+              <a:cs typeface="Calibri"/>
+              <a:sym typeface="Calibri"/>
+            </a:endParaRPr>
+          </a:p>
+        </p:txBody>
+      </p:sp>
+      <p:sp>
+        <p:nvSpPr>
+          <p:cNvPr id="133" name="Google Shape;133;p8"/>
+          <p:cNvSpPr/>
+          <p:nvPr/>
+        </p:nvSpPr>
+        <p:spPr>
+          <a:xfrm>
+            <a:off x="548640" y="1800000"/>
+            <a:ext cx="2514600" cy="1371600"/>
+          </a:xfrm>
+          <a:prstGeom prst="roundRect">
+            <a:avLst>
+              <a:gd fmla="val 6000" name="adj"/>
+            </a:avLst>
+          </a:prstGeom>
+          <a:solidFill>
+            <a:srgbClr val="EEF3FB"/>
+          </a:solidFill>
+          <a:ln cap="flat" cmpd="sng" w="12700">
+            <a:solidFill>
+              <a:srgbClr val="D5DEEC"/>
+            </a:solidFill>
+            <a:prstDash val="solid"/>
+            <a:round/>
+            <a:headEnd len="sm" w="sm" type="none"/>
+            <a:tailEnd len="sm" w="sm" type="none"/>
+          </a:ln>
+          <a:effectLst>
+            <a:outerShdw blurRad="114300" rotWithShape="0" algn="bl" dir="5400000" dist="38100">
+              <a:srgbClr val="16263F">
+                <a:alpha val="13000"/>
+              </a:srgbClr>
+            </a:outerShdw>
+          </a:effectLst>
+        </p:spPr>
+        <p:txBody>
+          <a:bodyPr anchorCtr="0" anchor="ctr" bIns="91425" lIns="91425" spcFirstLastPara="1" rIns="91425" wrap="square" tIns="91425">
+            <a:noAutofit/>
+          </a:bodyPr>
+          <a:lstStyle/>
+          <a:p>
+            <a:pPr indent="0" lvl="0" marL="0" rtl="0" algn="l">
+              <a:spcBef>
+                <a:spcPts val="0"/>
+              </a:spcBef>
+              <a:spcAft>
+                <a:spcPts val="0"/>
+              </a:spcAft>
+              <a:buNone/>
+            </a:pPr>
+            <a:r>
+              <a:t/>
+            </a:r>
+            <a:endParaRPr/>
+          </a:p>
+        </p:txBody>
+      </p:sp>
+      <p:sp>
+        <p:nvSpPr>
+          <p:cNvPr id="134" name="Google Shape;134;p8"/>
+          <p:cNvSpPr/>
+          <p:nvPr/>
+        </p:nvSpPr>
+        <p:spPr>
+          <a:xfrm>
+            <a:off x="749808" y="1937160"/>
+            <a:ext cx="2103120" cy="320040"/>
+          </a:xfrm>
+          <a:prstGeom prst="rect">
+            <a:avLst/>
+          </a:prstGeom>
+          <a:noFill/>
+          <a:ln>
+            <a:noFill/>
+          </a:ln>
+        </p:spPr>
+        <p:txBody>
+          <a:bodyPr anchorCtr="0" anchor="ctr" bIns="0" lIns="0" spcFirstLastPara="1" rIns="0" wrap="square" tIns="0">
+            <a:noAutofit/>
+          </a:bodyPr>
+          <a:lstStyle/>
+          <a:p>
+            <a:pPr indent="0" lvl="0" marL="0" marR="0" rtl="0" algn="l">
+              <a:spcBef>
+                <a:spcPts val="0"/>
+              </a:spcBef>
+              <a:spcAft>
+                <a:spcPts val="0"/>
+              </a:spcAft>
+              <a:buClr>
+                <a:srgbClr val="56627A"/>
+              </a:buClr>
+              <a:buSzPts val="1600"/>
+              <a:buFont typeface="Arial"/>
+              <a:buNone/>
+            </a:pPr>
+            <a:r>
+              <a:rPr b="1" i="0" lang="en-US" sz="1600" u="none" cap="none" strike="noStrike">
+                <a:solidFill>
+                  <a:srgbClr val="56627A"/>
+                </a:solidFill>
+                <a:latin typeface="Arial"/>
+                <a:ea typeface="Arial"/>
+                <a:cs typeface="Arial"/>
+                <a:sym typeface="Arial"/>
+              </a:rPr>
+              <a:t>上流</a:t>
+            </a:r>
+            <a:endParaRPr b="0" i="0" sz="1600" u="none" cap="none" strike="noStrike">
+              <a:solidFill>
+                <a:schemeClr val="dk1"/>
+              </a:solidFill>
+              <a:latin typeface="Calibri"/>
+              <a:ea typeface="Calibri"/>
+              <a:cs typeface="Calibri"/>
+              <a:sym typeface="Calibri"/>
+            </a:endParaRPr>
+          </a:p>
+        </p:txBody>
+      </p:sp>
+      <p:sp>
+        <p:nvSpPr>
+          <p:cNvPr id="135" name="Google Shape;135;p8"/>
+          <p:cNvSpPr/>
+          <p:nvPr/>
+        </p:nvSpPr>
+        <p:spPr>
+          <a:xfrm>
+            <a:off x="749808" y="2302920"/>
+            <a:ext cx="2148840" cy="365760"/>
+          </a:xfrm>
+          <a:prstGeom prst="rect">
+            <a:avLst/>
+          </a:prstGeom>
+          <a:noFill/>
+          <a:ln>
+            <a:noFill/>
+          </a:ln>
+        </p:spPr>
+        <p:txBody>
+          <a:bodyPr anchorCtr="0" anchor="ctr" bIns="0" lIns="0" spcFirstLastPara="1" rIns="0" wrap="square" tIns="0">
+            <a:noAutofit/>
+          </a:bodyPr>
+          <a:lstStyle/>
+          <a:p>
+            <a:pPr indent="0" lvl="0" marL="0" marR="0" rtl="0" algn="l">
+              <a:spcBef>
+                <a:spcPts val="0"/>
+              </a:spcBef>
+              <a:spcAft>
+                <a:spcPts val="0"/>
+              </a:spcAft>
+              <a:buClr>
+                <a:srgbClr val="56627A"/>
+              </a:buClr>
+              <a:buSzPts val="1100"/>
+              <a:buFont typeface="Arial"/>
+              <a:buNone/>
+            </a:pPr>
+            <a:r>
+              <a:rPr b="0" i="0" lang="en-US" sz="1100" u="none" cap="none" strike="noStrike">
+                <a:solidFill>
+                  <a:srgbClr val="56627A"/>
+                </a:solidFill>
+                <a:latin typeface="Arial"/>
+                <a:ea typeface="Arial"/>
+                <a:cs typeface="Arial"/>
+                <a:sym typeface="Arial"/>
+              </a:rPr>
+              <a:t>衛星を作る・飛ばす</a:t>
             </a:r>
             <a:endParaRPr b="0" i="0" sz="1100" u="none" cap="none" strike="noStrike">
               <a:solidFill>
@@ -10793,14 +12251,14 @@
       </p:sp>
       <p:sp>
         <p:nvSpPr>
-          <p:cNvPr id="132" name="Google Shape;132;p8"/>
-          <p:cNvSpPr/>
-          <p:nvPr/>
-        </p:nvSpPr>
-        <p:spPr>
-          <a:xfrm>
-            <a:off x="548640" y="603504"/>
-            <a:ext cx="8046720" cy="566928"/>
+          <p:cNvPr id="136" name="Google Shape;136;p8"/>
+          <p:cNvSpPr/>
+          <p:nvPr/>
+        </p:nvSpPr>
+        <p:spPr>
+          <a:xfrm>
+            <a:off x="749808" y="2741832"/>
+            <a:ext cx="2148840" cy="320040"/>
           </a:xfrm>
           <a:prstGeom prst="rect">
             <a:avLst/>
@@ -10824,25 +12282,25 @@
                 <a:spcPts val="0"/>
               </a:spcAft>
               <a:buClr>
-                <a:srgbClr val="EAF1FF"/>
+                <a:srgbClr val="16263F"/>
               </a:buClr>
-              <a:buSzPts val="2900"/>
+              <a:buSzPts val="1150"/>
               <a:buFont typeface="Arial"/>
               <a:buNone/>
             </a:pPr>
             <a:r>
-              <a:rPr b="1" i="0" lang="en-US" sz="2900" u="none" cap="none" strike="noStrike">
-                <a:solidFill>
-                  <a:srgbClr val="EAF1FF"/>
+              <a:rPr b="1" i="0" lang="en-US" sz="1150" u="none" cap="none" strike="noStrike">
+                <a:solidFill>
+                  <a:srgbClr val="16263F"/>
                 </a:solidFill>
                 <a:latin typeface="Arial"/>
                 <a:ea typeface="Arial"/>
                 <a:cs typeface="Arial"/>
                 <a:sym typeface="Arial"/>
               </a:rPr>
-              <a:t>なぜ Solafune が勝てるか</a:t>
-            </a:r>
-            <a:endParaRPr b="0" i="0" sz="2900" u="none" cap="none" strike="noStrike">
+              <a:t>三菱電機 等</a:t>
+            </a:r>
+            <a:endParaRPr b="0" i="0" sz="1150" u="none" cap="none" strike="noStrike">
               <a:solidFill>
                 <a:schemeClr val="dk1"/>
               </a:solidFill>
@@ -10854,38 +12312,64 @@
           </a:p>
         </p:txBody>
       </p:sp>
-      <p:sp>
-        <p:nvSpPr>
-          <p:cNvPr id="133" name="Google Shape;133;p8"/>
-          <p:cNvSpPr/>
-          <p:nvPr/>
-        </p:nvSpPr>
-        <p:spPr>
-          <a:xfrm>
-            <a:off x="548640" y="1600200"/>
-            <a:ext cx="2514600" cy="1371600"/>
-          </a:xfrm>
-          <a:prstGeom prst="roundRect">
-            <a:avLst>
-              <a:gd fmla="val 6000" name="adj"/>
-            </a:avLst>
-          </a:prstGeom>
-          <a:solidFill>
-            <a:srgbClr val="111C3C"/>
-          </a:solidFill>
-          <a:ln cap="flat" cmpd="sng" w="12700">
+      <p:cxnSp>
+        <p:nvCxnSpPr>
+          <p:cNvPr id="137" name="Google Shape;137;p8"/>
+          <p:cNvCxnSpPr/>
+          <p:nvPr/>
+        </p:nvCxnSpPr>
+        <p:spPr>
+          <a:xfrm>
+            <a:off x="3090672" y="2485800"/>
+            <a:ext cx="182880" cy="0"/>
+          </a:xfrm>
+          <a:prstGeom prst="straightConnector1">
+            <a:avLst/>
+          </a:prstGeom>
+          <a:noFill/>
+          <a:ln cap="flat" cmpd="sng" w="25400">
             <a:solidFill>
-              <a:srgbClr val="2A3B66"/>
+              <a:srgbClr val="1488C2"/>
             </a:solidFill>
             <a:prstDash val="solid"/>
             <a:round/>
             <a:headEnd len="sm" w="sm" type="none"/>
             <a:tailEnd len="sm" w="sm" type="none"/>
           </a:ln>
+        </p:spPr>
+      </p:cxnSp>
+      <p:sp>
+        <p:nvSpPr>
+          <p:cNvPr id="138" name="Google Shape;138;p8"/>
+          <p:cNvSpPr/>
+          <p:nvPr/>
+        </p:nvSpPr>
+        <p:spPr>
+          <a:xfrm>
+            <a:off x="3291840" y="1800000"/>
+            <a:ext cx="2514600" cy="1371600"/>
+          </a:xfrm>
+          <a:prstGeom prst="roundRect">
+            <a:avLst>
+              <a:gd fmla="val 6000" name="adj"/>
+            </a:avLst>
+          </a:prstGeom>
+          <a:solidFill>
+            <a:srgbClr val="EEF3FB"/>
+          </a:solidFill>
+          <a:ln cap="flat" cmpd="sng" w="12700">
+            <a:solidFill>
+              <a:srgbClr val="D5DEEC"/>
+            </a:solidFill>
+            <a:prstDash val="solid"/>
+            <a:round/>
+            <a:headEnd len="sm" w="sm" type="none"/>
+            <a:tailEnd len="sm" w="sm" type="none"/>
+          </a:ln>
           <a:effectLst>
             <a:outerShdw blurRad="114300" rotWithShape="0" algn="bl" dir="5400000" dist="38100">
-              <a:srgbClr val="000000">
-                <a:alpha val="45098"/>
+              <a:srgbClr val="16263F">
+                <a:alpha val="13000"/>
               </a:srgbClr>
             </a:outerShdw>
           </a:effectLst>
@@ -10914,13 +12398,13 @@
       </p:sp>
       <p:sp>
         <p:nvSpPr>
-          <p:cNvPr id="134" name="Google Shape;134;p8"/>
-          <p:cNvSpPr/>
-          <p:nvPr/>
-        </p:nvSpPr>
-        <p:spPr>
-          <a:xfrm>
-            <a:off x="749808" y="1737360"/>
+          <p:cNvPr id="139" name="Google Shape;139;p8"/>
+          <p:cNvSpPr/>
+          <p:nvPr/>
+        </p:nvSpPr>
+        <p:spPr>
+          <a:xfrm>
+            <a:off x="3493008" y="1937160"/>
             <a:ext cx="2103120" cy="320040"/>
           </a:xfrm>
           <a:prstGeom prst="rect">
@@ -10945,7 +12429,7 @@
                 <a:spcPts val="0"/>
               </a:spcAft>
               <a:buClr>
-                <a:srgbClr val="9DB0D0"/>
+                <a:srgbClr val="56627A"/>
               </a:buClr>
               <a:buSzPts val="1600"/>
               <a:buFont typeface="Arial"/>
@@ -10954,14 +12438,14 @@
             <a:r>
               <a:rPr b="1" i="0" lang="en-US" sz="1600" u="none" cap="none" strike="noStrike">
                 <a:solidFill>
-                  <a:srgbClr val="9DB0D0"/>
+                  <a:srgbClr val="56627A"/>
                 </a:solidFill>
                 <a:latin typeface="Arial"/>
                 <a:ea typeface="Arial"/>
                 <a:cs typeface="Arial"/>
                 <a:sym typeface="Arial"/>
               </a:rPr>
-              <a:t>上流</a:t>
+              <a:t>中流</a:t>
             </a:r>
             <a:endParaRPr b="0" i="0" sz="1600" u="none" cap="none" strike="noStrike">
               <a:solidFill>
@@ -10977,13 +12461,13 @@
       </p:sp>
       <p:sp>
         <p:nvSpPr>
-          <p:cNvPr id="135" name="Google Shape;135;p8"/>
-          <p:cNvSpPr/>
-          <p:nvPr/>
-        </p:nvSpPr>
-        <p:spPr>
-          <a:xfrm>
-            <a:off x="749808" y="2103120"/>
+          <p:cNvPr id="140" name="Google Shape;140;p8"/>
+          <p:cNvSpPr/>
+          <p:nvPr/>
+        </p:nvSpPr>
+        <p:spPr>
+          <a:xfrm>
+            <a:off x="3493008" y="2302920"/>
             <a:ext cx="2148840" cy="365760"/>
           </a:xfrm>
           <a:prstGeom prst="rect">
@@ -11008,7 +12492,7 @@
                 <a:spcPts val="0"/>
               </a:spcAft>
               <a:buClr>
-                <a:srgbClr val="9DB0D0"/>
+                <a:srgbClr val="56627A"/>
               </a:buClr>
               <a:buSzPts val="1100"/>
               <a:buFont typeface="Arial"/>
@@ -11017,14 +12501,14 @@
             <a:r>
               <a:rPr b="0" i="0" lang="en-US" sz="1100" u="none" cap="none" strike="noStrike">
                 <a:solidFill>
-                  <a:srgbClr val="9DB0D0"/>
+                  <a:srgbClr val="56627A"/>
                 </a:solidFill>
                 <a:latin typeface="Arial"/>
                 <a:ea typeface="Arial"/>
                 <a:cs typeface="Arial"/>
                 <a:sym typeface="Arial"/>
               </a:rPr>
-              <a:t>衛星を作る・飛ばす</a:t>
+              <a:t>データを撮る・売る</a:t>
             </a:r>
             <a:endParaRPr b="0" i="0" sz="1100" u="none" cap="none" strike="noStrike">
               <a:solidFill>
@@ -11040,13 +12524,13 @@
       </p:sp>
       <p:sp>
         <p:nvSpPr>
-          <p:cNvPr id="136" name="Google Shape;136;p8"/>
-          <p:cNvSpPr/>
-          <p:nvPr/>
-        </p:nvSpPr>
-        <p:spPr>
-          <a:xfrm>
-            <a:off x="749808" y="2542032"/>
+          <p:cNvPr id="141" name="Google Shape;141;p8"/>
+          <p:cNvSpPr/>
+          <p:nvPr/>
+        </p:nvSpPr>
+        <p:spPr>
+          <a:xfrm>
+            <a:off x="3493008" y="2741832"/>
             <a:ext cx="2148840" cy="320040"/>
           </a:xfrm>
           <a:prstGeom prst="rect">
@@ -11071,7 +12555,7 @@
                 <a:spcPts val="0"/>
               </a:spcAft>
               <a:buClr>
-                <a:srgbClr val="EAF1FF"/>
+                <a:srgbClr val="16263F"/>
               </a:buClr>
               <a:buSzPts val="1150"/>
               <a:buFont typeface="Arial"/>
@@ -11080,14 +12564,14 @@
             <a:r>
               <a:rPr b="1" i="0" lang="en-US" sz="1150" u="none" cap="none" strike="noStrike">
                 <a:solidFill>
-                  <a:srgbClr val="EAF1FF"/>
+                  <a:srgbClr val="16263F"/>
                 </a:solidFill>
                 <a:latin typeface="Arial"/>
                 <a:ea typeface="Arial"/>
                 <a:cs typeface="Arial"/>
                 <a:sym typeface="Arial"/>
               </a:rPr>
-              <a:t>三菱電機 等</a:t>
+              <a:t>Synspective / ICEYE</a:t>
             </a:r>
             <a:endParaRPr b="0" i="0" sz="1150" u="none" cap="none" strike="noStrike">
               <a:solidFill>
@@ -11103,13 +12587,13 @@
       </p:sp>
       <p:cxnSp>
         <p:nvCxnSpPr>
-          <p:cNvPr id="137" name="Google Shape;137;p8"/>
+          <p:cNvPr id="142" name="Google Shape;142;p8"/>
           <p:cNvCxnSpPr/>
           <p:nvPr/>
         </p:nvCxnSpPr>
         <p:spPr>
           <a:xfrm>
-            <a:off x="3090672" y="2286000"/>
+            <a:off x="5833872" y="2485800"/>
             <a:ext cx="182880" cy="0"/>
           </a:xfrm>
           <a:prstGeom prst="straightConnector1">
@@ -11118,7 +12602,7 @@
           <a:noFill/>
           <a:ln cap="flat" cmpd="sng" w="25400">
             <a:solidFill>
-              <a:srgbClr val="5BC8FF"/>
+              <a:srgbClr val="1488C2"/>
             </a:solidFill>
             <a:prstDash val="solid"/>
             <a:round/>
@@ -11129,13 +12613,13 @@
       </p:cxnSp>
       <p:sp>
         <p:nvSpPr>
-          <p:cNvPr id="138" name="Google Shape;138;p8"/>
-          <p:cNvSpPr/>
-          <p:nvPr/>
-        </p:nvSpPr>
-        <p:spPr>
-          <a:xfrm>
-            <a:off x="3291840" y="1600200"/>
+          <p:cNvPr id="143" name="Google Shape;143;p8"/>
+          <p:cNvSpPr/>
+          <p:nvPr/>
+        </p:nvSpPr>
+        <p:spPr>
+          <a:xfrm>
+            <a:off x="6035040" y="1800000"/>
             <a:ext cx="2514600" cy="1371600"/>
           </a:xfrm>
           <a:prstGeom prst="roundRect">
@@ -11144,11 +12628,11 @@
             </a:avLst>
           </a:prstGeom>
           <a:solidFill>
-            <a:srgbClr val="111C3C"/>
+            <a:srgbClr val="E4ECF8"/>
           </a:solidFill>
           <a:ln cap="flat" cmpd="sng" w="12700">
             <a:solidFill>
-              <a:srgbClr val="2A3B66"/>
+              <a:srgbClr val="D5DEEC"/>
             </a:solidFill>
             <a:prstDash val="solid"/>
             <a:round/>
@@ -11157,8 +12641,8 @@
           </a:ln>
           <a:effectLst>
             <a:outerShdw blurRad="114300" rotWithShape="0" algn="bl" dir="5400000" dist="38100">
-              <a:srgbClr val="000000">
-                <a:alpha val="45098"/>
+              <a:srgbClr val="16263F">
+                <a:alpha val="13000"/>
               </a:srgbClr>
             </a:outerShdw>
           </a:effectLst>
@@ -11187,13 +12671,13 @@
       </p:sp>
       <p:sp>
         <p:nvSpPr>
-          <p:cNvPr id="139" name="Google Shape;139;p8"/>
-          <p:cNvSpPr/>
-          <p:nvPr/>
-        </p:nvSpPr>
-        <p:spPr>
-          <a:xfrm>
-            <a:off x="3493008" y="1737360"/>
+          <p:cNvPr id="144" name="Google Shape;144;p8"/>
+          <p:cNvSpPr/>
+          <p:nvPr/>
+        </p:nvSpPr>
+        <p:spPr>
+          <a:xfrm>
+            <a:off x="6236208" y="1937160"/>
             <a:ext cx="2103120" cy="320040"/>
           </a:xfrm>
           <a:prstGeom prst="rect">
@@ -11218,7 +12702,7 @@
                 <a:spcPts val="0"/>
               </a:spcAft>
               <a:buClr>
-                <a:srgbClr val="9DB0D0"/>
+                <a:srgbClr val="D9881C"/>
               </a:buClr>
               <a:buSzPts val="1600"/>
               <a:buFont typeface="Arial"/>
@@ -11227,14 +12711,14 @@
             <a:r>
               <a:rPr b="1" i="0" lang="en-US" sz="1600" u="none" cap="none" strike="noStrike">
                 <a:solidFill>
-                  <a:srgbClr val="9DB0D0"/>
+                  <a:srgbClr val="D9881C"/>
                 </a:solidFill>
                 <a:latin typeface="Arial"/>
                 <a:ea typeface="Arial"/>
                 <a:cs typeface="Arial"/>
                 <a:sym typeface="Arial"/>
               </a:rPr>
-              <a:t>中流</a:t>
+              <a:t>下流</a:t>
             </a:r>
             <a:endParaRPr b="0" i="0" sz="1600" u="none" cap="none" strike="noStrike">
               <a:solidFill>
@@ -11250,13 +12734,13 @@
       </p:sp>
       <p:sp>
         <p:nvSpPr>
-          <p:cNvPr id="140" name="Google Shape;140;p8"/>
-          <p:cNvSpPr/>
-          <p:nvPr/>
-        </p:nvSpPr>
-        <p:spPr>
-          <a:xfrm>
-            <a:off x="3493008" y="2103120"/>
+          <p:cNvPr id="145" name="Google Shape;145;p8"/>
+          <p:cNvSpPr/>
+          <p:nvPr/>
+        </p:nvSpPr>
+        <p:spPr>
+          <a:xfrm>
+            <a:off x="6236208" y="2302920"/>
             <a:ext cx="2148840" cy="365760"/>
           </a:xfrm>
           <a:prstGeom prst="rect">
@@ -11281,7 +12765,7 @@
                 <a:spcPts val="0"/>
               </a:spcAft>
               <a:buClr>
-                <a:srgbClr val="9DB0D0"/>
+                <a:srgbClr val="56627A"/>
               </a:buClr>
               <a:buSzPts val="1100"/>
               <a:buFont typeface="Arial"/>
@@ -11290,14 +12774,14 @@
             <a:r>
               <a:rPr b="0" i="0" lang="en-US" sz="1100" u="none" cap="none" strike="noStrike">
                 <a:solidFill>
-                  <a:srgbClr val="9DB0D0"/>
+                  <a:srgbClr val="56627A"/>
                 </a:solidFill>
                 <a:latin typeface="Arial"/>
                 <a:ea typeface="Arial"/>
                 <a:cs typeface="Arial"/>
                 <a:sym typeface="Arial"/>
               </a:rPr>
-              <a:t>データを撮る・売る</a:t>
+              <a:t>解析 → インテリジェンス</a:t>
             </a:r>
             <a:endParaRPr b="0" i="0" sz="1100" u="none" cap="none" strike="noStrike">
               <a:solidFill>
@@ -11313,13 +12797,13 @@
       </p:sp>
       <p:sp>
         <p:nvSpPr>
-          <p:cNvPr id="141" name="Google Shape;141;p8"/>
-          <p:cNvSpPr/>
-          <p:nvPr/>
-        </p:nvSpPr>
-        <p:spPr>
-          <a:xfrm>
-            <a:off x="3493008" y="2542032"/>
+          <p:cNvPr id="146" name="Google Shape;146;p8"/>
+          <p:cNvSpPr/>
+          <p:nvPr/>
+        </p:nvSpPr>
+        <p:spPr>
+          <a:xfrm>
+            <a:off x="6236208" y="2741832"/>
             <a:ext cx="2148840" cy="320040"/>
           </a:xfrm>
           <a:prstGeom prst="rect">
@@ -11344,7 +12828,7 @@
                 <a:spcPts val="0"/>
               </a:spcAft>
               <a:buClr>
-                <a:srgbClr val="EAF1FF"/>
+                <a:srgbClr val="D9881C"/>
               </a:buClr>
               <a:buSzPts val="1150"/>
               <a:buFont typeface="Arial"/>
@@ -11353,14 +12837,14 @@
             <a:r>
               <a:rPr b="1" i="0" lang="en-US" sz="1150" u="none" cap="none" strike="noStrike">
                 <a:solidFill>
-                  <a:srgbClr val="EAF1FF"/>
+                  <a:srgbClr val="D9881C"/>
                 </a:solidFill>
                 <a:latin typeface="Arial"/>
                 <a:ea typeface="Arial"/>
                 <a:cs typeface="Arial"/>
                 <a:sym typeface="Arial"/>
               </a:rPr>
-              <a:t>Synspective / ICEYE</a:t>
+              <a:t>★ Solafune</a:t>
             </a:r>
             <a:endParaRPr b="0" i="0" sz="1150" u="none" cap="none" strike="noStrike">
               <a:solidFill>
@@ -11374,311 +12858,38 @@
           </a:p>
         </p:txBody>
       </p:sp>
-      <p:cxnSp>
-        <p:nvCxnSpPr>
-          <p:cNvPr id="142" name="Google Shape;142;p8"/>
-          <p:cNvCxnSpPr/>
-          <p:nvPr/>
-        </p:nvCxnSpPr>
-        <p:spPr>
-          <a:xfrm>
-            <a:off x="5833872" y="2286000"/>
-            <a:ext cx="182880" cy="0"/>
-          </a:xfrm>
-          <a:prstGeom prst="straightConnector1">
-            <a:avLst/>
-          </a:prstGeom>
-          <a:noFill/>
-          <a:ln cap="flat" cmpd="sng" w="25400">
+      <p:sp>
+        <p:nvSpPr>
+          <p:cNvPr id="147" name="Google Shape;147;p8"/>
+          <p:cNvSpPr/>
+          <p:nvPr/>
+        </p:nvSpPr>
+        <p:spPr>
+          <a:xfrm>
+            <a:off x="548640" y="3400200"/>
+            <a:ext cx="2514600" cy="1417320"/>
+          </a:xfrm>
+          <a:prstGeom prst="roundRect">
+            <a:avLst>
+              <a:gd fmla="val 5806" name="adj"/>
+            </a:avLst>
+          </a:prstGeom>
+          <a:solidFill>
+            <a:srgbClr val="EEF3FB"/>
+          </a:solidFill>
+          <a:ln cap="flat" cmpd="sng" w="12700">
             <a:solidFill>
-              <a:srgbClr val="5BC8FF"/>
+              <a:srgbClr val="D5DEEC"/>
             </a:solidFill>
             <a:prstDash val="solid"/>
             <a:round/>
             <a:headEnd len="sm" w="sm" type="none"/>
             <a:tailEnd len="sm" w="sm" type="none"/>
           </a:ln>
-        </p:spPr>
-      </p:cxnSp>
-      <p:sp>
-        <p:nvSpPr>
-          <p:cNvPr id="143" name="Google Shape;143;p8"/>
-          <p:cNvSpPr/>
-          <p:nvPr/>
-        </p:nvSpPr>
-        <p:spPr>
-          <a:xfrm>
-            <a:off x="6035040" y="1600200"/>
-            <a:ext cx="2514600" cy="1371600"/>
-          </a:xfrm>
-          <a:prstGeom prst="roundRect">
-            <a:avLst>
-              <a:gd fmla="val 6000" name="adj"/>
-            </a:avLst>
-          </a:prstGeom>
-          <a:solidFill>
-            <a:srgbClr val="16244A"/>
-          </a:solidFill>
-          <a:ln cap="flat" cmpd="sng" w="12700">
-            <a:solidFill>
-              <a:srgbClr val="2A3B66"/>
-            </a:solidFill>
-            <a:prstDash val="solid"/>
-            <a:round/>
-            <a:headEnd len="sm" w="sm" type="none"/>
-            <a:tailEnd len="sm" w="sm" type="none"/>
-          </a:ln>
           <a:effectLst>
             <a:outerShdw blurRad="114300" rotWithShape="0" algn="bl" dir="5400000" dist="38100">
-              <a:srgbClr val="000000">
-                <a:alpha val="45098"/>
-              </a:srgbClr>
-            </a:outerShdw>
-          </a:effectLst>
-        </p:spPr>
-        <p:txBody>
-          <a:bodyPr anchorCtr="0" anchor="ctr" bIns="91425" lIns="91425" spcFirstLastPara="1" rIns="91425" wrap="square" tIns="91425">
-            <a:noAutofit/>
-          </a:bodyPr>
-          <a:lstStyle/>
-          <a:p>
-            <a:pPr indent="0" lvl="0" marL="0" rtl="0" algn="l">
-              <a:spcBef>
-                <a:spcPts val="0"/>
-              </a:spcBef>
-              <a:spcAft>
-                <a:spcPts val="0"/>
-              </a:spcAft>
-              <a:buNone/>
-            </a:pPr>
-            <a:r>
-              <a:t/>
-            </a:r>
-            <a:endParaRPr/>
-          </a:p>
-        </p:txBody>
-      </p:sp>
-      <p:sp>
-        <p:nvSpPr>
-          <p:cNvPr id="144" name="Google Shape;144;p8"/>
-          <p:cNvSpPr/>
-          <p:nvPr/>
-        </p:nvSpPr>
-        <p:spPr>
-          <a:xfrm>
-            <a:off x="6236208" y="1737360"/>
-            <a:ext cx="2103120" cy="320040"/>
-          </a:xfrm>
-          <a:prstGeom prst="rect">
-            <a:avLst/>
-          </a:prstGeom>
-          <a:noFill/>
-          <a:ln>
-            <a:noFill/>
-          </a:ln>
-        </p:spPr>
-        <p:txBody>
-          <a:bodyPr anchorCtr="0" anchor="ctr" bIns="0" lIns="0" spcFirstLastPara="1" rIns="0" wrap="square" tIns="0">
-            <a:noAutofit/>
-          </a:bodyPr>
-          <a:lstStyle/>
-          <a:p>
-            <a:pPr indent="0" lvl="0" marL="0" marR="0" rtl="0" algn="l">
-              <a:spcBef>
-                <a:spcPts val="0"/>
-              </a:spcBef>
-              <a:spcAft>
-                <a:spcPts val="0"/>
-              </a:spcAft>
-              <a:buClr>
-                <a:srgbClr val="F5B454"/>
-              </a:buClr>
-              <a:buSzPts val="1600"/>
-              <a:buFont typeface="Arial"/>
-              <a:buNone/>
-            </a:pPr>
-            <a:r>
-              <a:rPr b="1" i="0" lang="en-US" sz="1600" u="none" cap="none" strike="noStrike">
-                <a:solidFill>
-                  <a:srgbClr val="F5B454"/>
-                </a:solidFill>
-                <a:latin typeface="Arial"/>
-                <a:ea typeface="Arial"/>
-                <a:cs typeface="Arial"/>
-                <a:sym typeface="Arial"/>
-              </a:rPr>
-              <a:t>下流</a:t>
-            </a:r>
-            <a:endParaRPr b="0" i="0" sz="1600" u="none" cap="none" strike="noStrike">
-              <a:solidFill>
-                <a:schemeClr val="dk1"/>
-              </a:solidFill>
-              <a:latin typeface="Calibri"/>
-              <a:ea typeface="Calibri"/>
-              <a:cs typeface="Calibri"/>
-              <a:sym typeface="Calibri"/>
-            </a:endParaRPr>
-          </a:p>
-        </p:txBody>
-      </p:sp>
-      <p:sp>
-        <p:nvSpPr>
-          <p:cNvPr id="145" name="Google Shape;145;p8"/>
-          <p:cNvSpPr/>
-          <p:nvPr/>
-        </p:nvSpPr>
-        <p:spPr>
-          <a:xfrm>
-            <a:off x="6236208" y="2103120"/>
-            <a:ext cx="2148840" cy="365760"/>
-          </a:xfrm>
-          <a:prstGeom prst="rect">
-            <a:avLst/>
-          </a:prstGeom>
-          <a:noFill/>
-          <a:ln>
-            <a:noFill/>
-          </a:ln>
-        </p:spPr>
-        <p:txBody>
-          <a:bodyPr anchorCtr="0" anchor="ctr" bIns="0" lIns="0" spcFirstLastPara="1" rIns="0" wrap="square" tIns="0">
-            <a:noAutofit/>
-          </a:bodyPr>
-          <a:lstStyle/>
-          <a:p>
-            <a:pPr indent="0" lvl="0" marL="0" marR="0" rtl="0" algn="l">
-              <a:spcBef>
-                <a:spcPts val="0"/>
-              </a:spcBef>
-              <a:spcAft>
-                <a:spcPts val="0"/>
-              </a:spcAft>
-              <a:buClr>
-                <a:srgbClr val="9DB0D0"/>
-              </a:buClr>
-              <a:buSzPts val="1100"/>
-              <a:buFont typeface="Arial"/>
-              <a:buNone/>
-            </a:pPr>
-            <a:r>
-              <a:rPr b="0" i="0" lang="en-US" sz="1100" u="none" cap="none" strike="noStrike">
-                <a:solidFill>
-                  <a:srgbClr val="9DB0D0"/>
-                </a:solidFill>
-                <a:latin typeface="Arial"/>
-                <a:ea typeface="Arial"/>
-                <a:cs typeface="Arial"/>
-                <a:sym typeface="Arial"/>
-              </a:rPr>
-              <a:t>解析 → インテリジェンス</a:t>
-            </a:r>
-            <a:endParaRPr b="0" i="0" sz="1100" u="none" cap="none" strike="noStrike">
-              <a:solidFill>
-                <a:schemeClr val="dk1"/>
-              </a:solidFill>
-              <a:latin typeface="Calibri"/>
-              <a:ea typeface="Calibri"/>
-              <a:cs typeface="Calibri"/>
-              <a:sym typeface="Calibri"/>
-            </a:endParaRPr>
-          </a:p>
-        </p:txBody>
-      </p:sp>
-      <p:sp>
-        <p:nvSpPr>
-          <p:cNvPr id="146" name="Google Shape;146;p8"/>
-          <p:cNvSpPr/>
-          <p:nvPr/>
-        </p:nvSpPr>
-        <p:spPr>
-          <a:xfrm>
-            <a:off x="6236208" y="2542032"/>
-            <a:ext cx="2148840" cy="320040"/>
-          </a:xfrm>
-          <a:prstGeom prst="rect">
-            <a:avLst/>
-          </a:prstGeom>
-          <a:noFill/>
-          <a:ln>
-            <a:noFill/>
-          </a:ln>
-        </p:spPr>
-        <p:txBody>
-          <a:bodyPr anchorCtr="0" anchor="ctr" bIns="0" lIns="0" spcFirstLastPara="1" rIns="0" wrap="square" tIns="0">
-            <a:noAutofit/>
-          </a:bodyPr>
-          <a:lstStyle/>
-          <a:p>
-            <a:pPr indent="0" lvl="0" marL="0" marR="0" rtl="0" algn="l">
-              <a:spcBef>
-                <a:spcPts val="0"/>
-              </a:spcBef>
-              <a:spcAft>
-                <a:spcPts val="0"/>
-              </a:spcAft>
-              <a:buClr>
-                <a:srgbClr val="F5B454"/>
-              </a:buClr>
-              <a:buSzPts val="1150"/>
-              <a:buFont typeface="Arial"/>
-              <a:buNone/>
-            </a:pPr>
-            <a:r>
-              <a:rPr b="1" i="0" lang="en-US" sz="1150" u="none" cap="none" strike="noStrike">
-                <a:solidFill>
-                  <a:srgbClr val="F5B454"/>
-                </a:solidFill>
-                <a:latin typeface="Arial"/>
-                <a:ea typeface="Arial"/>
-                <a:cs typeface="Arial"/>
-                <a:sym typeface="Arial"/>
-              </a:rPr>
-              <a:t>★ Solafune</a:t>
-            </a:r>
-            <a:endParaRPr b="0" i="0" sz="1150" u="none" cap="none" strike="noStrike">
-              <a:solidFill>
-                <a:schemeClr val="dk1"/>
-              </a:solidFill>
-              <a:latin typeface="Calibri"/>
-              <a:ea typeface="Calibri"/>
-              <a:cs typeface="Calibri"/>
-              <a:sym typeface="Calibri"/>
-            </a:endParaRPr>
-          </a:p>
-        </p:txBody>
-      </p:sp>
-      <p:sp>
-        <p:nvSpPr>
-          <p:cNvPr id="147" name="Google Shape;147;p8"/>
-          <p:cNvSpPr/>
-          <p:nvPr/>
-        </p:nvSpPr>
-        <p:spPr>
-          <a:xfrm>
-            <a:off x="548640" y="3200400"/>
-            <a:ext cx="2514600" cy="1417320"/>
-          </a:xfrm>
-          <a:prstGeom prst="roundRect">
-            <a:avLst>
-              <a:gd fmla="val 5806" name="adj"/>
-            </a:avLst>
-          </a:prstGeom>
-          <a:solidFill>
-            <a:srgbClr val="111C3C"/>
-          </a:solidFill>
-          <a:ln cap="flat" cmpd="sng" w="12700">
-            <a:solidFill>
-              <a:srgbClr val="2A3B66"/>
-            </a:solidFill>
-            <a:prstDash val="solid"/>
-            <a:round/>
-            <a:headEnd len="sm" w="sm" type="none"/>
-            <a:tailEnd len="sm" w="sm" type="none"/>
-          </a:ln>
-          <a:effectLst>
-            <a:outerShdw blurRad="114300" rotWithShape="0" algn="bl" dir="5400000" dist="38100">
-              <a:srgbClr val="000000">
-                <a:alpha val="45098"/>
+              <a:srgbClr val="16263F">
+                <a:alpha val="13000"/>
               </a:srgbClr>
             </a:outerShdw>
           </a:effectLst>
@@ -11720,7 +12931,7 @@
         </p:blipFill>
         <p:spPr>
           <a:xfrm>
-            <a:off x="749808" y="3364992"/>
+            <a:off x="749808" y="3564792"/>
             <a:ext cx="310896" cy="310896"/>
           </a:xfrm>
           <a:prstGeom prst="rect">
@@ -11740,7 +12951,7 @@
         </p:nvSpPr>
         <p:spPr>
           <a:xfrm>
-            <a:off x="1152144" y="3364992"/>
+            <a:off x="1152144" y="3564792"/>
             <a:ext cx="1783080" cy="320040"/>
           </a:xfrm>
           <a:prstGeom prst="rect">
@@ -11765,7 +12976,7 @@
                 <a:spcPts val="0"/>
               </a:spcAft>
               <a:buClr>
-                <a:srgbClr val="EAF1FF"/>
+                <a:srgbClr val="16263F"/>
               </a:buClr>
               <a:buSzPts val="1300"/>
               <a:buFont typeface="Arial"/>
@@ -11774,7 +12985,7 @@
             <a:r>
               <a:rPr b="1" i="0" lang="en-US" sz="1300" u="none" cap="none" strike="noStrike">
                 <a:solidFill>
-                  <a:srgbClr val="EAF1FF"/>
+                  <a:srgbClr val="16263F"/>
                 </a:solidFill>
                 <a:latin typeface="Arial"/>
                 <a:ea typeface="Arial"/>
@@ -11803,7 +13014,7 @@
         </p:nvSpPr>
         <p:spPr>
           <a:xfrm>
-            <a:off x="749808" y="3767328"/>
+            <a:off x="749808" y="3967128"/>
             <a:ext cx="2148840" cy="777240"/>
           </a:xfrm>
           <a:prstGeom prst="rect">
@@ -11828,7 +13039,7 @@
                 <a:spcPts val="0"/>
               </a:spcAft>
               <a:buClr>
-                <a:srgbClr val="9DB0D0"/>
+                <a:srgbClr val="56627A"/>
               </a:buClr>
               <a:buSzPts val="1050"/>
               <a:buFont typeface="Arial"/>
@@ -11837,7 +13048,7 @@
             <a:r>
               <a:rPr b="0" i="0" lang="en-US" sz="1050" u="none" cap="none" strike="noStrike">
                 <a:solidFill>
-                  <a:srgbClr val="9DB0D0"/>
+                  <a:srgbClr val="56627A"/>
                 </a:solidFill>
                 <a:latin typeface="Arial"/>
                 <a:ea typeface="Arial"/>
@@ -11866,7 +13077,7 @@
         </p:nvSpPr>
         <p:spPr>
           <a:xfrm>
-            <a:off x="3291840" y="3200400"/>
+            <a:off x="3291840" y="3400200"/>
             <a:ext cx="2514600" cy="1417320"/>
           </a:xfrm>
           <a:prstGeom prst="roundRect">
@@ -11875,11 +13086,11 @@
             </a:avLst>
           </a:prstGeom>
           <a:solidFill>
-            <a:srgbClr val="111C3C"/>
+            <a:srgbClr val="EEF3FB"/>
           </a:solidFill>
           <a:ln cap="flat" cmpd="sng" w="12700">
             <a:solidFill>
-              <a:srgbClr val="2A3B66"/>
+              <a:srgbClr val="D5DEEC"/>
             </a:solidFill>
             <a:prstDash val="solid"/>
             <a:round/>
@@ -11888,8 +13099,8 @@
           </a:ln>
           <a:effectLst>
             <a:outerShdw blurRad="114300" rotWithShape="0" algn="bl" dir="5400000" dist="38100">
-              <a:srgbClr val="000000">
-                <a:alpha val="45098"/>
+              <a:srgbClr val="16263F">
+                <a:alpha val="13000"/>
               </a:srgbClr>
             </a:outerShdw>
           </a:effectLst>
@@ -11931,7 +13142,7 @@
         </p:blipFill>
         <p:spPr>
           <a:xfrm>
-            <a:off x="3493008" y="3364992"/>
+            <a:off x="3493008" y="3564792"/>
             <a:ext cx="310896" cy="310896"/>
           </a:xfrm>
           <a:prstGeom prst="rect">
@@ -11951,7 +13162,7 @@
         </p:nvSpPr>
         <p:spPr>
           <a:xfrm>
-            <a:off x="3895344" y="3364992"/>
+            <a:off x="3895344" y="3564792"/>
             <a:ext cx="1783080" cy="320040"/>
           </a:xfrm>
           <a:prstGeom prst="rect">
@@ -11976,7 +13187,7 @@
                 <a:spcPts val="0"/>
               </a:spcAft>
               <a:buClr>
-                <a:srgbClr val="EAF1FF"/>
+                <a:srgbClr val="16263F"/>
               </a:buClr>
               <a:buSzPts val="1300"/>
               <a:buFont typeface="Arial"/>
@@ -11985,7 +13196,7 @@
             <a:r>
               <a:rPr b="1" i="0" lang="en-US" sz="1300" u="none" cap="none" strike="noStrike">
                 <a:solidFill>
-                  <a:srgbClr val="EAF1FF"/>
+                  <a:srgbClr val="16263F"/>
                 </a:solidFill>
                 <a:latin typeface="Arial"/>
                 <a:ea typeface="Arial"/>
@@ -12014,7 +13225,7 @@
         </p:nvSpPr>
         <p:spPr>
           <a:xfrm>
-            <a:off x="3493008" y="3767328"/>
+            <a:off x="3493008" y="3967128"/>
             <a:ext cx="2148840" cy="777240"/>
           </a:xfrm>
           <a:prstGeom prst="rect">
@@ -12039,7 +13250,7 @@
                 <a:spcPts val="0"/>
               </a:spcAft>
               <a:buClr>
-                <a:srgbClr val="9DB0D0"/>
+                <a:srgbClr val="56627A"/>
               </a:buClr>
               <a:buSzPts val="1050"/>
               <a:buFont typeface="Arial"/>
@@ -12048,7 +13259,7 @@
             <a:r>
               <a:rPr b="0" i="0" lang="en-US" sz="1050" u="none" cap="none" strike="noStrike">
                 <a:solidFill>
-                  <a:srgbClr val="9DB0D0"/>
+                  <a:srgbClr val="56627A"/>
                 </a:solidFill>
                 <a:latin typeface="Arial"/>
                 <a:ea typeface="Arial"/>
@@ -12077,7 +13288,7 @@
         </p:nvSpPr>
         <p:spPr>
           <a:xfrm>
-            <a:off x="6035040" y="3200400"/>
+            <a:off x="6035040" y="3400200"/>
             <a:ext cx="2514600" cy="1417320"/>
           </a:xfrm>
           <a:prstGeom prst="roundRect">
@@ -12086,11 +13297,11 @@
             </a:avLst>
           </a:prstGeom>
           <a:solidFill>
-            <a:srgbClr val="111C3C"/>
+            <a:srgbClr val="EEF3FB"/>
           </a:solidFill>
           <a:ln cap="flat" cmpd="sng" w="12700">
             <a:solidFill>
-              <a:srgbClr val="2A3B66"/>
+              <a:srgbClr val="D5DEEC"/>
             </a:solidFill>
             <a:prstDash val="solid"/>
             <a:round/>
@@ -12099,8 +13310,8 @@
           </a:ln>
           <a:effectLst>
             <a:outerShdw blurRad="114300" rotWithShape="0" algn="bl" dir="5400000" dist="38100">
-              <a:srgbClr val="000000">
-                <a:alpha val="45098"/>
+              <a:srgbClr val="16263F">
+                <a:alpha val="13000"/>
               </a:srgbClr>
             </a:outerShdw>
           </a:effectLst>
@@ -12142,7 +13353,7 @@
         </p:blipFill>
         <p:spPr>
           <a:xfrm>
-            <a:off x="6236208" y="3364992"/>
+            <a:off x="6236208" y="3564792"/>
             <a:ext cx="310896" cy="310896"/>
           </a:xfrm>
           <a:prstGeom prst="rect">
@@ -12162,7 +13373,7 @@
         </p:nvSpPr>
         <p:spPr>
           <a:xfrm>
-            <a:off x="6638544" y="3364992"/>
+            <a:off x="6638544" y="3564792"/>
             <a:ext cx="1783080" cy="320040"/>
           </a:xfrm>
           <a:prstGeom prst="rect">
@@ -12187,7 +13398,7 @@
                 <a:spcPts val="0"/>
               </a:spcAft>
               <a:buClr>
-                <a:srgbClr val="EAF1FF"/>
+                <a:srgbClr val="16263F"/>
               </a:buClr>
               <a:buSzPts val="1300"/>
               <a:buFont typeface="Arial"/>
@@ -12196,7 +13407,7 @@
             <a:r>
               <a:rPr b="1" i="0" lang="en-US" sz="1300" u="none" cap="none" strike="noStrike">
                 <a:solidFill>
-                  <a:srgbClr val="EAF1FF"/>
+                  <a:srgbClr val="16263F"/>
                 </a:solidFill>
                 <a:latin typeface="Arial"/>
                 <a:ea typeface="Arial"/>
@@ -12225,7 +13436,7 @@
         </p:nvSpPr>
         <p:spPr>
           <a:xfrm>
-            <a:off x="6236208" y="3767328"/>
+            <a:off x="6236208" y="3967128"/>
             <a:ext cx="2148840" cy="777240"/>
           </a:xfrm>
           <a:prstGeom prst="rect">
@@ -12250,7 +13461,7 @@
                 <a:spcPts val="0"/>
               </a:spcAft>
               <a:buClr>
-                <a:srgbClr val="9DB0D0"/>
+                <a:srgbClr val="56627A"/>
               </a:buClr>
               <a:buSzPts val="1050"/>
               <a:buFont typeface="Arial"/>
@@ -12259,7 +13470,7 @@
             <a:r>
               <a:rPr b="0" i="0" lang="en-US" sz="1050" u="none" cap="none" strike="noStrike">
                 <a:solidFill>
-                  <a:srgbClr val="9DB0D0"/>
+                  <a:srgbClr val="56627A"/>
                 </a:solidFill>
                 <a:latin typeface="Arial"/>
                 <a:ea typeface="Arial"/>
@@ -12277,6 +13488,181 @@
               <a:cs typeface="Calibri"/>
               <a:sym typeface="Calibri"/>
             </a:endParaRPr>
+          </a:p>
+        </p:txBody>
+      </p:sp>
+      <p:cxnSp>
+        <p:nvCxnSpPr>
+          <p:cNvPr id="159" name="Rule6"/>
+          <p:cNvCxnSpPr/>
+          <p:nvPr/>
+        </p:nvCxnSpPr>
+        <p:spPr>
+          <a:xfrm>
+            <a:off x="548640" y="957600"/>
+            <a:ext cx="8046720" cy="0"/>
+          </a:xfrm>
+          <a:prstGeom prst="line">
+            <a:avLst/>
+          </a:prstGeom>
+          <a:ln w="19050">
+            <a:solidFill>
+              <a:srgbClr val="9FAEC6"/>
+            </a:solidFill>
+          </a:ln>
+        </p:spPr>
+        <p:style>
+          <a:lnRef idx="2">
+            <a:schemeClr val="accent1"/>
+          </a:lnRef>
+          <a:fillRef idx="0">
+            <a:schemeClr val="accent1"/>
+          </a:fillRef>
+          <a:effectRef idx="1">
+            <a:schemeClr val="accent1"/>
+          </a:effectRef>
+          <a:fontRef idx="minor">
+            <a:schemeClr val="tx1"/>
+          </a:fontRef>
+        </p:style>
+      </p:cxnSp>
+      <p:sp>
+        <p:nvSpPr>
+          <p:cNvPr id="160" name="KeyBox6"/>
+          <p:cNvSpPr/>
+          <p:nvPr/>
+        </p:nvSpPr>
+        <p:spPr>
+          <a:xfrm>
+            <a:off x="548640" y="1029600"/>
+            <a:ext cx="8046720" cy="691200"/>
+          </a:xfrm>
+          <a:prstGeom prst="rect">
+            <a:avLst/>
+          </a:prstGeom>
+          <a:solidFill>
+            <a:srgbClr val="EEF0F4"/>
+          </a:solidFill>
+          <a:ln w="9525">
+            <a:solidFill>
+              <a:srgbClr val="D7DCE5"/>
+            </a:solidFill>
+          </a:ln>
+          <a:effectLst/>
+        </p:spPr>
+        <p:txBody>
+          <a:bodyPr rtlCol="0" anchor="ctr" wrap="square" lIns="216000" rIns="108000" tIns="28800" bIns="28800"/>
+          <a:lstStyle/>
+          <a:p>
+            <a:pPr algn="l" marL="198000" indent="-162000">
+              <a:lnSpc>
+                <a:spcPct val="105000"/>
+              </a:lnSpc>
+              <a:spcBef>
+                <a:spcPts val="300"/>
+              </a:spcBef>
+              <a:spcAft>
+                <a:spcPts val="300"/>
+              </a:spcAft>
+              <a:buClr>
+                <a:srgbClr val="1488C2"/>
+              </a:buClr>
+              <a:buFont typeface="Arial"/>
+              <a:buChar char="▪"/>
+            </a:pPr>
+            <a:r>
+              <a:rPr sz="1100" b="0">
+                <a:solidFill>
+                  <a:srgbClr val="16263F"/>
+                </a:solidFill>
+                <a:latin typeface="Arial"/>
+              </a:rPr>
+              <a:t>衛星を持たず、解析レイヤーに特化することで高い資本効率を実現。</a:t>
+            </a:r>
+          </a:p>
+          <a:p>
+            <a:pPr algn="l" marL="198000" indent="-162000">
+              <a:lnSpc>
+                <a:spcPct val="105000"/>
+              </a:lnSpc>
+              <a:spcBef>
+                <a:spcPts val="300"/>
+              </a:spcBef>
+              <a:spcAft>
+                <a:spcPts val="300"/>
+              </a:spcAft>
+              <a:buClr>
+                <a:srgbClr val="1488C2"/>
+              </a:buClr>
+              <a:buFont typeface="Arial"/>
+              <a:buChar char="▪"/>
+            </a:pPr>
+            <a:r>
+              <a:rPr sz="1100" b="0">
+                <a:solidFill>
+                  <a:srgbClr val="16263F"/>
+                </a:solidFill>
+                <a:latin typeface="Arial"/>
+              </a:rPr>
+              <a:t>120カ国の開発者がデータ・人材・アルゴリズムを循環供給（ネットワーク効果）。</a:t>
+            </a:r>
+          </a:p>
+          <a:p>
+            <a:pPr algn="l" marL="198000" indent="-162000">
+              <a:lnSpc>
+                <a:spcPct val="105000"/>
+              </a:lnSpc>
+              <a:spcBef>
+                <a:spcPts val="300"/>
+              </a:spcBef>
+              <a:spcAft>
+                <a:spcPts val="300"/>
+              </a:spcAft>
+              <a:buClr>
+                <a:srgbClr val="1488C2"/>
+              </a:buClr>
+              <a:buFont typeface="Arial"/>
+              <a:buChar char="▪"/>
+            </a:pPr>
+            <a:r>
+              <a:rPr sz="1100" b="0">
+                <a:solidFill>
+                  <a:srgbClr val="16263F"/>
+                </a:solidFill>
+                <a:latin typeface="Arial"/>
+              </a:rPr>
+              <a:t>政府・国際機関との実績が、参入障壁の高い領域での堀になる。</a:t>
+            </a:r>
+          </a:p>
+        </p:txBody>
+      </p:sp>
+      <p:sp>
+        <p:nvSpPr>
+          <p:cNvPr id="161" name="KeyBar6"/>
+          <p:cNvSpPr/>
+          <p:nvPr/>
+        </p:nvSpPr>
+        <p:spPr>
+          <a:xfrm>
+            <a:off x="548640" y="1029600"/>
+            <a:ext cx="54000" cy="691200"/>
+          </a:xfrm>
+          <a:prstGeom prst="rect">
+            <a:avLst/>
+          </a:prstGeom>
+          <a:solidFill>
+            <a:srgbClr val="1488C2"/>
+          </a:solidFill>
+          <a:ln>
+            <a:noFill/>
+          </a:ln>
+          <a:effectLst/>
+        </p:spPr>
+        <p:txBody>
+          <a:bodyPr rtlCol="0" anchor="ctr"/>
+          <a:lstStyle/>
+          <a:p>
+            <a:pPr algn="ctr"/>
           </a:p>
         </p:txBody>
       </p:sp>
@@ -12293,14 +13679,10 @@
   <p:cSld>
     <p:bg>
       <p:bgPr>
-        <a:blipFill>
-          <a:blip r:embed="rId3">
-            <a:alphaModFix/>
-          </a:blip>
-          <a:stretch>
-            <a:fillRect/>
-          </a:stretch>
-        </a:blipFill>
+        <a:solidFill>
+          <a:srgbClr val="FFFFFF"/>
+        </a:solidFill>
+        <a:effectLst/>
       </p:bgPr>
     </p:bg>
     <p:spTree>
@@ -12319,14 +13701,14 @@
       </p:grpSpPr>
       <p:sp>
         <p:nvSpPr>
-          <p:cNvPr id="164" name="Google Shape;164;p9"/>
-          <p:cNvSpPr/>
-          <p:nvPr/>
-        </p:nvSpPr>
-        <p:spPr>
-          <a:xfrm>
-            <a:off x="548640" y="365760"/>
-            <a:ext cx="8046720" cy="274320"/>
+          <p:cNvPr id="165" name="Google Shape;165;p9"/>
+          <p:cNvSpPr/>
+          <p:nvPr/>
+        </p:nvSpPr>
+        <p:spPr>
+          <a:xfrm>
+            <a:off x="548640" y="367200"/>
+            <a:ext cx="8046720" cy="566928"/>
           </a:xfrm>
           <a:prstGeom prst="rect">
             <a:avLst/>
@@ -12350,70 +13732,7 @@
                 <a:spcPts val="0"/>
               </a:spcAft>
               <a:buClr>
-                <a:srgbClr val="5BC8FF"/>
-              </a:buClr>
-              <a:buSzPts val="1100"/>
-              <a:buFont typeface="Arial"/>
-              <a:buNone/>
-            </a:pPr>
-            <a:r>
-              <a:rPr b="1" i="0" lang="en-US" sz="1100" u="none" cap="none" strike="noStrike">
-                <a:solidFill>
-                  <a:srgbClr val="5BC8FF"/>
-                </a:solidFill>
-                <a:latin typeface="Arial"/>
-                <a:ea typeface="Arial"/>
-                <a:cs typeface="Arial"/>
-                <a:sym typeface="Arial"/>
-              </a:rPr>
-              <a:t>MARKET ・ 市場規模</a:t>
-            </a:r>
-            <a:endParaRPr b="0" i="0" sz="1100" u="none" cap="none" strike="noStrike">
-              <a:solidFill>
-                <a:schemeClr val="dk1"/>
-              </a:solidFill>
-              <a:latin typeface="Calibri"/>
-              <a:ea typeface="Calibri"/>
-              <a:cs typeface="Calibri"/>
-              <a:sym typeface="Calibri"/>
-            </a:endParaRPr>
-          </a:p>
-        </p:txBody>
-      </p:sp>
-      <p:sp>
-        <p:nvSpPr>
-          <p:cNvPr id="165" name="Google Shape;165;p9"/>
-          <p:cNvSpPr/>
-          <p:nvPr/>
-        </p:nvSpPr>
-        <p:spPr>
-          <a:xfrm>
-            <a:off x="548640" y="603504"/>
-            <a:ext cx="8046720" cy="566928"/>
-          </a:xfrm>
-          <a:prstGeom prst="rect">
-            <a:avLst/>
-          </a:prstGeom>
-          <a:noFill/>
-          <a:ln>
-            <a:noFill/>
-          </a:ln>
-        </p:spPr>
-        <p:txBody>
-          <a:bodyPr anchorCtr="0" anchor="ctr" bIns="0" lIns="0" spcFirstLastPara="1" rIns="0" wrap="square" tIns="0">
-            <a:noAutofit/>
-          </a:bodyPr>
-          <a:lstStyle/>
-          <a:p>
-            <a:pPr indent="0" lvl="0" marL="0" marR="0" rtl="0" algn="l">
-              <a:spcBef>
-                <a:spcPts val="0"/>
-              </a:spcBef>
-              <a:spcAft>
-                <a:spcPts val="0"/>
-              </a:spcAft>
-              <a:buClr>
-                <a:srgbClr val="EAF1FF"/>
+                <a:srgbClr val="16263F"/>
               </a:buClr>
               <a:buSzPts val="2900"/>
               <a:buFont typeface="Arial"/>
@@ -12422,7 +13741,7 @@
             <a:r>
               <a:rPr b="1" i="0" lang="en-US" sz="2900" u="none" cap="none" strike="noStrike">
                 <a:solidFill>
-                  <a:srgbClr val="EAF1FF"/>
+                  <a:srgbClr val="16263F"/>
                 </a:solidFill>
                 <a:latin typeface="Arial"/>
                 <a:ea typeface="Arial"/>
@@ -12458,7 +13777,7 @@
         </p:blipFill>
         <p:spPr>
           <a:xfrm>
-            <a:off x="548640" y="1554480"/>
+            <a:off x="548640" y="1800000"/>
             <a:ext cx="3840480" cy="2834640"/>
           </a:xfrm>
           <a:prstGeom prst="rect">
@@ -12478,7 +13797,7 @@
         </p:nvSpPr>
         <p:spPr>
           <a:xfrm>
-            <a:off x="4709160" y="1627632"/>
+            <a:off x="4709160" y="1873152"/>
             <a:ext cx="3886200" cy="822960"/>
           </a:xfrm>
           <a:prstGeom prst="roundRect">
@@ -12487,11 +13806,11 @@
             </a:avLst>
           </a:prstGeom>
           <a:solidFill>
-            <a:srgbClr val="111C3C"/>
+            <a:srgbClr val="EEF3FB"/>
           </a:solidFill>
           <a:ln cap="flat" cmpd="sng" w="12700">
             <a:solidFill>
-              <a:srgbClr val="2A3B66"/>
+              <a:srgbClr val="D5DEEC"/>
             </a:solidFill>
             <a:prstDash val="solid"/>
             <a:round/>
@@ -12500,8 +13819,8 @@
           </a:ln>
           <a:effectLst>
             <a:outerShdw blurRad="114300" rotWithShape="0" algn="bl" dir="5400000" dist="38100">
-              <a:srgbClr val="000000">
-                <a:alpha val="45098"/>
+              <a:srgbClr val="16263F">
+                <a:alpha val="13000"/>
               </a:srgbClr>
             </a:outerShdw>
           </a:effectLst>
@@ -12536,7 +13855,7 @@
         </p:nvSpPr>
         <p:spPr>
           <a:xfrm>
-            <a:off x="4892040" y="1737360"/>
+            <a:off x="4892040" y="1982880"/>
             <a:ext cx="1097280" cy="548640"/>
           </a:xfrm>
           <a:prstGeom prst="rect">
@@ -12561,7 +13880,7 @@
                 <a:spcPts val="0"/>
               </a:spcAft>
               <a:buClr>
-                <a:srgbClr val="F5B454"/>
+                <a:srgbClr val="D9881C"/>
               </a:buClr>
               <a:buSzPts val="1500"/>
               <a:buFont typeface="Arial"/>
@@ -12570,7 +13889,7 @@
             <a:r>
               <a:rPr b="1" i="0" lang="en-US" sz="1500" u="none" cap="none" strike="noStrike">
                 <a:solidFill>
-                  <a:srgbClr val="F5B454"/>
+                  <a:srgbClr val="D9881C"/>
                 </a:solidFill>
                 <a:latin typeface="Arial"/>
                 <a:ea typeface="Arial"/>
@@ -12599,7 +13918,7 @@
         </p:nvSpPr>
         <p:spPr>
           <a:xfrm>
-            <a:off x="5806440" y="1700784"/>
+            <a:off x="5806440" y="1946304"/>
             <a:ext cx="2651760" cy="676656"/>
           </a:xfrm>
           <a:prstGeom prst="rect">
@@ -12624,7 +13943,7 @@
                 <a:spcPts val="0"/>
               </a:spcAft>
               <a:buClr>
-                <a:srgbClr val="9DB0D0"/>
+                <a:srgbClr val="56627A"/>
               </a:buClr>
               <a:buSzPts val="1150"/>
               <a:buFont typeface="Arial"/>
@@ -12633,7 +13952,7 @@
             <a:r>
               <a:rPr b="0" i="0" lang="en-US" sz="1150" u="none" cap="none" strike="noStrike">
                 <a:solidFill>
-                  <a:srgbClr val="9DB0D0"/>
+                  <a:srgbClr val="56627A"/>
                 </a:solidFill>
                 <a:latin typeface="Arial"/>
                 <a:ea typeface="Arial"/>
@@ -12662,7 +13981,7 @@
         </p:nvSpPr>
         <p:spPr>
           <a:xfrm>
-            <a:off x="4709160" y="2587752"/>
+            <a:off x="4709160" y="2833272"/>
             <a:ext cx="3886200" cy="822960"/>
           </a:xfrm>
           <a:prstGeom prst="roundRect">
@@ -12671,11 +13990,11 @@
             </a:avLst>
           </a:prstGeom>
           <a:solidFill>
-            <a:srgbClr val="111C3C"/>
+            <a:srgbClr val="EEF3FB"/>
           </a:solidFill>
           <a:ln cap="flat" cmpd="sng" w="12700">
             <a:solidFill>
-              <a:srgbClr val="2A3B66"/>
+              <a:srgbClr val="D5DEEC"/>
             </a:solidFill>
             <a:prstDash val="solid"/>
             <a:round/>
@@ -12684,8 +14003,8 @@
           </a:ln>
           <a:effectLst>
             <a:outerShdw blurRad="114300" rotWithShape="0" algn="bl" dir="5400000" dist="38100">
-              <a:srgbClr val="000000">
-                <a:alpha val="45098"/>
+              <a:srgbClr val="16263F">
+                <a:alpha val="13000"/>
               </a:srgbClr>
             </a:outerShdw>
           </a:effectLst>
@@ -12720,7 +14039,7 @@
         </p:nvSpPr>
         <p:spPr>
           <a:xfrm>
-            <a:off x="4892040" y="2697480"/>
+            <a:off x="4892040" y="2943000"/>
             <a:ext cx="1097280" cy="548640"/>
           </a:xfrm>
           <a:prstGeom prst="rect">
@@ -12745,7 +14064,7 @@
                 <a:spcPts val="0"/>
               </a:spcAft>
               <a:buClr>
-                <a:srgbClr val="5BC8FF"/>
+                <a:srgbClr val="1488C2"/>
               </a:buClr>
               <a:buSzPts val="1500"/>
               <a:buFont typeface="Arial"/>
@@ -12754,7 +14073,7 @@
             <a:r>
               <a:rPr b="1" i="0" lang="en-US" sz="1500" u="none" cap="none" strike="noStrike">
                 <a:solidFill>
-                  <a:srgbClr val="5BC8FF"/>
+                  <a:srgbClr val="1488C2"/>
                 </a:solidFill>
                 <a:latin typeface="Arial"/>
                 <a:ea typeface="Arial"/>
@@ -12783,7 +14102,7 @@
         </p:nvSpPr>
         <p:spPr>
           <a:xfrm>
-            <a:off x="5806440" y="2660904"/>
+            <a:off x="5806440" y="2906424"/>
             <a:ext cx="2651760" cy="676656"/>
           </a:xfrm>
           <a:prstGeom prst="rect">
@@ -12808,7 +14127,7 @@
                 <a:spcPts val="0"/>
               </a:spcAft>
               <a:buClr>
-                <a:srgbClr val="9DB0D0"/>
+                <a:srgbClr val="56627A"/>
               </a:buClr>
               <a:buSzPts val="1150"/>
               <a:buFont typeface="Arial"/>
@@ -12817,7 +14136,7 @@
             <a:r>
               <a:rPr b="0" i="0" lang="en-US" sz="1150" u="none" cap="none" strike="noStrike">
                 <a:solidFill>
-                  <a:srgbClr val="9DB0D0"/>
+                  <a:srgbClr val="56627A"/>
                 </a:solidFill>
                 <a:latin typeface="Arial"/>
                 <a:ea typeface="Arial"/>
@@ -12846,7 +14165,7 @@
         </p:nvSpPr>
         <p:spPr>
           <a:xfrm>
-            <a:off x="4709160" y="3547872"/>
+            <a:off x="4709160" y="3793392"/>
             <a:ext cx="3886200" cy="822960"/>
           </a:xfrm>
           <a:prstGeom prst="roundRect">
@@ -12855,11 +14174,11 @@
             </a:avLst>
           </a:prstGeom>
           <a:solidFill>
-            <a:srgbClr val="111C3C"/>
+            <a:srgbClr val="EEF3FB"/>
           </a:solidFill>
           <a:ln cap="flat" cmpd="sng" w="12700">
             <a:solidFill>
-              <a:srgbClr val="2A3B66"/>
+              <a:srgbClr val="D5DEEC"/>
             </a:solidFill>
             <a:prstDash val="solid"/>
             <a:round/>
@@ -12868,8 +14187,8 @@
           </a:ln>
           <a:effectLst>
             <a:outerShdw blurRad="114300" rotWithShape="0" algn="bl" dir="5400000" dist="38100">
-              <a:srgbClr val="000000">
-                <a:alpha val="45098"/>
+              <a:srgbClr val="16263F">
+                <a:alpha val="13000"/>
               </a:srgbClr>
             </a:outerShdw>
           </a:effectLst>
@@ -12904,7 +14223,7 @@
         </p:nvSpPr>
         <p:spPr>
           <a:xfrm>
-            <a:off x="4892040" y="3657600"/>
+            <a:off x="4892040" y="3903120"/>
             <a:ext cx="1097280" cy="548640"/>
           </a:xfrm>
           <a:prstGeom prst="rect">
@@ -12929,7 +14248,7 @@
                 <a:spcPts val="0"/>
               </a:spcAft>
               <a:buClr>
-                <a:srgbClr val="9C8CFF"/>
+                <a:srgbClr val="6E5AD9"/>
               </a:buClr>
               <a:buSzPts val="1500"/>
               <a:buFont typeface="Arial"/>
@@ -12938,7 +14257,7 @@
             <a:r>
               <a:rPr b="1" i="0" lang="en-US" sz="1500" u="none" cap="none" strike="noStrike">
                 <a:solidFill>
-                  <a:srgbClr val="9C8CFF"/>
+                  <a:srgbClr val="6E5AD9"/>
                 </a:solidFill>
                 <a:latin typeface="Arial"/>
                 <a:ea typeface="Arial"/>
@@ -12967,7 +14286,7 @@
         </p:nvSpPr>
         <p:spPr>
           <a:xfrm>
-            <a:off x="5806440" y="3621024"/>
+            <a:off x="5806440" y="3866544"/>
             <a:ext cx="2651760" cy="676656"/>
           </a:xfrm>
           <a:prstGeom prst="rect">
@@ -12992,7 +14311,7 @@
                 <a:spcPts val="0"/>
               </a:spcAft>
               <a:buClr>
-                <a:srgbClr val="9DB0D0"/>
+                <a:srgbClr val="56627A"/>
               </a:buClr>
               <a:buSzPts val="1150"/>
               <a:buFont typeface="Arial"/>
@@ -13001,7 +14320,7 @@
             <a:r>
               <a:rPr b="0" i="0" lang="en-US" sz="1150" u="none" cap="none" strike="noStrike">
                 <a:solidFill>
-                  <a:srgbClr val="9DB0D0"/>
+                  <a:srgbClr val="56627A"/>
                 </a:solidFill>
                 <a:latin typeface="Arial"/>
                 <a:ea typeface="Arial"/>
@@ -13019,6 +14338,181 @@
               <a:cs typeface="Calibri"/>
               <a:sym typeface="Calibri"/>
             </a:endParaRPr>
+          </a:p>
+        </p:txBody>
+      </p:sp>
+      <p:cxnSp>
+        <p:nvCxnSpPr>
+          <p:cNvPr id="176" name="Rule7"/>
+          <p:cNvCxnSpPr/>
+          <p:nvPr/>
+        </p:nvCxnSpPr>
+        <p:spPr>
+          <a:xfrm>
+            <a:off x="548640" y="957600"/>
+            <a:ext cx="8046720" cy="0"/>
+          </a:xfrm>
+          <a:prstGeom prst="line">
+            <a:avLst/>
+          </a:prstGeom>
+          <a:ln w="19050">
+            <a:solidFill>
+              <a:srgbClr val="9FAEC6"/>
+            </a:solidFill>
+          </a:ln>
+        </p:spPr>
+        <p:style>
+          <a:lnRef idx="2">
+            <a:schemeClr val="accent1"/>
+          </a:lnRef>
+          <a:fillRef idx="0">
+            <a:schemeClr val="accent1"/>
+          </a:fillRef>
+          <a:effectRef idx="1">
+            <a:schemeClr val="accent1"/>
+          </a:effectRef>
+          <a:fontRef idx="minor">
+            <a:schemeClr val="tx1"/>
+          </a:fontRef>
+        </p:style>
+      </p:cxnSp>
+      <p:sp>
+        <p:nvSpPr>
+          <p:cNvPr id="177" name="KeyBox7"/>
+          <p:cNvSpPr/>
+          <p:nvPr/>
+        </p:nvSpPr>
+        <p:spPr>
+          <a:xfrm>
+            <a:off x="548640" y="1029600"/>
+            <a:ext cx="8046720" cy="691200"/>
+          </a:xfrm>
+          <a:prstGeom prst="rect">
+            <a:avLst/>
+          </a:prstGeom>
+          <a:solidFill>
+            <a:srgbClr val="EEF0F4"/>
+          </a:solidFill>
+          <a:ln w="9525">
+            <a:solidFill>
+              <a:srgbClr val="D7DCE5"/>
+            </a:solidFill>
+          </a:ln>
+          <a:effectLst/>
+        </p:spPr>
+        <p:txBody>
+          <a:bodyPr rtlCol="0" anchor="ctr" wrap="square" lIns="216000" rIns="108000" tIns="28800" bIns="28800"/>
+          <a:lstStyle/>
+          <a:p>
+            <a:pPr algn="l" marL="198000" indent="-162000">
+              <a:lnSpc>
+                <a:spcPct val="105000"/>
+              </a:lnSpc>
+              <a:spcBef>
+                <a:spcPts val="300"/>
+              </a:spcBef>
+              <a:spcAft>
+                <a:spcPts val="300"/>
+              </a:spcAft>
+              <a:buClr>
+                <a:srgbClr val="1488C2"/>
+              </a:buClr>
+              <a:buFont typeface="Arial"/>
+              <a:buChar char="▪"/>
+            </a:pPr>
+            <a:r>
+              <a:rPr sz="1100" b="0">
+                <a:solidFill>
+                  <a:srgbClr val="16263F"/>
+                </a:solidFill>
+                <a:latin typeface="Arial"/>
+              </a:rPr>
+              <a:t>防衛地理空間市場はCAGR約11%、2030年に約$282Bへ拡大。</a:t>
+            </a:r>
+          </a:p>
+          <a:p>
+            <a:pPr algn="l" marL="198000" indent="-162000">
+              <a:lnSpc>
+                <a:spcPct val="105000"/>
+              </a:lnSpc>
+              <a:spcBef>
+                <a:spcPts val="300"/>
+              </a:spcBef>
+              <a:spcAft>
+                <a:spcPts val="300"/>
+              </a:spcAft>
+              <a:buClr>
+                <a:srgbClr val="1488C2"/>
+              </a:buClr>
+              <a:buFont typeface="Arial"/>
+              <a:buChar char="▪"/>
+            </a:pPr>
+            <a:r>
+              <a:rPr sz="1100" b="0">
+                <a:solidFill>
+                  <a:srgbClr val="16263F"/>
+                </a:solidFill>
+                <a:latin typeface="Arial"/>
+              </a:rPr>
+              <a:t>日本＋同志国の政府需要（防衛AI・宇宙データ・経済安保）をSAMに積み上げ。</a:t>
+            </a:r>
+          </a:p>
+          <a:p>
+            <a:pPr algn="l" marL="198000" indent="-162000">
+              <a:lnSpc>
+                <a:spcPct val="105000"/>
+              </a:lnSpc>
+              <a:spcBef>
+                <a:spcPts val="300"/>
+              </a:spcBef>
+              <a:spcAft>
+                <a:spcPts val="300"/>
+              </a:spcAft>
+              <a:buClr>
+                <a:srgbClr val="1488C2"/>
+              </a:buClr>
+              <a:buFont typeface="Arial"/>
+              <a:buChar char="▪"/>
+            </a:pPr>
+            <a:r>
+              <a:rPr sz="1100" b="0">
+                <a:solidFill>
+                  <a:srgbClr val="16263F"/>
+                </a:solidFill>
+                <a:latin typeface="Arial"/>
+              </a:rPr>
+              <a:t>日本政府→同志国政府→民間へとボトムアップで攻略する。</a:t>
+            </a:r>
+          </a:p>
+        </p:txBody>
+      </p:sp>
+      <p:sp>
+        <p:nvSpPr>
+          <p:cNvPr id="178" name="KeyBar7"/>
+          <p:cNvSpPr/>
+          <p:nvPr/>
+        </p:nvSpPr>
+        <p:spPr>
+          <a:xfrm>
+            <a:off x="548640" y="1029600"/>
+            <a:ext cx="54000" cy="691200"/>
+          </a:xfrm>
+          <a:prstGeom prst="rect">
+            <a:avLst/>
+          </a:prstGeom>
+          <a:solidFill>
+            <a:srgbClr val="1488C2"/>
+          </a:solidFill>
+          <a:ln>
+            <a:noFill/>
+          </a:ln>
+          <a:effectLst/>
+        </p:spPr>
+        <p:txBody>
+          <a:bodyPr rtlCol="0" anchor="ctr"/>
+          <a:lstStyle/>
+          <a:p>
+            <a:pPr algn="ctr"/>
           </a:p>
         </p:txBody>
       </p:sp>
@@ -13035,14 +14529,10 @@
   <p:cSld>
     <p:bg>
       <p:bgPr>
-        <a:blipFill>
-          <a:blip r:embed="rId3">
-            <a:alphaModFix/>
-          </a:blip>
-          <a:stretch>
-            <a:fillRect/>
-          </a:stretch>
-        </a:blipFill>
+        <a:solidFill>
+          <a:srgbClr val="FFFFFF"/>
+        </a:solidFill>
+        <a:effectLst/>
       </p:bgPr>
     </p:bg>
     <p:spTree>
@@ -13061,14 +14551,14 @@
       </p:grpSpPr>
       <p:sp>
         <p:nvSpPr>
-          <p:cNvPr id="181" name="Google Shape;181;p10"/>
-          <p:cNvSpPr/>
-          <p:nvPr/>
-        </p:nvSpPr>
-        <p:spPr>
-          <a:xfrm>
-            <a:off x="548640" y="365760"/>
-            <a:ext cx="8046720" cy="274320"/>
+          <p:cNvPr id="182" name="Google Shape;182;p10"/>
+          <p:cNvSpPr/>
+          <p:nvPr/>
+        </p:nvSpPr>
+        <p:spPr>
+          <a:xfrm>
+            <a:off x="548640" y="367200"/>
+            <a:ext cx="8046720" cy="566928"/>
           </a:xfrm>
           <a:prstGeom prst="rect">
             <a:avLst/>
@@ -13092,70 +14582,7 @@
                 <a:spcPts val="0"/>
               </a:spcAft>
               <a:buClr>
-                <a:srgbClr val="5BC8FF"/>
-              </a:buClr>
-              <a:buSzPts val="1100"/>
-              <a:buFont typeface="Arial"/>
-              <a:buNone/>
-            </a:pPr>
-            <a:r>
-              <a:rPr b="1" i="0" lang="en-US" sz="1100" u="none" cap="none" strike="noStrike">
-                <a:solidFill>
-                  <a:srgbClr val="5BC8FF"/>
-                </a:solidFill>
-                <a:latin typeface="Arial"/>
-                <a:ea typeface="Arial"/>
-                <a:cs typeface="Arial"/>
-                <a:sym typeface="Arial"/>
-              </a:rPr>
-              <a:t>QUANT ・ 定量モデル</a:t>
-            </a:r>
-            <a:endParaRPr b="0" i="0" sz="1100" u="none" cap="none" strike="noStrike">
-              <a:solidFill>
-                <a:schemeClr val="dk1"/>
-              </a:solidFill>
-              <a:latin typeface="Calibri"/>
-              <a:ea typeface="Calibri"/>
-              <a:cs typeface="Calibri"/>
-              <a:sym typeface="Calibri"/>
-            </a:endParaRPr>
-          </a:p>
-        </p:txBody>
-      </p:sp>
-      <p:sp>
-        <p:nvSpPr>
-          <p:cNvPr id="182" name="Google Shape;182;p10"/>
-          <p:cNvSpPr/>
-          <p:nvPr/>
-        </p:nvSpPr>
-        <p:spPr>
-          <a:xfrm>
-            <a:off x="548640" y="603504"/>
-            <a:ext cx="8046720" cy="566928"/>
-          </a:xfrm>
-          <a:prstGeom prst="rect">
-            <a:avLst/>
-          </a:prstGeom>
-          <a:noFill/>
-          <a:ln>
-            <a:noFill/>
-          </a:ln>
-        </p:spPr>
-        <p:txBody>
-          <a:bodyPr anchorCtr="0" anchor="ctr" bIns="0" lIns="0" spcFirstLastPara="1" rIns="0" wrap="square" tIns="0">
-            <a:noAutofit/>
-          </a:bodyPr>
-          <a:lstStyle/>
-          <a:p>
-            <a:pPr indent="0" lvl="0" marL="0" marR="0" rtl="0" algn="l">
-              <a:spcBef>
-                <a:spcPts val="0"/>
-              </a:spcBef>
-              <a:spcAft>
-                <a:spcPts val="0"/>
-              </a:spcAft>
-              <a:buClr>
-                <a:srgbClr val="EAF1FF"/>
+                <a:srgbClr val="16263F"/>
               </a:buClr>
               <a:buSzPts val="2900"/>
               <a:buFont typeface="Arial"/>
@@ -13164,7 +14591,7 @@
             <a:r>
               <a:rPr b="1" i="0" lang="en-US" sz="2900" u="none" cap="none" strike="noStrike">
                 <a:solidFill>
-                  <a:srgbClr val="EAF1FF"/>
+                  <a:srgbClr val="16263F"/>
                 </a:solidFill>
                 <a:latin typeface="Arial"/>
                 <a:ea typeface="Arial"/>
@@ -13200,7 +14627,7 @@
         </p:blipFill>
         <p:spPr>
           <a:xfrm>
-            <a:off x="548640" y="1554480"/>
+            <a:off x="548640" y="1800000"/>
             <a:ext cx="5212080" cy="2971800"/>
           </a:xfrm>
           <a:prstGeom prst="rect">
@@ -13220,7 +14647,7 @@
         </p:nvSpPr>
         <p:spPr>
           <a:xfrm>
-            <a:off x="5989320" y="1627632"/>
+            <a:off x="5989320" y="1873152"/>
             <a:ext cx="2606040" cy="822960"/>
           </a:xfrm>
           <a:prstGeom prst="roundRect">
@@ -13229,11 +14656,11 @@
             </a:avLst>
           </a:prstGeom>
           <a:solidFill>
-            <a:srgbClr val="111C3C"/>
+            <a:srgbClr val="EEF3FB"/>
           </a:solidFill>
           <a:ln cap="flat" cmpd="sng" w="12700">
             <a:solidFill>
-              <a:srgbClr val="2A3B66"/>
+              <a:srgbClr val="D5DEEC"/>
             </a:solidFill>
             <a:prstDash val="solid"/>
             <a:round/>
@@ -13242,8 +14669,8 @@
           </a:ln>
           <a:effectLst>
             <a:outerShdw blurRad="114300" rotWithShape="0" algn="bl" dir="5400000" dist="38100">
-              <a:srgbClr val="000000">
-                <a:alpha val="45098"/>
+              <a:srgbClr val="16263F">
+                <a:alpha val="13000"/>
               </a:srgbClr>
             </a:outerShdw>
           </a:effectLst>
@@ -13278,7 +14705,7 @@
         </p:nvSpPr>
         <p:spPr>
           <a:xfrm>
-            <a:off x="6172200" y="1719072"/>
+            <a:off x="6172200" y="1964592"/>
             <a:ext cx="2286000" cy="384048"/>
           </a:xfrm>
           <a:prstGeom prst="rect">
@@ -13303,7 +14730,7 @@
                 <a:spcPts val="0"/>
               </a:spcAft>
               <a:buClr>
-                <a:srgbClr val="F5B454"/>
+                <a:srgbClr val="D9881C"/>
               </a:buClr>
               <a:buSzPts val="2000"/>
               <a:buFont typeface="Arial"/>
@@ -13312,7 +14739,7 @@
             <a:r>
               <a:rPr b="1" i="0" lang="en-US" sz="2000" u="none" cap="none" strike="noStrike">
                 <a:solidFill>
-                  <a:srgbClr val="F5B454"/>
+                  <a:srgbClr val="D9881C"/>
                 </a:solidFill>
                 <a:latin typeface="Arial"/>
                 <a:ea typeface="Arial"/>
@@ -13341,7 +14768,7 @@
         </p:nvSpPr>
         <p:spPr>
           <a:xfrm>
-            <a:off x="6190488" y="2121408"/>
+            <a:off x="6190488" y="2366928"/>
             <a:ext cx="2286000" cy="274320"/>
           </a:xfrm>
           <a:prstGeom prst="rect">
@@ -13366,7 +14793,7 @@
                 <a:spcPts val="0"/>
               </a:spcAft>
               <a:buClr>
-                <a:srgbClr val="9DB0D0"/>
+                <a:srgbClr val="56627A"/>
               </a:buClr>
               <a:buSzPts val="1000"/>
               <a:buFont typeface="Arial"/>
@@ -13375,7 +14802,7 @@
             <a:r>
               <a:rPr b="0" i="0" lang="en-US" sz="1000" u="none" cap="none" strike="noStrike">
                 <a:solidFill>
-                  <a:srgbClr val="9DB0D0"/>
+                  <a:srgbClr val="56627A"/>
                 </a:solidFill>
                 <a:latin typeface="Arial"/>
                 <a:ea typeface="Arial"/>
@@ -13404,7 +14831,7 @@
         </p:nvSpPr>
         <p:spPr>
           <a:xfrm>
-            <a:off x="5989320" y="2587752"/>
+            <a:off x="5989320" y="2833272"/>
             <a:ext cx="2606040" cy="822960"/>
           </a:xfrm>
           <a:prstGeom prst="roundRect">
@@ -13413,11 +14840,11 @@
             </a:avLst>
           </a:prstGeom>
           <a:solidFill>
-            <a:srgbClr val="111C3C"/>
+            <a:srgbClr val="EEF3FB"/>
           </a:solidFill>
           <a:ln cap="flat" cmpd="sng" w="12700">
             <a:solidFill>
-              <a:srgbClr val="2A3B66"/>
+              <a:srgbClr val="D5DEEC"/>
             </a:solidFill>
             <a:prstDash val="solid"/>
             <a:round/>
@@ -13426,8 +14853,8 @@
           </a:ln>
           <a:effectLst>
             <a:outerShdw blurRad="114300" rotWithShape="0" algn="bl" dir="5400000" dist="38100">
-              <a:srgbClr val="000000">
-                <a:alpha val="45098"/>
+              <a:srgbClr val="16263F">
+                <a:alpha val="13000"/>
               </a:srgbClr>
             </a:outerShdw>
           </a:effectLst>
@@ -13462,7 +14889,7 @@
         </p:nvSpPr>
         <p:spPr>
           <a:xfrm>
-            <a:off x="6172200" y="2679192"/>
+            <a:off x="6172200" y="2924712"/>
             <a:ext cx="2286000" cy="384048"/>
           </a:xfrm>
           <a:prstGeom prst="rect">
@@ -13487,7 +14914,7 @@
                 <a:spcPts val="0"/>
               </a:spcAft>
               <a:buClr>
-                <a:srgbClr val="5BC8FF"/>
+                <a:srgbClr val="1488C2"/>
               </a:buClr>
               <a:buSzPts val="2000"/>
               <a:buFont typeface="Arial"/>
@@ -13496,7 +14923,7 @@
             <a:r>
               <a:rPr b="1" i="0" lang="en-US" sz="2000" u="none" cap="none" strike="noStrike">
                 <a:solidFill>
-                  <a:srgbClr val="5BC8FF"/>
+                  <a:srgbClr val="1488C2"/>
                 </a:solidFill>
                 <a:latin typeface="Arial"/>
                 <a:ea typeface="Arial"/>
@@ -13525,7 +14952,7 @@
         </p:nvSpPr>
         <p:spPr>
           <a:xfrm>
-            <a:off x="6190488" y="3081528"/>
+            <a:off x="6190488" y="3327048"/>
             <a:ext cx="2286000" cy="274320"/>
           </a:xfrm>
           <a:prstGeom prst="rect">
@@ -13550,7 +14977,7 @@
                 <a:spcPts val="0"/>
               </a:spcAft>
               <a:buClr>
-                <a:srgbClr val="9DB0D0"/>
+                <a:srgbClr val="56627A"/>
               </a:buClr>
               <a:buSzPts val="1000"/>
               <a:buFont typeface="Arial"/>
@@ -13559,7 +14986,7 @@
             <a:r>
               <a:rPr b="0" i="0" lang="en-US" sz="1000" u="none" cap="none" strike="noStrike">
                 <a:solidFill>
-                  <a:srgbClr val="9DB0D0"/>
+                  <a:srgbClr val="56627A"/>
                 </a:solidFill>
                 <a:latin typeface="Arial"/>
                 <a:ea typeface="Arial"/>
@@ -13588,7 +15015,7 @@
         </p:nvSpPr>
         <p:spPr>
           <a:xfrm>
-            <a:off x="5989320" y="3547872"/>
+            <a:off x="5989320" y="3793392"/>
             <a:ext cx="2606040" cy="822960"/>
           </a:xfrm>
           <a:prstGeom prst="roundRect">
@@ -13597,11 +15024,11 @@
             </a:avLst>
           </a:prstGeom>
           <a:solidFill>
-            <a:srgbClr val="111C3C"/>
+            <a:srgbClr val="EEF3FB"/>
           </a:solidFill>
           <a:ln cap="flat" cmpd="sng" w="12700">
             <a:solidFill>
-              <a:srgbClr val="2A3B66"/>
+              <a:srgbClr val="D5DEEC"/>
             </a:solidFill>
             <a:prstDash val="solid"/>
             <a:round/>
@@ -13610,8 +15037,8 @@
           </a:ln>
           <a:effectLst>
             <a:outerShdw blurRad="114300" rotWithShape="0" algn="bl" dir="5400000" dist="38100">
-              <a:srgbClr val="000000">
-                <a:alpha val="45098"/>
+              <a:srgbClr val="16263F">
+                <a:alpha val="13000"/>
               </a:srgbClr>
             </a:outerShdw>
           </a:effectLst>
@@ -13646,7 +15073,7 @@
         </p:nvSpPr>
         <p:spPr>
           <a:xfrm>
-            <a:off x="6172200" y="3639312"/>
+            <a:off x="6172200" y="3884832"/>
             <a:ext cx="2286000" cy="384048"/>
           </a:xfrm>
           <a:prstGeom prst="rect">
@@ -13671,7 +15098,7 @@
                 <a:spcPts val="0"/>
               </a:spcAft>
               <a:buClr>
-                <a:srgbClr val="9C8CFF"/>
+                <a:srgbClr val="6E5AD9"/>
               </a:buClr>
               <a:buSzPts val="2000"/>
               <a:buFont typeface="Arial"/>
@@ -13680,7 +15107,7 @@
             <a:r>
               <a:rPr b="1" i="0" lang="en-US" sz="2000" u="none" cap="none" strike="noStrike">
                 <a:solidFill>
-                  <a:srgbClr val="9C8CFF"/>
+                  <a:srgbClr val="6E5AD9"/>
                 </a:solidFill>
                 <a:latin typeface="Arial"/>
                 <a:ea typeface="Arial"/>
@@ -13709,7 +15136,7 @@
         </p:nvSpPr>
         <p:spPr>
           <a:xfrm>
-            <a:off x="6190488" y="4041648"/>
+            <a:off x="6190488" y="4287168"/>
             <a:ext cx="2286000" cy="274320"/>
           </a:xfrm>
           <a:prstGeom prst="rect">
@@ -13734,7 +15161,7 @@
                 <a:spcPts val="0"/>
               </a:spcAft>
               <a:buClr>
-                <a:srgbClr val="9DB0D0"/>
+                <a:srgbClr val="56627A"/>
               </a:buClr>
               <a:buSzPts val="1000"/>
               <a:buFont typeface="Arial"/>
@@ -13743,7 +15170,7 @@
             <a:r>
               <a:rPr b="0" i="0" lang="en-US" sz="1000" u="none" cap="none" strike="noStrike">
                 <a:solidFill>
-                  <a:srgbClr val="9DB0D0"/>
+                  <a:srgbClr val="56627A"/>
                 </a:solidFill>
                 <a:latin typeface="Arial"/>
                 <a:ea typeface="Arial"/>
@@ -13761,6 +15188,181 @@
               <a:cs typeface="Calibri"/>
               <a:sym typeface="Calibri"/>
             </a:endParaRPr>
+          </a:p>
+        </p:txBody>
+      </p:sp>
+      <p:cxnSp>
+        <p:nvCxnSpPr>
+          <p:cNvPr id="193" name="Rule8"/>
+          <p:cNvCxnSpPr/>
+          <p:nvPr/>
+        </p:nvCxnSpPr>
+        <p:spPr>
+          <a:xfrm>
+            <a:off x="548640" y="957600"/>
+            <a:ext cx="8046720" cy="0"/>
+          </a:xfrm>
+          <a:prstGeom prst="line">
+            <a:avLst/>
+          </a:prstGeom>
+          <a:ln w="19050">
+            <a:solidFill>
+              <a:srgbClr val="9FAEC6"/>
+            </a:solidFill>
+          </a:ln>
+        </p:spPr>
+        <p:style>
+          <a:lnRef idx="2">
+            <a:schemeClr val="accent1"/>
+          </a:lnRef>
+          <a:fillRef idx="0">
+            <a:schemeClr val="accent1"/>
+          </a:fillRef>
+          <a:effectRef idx="1">
+            <a:schemeClr val="accent1"/>
+          </a:effectRef>
+          <a:fontRef idx="minor">
+            <a:schemeClr val="tx1"/>
+          </a:fontRef>
+        </p:style>
+      </p:cxnSp>
+      <p:sp>
+        <p:nvSpPr>
+          <p:cNvPr id="194" name="KeyBox8"/>
+          <p:cNvSpPr/>
+          <p:nvPr/>
+        </p:nvSpPr>
+        <p:spPr>
+          <a:xfrm>
+            <a:off x="548640" y="1029600"/>
+            <a:ext cx="8046720" cy="691200"/>
+          </a:xfrm>
+          <a:prstGeom prst="rect">
+            <a:avLst/>
+          </a:prstGeom>
+          <a:solidFill>
+            <a:srgbClr val="EEF0F4"/>
+          </a:solidFill>
+          <a:ln w="9525">
+            <a:solidFill>
+              <a:srgbClr val="D7DCE5"/>
+            </a:solidFill>
+          </a:ln>
+          <a:effectLst/>
+        </p:spPr>
+        <p:txBody>
+          <a:bodyPr rtlCol="0" anchor="ctr" wrap="square" lIns="216000" rIns="108000" tIns="28800" bIns="28800"/>
+          <a:lstStyle/>
+          <a:p>
+            <a:pPr algn="l" marL="198000" indent="-162000">
+              <a:lnSpc>
+                <a:spcPct val="105000"/>
+              </a:lnSpc>
+              <a:spcBef>
+                <a:spcPts val="300"/>
+              </a:spcBef>
+              <a:spcAft>
+                <a:spcPts val="300"/>
+              </a:spcAft>
+              <a:buClr>
+                <a:srgbClr val="1488C2"/>
+              </a:buClr>
+              <a:buFont typeface="Arial"/>
+              <a:buChar char="▪"/>
+            </a:pPr>
+            <a:r>
+              <a:rPr sz="1100" b="0">
+                <a:solidFill>
+                  <a:srgbClr val="16263F"/>
+                </a:solidFill>
+                <a:latin typeface="Arial"/>
+              </a:rPr>
+              <a:t>政府案件＋海外展開で、売上は5年で約20倍・年率約2倍を想定（仮・要検証）。</a:t>
+            </a:r>
+          </a:p>
+          <a:p>
+            <a:pPr algn="l" marL="198000" indent="-162000">
+              <a:lnSpc>
+                <a:spcPct val="105000"/>
+              </a:lnSpc>
+              <a:spcBef>
+                <a:spcPts val="300"/>
+              </a:spcBef>
+              <a:spcAft>
+                <a:spcPts val="300"/>
+              </a:spcAft>
+              <a:buClr>
+                <a:srgbClr val="1488C2"/>
+              </a:buClr>
+              <a:buFont typeface="Arial"/>
+              <a:buChar char="▪"/>
+            </a:pPr>
+            <a:r>
+              <a:rPr sz="1100" b="0">
+                <a:solidFill>
+                  <a:srgbClr val="16263F"/>
+                </a:solidFill>
+                <a:latin typeface="Arial"/>
+              </a:rPr>
+              <a:t>グロスマージンはソフト/解析モデルで60%→72%へ改善。</a:t>
+            </a:r>
+          </a:p>
+          <a:p>
+            <a:pPr algn="l" marL="198000" indent="-162000">
+              <a:lnSpc>
+                <a:spcPct val="105000"/>
+              </a:lnSpc>
+              <a:spcBef>
+                <a:spcPts val="300"/>
+              </a:spcBef>
+              <a:spcAft>
+                <a:spcPts val="300"/>
+              </a:spcAft>
+              <a:buClr>
+                <a:srgbClr val="1488C2"/>
+              </a:buClr>
+              <a:buFont typeface="Arial"/>
+              <a:buChar char="▪"/>
+            </a:pPr>
+            <a:r>
+              <a:rPr sz="1100" b="0">
+                <a:solidFill>
+                  <a:srgbClr val="16263F"/>
+                </a:solidFill>
+                <a:latin typeface="Arial"/>
+              </a:rPr>
+              <a:t>投資時点のPost-Valは約40億円を想定。</a:t>
+            </a:r>
+          </a:p>
+        </p:txBody>
+      </p:sp>
+      <p:sp>
+        <p:nvSpPr>
+          <p:cNvPr id="195" name="KeyBar8"/>
+          <p:cNvSpPr/>
+          <p:nvPr/>
+        </p:nvSpPr>
+        <p:spPr>
+          <a:xfrm>
+            <a:off x="548640" y="1029600"/>
+            <a:ext cx="54000" cy="691200"/>
+          </a:xfrm>
+          <a:prstGeom prst="rect">
+            <a:avLst/>
+          </a:prstGeom>
+          <a:solidFill>
+            <a:srgbClr val="1488C2"/>
+          </a:solidFill>
+          <a:ln>
+            <a:noFill/>
+          </a:ln>
+          <a:effectLst/>
+        </p:spPr>
+        <p:txBody>
+          <a:bodyPr rtlCol="0" anchor="ctr"/>
+          <a:lstStyle/>
+          <a:p>
+            <a:pPr algn="ctr"/>
           </a:p>
         </p:txBody>
       </p:sp>
@@ -13777,14 +15379,10 @@
   <p:cSld>
     <p:bg>
       <p:bgPr>
-        <a:blipFill>
-          <a:blip r:embed="rId3">
-            <a:alphaModFix/>
-          </a:blip>
-          <a:stretch>
-            <a:fillRect/>
-          </a:stretch>
-        </a:blipFill>
+        <a:solidFill>
+          <a:srgbClr val="FFFFFF"/>
+        </a:solidFill>
+        <a:effectLst/>
       </p:bgPr>
     </p:bg>
     <p:spTree>
@@ -13803,14 +15401,14 @@
       </p:grpSpPr>
       <p:sp>
         <p:nvSpPr>
-          <p:cNvPr id="198" name="Google Shape;198;p11"/>
-          <p:cNvSpPr/>
-          <p:nvPr/>
-        </p:nvSpPr>
-        <p:spPr>
-          <a:xfrm>
-            <a:off x="548640" y="365760"/>
-            <a:ext cx="8046720" cy="274320"/>
+          <p:cNvPr id="199" name="Google Shape;199;p11"/>
+          <p:cNvSpPr/>
+          <p:nvPr/>
+        </p:nvSpPr>
+        <p:spPr>
+          <a:xfrm>
+            <a:off x="548640" y="367200"/>
+            <a:ext cx="8046720" cy="566928"/>
           </a:xfrm>
           <a:prstGeom prst="rect">
             <a:avLst/>
@@ -13834,70 +15432,7 @@
                 <a:spcPts val="0"/>
               </a:spcAft>
               <a:buClr>
-                <a:srgbClr val="5BC8FF"/>
-              </a:buClr>
-              <a:buSzPts val="1100"/>
-              <a:buFont typeface="Arial"/>
-              <a:buNone/>
-            </a:pPr>
-            <a:r>
-              <a:rPr b="1" i="0" lang="en-US" sz="1100" u="none" cap="none" strike="noStrike">
-                <a:solidFill>
-                  <a:srgbClr val="5BC8FF"/>
-                </a:solidFill>
-                <a:latin typeface="Arial"/>
-                <a:ea typeface="Arial"/>
-                <a:cs typeface="Arial"/>
-                <a:sym typeface="Arial"/>
-              </a:rPr>
-              <a:t>EXIT ・ ファンドリターナー</a:t>
-            </a:r>
-            <a:endParaRPr b="0" i="0" sz="1100" u="none" cap="none" strike="noStrike">
-              <a:solidFill>
-                <a:schemeClr val="dk1"/>
-              </a:solidFill>
-              <a:latin typeface="Calibri"/>
-              <a:ea typeface="Calibri"/>
-              <a:cs typeface="Calibri"/>
-              <a:sym typeface="Calibri"/>
-            </a:endParaRPr>
-          </a:p>
-        </p:txBody>
-      </p:sp>
-      <p:sp>
-        <p:nvSpPr>
-          <p:cNvPr id="199" name="Google Shape;199;p11"/>
-          <p:cNvSpPr/>
-          <p:nvPr/>
-        </p:nvSpPr>
-        <p:spPr>
-          <a:xfrm>
-            <a:off x="548640" y="603504"/>
-            <a:ext cx="8046720" cy="566928"/>
-          </a:xfrm>
-          <a:prstGeom prst="rect">
-            <a:avLst/>
-          </a:prstGeom>
-          <a:noFill/>
-          <a:ln>
-            <a:noFill/>
-          </a:ln>
-        </p:spPr>
-        <p:txBody>
-          <a:bodyPr anchorCtr="0" anchor="ctr" bIns="0" lIns="0" spcFirstLastPara="1" rIns="0" wrap="square" tIns="0">
-            <a:noAutofit/>
-          </a:bodyPr>
-          <a:lstStyle/>
-          <a:p>
-            <a:pPr indent="0" lvl="0" marL="0" marR="0" rtl="0" algn="l">
-              <a:spcBef>
-                <a:spcPts val="0"/>
-              </a:spcBef>
-              <a:spcAft>
-                <a:spcPts val="0"/>
-              </a:spcAft>
-              <a:buClr>
-                <a:srgbClr val="EAF1FF"/>
+                <a:srgbClr val="16263F"/>
               </a:buClr>
               <a:buSzPts val="2900"/>
               <a:buFont typeface="Arial"/>
@@ -13906,7 +15441,7 @@
             <a:r>
               <a:rPr b="1" i="0" lang="en-US" sz="2900" u="none" cap="none" strike="noStrike">
                 <a:solidFill>
-                  <a:srgbClr val="EAF1FF"/>
+                  <a:srgbClr val="16263F"/>
                 </a:solidFill>
                 <a:latin typeface="Arial"/>
                 <a:ea typeface="Arial"/>
@@ -13935,7 +15470,7 @@
         </p:nvSpPr>
         <p:spPr>
           <a:xfrm>
-            <a:off x="548640" y="1600200"/>
+            <a:off x="548640" y="1800000"/>
             <a:ext cx="2514600" cy="1051560"/>
           </a:xfrm>
           <a:prstGeom prst="roundRect">
@@ -13944,11 +15479,11 @@
             </a:avLst>
           </a:prstGeom>
           <a:solidFill>
-            <a:srgbClr val="111C3C"/>
+            <a:srgbClr val="EEF3FB"/>
           </a:solidFill>
           <a:ln cap="flat" cmpd="sng" w="12700">
             <a:solidFill>
-              <a:srgbClr val="2A3B66"/>
+              <a:srgbClr val="D5DEEC"/>
             </a:solidFill>
             <a:prstDash val="solid"/>
             <a:round/>
@@ -13957,8 +15492,8 @@
           </a:ln>
           <a:effectLst>
             <a:outerShdw blurRad="114300" rotWithShape="0" algn="bl" dir="5400000" dist="38100">
-              <a:srgbClr val="000000">
-                <a:alpha val="45098"/>
+              <a:srgbClr val="16263F">
+                <a:alpha val="13000"/>
               </a:srgbClr>
             </a:outerShdw>
           </a:effectLst>
@@ -13993,7 +15528,7 @@
         </p:nvSpPr>
         <p:spPr>
           <a:xfrm>
-            <a:off x="749808" y="1755648"/>
+            <a:off x="749808" y="1955448"/>
             <a:ext cx="2148840" cy="457200"/>
           </a:xfrm>
           <a:prstGeom prst="rect">
@@ -14018,7 +15553,7 @@
                 <a:spcPts val="0"/>
               </a:spcAft>
               <a:buClr>
-                <a:srgbClr val="5BC8FF"/>
+                <a:srgbClr val="1488C2"/>
               </a:buClr>
               <a:buSzPts val="1800"/>
               <a:buFont typeface="Arial"/>
@@ -14027,7 +15562,7 @@
             <a:r>
               <a:rPr b="1" i="0" lang="en-US" sz="1800" u="none" cap="none" strike="noStrike">
                 <a:solidFill>
-                  <a:srgbClr val="5BC8FF"/>
+                  <a:srgbClr val="1488C2"/>
                 </a:solidFill>
                 <a:latin typeface="Arial"/>
                 <a:ea typeface="Arial"/>
@@ -14056,7 +15591,7 @@
         </p:nvSpPr>
         <p:spPr>
           <a:xfrm>
-            <a:off x="749808" y="2249424"/>
+            <a:off x="749808" y="2449224"/>
             <a:ext cx="2148840" cy="274320"/>
           </a:xfrm>
           <a:prstGeom prst="rect">
@@ -14081,7 +15616,7 @@
                 <a:spcPts val="0"/>
               </a:spcAft>
               <a:buClr>
-                <a:srgbClr val="9DB0D0"/>
+                <a:srgbClr val="56627A"/>
               </a:buClr>
               <a:buSzPts val="1050"/>
               <a:buFont typeface="Arial"/>
@@ -14090,7 +15625,7 @@
             <a:r>
               <a:rPr b="0" i="0" lang="en-US" sz="1050" u="none" cap="none" strike="noStrike">
                 <a:solidFill>
-                  <a:srgbClr val="9DB0D0"/>
+                  <a:srgbClr val="56627A"/>
                 </a:solidFill>
                 <a:latin typeface="Arial"/>
                 <a:ea typeface="Arial"/>
@@ -14119,7 +15654,7 @@
         </p:nvCxnSpPr>
         <p:spPr>
           <a:xfrm>
-            <a:off x="3090672" y="2121408"/>
+            <a:off x="3090672" y="2321208"/>
             <a:ext cx="182880" cy="0"/>
           </a:xfrm>
           <a:prstGeom prst="straightConnector1">
@@ -14128,7 +15663,7 @@
           <a:noFill/>
           <a:ln cap="flat" cmpd="sng" w="25400">
             <a:solidFill>
-              <a:srgbClr val="5BC8FF"/>
+              <a:srgbClr val="1488C2"/>
             </a:solidFill>
             <a:prstDash val="solid"/>
             <a:round/>
@@ -14145,7 +15680,7 @@
         </p:nvSpPr>
         <p:spPr>
           <a:xfrm>
-            <a:off x="3291840" y="1600200"/>
+            <a:off x="3291840" y="1800000"/>
             <a:ext cx="2514600" cy="1051560"/>
           </a:xfrm>
           <a:prstGeom prst="roundRect">
@@ -14154,11 +15689,11 @@
             </a:avLst>
           </a:prstGeom>
           <a:solidFill>
-            <a:srgbClr val="111C3C"/>
+            <a:srgbClr val="EEF3FB"/>
           </a:solidFill>
           <a:ln cap="flat" cmpd="sng" w="12700">
             <a:solidFill>
-              <a:srgbClr val="2A3B66"/>
+              <a:srgbClr val="D5DEEC"/>
             </a:solidFill>
             <a:prstDash val="solid"/>
             <a:round/>
@@ -14167,8 +15702,8 @@
           </a:ln>
           <a:effectLst>
             <a:outerShdw blurRad="114300" rotWithShape="0" algn="bl" dir="5400000" dist="38100">
-              <a:srgbClr val="000000">
-                <a:alpha val="45098"/>
+              <a:srgbClr val="16263F">
+                <a:alpha val="13000"/>
               </a:srgbClr>
             </a:outerShdw>
           </a:effectLst>
@@ -14203,7 +15738,7 @@
         </p:nvSpPr>
         <p:spPr>
           <a:xfrm>
-            <a:off x="3493008" y="1755648"/>
+            <a:off x="3493008" y="1955448"/>
             <a:ext cx="2148840" cy="457200"/>
           </a:xfrm>
           <a:prstGeom prst="rect">
@@ -14228,7 +15763,7 @@
                 <a:spcPts val="0"/>
               </a:spcAft>
               <a:buClr>
-                <a:srgbClr val="9DB0D0"/>
+                <a:srgbClr val="56627A"/>
               </a:buClr>
               <a:buSzPts val="1800"/>
               <a:buFont typeface="Arial"/>
@@ -14237,7 +15772,7 @@
             <a:r>
               <a:rPr b="1" i="0" lang="en-US" sz="1800" u="none" cap="none" strike="noStrike">
                 <a:solidFill>
-                  <a:srgbClr val="9DB0D0"/>
+                  <a:srgbClr val="56627A"/>
                 </a:solidFill>
                 <a:latin typeface="Arial"/>
                 <a:ea typeface="Arial"/>
@@ -14266,7 +15801,7 @@
         </p:nvSpPr>
         <p:spPr>
           <a:xfrm>
-            <a:off x="3493008" y="2249424"/>
+            <a:off x="3493008" y="2449224"/>
             <a:ext cx="2148840" cy="274320"/>
           </a:xfrm>
           <a:prstGeom prst="rect">
@@ -14291,7 +15826,7 @@
                 <a:spcPts val="0"/>
               </a:spcAft>
               <a:buClr>
-                <a:srgbClr val="9DB0D0"/>
+                <a:srgbClr val="56627A"/>
               </a:buClr>
               <a:buSzPts val="1050"/>
               <a:buFont typeface="Arial"/>
@@ -14300,7 +15835,7 @@
             <a:r>
               <a:rPr b="0" i="0" lang="en-US" sz="1050" u="none" cap="none" strike="noStrike">
                 <a:solidFill>
-                  <a:srgbClr val="9DB0D0"/>
+                  <a:srgbClr val="56627A"/>
                 </a:solidFill>
                 <a:latin typeface="Arial"/>
                 <a:ea typeface="Arial"/>
@@ -14329,7 +15864,7 @@
         </p:nvCxnSpPr>
         <p:spPr>
           <a:xfrm>
-            <a:off x="5833872" y="2121408"/>
+            <a:off x="5833872" y="2321208"/>
             <a:ext cx="182880" cy="0"/>
           </a:xfrm>
           <a:prstGeom prst="straightConnector1">
@@ -14338,7 +15873,7 @@
           <a:noFill/>
           <a:ln cap="flat" cmpd="sng" w="25400">
             <a:solidFill>
-              <a:srgbClr val="5BC8FF"/>
+              <a:srgbClr val="1488C2"/>
             </a:solidFill>
             <a:prstDash val="solid"/>
             <a:round/>
@@ -14355,7 +15890,7 @@
         </p:nvSpPr>
         <p:spPr>
           <a:xfrm>
-            <a:off x="6035040" y="1600200"/>
+            <a:off x="6035040" y="1800000"/>
             <a:ext cx="2514600" cy="1051560"/>
           </a:xfrm>
           <a:prstGeom prst="roundRect">
@@ -14364,11 +15899,11 @@
             </a:avLst>
           </a:prstGeom>
           <a:solidFill>
-            <a:srgbClr val="111C3C"/>
+            <a:srgbClr val="EEF3FB"/>
           </a:solidFill>
           <a:ln cap="flat" cmpd="sng" w="12700">
             <a:solidFill>
-              <a:srgbClr val="2A3B66"/>
+              <a:srgbClr val="D5DEEC"/>
             </a:solidFill>
             <a:prstDash val="solid"/>
             <a:round/>
@@ -14377,8 +15912,8 @@
           </a:ln>
           <a:effectLst>
             <a:outerShdw blurRad="114300" rotWithShape="0" algn="bl" dir="5400000" dist="38100">
-              <a:srgbClr val="000000">
-                <a:alpha val="45098"/>
+              <a:srgbClr val="16263F">
+                <a:alpha val="13000"/>
               </a:srgbClr>
             </a:outerShdw>
           </a:effectLst>
@@ -14413,7 +15948,7 @@
         </p:nvSpPr>
         <p:spPr>
           <a:xfrm>
-            <a:off x="6236208" y="1755648"/>
+            <a:off x="6236208" y="1955448"/>
             <a:ext cx="2148840" cy="457200"/>
           </a:xfrm>
           <a:prstGeom prst="rect">
@@ -14438,7 +15973,7 @@
                 <a:spcPts val="0"/>
               </a:spcAft>
               <a:buClr>
-                <a:srgbClr val="F5B454"/>
+                <a:srgbClr val="D9881C"/>
               </a:buClr>
               <a:buSzPts val="1500"/>
               <a:buFont typeface="Arial"/>
@@ -14447,7 +15982,7 @@
             <a:r>
               <a:rPr b="1" i="0" lang="en-US" sz="1500" u="none" cap="none" strike="noStrike">
                 <a:solidFill>
-                  <a:srgbClr val="F5B454"/>
+                  <a:srgbClr val="D9881C"/>
                 </a:solidFill>
                 <a:latin typeface="Arial"/>
                 <a:ea typeface="Arial"/>
@@ -14476,7 +16011,7 @@
         </p:nvSpPr>
         <p:spPr>
           <a:xfrm>
-            <a:off x="6236208" y="2249424"/>
+            <a:off x="6236208" y="2449224"/>
             <a:ext cx="2148840" cy="274320"/>
           </a:xfrm>
           <a:prstGeom prst="rect">
@@ -14501,7 +16036,7 @@
                 <a:spcPts val="0"/>
               </a:spcAft>
               <a:buClr>
-                <a:srgbClr val="9DB0D0"/>
+                <a:srgbClr val="56627A"/>
               </a:buClr>
               <a:buSzPts val="1050"/>
               <a:buFont typeface="Arial"/>
@@ -14510,7 +16045,7 @@
             <a:r>
               <a:rPr b="0" i="0" lang="en-US" sz="1050" u="none" cap="none" strike="noStrike">
                 <a:solidFill>
-                  <a:srgbClr val="9DB0D0"/>
+                  <a:srgbClr val="56627A"/>
                 </a:solidFill>
                 <a:latin typeface="Arial"/>
                 <a:ea typeface="Arial"/>
@@ -14539,7 +16074,7 @@
         </p:nvSpPr>
         <p:spPr>
           <a:xfrm>
-            <a:off x="548640" y="2971800"/>
+            <a:off x="548640" y="3171600"/>
             <a:ext cx="8046720" cy="1600200"/>
           </a:xfrm>
           <a:prstGeom prst="roundRect">
@@ -14548,11 +16083,11 @@
             </a:avLst>
           </a:prstGeom>
           <a:solidFill>
-            <a:srgbClr val="16244A"/>
+            <a:srgbClr val="E4ECF8"/>
           </a:solidFill>
           <a:ln cap="flat" cmpd="sng" w="12700">
             <a:solidFill>
-              <a:srgbClr val="2A3B66"/>
+              <a:srgbClr val="D5DEEC"/>
             </a:solidFill>
             <a:prstDash val="solid"/>
             <a:round/>
@@ -14561,8 +16096,8 @@
           </a:ln>
           <a:effectLst>
             <a:outerShdw blurRad="114300" rotWithShape="0" algn="bl" dir="5400000" dist="38100">
-              <a:srgbClr val="000000">
-                <a:alpha val="45098"/>
+              <a:srgbClr val="16263F">
+                <a:alpha val="13000"/>
               </a:srgbClr>
             </a:outerShdw>
           </a:effectLst>
@@ -14597,7 +16132,7 @@
         </p:nvSpPr>
         <p:spPr>
           <a:xfrm>
-            <a:off x="914400" y="3200400"/>
+            <a:off x="914400" y="3400200"/>
             <a:ext cx="7315200" cy="457200"/>
           </a:xfrm>
           <a:prstGeom prst="rect">
@@ -14622,7 +16157,7 @@
                 <a:spcPts val="0"/>
               </a:spcAft>
               <a:buClr>
-                <a:srgbClr val="EAF1FF"/>
+                <a:srgbClr val="16263F"/>
               </a:buClr>
               <a:buSzPts val="2000"/>
               <a:buFont typeface="Arial"/>
@@ -14631,7 +16166,7 @@
             <a:r>
               <a:rPr b="1" i="0" lang="en-US" sz="2000" u="none" cap="none" strike="noStrike">
                 <a:solidFill>
-                  <a:srgbClr val="EAF1FF"/>
+                  <a:srgbClr val="16263F"/>
                 </a:solidFill>
                 <a:latin typeface="Arial"/>
                 <a:ea typeface="Arial"/>
@@ -14643,7 +16178,7 @@
             <a:r>
               <a:rPr b="1" i="0" lang="en-US" sz="2000" u="none" cap="none" strike="noStrike">
                 <a:solidFill>
-                  <a:srgbClr val="F5B454"/>
+                  <a:srgbClr val="D9881C"/>
                 </a:solidFill>
                 <a:latin typeface="Arial"/>
                 <a:ea typeface="Arial"/>
@@ -14672,7 +16207,7 @@
         </p:nvSpPr>
         <p:spPr>
           <a:xfrm>
-            <a:off x="914400" y="3703320"/>
+            <a:off x="914400" y="3903120"/>
             <a:ext cx="7315200" cy="365760"/>
           </a:xfrm>
           <a:prstGeom prst="rect">
@@ -14697,7 +16232,7 @@
                 <a:spcPts val="0"/>
               </a:spcAft>
               <a:buClr>
-                <a:srgbClr val="9DB0D0"/>
+                <a:srgbClr val="56627A"/>
               </a:buClr>
               <a:buSzPts val="1400"/>
               <a:buFont typeface="Arial"/>
@@ -14706,7 +16241,7 @@
             <a:r>
               <a:rPr b="0" i="0" lang="en-US" sz="1400" u="none" cap="none" strike="noStrike">
                 <a:solidFill>
-                  <a:srgbClr val="9DB0D0"/>
+                  <a:srgbClr val="56627A"/>
                 </a:solidFill>
                 <a:latin typeface="Arial"/>
                 <a:ea typeface="Arial"/>
@@ -14718,7 +16253,7 @@
             <a:r>
               <a:rPr b="1" i="0" lang="en-US" sz="1400" u="none" cap="none" strike="noStrike">
                 <a:solidFill>
-                  <a:srgbClr val="5BC8FF"/>
+                  <a:srgbClr val="1488C2"/>
                 </a:solidFill>
                 <a:latin typeface="Arial"/>
                 <a:ea typeface="Arial"/>
@@ -14747,7 +16282,7 @@
         </p:nvSpPr>
         <p:spPr>
           <a:xfrm>
-            <a:off x="914400" y="4114800"/>
+            <a:off x="914400" y="4314600"/>
             <a:ext cx="7315200" cy="320040"/>
           </a:xfrm>
           <a:prstGeom prst="rect">
@@ -14772,7 +16307,7 @@
                 <a:spcPts val="0"/>
               </a:spcAft>
               <a:buClr>
-                <a:srgbClr val="F5B454"/>
+                <a:srgbClr val="D9881C"/>
               </a:buClr>
               <a:buSzPts val="1200"/>
               <a:buFont typeface="Arial"/>
@@ -14781,7 +16316,7 @@
             <a:r>
               <a:rPr b="1" i="0" lang="en-US" sz="1200" u="none" cap="none" strike="noStrike">
                 <a:solidFill>
-                  <a:srgbClr val="F5B454"/>
+                  <a:srgbClr val="D9881C"/>
                 </a:solidFill>
                 <a:latin typeface="Arial"/>
                 <a:ea typeface="Arial"/>
@@ -14799,6 +16334,181 @@
               <a:cs typeface="Calibri"/>
               <a:sym typeface="Calibri"/>
             </a:endParaRPr>
+          </a:p>
+        </p:txBody>
+      </p:sp>
+      <p:cxnSp>
+        <p:nvCxnSpPr>
+          <p:cNvPr id="215" name="Rule9"/>
+          <p:cNvCxnSpPr/>
+          <p:nvPr/>
+        </p:nvCxnSpPr>
+        <p:spPr>
+          <a:xfrm>
+            <a:off x="548640" y="957600"/>
+            <a:ext cx="8046720" cy="0"/>
+          </a:xfrm>
+          <a:prstGeom prst="line">
+            <a:avLst/>
+          </a:prstGeom>
+          <a:ln w="19050">
+            <a:solidFill>
+              <a:srgbClr val="9FAEC6"/>
+            </a:solidFill>
+          </a:ln>
+        </p:spPr>
+        <p:style>
+          <a:lnRef idx="2">
+            <a:schemeClr val="accent1"/>
+          </a:lnRef>
+          <a:fillRef idx="0">
+            <a:schemeClr val="accent1"/>
+          </a:fillRef>
+          <a:effectRef idx="1">
+            <a:schemeClr val="accent1"/>
+          </a:effectRef>
+          <a:fontRef idx="minor">
+            <a:schemeClr val="tx1"/>
+          </a:fontRef>
+        </p:style>
+      </p:cxnSp>
+      <p:sp>
+        <p:nvSpPr>
+          <p:cNvPr id="216" name="KeyBox9"/>
+          <p:cNvSpPr/>
+          <p:nvPr/>
+        </p:nvSpPr>
+        <p:spPr>
+          <a:xfrm>
+            <a:off x="548640" y="1029600"/>
+            <a:ext cx="8046720" cy="691200"/>
+          </a:xfrm>
+          <a:prstGeom prst="rect">
+            <a:avLst/>
+          </a:prstGeom>
+          <a:solidFill>
+            <a:srgbClr val="EEF0F4"/>
+          </a:solidFill>
+          <a:ln w="9525">
+            <a:solidFill>
+              <a:srgbClr val="D7DCE5"/>
+            </a:solidFill>
+          </a:ln>
+          <a:effectLst/>
+        </p:spPr>
+        <p:txBody>
+          <a:bodyPr rtlCol="0" anchor="ctr" wrap="square" lIns="216000" rIns="108000" tIns="28800" bIns="28800"/>
+          <a:lstStyle/>
+          <a:p>
+            <a:pPr algn="l" marL="198000" indent="-162000">
+              <a:lnSpc>
+                <a:spcPct val="105000"/>
+              </a:lnSpc>
+              <a:spcBef>
+                <a:spcPts val="300"/>
+              </a:spcBef>
+              <a:spcAft>
+                <a:spcPts val="300"/>
+              </a:spcAft>
+              <a:buClr>
+                <a:srgbClr val="1488C2"/>
+              </a:buClr>
+              <a:buFont typeface="Arial"/>
+              <a:buChar char="▪"/>
+            </a:pPr>
+            <a:r>
+              <a:rPr sz="1100" b="0">
+                <a:solidFill>
+                  <a:srgbClr val="16263F"/>
+                </a:solidFill>
+                <a:latin typeface="Arial"/>
+              </a:rPr>
+              <a:t>売上85億円×ソフトマルチプル15〜18倍＝企業価値1,500〜1,800億円。</a:t>
+            </a:r>
+          </a:p>
+          <a:p>
+            <a:pPr algn="l" marL="198000" indent="-162000">
+              <a:lnSpc>
+                <a:spcPct val="105000"/>
+              </a:lnSpc>
+              <a:spcBef>
+                <a:spcPts val="300"/>
+              </a:spcBef>
+              <a:spcAft>
+                <a:spcPts val="300"/>
+              </a:spcAft>
+              <a:buClr>
+                <a:srgbClr val="1488C2"/>
+              </a:buClr>
+              <a:buFont typeface="Arial"/>
+              <a:buChar char="▪"/>
+            </a:pPr>
+            <a:r>
+              <a:rPr sz="1100" b="0">
+                <a:solidFill>
+                  <a:srgbClr val="16263F"/>
+                </a:solidFill>
+                <a:latin typeface="Arial"/>
+              </a:rPr>
+              <a:t>持分11%×Exit1,800億円＝約200億円。1社でファンドの約1.3倍を回収。</a:t>
+            </a:r>
+          </a:p>
+          <a:p>
+            <a:pPr algn="l" marL="198000" indent="-162000">
+              <a:lnSpc>
+                <a:spcPct val="105000"/>
+              </a:lnSpc>
+              <a:spcBef>
+                <a:spcPts val="300"/>
+              </a:spcBef>
+              <a:spcAft>
+                <a:spcPts val="300"/>
+              </a:spcAft>
+              <a:buClr>
+                <a:srgbClr val="1488C2"/>
+              </a:buClr>
+              <a:buFont typeface="Arial"/>
+              <a:buChar char="▪"/>
+            </a:pPr>
+            <a:r>
+              <a:rPr sz="1100" b="0">
+                <a:solidFill>
+                  <a:srgbClr val="16263F"/>
+                </a:solidFill>
+                <a:latin typeface="Arial"/>
+              </a:rPr>
+              <a:t>「持分×Exit ≧ ファンド総額」を満たすファンドリターナー。</a:t>
+            </a:r>
+          </a:p>
+        </p:txBody>
+      </p:sp>
+      <p:sp>
+        <p:nvSpPr>
+          <p:cNvPr id="217" name="KeyBar9"/>
+          <p:cNvSpPr/>
+          <p:nvPr/>
+        </p:nvSpPr>
+        <p:spPr>
+          <a:xfrm>
+            <a:off x="548640" y="1029600"/>
+            <a:ext cx="54000" cy="691200"/>
+          </a:xfrm>
+          <a:prstGeom prst="rect">
+            <a:avLst/>
+          </a:prstGeom>
+          <a:solidFill>
+            <a:srgbClr val="1488C2"/>
+          </a:solidFill>
+          <a:ln>
+            <a:noFill/>
+          </a:ln>
+          <a:effectLst/>
+        </p:spPr>
+        <p:txBody>
+          <a:bodyPr rtlCol="0" anchor="ctr"/>
+          <a:lstStyle/>
+          <a:p>
+            <a:pPr algn="ctr"/>
           </a:p>
         </p:txBody>
       </p:sp>

--- a/template/identity_academy_vc課題_A班.pptx
+++ b/template/identity_academy_vc課題_A班.pptx
@@ -9,6 +9,7 @@
   </p:notesMasterIdLst>
   <p:sldIdLst>
     <p:sldId id="256" r:id="rId5"/>
+    <p:sldId id="268" r:id="rId17"/>
     <p:sldId id="267" r:id="rId16"/>
     <p:sldId id="257" r:id="rId6"/>
     <p:sldId id="258" r:id="rId7"/>
@@ -4425,7 +4426,7 @@
     </p:bg>
     <p:spTree>
       <p:nvGrpSpPr>
-        <p:cNvPr id="219" name="Shape 219"/>
+        <p:cNvPr id="197" name="Shape 197"/>
         <p:cNvGrpSpPr/>
         <p:nvPr/>
       </p:nvGrpSpPr>
@@ -4439,7 +4440,7 @@
       </p:grpSpPr>
       <p:sp>
         <p:nvSpPr>
-          <p:cNvPr id="221" name="Google Shape;221;p12"/>
+          <p:cNvPr id="199" name="Google Shape;199;p11"/>
           <p:cNvSpPr/>
           <p:nvPr/>
         </p:nvSpPr>
@@ -4486,7 +4487,7 @@
                 <a:cs typeface="Arial"/>
                 <a:sym typeface="Arial"/>
               </a:rPr>
-              <a:t>弱点を、先に潰す</a:t>
+              <a:t>1社でファンドを返す</a:t>
             </a:r>
             <a:endParaRPr b="0" i="0" sz="2900" u="none" cap="none" strike="noStrike">
               <a:solidFill>
@@ -4502,18 +4503,18 @@
       </p:sp>
       <p:sp>
         <p:nvSpPr>
-          <p:cNvPr id="222" name="Google Shape;222;p12"/>
+          <p:cNvPr id="200" name="Google Shape;200;p11"/>
           <p:cNvSpPr/>
           <p:nvPr/>
         </p:nvSpPr>
         <p:spPr>
           <a:xfrm>
             <a:off x="548640" y="1800000"/>
-            <a:ext cx="3886200" cy="1280160"/>
+            <a:ext cx="2514600" cy="1051560"/>
           </a:xfrm>
           <a:prstGeom prst="roundRect">
             <a:avLst>
-              <a:gd fmla="val 6429" name="adj"/>
+              <a:gd fmla="val 7826" name="adj"/>
             </a:avLst>
           </a:prstGeom>
           <a:solidFill>
@@ -4558,23 +4559,16 @@
           </a:p>
         </p:txBody>
       </p:sp>
-      <p:pic>
-        <p:nvPicPr>
-          <p:cNvPr descr="preencoded.png" id="223" name="Google Shape;223;p12"/>
-          <p:cNvPicPr preferRelativeResize="0"/>
-          <p:nvPr/>
-        </p:nvPicPr>
-        <p:blipFill rotWithShape="1">
-          <a:blip r:embed="rId4">
-            <a:alphaModFix/>
-          </a:blip>
-          <a:srcRect b="0" l="0" r="0" t="0"/>
-          <a:stretch/>
-        </p:blipFill>
-        <p:spPr>
-          <a:xfrm>
-            <a:off x="777240" y="2028600"/>
-            <a:ext cx="292608" cy="292608"/>
+      <p:sp>
+        <p:nvSpPr>
+          <p:cNvPr id="201" name="Google Shape;201;p11"/>
+          <p:cNvSpPr/>
+          <p:nvPr/>
+        </p:nvSpPr>
+        <p:spPr>
+          <a:xfrm>
+            <a:off x="749808" y="1955448"/>
+            <a:ext cx="2148840" cy="457200"/>
           </a:xfrm>
           <a:prstGeom prst="rect">
             <a:avLst/>
@@ -4584,26 +4578,6 @@
             <a:noFill/>
           </a:ln>
         </p:spPr>
-      </p:pic>
-      <p:sp>
-        <p:nvSpPr>
-          <p:cNvPr id="224" name="Google Shape;224;p12"/>
-          <p:cNvSpPr/>
-          <p:nvPr/>
-        </p:nvSpPr>
-        <p:spPr>
-          <a:xfrm>
-            <a:off x="1170432" y="2001168"/>
-            <a:ext cx="3108960" cy="365760"/>
-          </a:xfrm>
-          <a:prstGeom prst="rect">
-            <a:avLst/>
-          </a:prstGeom>
-          <a:noFill/>
-          <a:ln>
-            <a:noFill/>
-          </a:ln>
-        </p:spPr>
         <p:txBody>
           <a:bodyPr anchorCtr="0" anchor="ctr" bIns="0" lIns="0" spcFirstLastPara="1" rIns="0" wrap="square" tIns="0">
             <a:noAutofit/>
@@ -4618,25 +4592,25 @@
                 <a:spcPts val="0"/>
               </a:spcAft>
               <a:buClr>
-                <a:srgbClr val="D9881C"/>
+                <a:srgbClr val="1488C2"/>
               </a:buClr>
-              <a:buSzPts val="1400"/>
+              <a:buSzPts val="1800"/>
               <a:buFont typeface="Arial"/>
               <a:buNone/>
             </a:pPr>
             <a:r>
-              <a:rPr b="1" i="0" lang="en-US" sz="1400" u="none" cap="none" strike="noStrike">
-                <a:solidFill>
-                  <a:srgbClr val="D9881C"/>
+              <a:rPr b="1" i="0" lang="en-US" sz="1800" u="none" cap="none" strike="noStrike">
+                <a:solidFill>
+                  <a:srgbClr val="1488C2"/>
                 </a:solidFill>
                 <a:latin typeface="Arial"/>
                 <a:ea typeface="Arial"/>
                 <a:cs typeface="Arial"/>
                 <a:sym typeface="Arial"/>
               </a:rPr>
-              <a:t>出口が未実証</a:t>
-            </a:r>
-            <a:endParaRPr b="0" i="0" sz="1400" u="none" cap="none" strike="noStrike">
+              <a:t>売上 ¥85億</a:t>
+            </a:r>
+            <a:endParaRPr b="0" i="0" sz="1800" u="none" cap="none" strike="noStrike">
               <a:solidFill>
                 <a:schemeClr val="dk1"/>
               </a:solidFill>
@@ -4650,14 +4624,14 @@
       </p:sp>
       <p:sp>
         <p:nvSpPr>
-          <p:cNvPr id="225" name="Google Shape;225;p12"/>
-          <p:cNvSpPr/>
-          <p:nvPr/>
-        </p:nvSpPr>
-        <p:spPr>
-          <a:xfrm>
-            <a:off x="777240" y="2421792"/>
-            <a:ext cx="3474720" cy="548640"/>
+          <p:cNvPr id="202" name="Google Shape;202;p11"/>
+          <p:cNvSpPr/>
+          <p:nvPr/>
+        </p:nvSpPr>
+        <p:spPr>
+          <a:xfrm>
+            <a:off x="749808" y="2449224"/>
+            <a:ext cx="2148840" cy="274320"/>
           </a:xfrm>
           <a:prstGeom prst="rect">
             <a:avLst/>
@@ -4683,12 +4657,12 @@
               <a:buClr>
                 <a:srgbClr val="56627A"/>
               </a:buClr>
-              <a:buSzPts val="1150"/>
+              <a:buSzPts val="1050"/>
               <a:buFont typeface="Arial"/>
               <a:buNone/>
             </a:pPr>
             <a:r>
-              <a:rPr b="0" i="0" lang="en-US" sz="1150" u="none" cap="none" strike="noStrike">
+              <a:rPr b="0" i="0" lang="en-US" sz="1050" u="none" cap="none" strike="noStrike">
                 <a:solidFill>
                   <a:srgbClr val="56627A"/>
                 </a:solidFill>
@@ -4697,9 +4671,9 @@
                 <a:cs typeface="Arial"/>
                 <a:sym typeface="Arial"/>
               </a:rPr>
-              <a:t>上場済み宇宙SU（Synspective等）が実証。日本IPO波に乗る</a:t>
-            </a:r>
-            <a:endParaRPr b="0" i="0" sz="1150" u="none" cap="none" strike="noStrike">
+              <a:t>2030</a:t>
+            </a:r>
+            <a:endParaRPr b="0" i="0" sz="1050" u="none" cap="none" strike="noStrike">
               <a:solidFill>
                 <a:schemeClr val="dk1"/>
               </a:solidFill>
@@ -4711,20 +4685,46 @@
           </a:p>
         </p:txBody>
       </p:sp>
-      <p:sp>
-        <p:nvSpPr>
-          <p:cNvPr id="226" name="Google Shape;226;p12"/>
-          <p:cNvSpPr/>
-          <p:nvPr/>
-        </p:nvSpPr>
-        <p:spPr>
-          <a:xfrm>
-            <a:off x="4663440" y="1800000"/>
-            <a:ext cx="3886200" cy="1280160"/>
+      <p:cxnSp>
+        <p:nvCxnSpPr>
+          <p:cNvPr id="203" name="Google Shape;203;p11"/>
+          <p:cNvCxnSpPr/>
+          <p:nvPr/>
+        </p:nvCxnSpPr>
+        <p:spPr>
+          <a:xfrm>
+            <a:off x="3090672" y="2321208"/>
+            <a:ext cx="182880" cy="0"/>
+          </a:xfrm>
+          <a:prstGeom prst="straightConnector1">
+            <a:avLst/>
+          </a:prstGeom>
+          <a:noFill/>
+          <a:ln cap="flat" cmpd="sng" w="25400">
+            <a:solidFill>
+              <a:srgbClr val="1488C2"/>
+            </a:solidFill>
+            <a:prstDash val="solid"/>
+            <a:round/>
+            <a:headEnd len="sm" w="sm" type="none"/>
+            <a:tailEnd len="sm" w="sm" type="none"/>
+          </a:ln>
+        </p:spPr>
+      </p:cxnSp>
+      <p:sp>
+        <p:nvSpPr>
+          <p:cNvPr id="204" name="Google Shape;204;p11"/>
+          <p:cNvSpPr/>
+          <p:nvPr/>
+        </p:nvSpPr>
+        <p:spPr>
+          <a:xfrm>
+            <a:off x="3291840" y="1800000"/>
+            <a:ext cx="2514600" cy="1051560"/>
           </a:xfrm>
           <a:prstGeom prst="roundRect">
             <a:avLst>
-              <a:gd fmla="val 6429" name="adj"/>
+              <a:gd fmla="val 7826" name="adj"/>
             </a:avLst>
           </a:prstGeom>
           <a:solidFill>
@@ -4769,23 +4769,16 @@
           </a:p>
         </p:txBody>
       </p:sp>
-      <p:pic>
-        <p:nvPicPr>
-          <p:cNvPr descr="preencoded.png" id="227" name="Google Shape;227;p12"/>
-          <p:cNvPicPr preferRelativeResize="0"/>
-          <p:nvPr/>
-        </p:nvPicPr>
-        <p:blipFill rotWithShape="1">
-          <a:blip r:embed="rId4">
-            <a:alphaModFix/>
-          </a:blip>
-          <a:srcRect b="0" l="0" r="0" t="0"/>
-          <a:stretch/>
-        </p:blipFill>
-        <p:spPr>
-          <a:xfrm>
-            <a:off x="4892040" y="2028600"/>
-            <a:ext cx="292608" cy="292608"/>
+      <p:sp>
+        <p:nvSpPr>
+          <p:cNvPr id="205" name="Google Shape;205;p11"/>
+          <p:cNvSpPr/>
+          <p:nvPr/>
+        </p:nvSpPr>
+        <p:spPr>
+          <a:xfrm>
+            <a:off x="3493008" y="1955448"/>
+            <a:ext cx="2148840" cy="457200"/>
           </a:xfrm>
           <a:prstGeom prst="rect">
             <a:avLst/>
@@ -4795,26 +4788,6 @@
             <a:noFill/>
           </a:ln>
         </p:spPr>
-      </p:pic>
-      <p:sp>
-        <p:nvSpPr>
-          <p:cNvPr id="228" name="Google Shape;228;p12"/>
-          <p:cNvSpPr/>
-          <p:nvPr/>
-        </p:nvSpPr>
-        <p:spPr>
-          <a:xfrm>
-            <a:off x="5285232" y="2001168"/>
-            <a:ext cx="3108960" cy="365760"/>
-          </a:xfrm>
-          <a:prstGeom prst="rect">
-            <a:avLst/>
-          </a:prstGeom>
-          <a:noFill/>
-          <a:ln>
-            <a:noFill/>
-          </a:ln>
-        </p:spPr>
         <p:txBody>
           <a:bodyPr anchorCtr="0" anchor="ctr" bIns="0" lIns="0" spcFirstLastPara="1" rIns="0" wrap="square" tIns="0">
             <a:noAutofit/>
@@ -4829,25 +4802,25 @@
                 <a:spcPts val="0"/>
               </a:spcAft>
               <a:buClr>
-                <a:srgbClr val="D9881C"/>
+                <a:srgbClr val="56627A"/>
               </a:buClr>
-              <a:buSzPts val="1400"/>
+              <a:buSzPts val="1800"/>
               <a:buFont typeface="Arial"/>
               <a:buNone/>
             </a:pPr>
             <a:r>
-              <a:rPr b="1" i="0" lang="en-US" sz="1400" u="none" cap="none" strike="noStrike">
-                <a:solidFill>
-                  <a:srgbClr val="D9881C"/>
+              <a:rPr b="1" i="0" lang="en-US" sz="1800" u="none" cap="none" strike="noStrike">
+                <a:solidFill>
+                  <a:srgbClr val="56627A"/>
                 </a:solidFill>
                 <a:latin typeface="Arial"/>
                 <a:ea typeface="Arial"/>
                 <a:cs typeface="Arial"/>
                 <a:sym typeface="Arial"/>
               </a:rPr>
-              <a:t>政府依存・調達変動</a:t>
-            </a:r>
-            <a:endParaRPr b="0" i="0" sz="1400" u="none" cap="none" strike="noStrike">
+              <a:t>× 15–18倍</a:t>
+            </a:r>
+            <a:endParaRPr b="0" i="0" sz="1800" u="none" cap="none" strike="noStrike">
               <a:solidFill>
                 <a:schemeClr val="dk1"/>
               </a:solidFill>
@@ -4861,14 +4834,14 @@
       </p:sp>
       <p:sp>
         <p:nvSpPr>
-          <p:cNvPr id="229" name="Google Shape;229;p12"/>
-          <p:cNvSpPr/>
-          <p:nvPr/>
-        </p:nvSpPr>
-        <p:spPr>
-          <a:xfrm>
-            <a:off x="4892040" y="2421792"/>
-            <a:ext cx="3474720" cy="548640"/>
+          <p:cNvPr id="206" name="Google Shape;206;p11"/>
+          <p:cNvSpPr/>
+          <p:nvPr/>
+        </p:nvSpPr>
+        <p:spPr>
+          <a:xfrm>
+            <a:off x="3493008" y="2449224"/>
+            <a:ext cx="2148840" cy="274320"/>
           </a:xfrm>
           <a:prstGeom prst="rect">
             <a:avLst/>
@@ -4894,12 +4867,12 @@
               <a:buClr>
                 <a:srgbClr val="56627A"/>
               </a:buClr>
-              <a:buSzPts val="1150"/>
+              <a:buSzPts val="1050"/>
               <a:buFont typeface="Arial"/>
               <a:buNone/>
             </a:pPr>
             <a:r>
-              <a:rPr b="0" i="0" lang="en-US" sz="1150" u="none" cap="none" strike="noStrike">
+              <a:rPr b="0" i="0" lang="en-US" sz="1050" u="none" cap="none" strike="noStrike">
                 <a:solidFill>
                   <a:srgbClr val="56627A"/>
                 </a:solidFill>
@@ -4908,9 +4881,9 @@
                 <a:cs typeface="Arial"/>
                 <a:sym typeface="Arial"/>
               </a:rPr>
-              <a:t>マイルストン連動＋同志国横展開でリカーリング化</a:t>
-            </a:r>
-            <a:endParaRPr b="0" i="0" sz="1150" u="none" cap="none" strike="noStrike">
+              <a:t>ソフト・マルチプル</a:t>
+            </a:r>
+            <a:endParaRPr b="0" i="0" sz="1050" u="none" cap="none" strike="noStrike">
               <a:solidFill>
                 <a:schemeClr val="dk1"/>
               </a:solidFill>
@@ -4922,20 +4895,46 @@
           </a:p>
         </p:txBody>
       </p:sp>
-      <p:sp>
-        <p:nvSpPr>
-          <p:cNvPr id="230" name="Google Shape;230;p12"/>
-          <p:cNvSpPr/>
-          <p:nvPr/>
-        </p:nvSpPr>
-        <p:spPr>
-          <a:xfrm>
-            <a:off x="548640" y="3263040"/>
-            <a:ext cx="3886200" cy="1280160"/>
+      <p:cxnSp>
+        <p:nvCxnSpPr>
+          <p:cNvPr id="207" name="Google Shape;207;p11"/>
+          <p:cNvCxnSpPr/>
+          <p:nvPr/>
+        </p:nvCxnSpPr>
+        <p:spPr>
+          <a:xfrm>
+            <a:off x="5833872" y="2321208"/>
+            <a:ext cx="182880" cy="0"/>
+          </a:xfrm>
+          <a:prstGeom prst="straightConnector1">
+            <a:avLst/>
+          </a:prstGeom>
+          <a:noFill/>
+          <a:ln cap="flat" cmpd="sng" w="25400">
+            <a:solidFill>
+              <a:srgbClr val="1488C2"/>
+            </a:solidFill>
+            <a:prstDash val="solid"/>
+            <a:round/>
+            <a:headEnd len="sm" w="sm" type="none"/>
+            <a:tailEnd len="sm" w="sm" type="none"/>
+          </a:ln>
+        </p:spPr>
+      </p:cxnSp>
+      <p:sp>
+        <p:nvSpPr>
+          <p:cNvPr id="208" name="Google Shape;208;p11"/>
+          <p:cNvSpPr/>
+          <p:nvPr/>
+        </p:nvSpPr>
+        <p:spPr>
+          <a:xfrm>
+            <a:off x="6035040" y="1800000"/>
+            <a:ext cx="2514600" cy="1051560"/>
           </a:xfrm>
           <a:prstGeom prst="roundRect">
             <a:avLst>
-              <a:gd fmla="val 6429" name="adj"/>
+              <a:gd fmla="val 7826" name="adj"/>
             </a:avLst>
           </a:prstGeom>
           <a:solidFill>
@@ -4980,43 +4979,16 @@
           </a:p>
         </p:txBody>
       </p:sp>
-      <p:pic>
-        <p:nvPicPr>
-          <p:cNvPr descr="preencoded.png" id="231" name="Google Shape;231;p12"/>
-          <p:cNvPicPr preferRelativeResize="0"/>
-          <p:nvPr/>
-        </p:nvPicPr>
-        <p:blipFill rotWithShape="1">
-          <a:blip r:embed="rId4">
-            <a:alphaModFix/>
-          </a:blip>
-          <a:srcRect b="0" l="0" r="0" t="0"/>
-          <a:stretch/>
-        </p:blipFill>
-        <p:spPr>
-          <a:xfrm>
-            <a:off x="777240" y="3491640"/>
-            <a:ext cx="292608" cy="292608"/>
-          </a:xfrm>
-          <a:prstGeom prst="rect">
-            <a:avLst/>
-          </a:prstGeom>
-          <a:noFill/>
-          <a:ln>
-            <a:noFill/>
-          </a:ln>
-        </p:spPr>
-      </p:pic>
-      <p:sp>
-        <p:nvSpPr>
-          <p:cNvPr id="232" name="Google Shape;232;p12"/>
-          <p:cNvSpPr/>
-          <p:nvPr/>
-        </p:nvSpPr>
-        <p:spPr>
-          <a:xfrm>
-            <a:off x="1170432" y="3464208"/>
-            <a:ext cx="3108960" cy="365760"/>
+      <p:sp>
+        <p:nvSpPr>
+          <p:cNvPr id="209" name="Google Shape;209;p11"/>
+          <p:cNvSpPr/>
+          <p:nvPr/>
+        </p:nvSpPr>
+        <p:spPr>
+          <a:xfrm>
+            <a:off x="6236208" y="1955448"/>
+            <a:ext cx="2148840" cy="457200"/>
           </a:xfrm>
           <a:prstGeom prst="rect">
             <a:avLst/>
@@ -5042,12 +5014,12 @@
               <a:buClr>
                 <a:srgbClr val="D9881C"/>
               </a:buClr>
-              <a:buSzPts val="1400"/>
+              <a:buSzPts val="1500"/>
               <a:buFont typeface="Arial"/>
               <a:buNone/>
             </a:pPr>
             <a:r>
-              <a:rPr b="1" i="0" lang="en-US" sz="1400" u="none" cap="none" strike="noStrike">
+              <a:rPr b="1" i="0" lang="en-US" sz="1500" u="none" cap="none" strike="noStrike">
                 <a:solidFill>
                   <a:srgbClr val="D9881C"/>
                 </a:solidFill>
@@ -5056,7 +5028,278 @@
                 <a:cs typeface="Arial"/>
                 <a:sym typeface="Arial"/>
               </a:rPr>
-              <a:t>バリュエーション非開示</a:t>
+              <a:t>企業価値 ¥1,500–1,800億</a:t>
+            </a:r>
+            <a:endParaRPr b="0" i="0" sz="1500" u="none" cap="none" strike="noStrike">
+              <a:solidFill>
+                <a:schemeClr val="dk1"/>
+              </a:solidFill>
+              <a:latin typeface="Calibri"/>
+              <a:ea typeface="Calibri"/>
+              <a:cs typeface="Calibri"/>
+              <a:sym typeface="Calibri"/>
+            </a:endParaRPr>
+          </a:p>
+        </p:txBody>
+      </p:sp>
+      <p:sp>
+        <p:nvSpPr>
+          <p:cNvPr id="210" name="Google Shape;210;p11"/>
+          <p:cNvSpPr/>
+          <p:nvPr/>
+        </p:nvSpPr>
+        <p:spPr>
+          <a:xfrm>
+            <a:off x="6236208" y="2449224"/>
+            <a:ext cx="2148840" cy="274320"/>
+          </a:xfrm>
+          <a:prstGeom prst="rect">
+            <a:avLst/>
+          </a:prstGeom>
+          <a:noFill/>
+          <a:ln>
+            <a:noFill/>
+          </a:ln>
+        </p:spPr>
+        <p:txBody>
+          <a:bodyPr anchorCtr="0" anchor="ctr" bIns="0" lIns="0" spcFirstLastPara="1" rIns="0" wrap="square" tIns="0">
+            <a:noAutofit/>
+          </a:bodyPr>
+          <a:lstStyle/>
+          <a:p>
+            <a:pPr indent="0" lvl="0" marL="0" marR="0" rtl="0" algn="l">
+              <a:spcBef>
+                <a:spcPts val="0"/>
+              </a:spcBef>
+              <a:spcAft>
+                <a:spcPts val="0"/>
+              </a:spcAft>
+              <a:buClr>
+                <a:srgbClr val="56627A"/>
+              </a:buClr>
+              <a:buSzPts val="1050"/>
+              <a:buFont typeface="Arial"/>
+              <a:buNone/>
+            </a:pPr>
+            <a:r>
+              <a:rPr b="0" i="0" lang="en-US" sz="1050" u="none" cap="none" strike="noStrike">
+                <a:solidFill>
+                  <a:srgbClr val="56627A"/>
+                </a:solidFill>
+                <a:latin typeface="Arial"/>
+                <a:ea typeface="Arial"/>
+                <a:cs typeface="Arial"/>
+                <a:sym typeface="Arial"/>
+              </a:rPr>
+              <a:t>Exit 2032・IPO/M&amp;A</a:t>
+            </a:r>
+            <a:endParaRPr b="0" i="0" sz="1050" u="none" cap="none" strike="noStrike">
+              <a:solidFill>
+                <a:schemeClr val="dk1"/>
+              </a:solidFill>
+              <a:latin typeface="Calibri"/>
+              <a:ea typeface="Calibri"/>
+              <a:cs typeface="Calibri"/>
+              <a:sym typeface="Calibri"/>
+            </a:endParaRPr>
+          </a:p>
+        </p:txBody>
+      </p:sp>
+      <p:sp>
+        <p:nvSpPr>
+          <p:cNvPr id="211" name="Google Shape;211;p11"/>
+          <p:cNvSpPr/>
+          <p:nvPr/>
+        </p:nvSpPr>
+        <p:spPr>
+          <a:xfrm>
+            <a:off x="548640" y="3171600"/>
+            <a:ext cx="8046720" cy="1600200"/>
+          </a:xfrm>
+          <a:prstGeom prst="roundRect">
+            <a:avLst>
+              <a:gd fmla="val 5143" name="adj"/>
+            </a:avLst>
+          </a:prstGeom>
+          <a:solidFill>
+            <a:srgbClr val="E4ECF8"/>
+          </a:solidFill>
+          <a:ln cap="flat" cmpd="sng" w="12700">
+            <a:solidFill>
+              <a:srgbClr val="D5DEEC"/>
+            </a:solidFill>
+            <a:prstDash val="solid"/>
+            <a:round/>
+            <a:headEnd len="sm" w="sm" type="none"/>
+            <a:tailEnd len="sm" w="sm" type="none"/>
+          </a:ln>
+          <a:effectLst>
+            <a:outerShdw blurRad="114300" rotWithShape="0" algn="bl" dir="5400000" dist="38100">
+              <a:srgbClr val="16263F">
+                <a:alpha val="13000"/>
+              </a:srgbClr>
+            </a:outerShdw>
+          </a:effectLst>
+        </p:spPr>
+        <p:txBody>
+          <a:bodyPr anchorCtr="0" anchor="ctr" bIns="91425" lIns="91425" spcFirstLastPara="1" rIns="91425" wrap="square" tIns="91425">
+            <a:noAutofit/>
+          </a:bodyPr>
+          <a:lstStyle/>
+          <a:p>
+            <a:pPr indent="0" lvl="0" marL="0" rtl="0" algn="l">
+              <a:spcBef>
+                <a:spcPts val="0"/>
+              </a:spcBef>
+              <a:spcAft>
+                <a:spcPts val="0"/>
+              </a:spcAft>
+              <a:buNone/>
+            </a:pPr>
+            <a:r>
+              <a:t/>
+            </a:r>
+            <a:endParaRPr/>
+          </a:p>
+        </p:txBody>
+      </p:sp>
+      <p:sp>
+        <p:nvSpPr>
+          <p:cNvPr id="212" name="Google Shape;212;p11"/>
+          <p:cNvSpPr/>
+          <p:nvPr/>
+        </p:nvSpPr>
+        <p:spPr>
+          <a:xfrm>
+            <a:off x="914400" y="3400200"/>
+            <a:ext cx="7315200" cy="457200"/>
+          </a:xfrm>
+          <a:prstGeom prst="rect">
+            <a:avLst/>
+          </a:prstGeom>
+          <a:noFill/>
+          <a:ln>
+            <a:noFill/>
+          </a:ln>
+        </p:spPr>
+        <p:txBody>
+          <a:bodyPr anchorCtr="0" anchor="ctr" bIns="0" lIns="0" spcFirstLastPara="1" rIns="0" wrap="square" tIns="0">
+            <a:noAutofit/>
+          </a:bodyPr>
+          <a:lstStyle/>
+          <a:p>
+            <a:pPr indent="0" lvl="0" marL="0" marR="0" rtl="0" algn="l">
+              <a:spcBef>
+                <a:spcPts val="0"/>
+              </a:spcBef>
+              <a:spcAft>
+                <a:spcPts val="0"/>
+              </a:spcAft>
+              <a:buClr>
+                <a:srgbClr val="16263F"/>
+              </a:buClr>
+              <a:buSzPts val="2000"/>
+              <a:buFont typeface="Arial"/>
+              <a:buNone/>
+            </a:pPr>
+            <a:r>
+              <a:rPr b="1" i="0" lang="en-US" sz="2000" u="none" cap="none" strike="noStrike">
+                <a:solidFill>
+                  <a:srgbClr val="16263F"/>
+                </a:solidFill>
+                <a:latin typeface="Arial"/>
+                <a:ea typeface="Arial"/>
+                <a:cs typeface="Arial"/>
+                <a:sym typeface="Arial"/>
+              </a:rPr>
+              <a:t>持分 11%  ×  Exit ¥1,800億  =  </a:t>
+            </a:r>
+            <a:r>
+              <a:rPr b="1" i="0" lang="en-US" sz="2000" u="none" cap="none" strike="noStrike">
+                <a:solidFill>
+                  <a:srgbClr val="D9881C"/>
+                </a:solidFill>
+                <a:latin typeface="Arial"/>
+                <a:ea typeface="Arial"/>
+                <a:cs typeface="Arial"/>
+                <a:sym typeface="Arial"/>
+              </a:rPr>
+              <a:t>¥約200億</a:t>
+            </a:r>
+            <a:endParaRPr b="0" i="0" sz="2000" u="none" cap="none" strike="noStrike">
+              <a:solidFill>
+                <a:schemeClr val="dk1"/>
+              </a:solidFill>
+              <a:latin typeface="Calibri"/>
+              <a:ea typeface="Calibri"/>
+              <a:cs typeface="Calibri"/>
+              <a:sym typeface="Calibri"/>
+            </a:endParaRPr>
+          </a:p>
+        </p:txBody>
+      </p:sp>
+      <p:sp>
+        <p:nvSpPr>
+          <p:cNvPr id="213" name="Google Shape;213;p11"/>
+          <p:cNvSpPr/>
+          <p:nvPr/>
+        </p:nvSpPr>
+        <p:spPr>
+          <a:xfrm>
+            <a:off x="914400" y="3903120"/>
+            <a:ext cx="7315200" cy="365760"/>
+          </a:xfrm>
+          <a:prstGeom prst="rect">
+            <a:avLst/>
+          </a:prstGeom>
+          <a:noFill/>
+          <a:ln>
+            <a:noFill/>
+          </a:ln>
+        </p:spPr>
+        <p:txBody>
+          <a:bodyPr anchorCtr="0" anchor="ctr" bIns="0" lIns="0" spcFirstLastPara="1" rIns="0" wrap="square" tIns="0">
+            <a:noAutofit/>
+          </a:bodyPr>
+          <a:lstStyle/>
+          <a:p>
+            <a:pPr indent="0" lvl="0" marL="0" marR="0" rtl="0" algn="l">
+              <a:spcBef>
+                <a:spcPts val="0"/>
+              </a:spcBef>
+              <a:spcAft>
+                <a:spcPts val="0"/>
+              </a:spcAft>
+              <a:buClr>
+                <a:srgbClr val="56627A"/>
+              </a:buClr>
+              <a:buSzPts val="1400"/>
+              <a:buFont typeface="Arial"/>
+              <a:buNone/>
+            </a:pPr>
+            <a:r>
+              <a:rPr b="0" i="0" lang="en-US" sz="1400" u="none" cap="none" strike="noStrike">
+                <a:solidFill>
+                  <a:srgbClr val="56627A"/>
+                </a:solidFill>
+                <a:latin typeface="Arial"/>
+                <a:ea typeface="Arial"/>
+                <a:cs typeface="Arial"/>
+                <a:sym typeface="Arial"/>
+              </a:rPr>
+              <a:t>＝ ファンド(¥150億)の 約1.3倍 を1社で回収。  </a:t>
+            </a:r>
+            <a:r>
+              <a:rPr b="1" i="0" lang="en-US" sz="1400" u="none" cap="none" strike="noStrike">
+                <a:solidFill>
+                  <a:srgbClr val="1488C2"/>
+                </a:solidFill>
+                <a:latin typeface="Arial"/>
+                <a:ea typeface="Arial"/>
+                <a:cs typeface="Arial"/>
+                <a:sym typeface="Arial"/>
+              </a:rPr>
+              <a:t>持分 × Exit ≧ ファンド総額 ✓</a:t>
             </a:r>
             <a:endParaRPr b="0" i="0" sz="1400" u="none" cap="none" strike="noStrike">
               <a:solidFill>
@@ -5072,14 +5315,14 @@
       </p:sp>
       <p:sp>
         <p:nvSpPr>
-          <p:cNvPr id="233" name="Google Shape;233;p12"/>
-          <p:cNvSpPr/>
-          <p:nvPr/>
-        </p:nvSpPr>
-        <p:spPr>
-          <a:xfrm>
-            <a:off x="777240" y="3884832"/>
-            <a:ext cx="3474720" cy="548640"/>
+          <p:cNvPr id="214" name="Google Shape;214;p11"/>
+          <p:cNvSpPr/>
+          <p:nvPr/>
+        </p:nvSpPr>
+        <p:spPr>
+          <a:xfrm>
+            <a:off x="914400" y="4314600"/>
+            <a:ext cx="7315200" cy="320040"/>
           </a:xfrm>
           <a:prstGeom prst="rect">
             <a:avLst/>
@@ -5103,25 +5346,25 @@
                 <a:spcPts val="0"/>
               </a:spcAft>
               <a:buClr>
-                <a:srgbClr val="56627A"/>
+                <a:srgbClr val="D9881C"/>
               </a:buClr>
-              <a:buSzPts val="1150"/>
+              <a:buSzPts val="1200"/>
               <a:buFont typeface="Arial"/>
               <a:buNone/>
             </a:pPr>
             <a:r>
-              <a:rPr b="0" i="0" lang="en-US" sz="1150" u="none" cap="none" strike="noStrike">
-                <a:solidFill>
-                  <a:srgbClr val="56627A"/>
+              <a:rPr b="1" i="0" lang="en-US" sz="1200" u="none" cap="none" strike="noStrike">
+                <a:solidFill>
+                  <a:srgbClr val="D9881C"/>
                 </a:solidFill>
                 <a:latin typeface="Arial"/>
                 <a:ea typeface="Arial"/>
                 <a:cs typeface="Arial"/>
                 <a:sym typeface="Arial"/>
               </a:rPr>
-              <a:t>トランシェ払込・希薄化防止・取締役指名権を確保</a:t>
-            </a:r>
-            <a:endParaRPr b="0" i="0" sz="1150" u="none" cap="none" strike="noStrike">
+              <a:t>1.3X  FUND RETURNED BY ONE COMPANY</a:t>
+            </a:r>
+            <a:endParaRPr b="0" i="0" sz="1200" u="none" cap="none" strike="noStrike">
               <a:solidFill>
                 <a:schemeClr val="dk1"/>
               </a:solidFill>
@@ -5133,220 +5376,9 @@
           </a:p>
         </p:txBody>
       </p:sp>
-      <p:sp>
-        <p:nvSpPr>
-          <p:cNvPr id="234" name="Google Shape;234;p12"/>
-          <p:cNvSpPr/>
-          <p:nvPr/>
-        </p:nvSpPr>
-        <p:spPr>
-          <a:xfrm>
-            <a:off x="4663440" y="3263040"/>
-            <a:ext cx="3886200" cy="1280160"/>
-          </a:xfrm>
-          <a:prstGeom prst="roundRect">
-            <a:avLst>
-              <a:gd fmla="val 6429" name="adj"/>
-            </a:avLst>
-          </a:prstGeom>
-          <a:solidFill>
-            <a:srgbClr val="EEF3FB"/>
-          </a:solidFill>
-          <a:ln cap="flat" cmpd="sng" w="12700">
-            <a:solidFill>
-              <a:srgbClr val="D5DEEC"/>
-            </a:solidFill>
-            <a:prstDash val="solid"/>
-            <a:round/>
-            <a:headEnd len="sm" w="sm" type="none"/>
-            <a:tailEnd len="sm" w="sm" type="none"/>
-          </a:ln>
-          <a:effectLst>
-            <a:outerShdw blurRad="114300" rotWithShape="0" algn="bl" dir="5400000" dist="38100">
-              <a:srgbClr val="16263F">
-                <a:alpha val="13000"/>
-              </a:srgbClr>
-            </a:outerShdw>
-          </a:effectLst>
-        </p:spPr>
-        <p:txBody>
-          <a:bodyPr anchorCtr="0" anchor="ctr" bIns="91425" lIns="91425" spcFirstLastPara="1" rIns="91425" wrap="square" tIns="91425">
-            <a:noAutofit/>
-          </a:bodyPr>
-          <a:lstStyle/>
-          <a:p>
-            <a:pPr indent="0" lvl="0" marL="0" rtl="0" algn="l">
-              <a:spcBef>
-                <a:spcPts val="0"/>
-              </a:spcBef>
-              <a:spcAft>
-                <a:spcPts val="0"/>
-              </a:spcAft>
-              <a:buNone/>
-            </a:pPr>
-            <a:r>
-              <a:t/>
-            </a:r>
-            <a:endParaRPr/>
-          </a:p>
-        </p:txBody>
-      </p:sp>
-      <p:pic>
-        <p:nvPicPr>
-          <p:cNvPr descr="preencoded.png" id="235" name="Google Shape;235;p12"/>
-          <p:cNvPicPr preferRelativeResize="0"/>
-          <p:nvPr/>
-        </p:nvPicPr>
-        <p:blipFill rotWithShape="1">
-          <a:blip r:embed="rId4">
-            <a:alphaModFix/>
-          </a:blip>
-          <a:srcRect b="0" l="0" r="0" t="0"/>
-          <a:stretch/>
-        </p:blipFill>
-        <p:spPr>
-          <a:xfrm>
-            <a:off x="4892040" y="3491640"/>
-            <a:ext cx="292608" cy="292608"/>
-          </a:xfrm>
-          <a:prstGeom prst="rect">
-            <a:avLst/>
-          </a:prstGeom>
-          <a:noFill/>
-          <a:ln>
-            <a:noFill/>
-          </a:ln>
-        </p:spPr>
-      </p:pic>
-      <p:sp>
-        <p:nvSpPr>
-          <p:cNvPr id="236" name="Google Shape;236;p12"/>
-          <p:cNvSpPr/>
-          <p:nvPr/>
-        </p:nvSpPr>
-        <p:spPr>
-          <a:xfrm>
-            <a:off x="5285232" y="3464208"/>
-            <a:ext cx="3108960" cy="365760"/>
-          </a:xfrm>
-          <a:prstGeom prst="rect">
-            <a:avLst/>
-          </a:prstGeom>
-          <a:noFill/>
-          <a:ln>
-            <a:noFill/>
-          </a:ln>
-        </p:spPr>
-        <p:txBody>
-          <a:bodyPr anchorCtr="0" anchor="ctr" bIns="0" lIns="0" spcFirstLastPara="1" rIns="0" wrap="square" tIns="0">
-            <a:noAutofit/>
-          </a:bodyPr>
-          <a:lstStyle/>
-          <a:p>
-            <a:pPr indent="0" lvl="0" marL="0" marR="0" rtl="0" algn="l">
-              <a:spcBef>
-                <a:spcPts val="0"/>
-              </a:spcBef>
-              <a:spcAft>
-                <a:spcPts val="0"/>
-              </a:spcAft>
-              <a:buClr>
-                <a:srgbClr val="D9881C"/>
-              </a:buClr>
-              <a:buSzPts val="1400"/>
-              <a:buFont typeface="Arial"/>
-              <a:buNone/>
-            </a:pPr>
-            <a:r>
-              <a:rPr b="1" i="0" lang="en-US" sz="1400" u="none" cap="none" strike="noStrike">
-                <a:solidFill>
-                  <a:srgbClr val="D9881C"/>
-                </a:solidFill>
-                <a:latin typeface="Arial"/>
-                <a:ea typeface="Arial"/>
-                <a:cs typeface="Arial"/>
-                <a:sym typeface="Arial"/>
-              </a:rPr>
-              <a:t>防衛AIバブル懸念</a:t>
-            </a:r>
-            <a:endParaRPr b="0" i="0" sz="1400" u="none" cap="none" strike="noStrike">
-              <a:solidFill>
-                <a:schemeClr val="dk1"/>
-              </a:solidFill>
-              <a:latin typeface="Calibri"/>
-              <a:ea typeface="Calibri"/>
-              <a:cs typeface="Calibri"/>
-              <a:sym typeface="Calibri"/>
-            </a:endParaRPr>
-          </a:p>
-        </p:txBody>
-      </p:sp>
-      <p:sp>
-        <p:nvSpPr>
-          <p:cNvPr id="237" name="Google Shape;237;p12"/>
-          <p:cNvSpPr/>
-          <p:nvPr/>
-        </p:nvSpPr>
-        <p:spPr>
-          <a:xfrm>
-            <a:off x="4892040" y="3884832"/>
-            <a:ext cx="3474720" cy="548640"/>
-          </a:xfrm>
-          <a:prstGeom prst="rect">
-            <a:avLst/>
-          </a:prstGeom>
-          <a:noFill/>
-          <a:ln>
-            <a:noFill/>
-          </a:ln>
-        </p:spPr>
-        <p:txBody>
-          <a:bodyPr anchorCtr="0" anchor="ctr" bIns="0" lIns="0" spcFirstLastPara="1" rIns="0" wrap="square" tIns="0">
-            <a:noAutofit/>
-          </a:bodyPr>
-          <a:lstStyle/>
-          <a:p>
-            <a:pPr indent="0" lvl="0" marL="0" marR="0" rtl="0" algn="l">
-              <a:spcBef>
-                <a:spcPts val="0"/>
-              </a:spcBef>
-              <a:spcAft>
-                <a:spcPts val="0"/>
-              </a:spcAft>
-              <a:buClr>
-                <a:srgbClr val="56627A"/>
-              </a:buClr>
-              <a:buSzPts val="1150"/>
-              <a:buFont typeface="Arial"/>
-              <a:buNone/>
-            </a:pPr>
-            <a:r>
-              <a:rPr b="0" i="0" lang="en-US" sz="1150" u="none" cap="none" strike="noStrike">
-                <a:solidFill>
-                  <a:srgbClr val="56627A"/>
-                </a:solidFill>
-                <a:latin typeface="Arial"/>
-                <a:ea typeface="Arial"/>
-                <a:cs typeface="Arial"/>
-                <a:sym typeface="Arial"/>
-              </a:rPr>
-              <a:t>保守的マルチプル(15–18倍)とExit時期の柔軟化で吸収</a:t>
-            </a:r>
-            <a:endParaRPr b="0" i="0" sz="1150" u="none" cap="none" strike="noStrike">
-              <a:solidFill>
-                <a:schemeClr val="dk1"/>
-              </a:solidFill>
-              <a:latin typeface="Calibri"/>
-              <a:ea typeface="Calibri"/>
-              <a:cs typeface="Calibri"/>
-              <a:sym typeface="Calibri"/>
-            </a:endParaRPr>
-          </a:p>
-        </p:txBody>
-      </p:sp>
       <p:cxnSp>
         <p:nvCxnSpPr>
-          <p:cNvPr id="238" name="Rule10"/>
+          <p:cNvPr id="215" name="Rule9"/>
           <p:cNvCxnSpPr/>
           <p:nvPr/>
         </p:nvCxnSpPr>
@@ -5381,7 +5413,7 @@
       </p:cxnSp>
       <p:sp>
         <p:nvSpPr>
-          <p:cNvPr id="239" name="KeyBox10"/>
+          <p:cNvPr id="216" name="KeyBox9"/>
           <p:cNvSpPr/>
           <p:nvPr/>
         </p:nvSpPr>
@@ -5430,7 +5462,7 @@
                 </a:solidFill>
                 <a:latin typeface="Arial"/>
               </a:rPr>
-              <a:t>出口未実証は、上場済み宇宙SU（Synspective等）の実証と日本IPO波で対応。</a:t>
+              <a:t>売上85億円×ソフトマルチプル15〜18倍＝企業価値1,500〜1,800億円。</a:t>
             </a:r>
           </a:p>
           <a:p>
@@ -5457,7 +5489,7 @@
                 </a:solidFill>
                 <a:latin typeface="Arial"/>
               </a:rPr>
-              <a:t>政府依存・調達変動は、マイルストン連動＋同志国横展開でリカーリング化。</a:t>
+              <a:t>持分11%×Exit1,800億円＝約200億円。1社でファンドの約1.3倍を回収。</a:t>
             </a:r>
           </a:p>
           <a:p>
@@ -5484,14 +5516,14 @@
                 </a:solidFill>
                 <a:latin typeface="Arial"/>
               </a:rPr>
-              <a:t>評価/バブル懸念は、保守的マルチプル(15〜18倍)と契約条項で吸収。</a:t>
-            </a:r>
-          </a:p>
-        </p:txBody>
-      </p:sp>
-      <p:sp>
-        <p:nvSpPr>
-          <p:cNvPr id="240" name="KeyBar10"/>
+              <a:t>「持分×Exit ≧ ファンド総額」を満たすファンドリターナー。</a:t>
+            </a:r>
+          </a:p>
+        </p:txBody>
+      </p:sp>
+      <p:sp>
+        <p:nvSpPr>
+          <p:cNvPr id="217" name="KeyBar9"/>
           <p:cNvSpPr/>
           <p:nvPr/>
         </p:nvSpPr>
@@ -5528,6 +5560,1121 @@
 </file>
 
 <file path=ppt/slides/slide11.xml><?xml version="1.0" encoding="utf-8"?>
+<p:sld xmlns:a="http://schemas.openxmlformats.org/drawingml/2006/main" xmlns:r="http://schemas.openxmlformats.org/officeDocument/2006/relationships" xmlns:mc="http://schemas.openxmlformats.org/markup-compatibility/2006" xmlns:mv="urn:schemas-microsoft-com:mac:vml" xmlns:p="http://schemas.openxmlformats.org/presentationml/2006/main" xmlns:c="http://schemas.openxmlformats.org/drawingml/2006/chart" xmlns:dgm="http://schemas.openxmlformats.org/drawingml/2006/diagram" xmlns:o="urn:schemas-microsoft-com:office:office" xmlns:v="urn:schemas-microsoft-com:vml" xmlns:pvml="urn:schemas-microsoft-com:office:powerpoint" xmlns:com="http://schemas.openxmlformats.org/drawingml/2006/compatibility" xmlns:p14="http://schemas.microsoft.com/office/powerpoint/2010/main" xmlns:p15="http://schemas.microsoft.com/office/powerpoint/2012/main" xmlns:ahyp="http://schemas.microsoft.com/office/drawing/2018/hyperlinkcolor">
+  <p:cSld>
+    <p:bg>
+      <p:bgPr>
+        <a:solidFill>
+          <a:srgbClr val="FFFFFF"/>
+        </a:solidFill>
+        <a:effectLst/>
+      </p:bgPr>
+    </p:bg>
+    <p:spTree>
+      <p:nvGrpSpPr>
+        <p:cNvPr id="219" name="Shape 219"/>
+        <p:cNvGrpSpPr/>
+        <p:nvPr/>
+      </p:nvGrpSpPr>
+      <p:grpSpPr>
+        <a:xfrm>
+          <a:off x="0" y="0"/>
+          <a:ext cx="0" cy="0"/>
+          <a:chOff x="0" y="0"/>
+          <a:chExt cx="0" cy="0"/>
+        </a:xfrm>
+      </p:grpSpPr>
+      <p:sp>
+        <p:nvSpPr>
+          <p:cNvPr id="221" name="Google Shape;221;p12"/>
+          <p:cNvSpPr/>
+          <p:nvPr/>
+        </p:nvSpPr>
+        <p:spPr>
+          <a:xfrm>
+            <a:off x="548640" y="367200"/>
+            <a:ext cx="8046720" cy="566928"/>
+          </a:xfrm>
+          <a:prstGeom prst="rect">
+            <a:avLst/>
+          </a:prstGeom>
+          <a:noFill/>
+          <a:ln>
+            <a:noFill/>
+          </a:ln>
+        </p:spPr>
+        <p:txBody>
+          <a:bodyPr anchorCtr="0" anchor="ctr" bIns="0" lIns="0" spcFirstLastPara="1" rIns="0" wrap="square" tIns="0">
+            <a:noAutofit/>
+          </a:bodyPr>
+          <a:lstStyle/>
+          <a:p>
+            <a:pPr indent="0" lvl="0" marL="0" marR="0" rtl="0" algn="l">
+              <a:spcBef>
+                <a:spcPts val="0"/>
+              </a:spcBef>
+              <a:spcAft>
+                <a:spcPts val="0"/>
+              </a:spcAft>
+              <a:buClr>
+                <a:srgbClr val="16263F"/>
+              </a:buClr>
+              <a:buSzPts val="2900"/>
+              <a:buFont typeface="Arial"/>
+              <a:buNone/>
+            </a:pPr>
+            <a:r>
+              <a:rPr b="1" i="0" lang="en-US" sz="2900" u="none" cap="none" strike="noStrike">
+                <a:solidFill>
+                  <a:srgbClr val="16263F"/>
+                </a:solidFill>
+                <a:latin typeface="Arial"/>
+                <a:ea typeface="Arial"/>
+                <a:cs typeface="Arial"/>
+                <a:sym typeface="Arial"/>
+              </a:rPr>
+              <a:t>弱点を、先に潰す</a:t>
+            </a:r>
+            <a:endParaRPr b="0" i="0" sz="2900" u="none" cap="none" strike="noStrike">
+              <a:solidFill>
+                <a:schemeClr val="dk1"/>
+              </a:solidFill>
+              <a:latin typeface="Calibri"/>
+              <a:ea typeface="Calibri"/>
+              <a:cs typeface="Calibri"/>
+              <a:sym typeface="Calibri"/>
+            </a:endParaRPr>
+          </a:p>
+        </p:txBody>
+      </p:sp>
+      <p:sp>
+        <p:nvSpPr>
+          <p:cNvPr id="222" name="Google Shape;222;p12"/>
+          <p:cNvSpPr/>
+          <p:nvPr/>
+        </p:nvSpPr>
+        <p:spPr>
+          <a:xfrm>
+            <a:off x="548640" y="1800000"/>
+            <a:ext cx="3886200" cy="1280160"/>
+          </a:xfrm>
+          <a:prstGeom prst="roundRect">
+            <a:avLst>
+              <a:gd fmla="val 6429" name="adj"/>
+            </a:avLst>
+          </a:prstGeom>
+          <a:solidFill>
+            <a:srgbClr val="EEF3FB"/>
+          </a:solidFill>
+          <a:ln cap="flat" cmpd="sng" w="12700">
+            <a:solidFill>
+              <a:srgbClr val="D5DEEC"/>
+            </a:solidFill>
+            <a:prstDash val="solid"/>
+            <a:round/>
+            <a:headEnd len="sm" w="sm" type="none"/>
+            <a:tailEnd len="sm" w="sm" type="none"/>
+          </a:ln>
+          <a:effectLst>
+            <a:outerShdw blurRad="114300" rotWithShape="0" algn="bl" dir="5400000" dist="38100">
+              <a:srgbClr val="16263F">
+                <a:alpha val="13000"/>
+              </a:srgbClr>
+            </a:outerShdw>
+          </a:effectLst>
+        </p:spPr>
+        <p:txBody>
+          <a:bodyPr anchorCtr="0" anchor="ctr" bIns="91425" lIns="91425" spcFirstLastPara="1" rIns="91425" wrap="square" tIns="91425">
+            <a:noAutofit/>
+          </a:bodyPr>
+          <a:lstStyle/>
+          <a:p>
+            <a:pPr indent="0" lvl="0" marL="0" rtl="0" algn="l">
+              <a:spcBef>
+                <a:spcPts val="0"/>
+              </a:spcBef>
+              <a:spcAft>
+                <a:spcPts val="0"/>
+              </a:spcAft>
+              <a:buNone/>
+            </a:pPr>
+            <a:r>
+              <a:t/>
+            </a:r>
+            <a:endParaRPr/>
+          </a:p>
+        </p:txBody>
+      </p:sp>
+      <p:pic>
+        <p:nvPicPr>
+          <p:cNvPr descr="preencoded.png" id="223" name="Google Shape;223;p12"/>
+          <p:cNvPicPr preferRelativeResize="0"/>
+          <p:nvPr/>
+        </p:nvPicPr>
+        <p:blipFill rotWithShape="1">
+          <a:blip r:embed="rId4">
+            <a:alphaModFix/>
+          </a:blip>
+          <a:srcRect b="0" l="0" r="0" t="0"/>
+          <a:stretch/>
+        </p:blipFill>
+        <p:spPr>
+          <a:xfrm>
+            <a:off x="777240" y="2028600"/>
+            <a:ext cx="292608" cy="292608"/>
+          </a:xfrm>
+          <a:prstGeom prst="rect">
+            <a:avLst/>
+          </a:prstGeom>
+          <a:noFill/>
+          <a:ln>
+            <a:noFill/>
+          </a:ln>
+        </p:spPr>
+      </p:pic>
+      <p:sp>
+        <p:nvSpPr>
+          <p:cNvPr id="224" name="Google Shape;224;p12"/>
+          <p:cNvSpPr/>
+          <p:nvPr/>
+        </p:nvSpPr>
+        <p:spPr>
+          <a:xfrm>
+            <a:off x="1170432" y="2001168"/>
+            <a:ext cx="3108960" cy="365760"/>
+          </a:xfrm>
+          <a:prstGeom prst="rect">
+            <a:avLst/>
+          </a:prstGeom>
+          <a:noFill/>
+          <a:ln>
+            <a:noFill/>
+          </a:ln>
+        </p:spPr>
+        <p:txBody>
+          <a:bodyPr anchorCtr="0" anchor="ctr" bIns="0" lIns="0" spcFirstLastPara="1" rIns="0" wrap="square" tIns="0">
+            <a:noAutofit/>
+          </a:bodyPr>
+          <a:lstStyle/>
+          <a:p>
+            <a:pPr indent="0" lvl="0" marL="0" marR="0" rtl="0" algn="l">
+              <a:spcBef>
+                <a:spcPts val="0"/>
+              </a:spcBef>
+              <a:spcAft>
+                <a:spcPts val="0"/>
+              </a:spcAft>
+              <a:buClr>
+                <a:srgbClr val="D9881C"/>
+              </a:buClr>
+              <a:buSzPts val="1400"/>
+              <a:buFont typeface="Arial"/>
+              <a:buNone/>
+            </a:pPr>
+            <a:r>
+              <a:rPr b="1" i="0" lang="en-US" sz="1400" u="none" cap="none" strike="noStrike">
+                <a:solidFill>
+                  <a:srgbClr val="D9881C"/>
+                </a:solidFill>
+                <a:latin typeface="Arial"/>
+                <a:ea typeface="Arial"/>
+                <a:cs typeface="Arial"/>
+                <a:sym typeface="Arial"/>
+              </a:rPr>
+              <a:t>出口が未実証</a:t>
+            </a:r>
+            <a:endParaRPr b="0" i="0" sz="1400" u="none" cap="none" strike="noStrike">
+              <a:solidFill>
+                <a:schemeClr val="dk1"/>
+              </a:solidFill>
+              <a:latin typeface="Calibri"/>
+              <a:ea typeface="Calibri"/>
+              <a:cs typeface="Calibri"/>
+              <a:sym typeface="Calibri"/>
+            </a:endParaRPr>
+          </a:p>
+        </p:txBody>
+      </p:sp>
+      <p:sp>
+        <p:nvSpPr>
+          <p:cNvPr id="225" name="Google Shape;225;p12"/>
+          <p:cNvSpPr/>
+          <p:nvPr/>
+        </p:nvSpPr>
+        <p:spPr>
+          <a:xfrm>
+            <a:off x="777240" y="2421792"/>
+            <a:ext cx="3474720" cy="548640"/>
+          </a:xfrm>
+          <a:prstGeom prst="rect">
+            <a:avLst/>
+          </a:prstGeom>
+          <a:noFill/>
+          <a:ln>
+            <a:noFill/>
+          </a:ln>
+        </p:spPr>
+        <p:txBody>
+          <a:bodyPr anchorCtr="0" anchor="ctr" bIns="0" lIns="0" spcFirstLastPara="1" rIns="0" wrap="square" tIns="0">
+            <a:noAutofit/>
+          </a:bodyPr>
+          <a:lstStyle/>
+          <a:p>
+            <a:pPr indent="0" lvl="0" marL="0" marR="0" rtl="0" algn="l">
+              <a:spcBef>
+                <a:spcPts val="0"/>
+              </a:spcBef>
+              <a:spcAft>
+                <a:spcPts val="0"/>
+              </a:spcAft>
+              <a:buClr>
+                <a:srgbClr val="56627A"/>
+              </a:buClr>
+              <a:buSzPts val="1150"/>
+              <a:buFont typeface="Arial"/>
+              <a:buNone/>
+            </a:pPr>
+            <a:r>
+              <a:rPr b="0" i="0" lang="en-US" sz="1150" u="none" cap="none" strike="noStrike">
+                <a:solidFill>
+                  <a:srgbClr val="56627A"/>
+                </a:solidFill>
+                <a:latin typeface="Arial"/>
+                <a:ea typeface="Arial"/>
+                <a:cs typeface="Arial"/>
+                <a:sym typeface="Arial"/>
+              </a:rPr>
+              <a:t>上場済み宇宙SU（Synspective等）が実証。日本IPO波に乗る</a:t>
+            </a:r>
+            <a:endParaRPr b="0" i="0" sz="1150" u="none" cap="none" strike="noStrike">
+              <a:solidFill>
+                <a:schemeClr val="dk1"/>
+              </a:solidFill>
+              <a:latin typeface="Calibri"/>
+              <a:ea typeface="Calibri"/>
+              <a:cs typeface="Calibri"/>
+              <a:sym typeface="Calibri"/>
+            </a:endParaRPr>
+          </a:p>
+        </p:txBody>
+      </p:sp>
+      <p:sp>
+        <p:nvSpPr>
+          <p:cNvPr id="226" name="Google Shape;226;p12"/>
+          <p:cNvSpPr/>
+          <p:nvPr/>
+        </p:nvSpPr>
+        <p:spPr>
+          <a:xfrm>
+            <a:off x="4663440" y="1800000"/>
+            <a:ext cx="3886200" cy="1280160"/>
+          </a:xfrm>
+          <a:prstGeom prst="roundRect">
+            <a:avLst>
+              <a:gd fmla="val 6429" name="adj"/>
+            </a:avLst>
+          </a:prstGeom>
+          <a:solidFill>
+            <a:srgbClr val="EEF3FB"/>
+          </a:solidFill>
+          <a:ln cap="flat" cmpd="sng" w="12700">
+            <a:solidFill>
+              <a:srgbClr val="D5DEEC"/>
+            </a:solidFill>
+            <a:prstDash val="solid"/>
+            <a:round/>
+            <a:headEnd len="sm" w="sm" type="none"/>
+            <a:tailEnd len="sm" w="sm" type="none"/>
+          </a:ln>
+          <a:effectLst>
+            <a:outerShdw blurRad="114300" rotWithShape="0" algn="bl" dir="5400000" dist="38100">
+              <a:srgbClr val="16263F">
+                <a:alpha val="13000"/>
+              </a:srgbClr>
+            </a:outerShdw>
+          </a:effectLst>
+        </p:spPr>
+        <p:txBody>
+          <a:bodyPr anchorCtr="0" anchor="ctr" bIns="91425" lIns="91425" spcFirstLastPara="1" rIns="91425" wrap="square" tIns="91425">
+            <a:noAutofit/>
+          </a:bodyPr>
+          <a:lstStyle/>
+          <a:p>
+            <a:pPr indent="0" lvl="0" marL="0" rtl="0" algn="l">
+              <a:spcBef>
+                <a:spcPts val="0"/>
+              </a:spcBef>
+              <a:spcAft>
+                <a:spcPts val="0"/>
+              </a:spcAft>
+              <a:buNone/>
+            </a:pPr>
+            <a:r>
+              <a:t/>
+            </a:r>
+            <a:endParaRPr/>
+          </a:p>
+        </p:txBody>
+      </p:sp>
+      <p:pic>
+        <p:nvPicPr>
+          <p:cNvPr descr="preencoded.png" id="227" name="Google Shape;227;p12"/>
+          <p:cNvPicPr preferRelativeResize="0"/>
+          <p:nvPr/>
+        </p:nvPicPr>
+        <p:blipFill rotWithShape="1">
+          <a:blip r:embed="rId4">
+            <a:alphaModFix/>
+          </a:blip>
+          <a:srcRect b="0" l="0" r="0" t="0"/>
+          <a:stretch/>
+        </p:blipFill>
+        <p:spPr>
+          <a:xfrm>
+            <a:off x="4892040" y="2028600"/>
+            <a:ext cx="292608" cy="292608"/>
+          </a:xfrm>
+          <a:prstGeom prst="rect">
+            <a:avLst/>
+          </a:prstGeom>
+          <a:noFill/>
+          <a:ln>
+            <a:noFill/>
+          </a:ln>
+        </p:spPr>
+      </p:pic>
+      <p:sp>
+        <p:nvSpPr>
+          <p:cNvPr id="228" name="Google Shape;228;p12"/>
+          <p:cNvSpPr/>
+          <p:nvPr/>
+        </p:nvSpPr>
+        <p:spPr>
+          <a:xfrm>
+            <a:off x="5285232" y="2001168"/>
+            <a:ext cx="3108960" cy="365760"/>
+          </a:xfrm>
+          <a:prstGeom prst="rect">
+            <a:avLst/>
+          </a:prstGeom>
+          <a:noFill/>
+          <a:ln>
+            <a:noFill/>
+          </a:ln>
+        </p:spPr>
+        <p:txBody>
+          <a:bodyPr anchorCtr="0" anchor="ctr" bIns="0" lIns="0" spcFirstLastPara="1" rIns="0" wrap="square" tIns="0">
+            <a:noAutofit/>
+          </a:bodyPr>
+          <a:lstStyle/>
+          <a:p>
+            <a:pPr indent="0" lvl="0" marL="0" marR="0" rtl="0" algn="l">
+              <a:spcBef>
+                <a:spcPts val="0"/>
+              </a:spcBef>
+              <a:spcAft>
+                <a:spcPts val="0"/>
+              </a:spcAft>
+              <a:buClr>
+                <a:srgbClr val="D9881C"/>
+              </a:buClr>
+              <a:buSzPts val="1400"/>
+              <a:buFont typeface="Arial"/>
+              <a:buNone/>
+            </a:pPr>
+            <a:r>
+              <a:rPr b="1" i="0" lang="en-US" sz="1400" u="none" cap="none" strike="noStrike">
+                <a:solidFill>
+                  <a:srgbClr val="D9881C"/>
+                </a:solidFill>
+                <a:latin typeface="Arial"/>
+                <a:ea typeface="Arial"/>
+                <a:cs typeface="Arial"/>
+                <a:sym typeface="Arial"/>
+              </a:rPr>
+              <a:t>政府依存・調達変動</a:t>
+            </a:r>
+            <a:endParaRPr b="0" i="0" sz="1400" u="none" cap="none" strike="noStrike">
+              <a:solidFill>
+                <a:schemeClr val="dk1"/>
+              </a:solidFill>
+              <a:latin typeface="Calibri"/>
+              <a:ea typeface="Calibri"/>
+              <a:cs typeface="Calibri"/>
+              <a:sym typeface="Calibri"/>
+            </a:endParaRPr>
+          </a:p>
+        </p:txBody>
+      </p:sp>
+      <p:sp>
+        <p:nvSpPr>
+          <p:cNvPr id="229" name="Google Shape;229;p12"/>
+          <p:cNvSpPr/>
+          <p:nvPr/>
+        </p:nvSpPr>
+        <p:spPr>
+          <a:xfrm>
+            <a:off x="4892040" y="2421792"/>
+            <a:ext cx="3474720" cy="548640"/>
+          </a:xfrm>
+          <a:prstGeom prst="rect">
+            <a:avLst/>
+          </a:prstGeom>
+          <a:noFill/>
+          <a:ln>
+            <a:noFill/>
+          </a:ln>
+        </p:spPr>
+        <p:txBody>
+          <a:bodyPr anchorCtr="0" anchor="ctr" bIns="0" lIns="0" spcFirstLastPara="1" rIns="0" wrap="square" tIns="0">
+            <a:noAutofit/>
+          </a:bodyPr>
+          <a:lstStyle/>
+          <a:p>
+            <a:pPr indent="0" lvl="0" marL="0" marR="0" rtl="0" algn="l">
+              <a:spcBef>
+                <a:spcPts val="0"/>
+              </a:spcBef>
+              <a:spcAft>
+                <a:spcPts val="0"/>
+              </a:spcAft>
+              <a:buClr>
+                <a:srgbClr val="56627A"/>
+              </a:buClr>
+              <a:buSzPts val="1150"/>
+              <a:buFont typeface="Arial"/>
+              <a:buNone/>
+            </a:pPr>
+            <a:r>
+              <a:rPr b="0" i="0" lang="en-US" sz="1150" u="none" cap="none" strike="noStrike">
+                <a:solidFill>
+                  <a:srgbClr val="56627A"/>
+                </a:solidFill>
+                <a:latin typeface="Arial"/>
+                <a:ea typeface="Arial"/>
+                <a:cs typeface="Arial"/>
+                <a:sym typeface="Arial"/>
+              </a:rPr>
+              <a:t>マイルストン連動＋同志国横展開でリカーリング化</a:t>
+            </a:r>
+            <a:endParaRPr b="0" i="0" sz="1150" u="none" cap="none" strike="noStrike">
+              <a:solidFill>
+                <a:schemeClr val="dk1"/>
+              </a:solidFill>
+              <a:latin typeface="Calibri"/>
+              <a:ea typeface="Calibri"/>
+              <a:cs typeface="Calibri"/>
+              <a:sym typeface="Calibri"/>
+            </a:endParaRPr>
+          </a:p>
+        </p:txBody>
+      </p:sp>
+      <p:sp>
+        <p:nvSpPr>
+          <p:cNvPr id="230" name="Google Shape;230;p12"/>
+          <p:cNvSpPr/>
+          <p:nvPr/>
+        </p:nvSpPr>
+        <p:spPr>
+          <a:xfrm>
+            <a:off x="548640" y="3263040"/>
+            <a:ext cx="3886200" cy="1280160"/>
+          </a:xfrm>
+          <a:prstGeom prst="roundRect">
+            <a:avLst>
+              <a:gd fmla="val 6429" name="adj"/>
+            </a:avLst>
+          </a:prstGeom>
+          <a:solidFill>
+            <a:srgbClr val="EEF3FB"/>
+          </a:solidFill>
+          <a:ln cap="flat" cmpd="sng" w="12700">
+            <a:solidFill>
+              <a:srgbClr val="D5DEEC"/>
+            </a:solidFill>
+            <a:prstDash val="solid"/>
+            <a:round/>
+            <a:headEnd len="sm" w="sm" type="none"/>
+            <a:tailEnd len="sm" w="sm" type="none"/>
+          </a:ln>
+          <a:effectLst>
+            <a:outerShdw blurRad="114300" rotWithShape="0" algn="bl" dir="5400000" dist="38100">
+              <a:srgbClr val="16263F">
+                <a:alpha val="13000"/>
+              </a:srgbClr>
+            </a:outerShdw>
+          </a:effectLst>
+        </p:spPr>
+        <p:txBody>
+          <a:bodyPr anchorCtr="0" anchor="ctr" bIns="91425" lIns="91425" spcFirstLastPara="1" rIns="91425" wrap="square" tIns="91425">
+            <a:noAutofit/>
+          </a:bodyPr>
+          <a:lstStyle/>
+          <a:p>
+            <a:pPr indent="0" lvl="0" marL="0" rtl="0" algn="l">
+              <a:spcBef>
+                <a:spcPts val="0"/>
+              </a:spcBef>
+              <a:spcAft>
+                <a:spcPts val="0"/>
+              </a:spcAft>
+              <a:buNone/>
+            </a:pPr>
+            <a:r>
+              <a:t/>
+            </a:r>
+            <a:endParaRPr/>
+          </a:p>
+        </p:txBody>
+      </p:sp>
+      <p:pic>
+        <p:nvPicPr>
+          <p:cNvPr descr="preencoded.png" id="231" name="Google Shape;231;p12"/>
+          <p:cNvPicPr preferRelativeResize="0"/>
+          <p:nvPr/>
+        </p:nvPicPr>
+        <p:blipFill rotWithShape="1">
+          <a:blip r:embed="rId4">
+            <a:alphaModFix/>
+          </a:blip>
+          <a:srcRect b="0" l="0" r="0" t="0"/>
+          <a:stretch/>
+        </p:blipFill>
+        <p:spPr>
+          <a:xfrm>
+            <a:off x="777240" y="3491640"/>
+            <a:ext cx="292608" cy="292608"/>
+          </a:xfrm>
+          <a:prstGeom prst="rect">
+            <a:avLst/>
+          </a:prstGeom>
+          <a:noFill/>
+          <a:ln>
+            <a:noFill/>
+          </a:ln>
+        </p:spPr>
+      </p:pic>
+      <p:sp>
+        <p:nvSpPr>
+          <p:cNvPr id="232" name="Google Shape;232;p12"/>
+          <p:cNvSpPr/>
+          <p:nvPr/>
+        </p:nvSpPr>
+        <p:spPr>
+          <a:xfrm>
+            <a:off x="1170432" y="3464208"/>
+            <a:ext cx="3108960" cy="365760"/>
+          </a:xfrm>
+          <a:prstGeom prst="rect">
+            <a:avLst/>
+          </a:prstGeom>
+          <a:noFill/>
+          <a:ln>
+            <a:noFill/>
+          </a:ln>
+        </p:spPr>
+        <p:txBody>
+          <a:bodyPr anchorCtr="0" anchor="ctr" bIns="0" lIns="0" spcFirstLastPara="1" rIns="0" wrap="square" tIns="0">
+            <a:noAutofit/>
+          </a:bodyPr>
+          <a:lstStyle/>
+          <a:p>
+            <a:pPr indent="0" lvl="0" marL="0" marR="0" rtl="0" algn="l">
+              <a:spcBef>
+                <a:spcPts val="0"/>
+              </a:spcBef>
+              <a:spcAft>
+                <a:spcPts val="0"/>
+              </a:spcAft>
+              <a:buClr>
+                <a:srgbClr val="D9881C"/>
+              </a:buClr>
+              <a:buSzPts val="1400"/>
+              <a:buFont typeface="Arial"/>
+              <a:buNone/>
+            </a:pPr>
+            <a:r>
+              <a:rPr b="1" i="0" lang="en-US" sz="1400" u="none" cap="none" strike="noStrike">
+                <a:solidFill>
+                  <a:srgbClr val="D9881C"/>
+                </a:solidFill>
+                <a:latin typeface="Arial"/>
+                <a:ea typeface="Arial"/>
+                <a:cs typeface="Arial"/>
+                <a:sym typeface="Arial"/>
+              </a:rPr>
+              <a:t>バリュエーション非開示</a:t>
+            </a:r>
+            <a:endParaRPr b="0" i="0" sz="1400" u="none" cap="none" strike="noStrike">
+              <a:solidFill>
+                <a:schemeClr val="dk1"/>
+              </a:solidFill>
+              <a:latin typeface="Calibri"/>
+              <a:ea typeface="Calibri"/>
+              <a:cs typeface="Calibri"/>
+              <a:sym typeface="Calibri"/>
+            </a:endParaRPr>
+          </a:p>
+        </p:txBody>
+      </p:sp>
+      <p:sp>
+        <p:nvSpPr>
+          <p:cNvPr id="233" name="Google Shape;233;p12"/>
+          <p:cNvSpPr/>
+          <p:nvPr/>
+        </p:nvSpPr>
+        <p:spPr>
+          <a:xfrm>
+            <a:off x="777240" y="3884832"/>
+            <a:ext cx="3474720" cy="548640"/>
+          </a:xfrm>
+          <a:prstGeom prst="rect">
+            <a:avLst/>
+          </a:prstGeom>
+          <a:noFill/>
+          <a:ln>
+            <a:noFill/>
+          </a:ln>
+        </p:spPr>
+        <p:txBody>
+          <a:bodyPr anchorCtr="0" anchor="ctr" bIns="0" lIns="0" spcFirstLastPara="1" rIns="0" wrap="square" tIns="0">
+            <a:noAutofit/>
+          </a:bodyPr>
+          <a:lstStyle/>
+          <a:p>
+            <a:pPr indent="0" lvl="0" marL="0" marR="0" rtl="0" algn="l">
+              <a:spcBef>
+                <a:spcPts val="0"/>
+              </a:spcBef>
+              <a:spcAft>
+                <a:spcPts val="0"/>
+              </a:spcAft>
+              <a:buClr>
+                <a:srgbClr val="56627A"/>
+              </a:buClr>
+              <a:buSzPts val="1150"/>
+              <a:buFont typeface="Arial"/>
+              <a:buNone/>
+            </a:pPr>
+            <a:r>
+              <a:rPr b="0" i="0" lang="en-US" sz="1150" u="none" cap="none" strike="noStrike">
+                <a:solidFill>
+                  <a:srgbClr val="56627A"/>
+                </a:solidFill>
+                <a:latin typeface="Arial"/>
+                <a:ea typeface="Arial"/>
+                <a:cs typeface="Arial"/>
+                <a:sym typeface="Arial"/>
+              </a:rPr>
+              <a:t>トランシェ払込・希薄化防止・取締役指名権を確保</a:t>
+            </a:r>
+            <a:endParaRPr b="0" i="0" sz="1150" u="none" cap="none" strike="noStrike">
+              <a:solidFill>
+                <a:schemeClr val="dk1"/>
+              </a:solidFill>
+              <a:latin typeface="Calibri"/>
+              <a:ea typeface="Calibri"/>
+              <a:cs typeface="Calibri"/>
+              <a:sym typeface="Calibri"/>
+            </a:endParaRPr>
+          </a:p>
+        </p:txBody>
+      </p:sp>
+      <p:sp>
+        <p:nvSpPr>
+          <p:cNvPr id="234" name="Google Shape;234;p12"/>
+          <p:cNvSpPr/>
+          <p:nvPr/>
+        </p:nvSpPr>
+        <p:spPr>
+          <a:xfrm>
+            <a:off x="4663440" y="3263040"/>
+            <a:ext cx="3886200" cy="1280160"/>
+          </a:xfrm>
+          <a:prstGeom prst="roundRect">
+            <a:avLst>
+              <a:gd fmla="val 6429" name="adj"/>
+            </a:avLst>
+          </a:prstGeom>
+          <a:solidFill>
+            <a:srgbClr val="EEF3FB"/>
+          </a:solidFill>
+          <a:ln cap="flat" cmpd="sng" w="12700">
+            <a:solidFill>
+              <a:srgbClr val="D5DEEC"/>
+            </a:solidFill>
+            <a:prstDash val="solid"/>
+            <a:round/>
+            <a:headEnd len="sm" w="sm" type="none"/>
+            <a:tailEnd len="sm" w="sm" type="none"/>
+          </a:ln>
+          <a:effectLst>
+            <a:outerShdw blurRad="114300" rotWithShape="0" algn="bl" dir="5400000" dist="38100">
+              <a:srgbClr val="16263F">
+                <a:alpha val="13000"/>
+              </a:srgbClr>
+            </a:outerShdw>
+          </a:effectLst>
+        </p:spPr>
+        <p:txBody>
+          <a:bodyPr anchorCtr="0" anchor="ctr" bIns="91425" lIns="91425" spcFirstLastPara="1" rIns="91425" wrap="square" tIns="91425">
+            <a:noAutofit/>
+          </a:bodyPr>
+          <a:lstStyle/>
+          <a:p>
+            <a:pPr indent="0" lvl="0" marL="0" rtl="0" algn="l">
+              <a:spcBef>
+                <a:spcPts val="0"/>
+              </a:spcBef>
+              <a:spcAft>
+                <a:spcPts val="0"/>
+              </a:spcAft>
+              <a:buNone/>
+            </a:pPr>
+            <a:r>
+              <a:t/>
+            </a:r>
+            <a:endParaRPr/>
+          </a:p>
+        </p:txBody>
+      </p:sp>
+      <p:pic>
+        <p:nvPicPr>
+          <p:cNvPr descr="preencoded.png" id="235" name="Google Shape;235;p12"/>
+          <p:cNvPicPr preferRelativeResize="0"/>
+          <p:nvPr/>
+        </p:nvPicPr>
+        <p:blipFill rotWithShape="1">
+          <a:blip r:embed="rId4">
+            <a:alphaModFix/>
+          </a:blip>
+          <a:srcRect b="0" l="0" r="0" t="0"/>
+          <a:stretch/>
+        </p:blipFill>
+        <p:spPr>
+          <a:xfrm>
+            <a:off x="4892040" y="3491640"/>
+            <a:ext cx="292608" cy="292608"/>
+          </a:xfrm>
+          <a:prstGeom prst="rect">
+            <a:avLst/>
+          </a:prstGeom>
+          <a:noFill/>
+          <a:ln>
+            <a:noFill/>
+          </a:ln>
+        </p:spPr>
+      </p:pic>
+      <p:sp>
+        <p:nvSpPr>
+          <p:cNvPr id="236" name="Google Shape;236;p12"/>
+          <p:cNvSpPr/>
+          <p:nvPr/>
+        </p:nvSpPr>
+        <p:spPr>
+          <a:xfrm>
+            <a:off x="5285232" y="3464208"/>
+            <a:ext cx="3108960" cy="365760"/>
+          </a:xfrm>
+          <a:prstGeom prst="rect">
+            <a:avLst/>
+          </a:prstGeom>
+          <a:noFill/>
+          <a:ln>
+            <a:noFill/>
+          </a:ln>
+        </p:spPr>
+        <p:txBody>
+          <a:bodyPr anchorCtr="0" anchor="ctr" bIns="0" lIns="0" spcFirstLastPara="1" rIns="0" wrap="square" tIns="0">
+            <a:noAutofit/>
+          </a:bodyPr>
+          <a:lstStyle/>
+          <a:p>
+            <a:pPr indent="0" lvl="0" marL="0" marR="0" rtl="0" algn="l">
+              <a:spcBef>
+                <a:spcPts val="0"/>
+              </a:spcBef>
+              <a:spcAft>
+                <a:spcPts val="0"/>
+              </a:spcAft>
+              <a:buClr>
+                <a:srgbClr val="D9881C"/>
+              </a:buClr>
+              <a:buSzPts val="1400"/>
+              <a:buFont typeface="Arial"/>
+              <a:buNone/>
+            </a:pPr>
+            <a:r>
+              <a:rPr b="1" i="0" lang="en-US" sz="1400" u="none" cap="none" strike="noStrike">
+                <a:solidFill>
+                  <a:srgbClr val="D9881C"/>
+                </a:solidFill>
+                <a:latin typeface="Arial"/>
+                <a:ea typeface="Arial"/>
+                <a:cs typeface="Arial"/>
+                <a:sym typeface="Arial"/>
+              </a:rPr>
+              <a:t>防衛AIバブル懸念</a:t>
+            </a:r>
+            <a:endParaRPr b="0" i="0" sz="1400" u="none" cap="none" strike="noStrike">
+              <a:solidFill>
+                <a:schemeClr val="dk1"/>
+              </a:solidFill>
+              <a:latin typeface="Calibri"/>
+              <a:ea typeface="Calibri"/>
+              <a:cs typeface="Calibri"/>
+              <a:sym typeface="Calibri"/>
+            </a:endParaRPr>
+          </a:p>
+        </p:txBody>
+      </p:sp>
+      <p:sp>
+        <p:nvSpPr>
+          <p:cNvPr id="237" name="Google Shape;237;p12"/>
+          <p:cNvSpPr/>
+          <p:nvPr/>
+        </p:nvSpPr>
+        <p:spPr>
+          <a:xfrm>
+            <a:off x="4892040" y="3884832"/>
+            <a:ext cx="3474720" cy="548640"/>
+          </a:xfrm>
+          <a:prstGeom prst="rect">
+            <a:avLst/>
+          </a:prstGeom>
+          <a:noFill/>
+          <a:ln>
+            <a:noFill/>
+          </a:ln>
+        </p:spPr>
+        <p:txBody>
+          <a:bodyPr anchorCtr="0" anchor="ctr" bIns="0" lIns="0" spcFirstLastPara="1" rIns="0" wrap="square" tIns="0">
+            <a:noAutofit/>
+          </a:bodyPr>
+          <a:lstStyle/>
+          <a:p>
+            <a:pPr indent="0" lvl="0" marL="0" marR="0" rtl="0" algn="l">
+              <a:spcBef>
+                <a:spcPts val="0"/>
+              </a:spcBef>
+              <a:spcAft>
+                <a:spcPts val="0"/>
+              </a:spcAft>
+              <a:buClr>
+                <a:srgbClr val="56627A"/>
+              </a:buClr>
+              <a:buSzPts val="1150"/>
+              <a:buFont typeface="Arial"/>
+              <a:buNone/>
+            </a:pPr>
+            <a:r>
+              <a:rPr b="0" i="0" lang="en-US" sz="1150" u="none" cap="none" strike="noStrike">
+                <a:solidFill>
+                  <a:srgbClr val="56627A"/>
+                </a:solidFill>
+                <a:latin typeface="Arial"/>
+                <a:ea typeface="Arial"/>
+                <a:cs typeface="Arial"/>
+                <a:sym typeface="Arial"/>
+              </a:rPr>
+              <a:t>保守的マルチプル(15–18倍)とExit時期の柔軟化で吸収</a:t>
+            </a:r>
+            <a:endParaRPr b="0" i="0" sz="1150" u="none" cap="none" strike="noStrike">
+              <a:solidFill>
+                <a:schemeClr val="dk1"/>
+              </a:solidFill>
+              <a:latin typeface="Calibri"/>
+              <a:ea typeface="Calibri"/>
+              <a:cs typeface="Calibri"/>
+              <a:sym typeface="Calibri"/>
+            </a:endParaRPr>
+          </a:p>
+        </p:txBody>
+      </p:sp>
+      <p:cxnSp>
+        <p:nvCxnSpPr>
+          <p:cNvPr id="238" name="Rule10"/>
+          <p:cNvCxnSpPr/>
+          <p:nvPr/>
+        </p:nvCxnSpPr>
+        <p:spPr>
+          <a:xfrm>
+            <a:off x="548640" y="957600"/>
+            <a:ext cx="8046720" cy="0"/>
+          </a:xfrm>
+          <a:prstGeom prst="line">
+            <a:avLst/>
+          </a:prstGeom>
+          <a:ln w="19050">
+            <a:solidFill>
+              <a:srgbClr val="9FAEC6"/>
+            </a:solidFill>
+          </a:ln>
+        </p:spPr>
+        <p:style>
+          <a:lnRef idx="2">
+            <a:schemeClr val="accent1"/>
+          </a:lnRef>
+          <a:fillRef idx="0">
+            <a:schemeClr val="accent1"/>
+          </a:fillRef>
+          <a:effectRef idx="1">
+            <a:schemeClr val="accent1"/>
+          </a:effectRef>
+          <a:fontRef idx="minor">
+            <a:schemeClr val="tx1"/>
+          </a:fontRef>
+        </p:style>
+      </p:cxnSp>
+      <p:sp>
+        <p:nvSpPr>
+          <p:cNvPr id="239" name="KeyBox10"/>
+          <p:cNvSpPr/>
+          <p:nvPr/>
+        </p:nvSpPr>
+        <p:spPr>
+          <a:xfrm>
+            <a:off x="548640" y="1029600"/>
+            <a:ext cx="8046720" cy="691200"/>
+          </a:xfrm>
+          <a:prstGeom prst="rect">
+            <a:avLst/>
+          </a:prstGeom>
+          <a:solidFill>
+            <a:srgbClr val="EEF0F4"/>
+          </a:solidFill>
+          <a:ln w="9525">
+            <a:solidFill>
+              <a:srgbClr val="D7DCE5"/>
+            </a:solidFill>
+          </a:ln>
+          <a:effectLst/>
+        </p:spPr>
+        <p:txBody>
+          <a:bodyPr rtlCol="0" anchor="ctr" wrap="square" lIns="216000" rIns="108000" tIns="28800" bIns="28800"/>
+          <a:lstStyle/>
+          <a:p>
+            <a:pPr algn="l" marL="198000" indent="-162000">
+              <a:lnSpc>
+                <a:spcPct val="105000"/>
+              </a:lnSpc>
+              <a:spcBef>
+                <a:spcPts val="300"/>
+              </a:spcBef>
+              <a:spcAft>
+                <a:spcPts val="300"/>
+              </a:spcAft>
+              <a:buClr>
+                <a:srgbClr val="1488C2"/>
+              </a:buClr>
+              <a:buFont typeface="Arial"/>
+              <a:buChar char="▪"/>
+            </a:pPr>
+            <a:r>
+              <a:rPr sz="1100" b="0">
+                <a:solidFill>
+                  <a:srgbClr val="16263F"/>
+                </a:solidFill>
+                <a:latin typeface="Arial"/>
+              </a:rPr>
+              <a:t>出口未実証は、上場済み宇宙SU（Synspective等）の実証と日本IPO波で対応。</a:t>
+            </a:r>
+          </a:p>
+          <a:p>
+            <a:pPr algn="l" marL="198000" indent="-162000">
+              <a:lnSpc>
+                <a:spcPct val="105000"/>
+              </a:lnSpc>
+              <a:spcBef>
+                <a:spcPts val="300"/>
+              </a:spcBef>
+              <a:spcAft>
+                <a:spcPts val="300"/>
+              </a:spcAft>
+              <a:buClr>
+                <a:srgbClr val="1488C2"/>
+              </a:buClr>
+              <a:buFont typeface="Arial"/>
+              <a:buChar char="▪"/>
+            </a:pPr>
+            <a:r>
+              <a:rPr sz="1100" b="0">
+                <a:solidFill>
+                  <a:srgbClr val="16263F"/>
+                </a:solidFill>
+                <a:latin typeface="Arial"/>
+              </a:rPr>
+              <a:t>政府依存・調達変動は、マイルストン連動＋同志国横展開でリカーリング化。</a:t>
+            </a:r>
+          </a:p>
+          <a:p>
+            <a:pPr algn="l" marL="198000" indent="-162000">
+              <a:lnSpc>
+                <a:spcPct val="105000"/>
+              </a:lnSpc>
+              <a:spcBef>
+                <a:spcPts val="300"/>
+              </a:spcBef>
+              <a:spcAft>
+                <a:spcPts val="300"/>
+              </a:spcAft>
+              <a:buClr>
+                <a:srgbClr val="1488C2"/>
+              </a:buClr>
+              <a:buFont typeface="Arial"/>
+              <a:buChar char="▪"/>
+            </a:pPr>
+            <a:r>
+              <a:rPr sz="1100" b="0">
+                <a:solidFill>
+                  <a:srgbClr val="16263F"/>
+                </a:solidFill>
+                <a:latin typeface="Arial"/>
+              </a:rPr>
+              <a:t>評価/バブル懸念は、保守的マルチプル(15〜18倍)と契約条項で吸収。</a:t>
+            </a:r>
+          </a:p>
+        </p:txBody>
+      </p:sp>
+      <p:sp>
+        <p:nvSpPr>
+          <p:cNvPr id="240" name="KeyBar10"/>
+          <p:cNvSpPr/>
+          <p:nvPr/>
+        </p:nvSpPr>
+        <p:spPr>
+          <a:xfrm>
+            <a:off x="548640" y="1029600"/>
+            <a:ext cx="54000" cy="691200"/>
+          </a:xfrm>
+          <a:prstGeom prst="rect">
+            <a:avLst/>
+          </a:prstGeom>
+          <a:solidFill>
+            <a:srgbClr val="1488C2"/>
+          </a:solidFill>
+          <a:ln>
+            <a:noFill/>
+          </a:ln>
+          <a:effectLst/>
+        </p:spPr>
+        <p:txBody>
+          <a:bodyPr rtlCol="0" anchor="ctr"/>
+          <a:lstStyle/>
+          <a:p>
+            <a:pPr algn="ctr"/>
+          </a:p>
+        </p:txBody>
+      </p:sp>
+    </p:spTree>
+  </p:cSld>
+  <p:clrMapOvr>
+    <a:masterClrMapping/>
+  </p:clrMapOvr>
+</p:sld>
+</file>
+
+<file path=ppt/slides/slide12.xml><?xml version="1.0" encoding="utf-8"?>
 <p:sld xmlns:a="http://schemas.openxmlformats.org/drawingml/2006/main" xmlns:r="http://schemas.openxmlformats.org/officeDocument/2006/relationships" xmlns:mc="http://schemas.openxmlformats.org/markup-compatibility/2006" xmlns:mv="urn:schemas-microsoft-com:mac:vml" xmlns:p="http://schemas.openxmlformats.org/presentationml/2006/main" xmlns:c="http://schemas.openxmlformats.org/drawingml/2006/chart" xmlns:dgm="http://schemas.openxmlformats.org/drawingml/2006/diagram" xmlns:o="urn:schemas-microsoft-com:office:office" xmlns:v="urn:schemas-microsoft-com:vml" xmlns:pvml="urn:schemas-microsoft-com:office:powerpoint" xmlns:com="http://schemas.openxmlformats.org/drawingml/2006/compatibility" xmlns:p14="http://schemas.microsoft.com/office/powerpoint/2010/main" xmlns:p15="http://schemas.microsoft.com/office/powerpoint/2012/main" xmlns:ahyp="http://schemas.microsoft.com/office/drawing/2018/hyperlinkcolor">
   <p:cSld>
     <p:bg>
@@ -5859,7 +7006,7 @@
 </p:sld>
 </file>
 
-<file path=ppt/slides/slide12.xml><?xml version="1.0" encoding="utf-8"?>
+<file path=ppt/slides/slide13.xml><?xml version="1.0" encoding="utf-8"?>
 <p:sld xmlns:a="http://schemas.openxmlformats.org/drawingml/2006/main" xmlns:p="http://schemas.openxmlformats.org/presentationml/2006/main" xmlns:r="http://schemas.openxmlformats.org/officeDocument/2006/relationships">
   <p:cSld>
     <p:bg>
@@ -5879,7 +7026,7 @@
       <p:grpSpPr/>
       <p:sp>
         <p:nvSpPr>
-          <p:cNvPr id="950" name="ExecTitle"/>
+          <p:cNvPr id="970" name="AgendaTitle"/>
           <p:cNvSpPr/>
           <p:nvPr/>
         </p:nvSpPr>
@@ -5926,7 +7073,7 @@
                 <a:cs typeface="Arial"/>
                 <a:sym typeface="Arial"/>
               </a:rPr>
-              <a:t>エグゼクティブサマリー</a:t>
+              <a:t>アジェンダ</a:t>
             </a:r>
             <a:endParaRPr b="0" i="0" sz="2900" u="none" cap="none" strike="noStrike">
               <a:solidFill>
@@ -5942,7 +7089,7 @@
       </p:sp>
       <p:cxnSp>
         <p:nvCxnSpPr>
-          <p:cNvPr id="951" name="Rule1"/>
+          <p:cNvPr id="971" name="AgendaRule"/>
           <p:cNvCxnSpPr/>
           <p:nvPr/>
         </p:nvCxnSpPr>
@@ -5977,85 +7124,14 @@
       </p:cxnSp>
       <p:sp>
         <p:nvSpPr>
-          <p:cNvPr id="952" name="ExecThesis"/>
-          <p:cNvSpPr/>
-          <p:nvPr/>
-        </p:nvSpPr>
-        <p:spPr>
-          <a:xfrm>
-            <a:off x="548640" y="1029600"/>
-            <a:ext cx="8046720" cy="468000"/>
-          </a:xfrm>
-          <a:prstGeom prst="rect">
-            <a:avLst/>
-          </a:prstGeom>
-          <a:solidFill>
-            <a:srgbClr val="EEF0F4"/>
-          </a:solidFill>
-          <a:ln w="9525">
-            <a:solidFill>
-              <a:srgbClr val="D7DCE5"/>
-            </a:solidFill>
-          </a:ln>
-          <a:effectLst/>
-        </p:spPr>
-        <p:txBody>
-          <a:bodyPr rtlCol="0" anchor="ctr" wrap="square" lIns="216000" rIns="108000" tIns="21600" bIns="21600"/>
-          <a:lstStyle/>
-          <a:p>
-            <a:pPr algn="l"/>
-            <a:r>
-              <a:rPr sz="1300" b="1">
-                <a:solidFill>
-                  <a:srgbClr val="16263F"/>
-                </a:solidFill>
-                <a:latin typeface="Arial"/>
-              </a:rPr>
-              <a:t>経済安全保障 × 宇宙 × AI に「狭く深く」張る集中型ファンドで、Solafune にリードで投資する。</a:t>
-            </a:r>
-          </a:p>
-        </p:txBody>
-      </p:sp>
-      <p:sp>
-        <p:nvSpPr>
-          <p:cNvPr id="953" name="ExecThesisBar"/>
-          <p:cNvSpPr/>
-          <p:nvPr/>
-        </p:nvSpPr>
-        <p:spPr>
-          <a:xfrm>
-            <a:off x="548640" y="1029600"/>
-            <a:ext cx="54000" cy="468000"/>
-          </a:xfrm>
-          <a:prstGeom prst="rect">
-            <a:avLst/>
-          </a:prstGeom>
-          <a:solidFill>
-            <a:srgbClr val="1488C2"/>
-          </a:solidFill>
-          <a:ln>
-            <a:noFill/>
-          </a:ln>
-          <a:effectLst/>
-        </p:spPr>
-        <p:txBody>
-          <a:bodyPr rtlCol="0" anchor="ctr"/>
-          <a:lstStyle/>
-          <a:p>
-            <a:pPr algn="ctr"/>
-          </a:p>
-        </p:txBody>
-      </p:sp>
-      <p:sp>
-        <p:nvSpPr>
-          <p:cNvPr id="954" name="ExecRow0"/>
-          <p:cNvSpPr/>
-          <p:nvPr/>
-        </p:nvSpPr>
-        <p:spPr>
-          <a:xfrm>
-            <a:off x="548640" y="1655999"/>
-            <a:ext cx="8046720" cy="511200"/>
+          <p:cNvPr id="972" name="AgRow0"/>
+          <p:cNvSpPr/>
+          <p:nvPr/>
+        </p:nvSpPr>
+        <p:spPr>
+          <a:xfrm>
+            <a:off x="548640" y="1242000"/>
+            <a:ext cx="8046720" cy="503999"/>
           </a:xfrm>
           <a:prstGeom prst="rect">
             <a:avLst/>
@@ -6080,16 +7156,16 @@
       </p:sp>
       <p:sp>
         <p:nvSpPr>
-          <p:cNvPr id="955" name="ExecRowBar0"/>
-          <p:cNvSpPr/>
-          <p:nvPr/>
-        </p:nvSpPr>
-        <p:spPr>
-          <a:xfrm>
-            <a:off x="548640" y="1655999"/>
-            <a:ext cx="54000" cy="511200"/>
-          </a:xfrm>
-          <a:prstGeom prst="rect">
+          <p:cNvPr id="973" name="AgBadge0"/>
+          <p:cNvSpPr/>
+          <p:nvPr/>
+        </p:nvSpPr>
+        <p:spPr>
+          <a:xfrm>
+            <a:off x="663840" y="1317599"/>
+            <a:ext cx="352800" cy="352800"/>
+          </a:xfrm>
+          <a:prstGeom prst="ellipse">
             <a:avLst/>
           </a:prstGeom>
           <a:solidFill>
@@ -6101,93 +7177,102 @@
           <a:effectLst/>
         </p:spPr>
         <p:txBody>
-          <a:bodyPr rtlCol="0" anchor="ctr"/>
+          <a:bodyPr rtlCol="0" anchor="ctr" wrap="none" lIns="0" rIns="0" tIns="0" bIns="0"/>
           <a:lstStyle/>
           <a:p>
             <a:pPr algn="ctr"/>
-          </a:p>
-        </p:txBody>
-      </p:sp>
-      <p:sp>
-        <p:nvSpPr>
-          <p:cNvPr id="956" name="TextBox 955"/>
-          <p:cNvSpPr txBox="1"/>
-          <p:nvPr/>
-        </p:nvSpPr>
-        <p:spPr>
-          <a:xfrm>
-            <a:off x="692640" y="1655999"/>
-            <a:ext cx="1044000" cy="511200"/>
-          </a:xfrm>
-          <a:prstGeom prst="rect">
-            <a:avLst/>
-          </a:prstGeom>
-          <a:noFill/>
-        </p:spPr>
-        <p:txBody>
-          <a:bodyPr wrap="square" anchor="ctr" lIns="54000" rIns="0" tIns="0" bIns="0">
-            <a:spAutoFit/>
-          </a:bodyPr>
-          <a:lstStyle/>
-          <a:p>
-            <a:pPr algn="l"/>
-            <a:r>
-              <a:rPr sz="1300" b="1">
-                <a:solidFill>
-                  <a:srgbClr val="1488C2"/>
+            <a:r>
+              <a:rPr sz="1400" b="1">
+                <a:solidFill>
+                  <a:srgbClr val="FFFFFF"/>
                 </a:solidFill>
                 <a:latin typeface="Arial"/>
               </a:rPr>
-              <a:t>ファンド</a:t>
-            </a:r>
-          </a:p>
-        </p:txBody>
-      </p:sp>
-      <p:sp>
-        <p:nvSpPr>
-          <p:cNvPr id="957" name="TextBox 956"/>
+              <a:t>01</a:t>
+            </a:r>
+          </a:p>
+        </p:txBody>
+      </p:sp>
+      <p:sp>
+        <p:nvSpPr>
+          <p:cNvPr id="974" name="TextBox 973"/>
           <p:cNvSpPr txBox="1"/>
           <p:nvPr/>
         </p:nvSpPr>
         <p:spPr>
           <a:xfrm>
-            <a:off x="1682640" y="1655999"/>
-            <a:ext cx="6912720" cy="511200"/>
-          </a:xfrm>
-          <a:prstGeom prst="rect">
-            <a:avLst/>
-          </a:prstGeom>
-          <a:noFill/>
-        </p:spPr>
-        <p:txBody>
-          <a:bodyPr wrap="square" anchor="ctr" lIns="0" rIns="72000" tIns="0" bIns="0">
+            <a:off x="1160640" y="1242000"/>
+            <a:ext cx="5040000" cy="503999"/>
+          </a:xfrm>
+          <a:prstGeom prst="rect">
+            <a:avLst/>
+          </a:prstGeom>
+          <a:noFill/>
+        </p:spPr>
+        <p:txBody>
+          <a:bodyPr wrap="square" anchor="ctr" lIns="0" rIns="0" tIns="0" bIns="0">
             <a:spAutoFit/>
           </a:bodyPr>
           <a:lstStyle/>
           <a:p>
             <a:pPr algn="l"/>
             <a:r>
-              <a:rPr sz="1150">
+              <a:rPr sz="1600" b="1">
                 <a:solidFill>
                   <a:srgbClr val="16263F"/>
                 </a:solidFill>
                 <a:latin typeface="Arial"/>
               </a:rPr>
-              <a:t>総額150億円・集中10〜12社・運用10年の日本登記3号。目標ネットDPI 3.0X（グロス約4.3X）。</a:t>
-            </a:r>
-          </a:p>
-        </p:txBody>
-      </p:sp>
-      <p:sp>
-        <p:nvSpPr>
-          <p:cNvPr id="958" name="ExecRow1"/>
-          <p:cNvSpPr/>
-          <p:nvPr/>
-        </p:nvSpPr>
-        <p:spPr>
-          <a:xfrm>
-            <a:off x="548640" y="2239199"/>
-            <a:ext cx="8046720" cy="511200"/>
+              <a:t>勝ち筋とファンド設計</a:t>
+            </a:r>
+          </a:p>
+        </p:txBody>
+      </p:sp>
+      <p:sp>
+        <p:nvSpPr>
+          <p:cNvPr id="975" name="TextBox 974"/>
+          <p:cNvSpPr txBox="1"/>
+          <p:nvPr/>
+        </p:nvSpPr>
+        <p:spPr>
+          <a:xfrm>
+            <a:off x="5948640" y="1242000"/>
+            <a:ext cx="2538720" cy="503999"/>
+          </a:xfrm>
+          <a:prstGeom prst="rect">
+            <a:avLst/>
+          </a:prstGeom>
+          <a:noFill/>
+        </p:spPr>
+        <p:txBody>
+          <a:bodyPr wrap="square" anchor="ctr" lIns="0" rIns="0" tIns="0" bIns="0">
+            <a:spAutoFit/>
+          </a:bodyPr>
+          <a:lstStyle/>
+          <a:p>
+            <a:pPr algn="r"/>
+            <a:r>
+              <a:rPr sz="1050" b="1">
+                <a:solidFill>
+                  <a:srgbClr val="56627A"/>
+                </a:solidFill>
+                <a:latin typeface="Arial"/>
+              </a:rPr>
+              <a:t>OUR EDGE / FUND DESIGN</a:t>
+            </a:r>
+          </a:p>
+        </p:txBody>
+      </p:sp>
+      <p:sp>
+        <p:nvSpPr>
+          <p:cNvPr id="976" name="AgRow1"/>
+          <p:cNvSpPr/>
+          <p:nvPr/>
+        </p:nvSpPr>
+        <p:spPr>
+          <a:xfrm>
+            <a:off x="548640" y="1810800"/>
+            <a:ext cx="8046720" cy="503999"/>
           </a:xfrm>
           <a:prstGeom prst="rect">
             <a:avLst/>
@@ -6212,16 +7297,16 @@
       </p:sp>
       <p:sp>
         <p:nvSpPr>
-          <p:cNvPr id="959" name="ExecRowBar1"/>
-          <p:cNvSpPr/>
-          <p:nvPr/>
-        </p:nvSpPr>
-        <p:spPr>
-          <a:xfrm>
-            <a:off x="548640" y="2239199"/>
-            <a:ext cx="54000" cy="511200"/>
-          </a:xfrm>
-          <a:prstGeom prst="rect">
+          <p:cNvPr id="977" name="AgBadge1"/>
+          <p:cNvSpPr/>
+          <p:nvPr/>
+        </p:nvSpPr>
+        <p:spPr>
+          <a:xfrm>
+            <a:off x="663840" y="1886399"/>
+            <a:ext cx="352800" cy="352800"/>
+          </a:xfrm>
+          <a:prstGeom prst="ellipse">
             <a:avLst/>
           </a:prstGeom>
           <a:solidFill>
@@ -6233,93 +7318,102 @@
           <a:effectLst/>
         </p:spPr>
         <p:txBody>
-          <a:bodyPr rtlCol="0" anchor="ctr"/>
+          <a:bodyPr rtlCol="0" anchor="ctr" wrap="none" lIns="0" rIns="0" tIns="0" bIns="0"/>
           <a:lstStyle/>
           <a:p>
             <a:pPr algn="ctr"/>
-          </a:p>
-        </p:txBody>
-      </p:sp>
-      <p:sp>
-        <p:nvSpPr>
-          <p:cNvPr id="960" name="TextBox 959"/>
-          <p:cNvSpPr txBox="1"/>
-          <p:nvPr/>
-        </p:nvSpPr>
-        <p:spPr>
-          <a:xfrm>
-            <a:off x="692640" y="2239199"/>
-            <a:ext cx="1044000" cy="511200"/>
-          </a:xfrm>
-          <a:prstGeom prst="rect">
-            <a:avLst/>
-          </a:prstGeom>
-          <a:noFill/>
-        </p:spPr>
-        <p:txBody>
-          <a:bodyPr wrap="square" anchor="ctr" lIns="54000" rIns="0" tIns="0" bIns="0">
-            <a:spAutoFit/>
-          </a:bodyPr>
-          <a:lstStyle/>
-          <a:p>
-            <a:pPr algn="l"/>
-            <a:r>
-              <a:rPr sz="1300" b="1">
-                <a:solidFill>
-                  <a:srgbClr val="1488C2"/>
+            <a:r>
+              <a:rPr sz="1400" b="1">
+                <a:solidFill>
+                  <a:srgbClr val="FFFFFF"/>
                 </a:solidFill>
                 <a:latin typeface="Arial"/>
               </a:rPr>
-              <a:t>なぜ今</a:t>
-            </a:r>
-          </a:p>
-        </p:txBody>
-      </p:sp>
-      <p:sp>
-        <p:nvSpPr>
-          <p:cNvPr id="961" name="TextBox 960"/>
+              <a:t>02</a:t>
+            </a:r>
+          </a:p>
+        </p:txBody>
+      </p:sp>
+      <p:sp>
+        <p:nvSpPr>
+          <p:cNvPr id="978" name="TextBox 977"/>
           <p:cNvSpPr txBox="1"/>
           <p:nvPr/>
         </p:nvSpPr>
         <p:spPr>
           <a:xfrm>
-            <a:off x="1682640" y="2239199"/>
-            <a:ext cx="6912720" cy="511200"/>
-          </a:xfrm>
-          <a:prstGeom prst="rect">
-            <a:avLst/>
-          </a:prstGeom>
-          <a:noFill/>
-        </p:spPr>
-        <p:txBody>
-          <a:bodyPr wrap="square" anchor="ctr" lIns="0" rIns="72000" tIns="0" bIns="0">
+            <a:off x="1160640" y="1810800"/>
+            <a:ext cx="5040000" cy="503999"/>
+          </a:xfrm>
+          <a:prstGeom prst="rect">
+            <a:avLst/>
+          </a:prstGeom>
+          <a:noFill/>
+        </p:spPr>
+        <p:txBody>
+          <a:bodyPr wrap="square" anchor="ctr" lIns="0" rIns="0" tIns="0" bIns="0">
             <a:spAutoFit/>
           </a:bodyPr>
           <a:lstStyle/>
           <a:p>
             <a:pPr algn="l"/>
             <a:r>
-              <a:rPr sz="1150">
+              <a:rPr sz="1600" b="1">
                 <a:solidFill>
                   <a:srgbClr val="16263F"/>
                 </a:solidFill>
                 <a:latin typeface="Arial"/>
               </a:rPr>
-              <a:t>重要鉱物の主権争いで、防衛・宇宙の公的需要が構造的に拡大（防衛8.8兆円・宇宙戦略基金1兆円）。</a:t>
-            </a:r>
-          </a:p>
-        </p:txBody>
-      </p:sp>
-      <p:sp>
-        <p:nvSpPr>
-          <p:cNvPr id="962" name="ExecRow2"/>
-          <p:cNvSpPr/>
-          <p:nvPr/>
-        </p:nvSpPr>
-        <p:spPr>
-          <a:xfrm>
-            <a:off x="548640" y="2822399"/>
-            <a:ext cx="8046720" cy="511200"/>
+              <a:t>なぜ今 — 経済安全保障 × 宇宙</a:t>
+            </a:r>
+          </a:p>
+        </p:txBody>
+      </p:sp>
+      <p:sp>
+        <p:nvSpPr>
+          <p:cNvPr id="979" name="TextBox 978"/>
+          <p:cNvSpPr txBox="1"/>
+          <p:nvPr/>
+        </p:nvSpPr>
+        <p:spPr>
+          <a:xfrm>
+            <a:off x="5948640" y="1810800"/>
+            <a:ext cx="2538720" cy="503999"/>
+          </a:xfrm>
+          <a:prstGeom prst="rect">
+            <a:avLst/>
+          </a:prstGeom>
+          <a:noFill/>
+        </p:spPr>
+        <p:txBody>
+          <a:bodyPr wrap="square" anchor="ctr" lIns="0" rIns="0" tIns="0" bIns="0">
+            <a:spAutoFit/>
+          </a:bodyPr>
+          <a:lstStyle/>
+          <a:p>
+            <a:pPr algn="r"/>
+            <a:r>
+              <a:rPr sz="1050" b="1">
+                <a:solidFill>
+                  <a:srgbClr val="56627A"/>
+                </a:solidFill>
+                <a:latin typeface="Arial"/>
+              </a:rPr>
+              <a:t>WHY NOW</a:t>
+            </a:r>
+          </a:p>
+        </p:txBody>
+      </p:sp>
+      <p:sp>
+        <p:nvSpPr>
+          <p:cNvPr id="980" name="AgRow2"/>
+          <p:cNvSpPr/>
+          <p:nvPr/>
+        </p:nvSpPr>
+        <p:spPr>
+          <a:xfrm>
+            <a:off x="548640" y="2379600"/>
+            <a:ext cx="8046720" cy="503999"/>
           </a:xfrm>
           <a:prstGeom prst="rect">
             <a:avLst/>
@@ -6344,16 +7438,16 @@
       </p:sp>
       <p:sp>
         <p:nvSpPr>
-          <p:cNvPr id="963" name="ExecRowBar2"/>
-          <p:cNvSpPr/>
-          <p:nvPr/>
-        </p:nvSpPr>
-        <p:spPr>
-          <a:xfrm>
-            <a:off x="548640" y="2822399"/>
-            <a:ext cx="54000" cy="511200"/>
-          </a:xfrm>
-          <a:prstGeom prst="rect">
+          <p:cNvPr id="981" name="AgBadge2"/>
+          <p:cNvSpPr/>
+          <p:nvPr/>
+        </p:nvSpPr>
+        <p:spPr>
+          <a:xfrm>
+            <a:off x="663840" y="2455199"/>
+            <a:ext cx="352800" cy="352800"/>
+          </a:xfrm>
+          <a:prstGeom prst="ellipse">
             <a:avLst/>
           </a:prstGeom>
           <a:solidFill>
@@ -6365,93 +7459,102 @@
           <a:effectLst/>
         </p:spPr>
         <p:txBody>
-          <a:bodyPr rtlCol="0" anchor="ctr"/>
+          <a:bodyPr rtlCol="0" anchor="ctr" wrap="none" lIns="0" rIns="0" tIns="0" bIns="0"/>
           <a:lstStyle/>
           <a:p>
             <a:pPr algn="ctr"/>
-          </a:p>
-        </p:txBody>
-      </p:sp>
-      <p:sp>
-        <p:nvSpPr>
-          <p:cNvPr id="964" name="TextBox 963"/>
-          <p:cNvSpPr txBox="1"/>
-          <p:nvPr/>
-        </p:nvSpPr>
-        <p:spPr>
-          <a:xfrm>
-            <a:off x="692640" y="2822399"/>
-            <a:ext cx="1044000" cy="511200"/>
-          </a:xfrm>
-          <a:prstGeom prst="rect">
-            <a:avLst/>
-          </a:prstGeom>
-          <a:noFill/>
-        </p:spPr>
-        <p:txBody>
-          <a:bodyPr wrap="square" anchor="ctr" lIns="54000" rIns="0" tIns="0" bIns="0">
-            <a:spAutoFit/>
-          </a:bodyPr>
-          <a:lstStyle/>
-          <a:p>
-            <a:pPr algn="l"/>
-            <a:r>
-              <a:rPr sz="1300" b="1">
-                <a:solidFill>
-                  <a:srgbClr val="1488C2"/>
+            <a:r>
+              <a:rPr sz="1400" b="1">
+                <a:solidFill>
+                  <a:srgbClr val="FFFFFF"/>
                 </a:solidFill>
                 <a:latin typeface="Arial"/>
               </a:rPr>
-              <a:t>投資対象</a:t>
-            </a:r>
-          </a:p>
-        </p:txBody>
-      </p:sp>
-      <p:sp>
-        <p:nvSpPr>
-          <p:cNvPr id="965" name="TextBox 964"/>
+              <a:t>03</a:t>
+            </a:r>
+          </a:p>
+        </p:txBody>
+      </p:sp>
+      <p:sp>
+        <p:nvSpPr>
+          <p:cNvPr id="982" name="TextBox 981"/>
           <p:cNvSpPr txBox="1"/>
           <p:nvPr/>
         </p:nvSpPr>
         <p:spPr>
           <a:xfrm>
-            <a:off x="1682640" y="2822399"/>
-            <a:ext cx="6912720" cy="511200"/>
-          </a:xfrm>
-          <a:prstGeom prst="rect">
-            <a:avLst/>
-          </a:prstGeom>
-          <a:noFill/>
-        </p:spPr>
-        <p:txBody>
-          <a:bodyPr wrap="square" anchor="ctr" lIns="0" rIns="72000" tIns="0" bIns="0">
+            <a:off x="1160640" y="2379600"/>
+            <a:ext cx="5040000" cy="503999"/>
+          </a:xfrm>
+          <a:prstGeom prst="rect">
+            <a:avLst/>
+          </a:prstGeom>
+          <a:noFill/>
+        </p:spPr>
+        <p:txBody>
+          <a:bodyPr wrap="square" anchor="ctr" lIns="0" rIns="0" tIns="0" bIns="0">
             <a:spAutoFit/>
           </a:bodyPr>
           <a:lstStyle/>
           <a:p>
             <a:pPr algn="l"/>
             <a:r>
-              <a:rPr sz="1150">
+              <a:rPr sz="1600" b="1">
                 <a:solidFill>
                   <a:srgbClr val="16263F"/>
                 </a:solidFill>
                 <a:latin typeface="Arial"/>
               </a:rPr>
-              <a:t>Solafune＝衛星×AIで地球を解析する「Planetary Intelligence OS」。120カ国超の開発者基盤。</a:t>
-            </a:r>
-          </a:p>
-        </p:txBody>
-      </p:sp>
-      <p:sp>
-        <p:nvSpPr>
-          <p:cNvPr id="966" name="ExecRow3"/>
-          <p:cNvSpPr/>
-          <p:nvPr/>
-        </p:nvSpPr>
-        <p:spPr>
-          <a:xfrm>
-            <a:off x="548640" y="3405599"/>
-            <a:ext cx="8046720" cy="511200"/>
+              <a:t>投資対象 — Solafune と競争優位</a:t>
+            </a:r>
+          </a:p>
+        </p:txBody>
+      </p:sp>
+      <p:sp>
+        <p:nvSpPr>
+          <p:cNvPr id="983" name="TextBox 982"/>
+          <p:cNvSpPr txBox="1"/>
+          <p:nvPr/>
+        </p:nvSpPr>
+        <p:spPr>
+          <a:xfrm>
+            <a:off x="5948640" y="2379600"/>
+            <a:ext cx="2538720" cy="503999"/>
+          </a:xfrm>
+          <a:prstGeom prst="rect">
+            <a:avLst/>
+          </a:prstGeom>
+          <a:noFill/>
+        </p:spPr>
+        <p:txBody>
+          <a:bodyPr wrap="square" anchor="ctr" lIns="0" rIns="0" tIns="0" bIns="0">
+            <a:spAutoFit/>
+          </a:bodyPr>
+          <a:lstStyle/>
+          <a:p>
+            <a:pPr algn="r"/>
+            <a:r>
+              <a:rPr sz="1050" b="1">
+                <a:solidFill>
+                  <a:srgbClr val="56627A"/>
+                </a:solidFill>
+                <a:latin typeface="Arial"/>
+              </a:rPr>
+              <a:t>THE TARGET / MOAT</a:t>
+            </a:r>
+          </a:p>
+        </p:txBody>
+      </p:sp>
+      <p:sp>
+        <p:nvSpPr>
+          <p:cNvPr id="984" name="AgRow3"/>
+          <p:cNvSpPr/>
+          <p:nvPr/>
+        </p:nvSpPr>
+        <p:spPr>
+          <a:xfrm>
+            <a:off x="548640" y="2948400"/>
+            <a:ext cx="8046720" cy="503999"/>
           </a:xfrm>
           <a:prstGeom prst="rect">
             <a:avLst/>
@@ -6476,16 +7579,16 @@
       </p:sp>
       <p:sp>
         <p:nvSpPr>
-          <p:cNvPr id="967" name="ExecRowBar3"/>
-          <p:cNvSpPr/>
-          <p:nvPr/>
-        </p:nvSpPr>
-        <p:spPr>
-          <a:xfrm>
-            <a:off x="548640" y="3405599"/>
-            <a:ext cx="54000" cy="511200"/>
-          </a:xfrm>
-          <a:prstGeom prst="rect">
+          <p:cNvPr id="985" name="AgBadge3"/>
+          <p:cNvSpPr/>
+          <p:nvPr/>
+        </p:nvSpPr>
+        <p:spPr>
+          <a:xfrm>
+            <a:off x="663840" y="3023999"/>
+            <a:ext cx="352800" cy="352800"/>
+          </a:xfrm>
+          <a:prstGeom prst="ellipse">
             <a:avLst/>
           </a:prstGeom>
           <a:solidFill>
@@ -6497,93 +7600,102 @@
           <a:effectLst/>
         </p:spPr>
         <p:txBody>
-          <a:bodyPr rtlCol="0" anchor="ctr"/>
+          <a:bodyPr rtlCol="0" anchor="ctr" wrap="none" lIns="0" rIns="0" tIns="0" bIns="0"/>
           <a:lstStyle/>
           <a:p>
             <a:pPr algn="ctr"/>
-          </a:p>
-        </p:txBody>
-      </p:sp>
-      <p:sp>
-        <p:nvSpPr>
-          <p:cNvPr id="968" name="TextBox 967"/>
-          <p:cNvSpPr txBox="1"/>
-          <p:nvPr/>
-        </p:nvSpPr>
-        <p:spPr>
-          <a:xfrm>
-            <a:off x="692640" y="3405599"/>
-            <a:ext cx="1044000" cy="511200"/>
-          </a:xfrm>
-          <a:prstGeom prst="rect">
-            <a:avLst/>
-          </a:prstGeom>
-          <a:noFill/>
-        </p:spPr>
-        <p:txBody>
-          <a:bodyPr wrap="square" anchor="ctr" lIns="54000" rIns="0" tIns="0" bIns="0">
-            <a:spAutoFit/>
-          </a:bodyPr>
-          <a:lstStyle/>
-          <a:p>
-            <a:pPr algn="l"/>
-            <a:r>
-              <a:rPr sz="1300" b="1">
-                <a:solidFill>
-                  <a:srgbClr val="1488C2"/>
+            <a:r>
+              <a:rPr sz="1400" b="1">
+                <a:solidFill>
+                  <a:srgbClr val="FFFFFF"/>
                 </a:solidFill>
                 <a:latin typeface="Arial"/>
               </a:rPr>
-              <a:t>勝ち筋</a:t>
-            </a:r>
-          </a:p>
-        </p:txBody>
-      </p:sp>
-      <p:sp>
-        <p:nvSpPr>
-          <p:cNvPr id="969" name="TextBox 968"/>
+              <a:t>04</a:t>
+            </a:r>
+          </a:p>
+        </p:txBody>
+      </p:sp>
+      <p:sp>
+        <p:nvSpPr>
+          <p:cNvPr id="986" name="TextBox 985"/>
           <p:cNvSpPr txBox="1"/>
           <p:nvPr/>
         </p:nvSpPr>
         <p:spPr>
           <a:xfrm>
-            <a:off x="1682640" y="3405599"/>
-            <a:ext cx="6912720" cy="511200"/>
-          </a:xfrm>
-          <a:prstGeom prst="rect">
-            <a:avLst/>
-          </a:prstGeom>
-          <a:noFill/>
-        </p:spPr>
-        <p:txBody>
-          <a:bodyPr wrap="square" anchor="ctr" lIns="0" rIns="72000" tIns="0" bIns="0">
+            <a:off x="1160640" y="2948400"/>
+            <a:ext cx="5040000" cy="503999"/>
+          </a:xfrm>
+          <a:prstGeom prst="rect">
+            <a:avLst/>
+          </a:prstGeom>
+          <a:noFill/>
+        </p:spPr>
+        <p:txBody>
+          <a:bodyPr wrap="square" anchor="ctr" lIns="0" rIns="0" tIns="0" bIns="0">
             <a:spAutoFit/>
           </a:bodyPr>
           <a:lstStyle/>
           <a:p>
             <a:pPr algn="l"/>
             <a:r>
-              <a:rPr sz="1150">
+              <a:rPr sz="1600" b="1">
                 <a:solidFill>
                   <a:srgbClr val="16263F"/>
                 </a:solidFill>
                 <a:latin typeface="Arial"/>
               </a:rPr>
-              <a:t>衛星を持たず解析レイヤーに特化。ネットワーク効果と政府・国際機関の信認が参入障壁。</a:t>
-            </a:r>
-          </a:p>
-        </p:txBody>
-      </p:sp>
-      <p:sp>
-        <p:nvSpPr>
-          <p:cNvPr id="970" name="ExecRow4"/>
-          <p:cNvSpPr/>
-          <p:nvPr/>
-        </p:nvSpPr>
-        <p:spPr>
-          <a:xfrm>
-            <a:off x="548640" y="3988799"/>
-            <a:ext cx="8046720" cy="511200"/>
+              <a:t>市場規模と定量モデル</a:t>
+            </a:r>
+          </a:p>
+        </p:txBody>
+      </p:sp>
+      <p:sp>
+        <p:nvSpPr>
+          <p:cNvPr id="987" name="TextBox 986"/>
+          <p:cNvSpPr txBox="1"/>
+          <p:nvPr/>
+        </p:nvSpPr>
+        <p:spPr>
+          <a:xfrm>
+            <a:off x="5948640" y="2948400"/>
+            <a:ext cx="2538720" cy="503999"/>
+          </a:xfrm>
+          <a:prstGeom prst="rect">
+            <a:avLst/>
+          </a:prstGeom>
+          <a:noFill/>
+        </p:spPr>
+        <p:txBody>
+          <a:bodyPr wrap="square" anchor="ctr" lIns="0" rIns="0" tIns="0" bIns="0">
+            <a:spAutoFit/>
+          </a:bodyPr>
+          <a:lstStyle/>
+          <a:p>
+            <a:pPr algn="r"/>
+            <a:r>
+              <a:rPr sz="1050" b="1">
+                <a:solidFill>
+                  <a:srgbClr val="56627A"/>
+                </a:solidFill>
+                <a:latin typeface="Arial"/>
+              </a:rPr>
+              <a:t>MARKET / QUANT</a:t>
+            </a:r>
+          </a:p>
+        </p:txBody>
+      </p:sp>
+      <p:sp>
+        <p:nvSpPr>
+          <p:cNvPr id="988" name="AgRow4"/>
+          <p:cNvSpPr/>
+          <p:nvPr/>
+        </p:nvSpPr>
+        <p:spPr>
+          <a:xfrm>
+            <a:off x="548640" y="3517200"/>
+            <a:ext cx="8046720" cy="503999"/>
           </a:xfrm>
           <a:prstGeom prst="rect">
             <a:avLst/>
@@ -6608,16 +7720,16 @@
       </p:sp>
       <p:sp>
         <p:nvSpPr>
-          <p:cNvPr id="971" name="ExecRowBar4"/>
-          <p:cNvSpPr/>
-          <p:nvPr/>
-        </p:nvSpPr>
-        <p:spPr>
-          <a:xfrm>
-            <a:off x="548640" y="3988799"/>
-            <a:ext cx="54000" cy="511200"/>
-          </a:xfrm>
-          <a:prstGeom prst="rect">
+          <p:cNvPr id="989" name="AgBadge4"/>
+          <p:cNvSpPr/>
+          <p:nvPr/>
+        </p:nvSpPr>
+        <p:spPr>
+          <a:xfrm>
+            <a:off x="663840" y="3592799"/>
+            <a:ext cx="352800" cy="352800"/>
+          </a:xfrm>
+          <a:prstGeom prst="ellipse">
             <a:avLst/>
           </a:prstGeom>
           <a:solidFill>
@@ -6629,114 +7741,229 @@
           <a:effectLst/>
         </p:spPr>
         <p:txBody>
-          <a:bodyPr rtlCol="0" anchor="ctr"/>
+          <a:bodyPr rtlCol="0" anchor="ctr" wrap="none" lIns="0" rIns="0" tIns="0" bIns="0"/>
           <a:lstStyle/>
           <a:p>
             <a:pPr algn="ctr"/>
-          </a:p>
-        </p:txBody>
-      </p:sp>
-      <p:sp>
-        <p:nvSpPr>
-          <p:cNvPr id="972" name="TextBox 971"/>
-          <p:cNvSpPr txBox="1"/>
-          <p:nvPr/>
-        </p:nvSpPr>
-        <p:spPr>
-          <a:xfrm>
-            <a:off x="692640" y="3988799"/>
-            <a:ext cx="1044000" cy="511200"/>
-          </a:xfrm>
-          <a:prstGeom prst="rect">
-            <a:avLst/>
-          </a:prstGeom>
-          <a:noFill/>
-        </p:spPr>
-        <p:txBody>
-          <a:bodyPr wrap="square" anchor="ctr" lIns="54000" rIns="0" tIns="0" bIns="0">
-            <a:spAutoFit/>
-          </a:bodyPr>
-          <a:lstStyle/>
-          <a:p>
-            <a:pPr algn="l"/>
-            <a:r>
-              <a:rPr sz="1300" b="1">
-                <a:solidFill>
-                  <a:srgbClr val="1488C2"/>
+            <a:r>
+              <a:rPr sz="1400" b="1">
+                <a:solidFill>
+                  <a:srgbClr val="FFFFFF"/>
                 </a:solidFill>
                 <a:latin typeface="Arial"/>
               </a:rPr>
-              <a:t>リターン</a:t>
-            </a:r>
-          </a:p>
-        </p:txBody>
-      </p:sp>
-      <p:sp>
-        <p:nvSpPr>
-          <p:cNvPr id="973" name="TextBox 972"/>
+              <a:t>05</a:t>
+            </a:r>
+          </a:p>
+        </p:txBody>
+      </p:sp>
+      <p:sp>
+        <p:nvSpPr>
+          <p:cNvPr id="990" name="TextBox 989"/>
           <p:cNvSpPr txBox="1"/>
           <p:nvPr/>
         </p:nvSpPr>
         <p:spPr>
           <a:xfrm>
-            <a:off x="1682640" y="3988799"/>
-            <a:ext cx="6912720" cy="511200"/>
-          </a:xfrm>
-          <a:prstGeom prst="rect">
-            <a:avLst/>
-          </a:prstGeom>
-          <a:noFill/>
-        </p:spPr>
-        <p:txBody>
-          <a:bodyPr wrap="square" anchor="ctr" lIns="0" rIns="72000" tIns="0" bIns="0">
+            <a:off x="1160640" y="3517200"/>
+            <a:ext cx="5040000" cy="503999"/>
+          </a:xfrm>
+          <a:prstGeom prst="rect">
+            <a:avLst/>
+          </a:prstGeom>
+          <a:noFill/>
+        </p:spPr>
+        <p:txBody>
+          <a:bodyPr wrap="square" anchor="ctr" lIns="0" rIns="0" tIns="0" bIns="0">
             <a:spAutoFit/>
           </a:bodyPr>
           <a:lstStyle/>
           <a:p>
             <a:pPr algn="l"/>
             <a:r>
-              <a:rPr sz="1150">
+              <a:rPr sz="1600" b="1">
                 <a:solidFill>
                   <a:srgbClr val="16263F"/>
                 </a:solidFill>
                 <a:latin typeface="Arial"/>
               </a:rPr>
-              <a:t>Solafune 1社のExit（企業価値1,500〜1,800億円）で150億円ファンドを回収（約1.3X）。</a:t>
-            </a:r>
-          </a:p>
-        </p:txBody>
-      </p:sp>
-      <p:sp>
-        <p:nvSpPr>
-          <p:cNvPr id="974" name="TextBox 973"/>
+              <a:t>リターン — 1社でファンドを返す</a:t>
+            </a:r>
+          </a:p>
+        </p:txBody>
+      </p:sp>
+      <p:sp>
+        <p:nvSpPr>
+          <p:cNvPr id="991" name="TextBox 990"/>
           <p:cNvSpPr txBox="1"/>
           <p:nvPr/>
         </p:nvSpPr>
         <p:spPr>
           <a:xfrm>
-            <a:off x="548640" y="4589999"/>
-            <a:ext cx="8046720" cy="251999"/>
-          </a:xfrm>
-          <a:prstGeom prst="rect">
-            <a:avLst/>
-          </a:prstGeom>
-          <a:noFill/>
-        </p:spPr>
-        <p:txBody>
-          <a:bodyPr wrap="square" anchor="ctr" lIns="18000" rIns="0" tIns="0" bIns="0">
+            <a:off x="5948640" y="3517200"/>
+            <a:ext cx="2538720" cy="503999"/>
+          </a:xfrm>
+          <a:prstGeom prst="rect">
+            <a:avLst/>
+          </a:prstGeom>
+          <a:noFill/>
+        </p:spPr>
+        <p:txBody>
+          <a:bodyPr wrap="square" anchor="ctr" lIns="0" rIns="0" tIns="0" bIns="0">
             <a:spAutoFit/>
           </a:bodyPr>
           <a:lstStyle/>
           <a:p>
-            <a:pPr algn="l"/>
-            <a:r>
-              <a:rPr sz="1000">
+            <a:pPr algn="r"/>
+            <a:r>
+              <a:rPr sz="1050" b="1">
                 <a:solidFill>
                   <a:srgbClr val="56627A"/>
                 </a:solidFill>
                 <a:latin typeface="Arial"/>
               </a:rPr>
-              <a:t>守り：出口未実証・政府依存・評価非開示のリスクは、契約条項（トランシェ払込・希薄化防止・取締役指名権）と保守的前提で先回りして潰す。</a:t>
+              <a:t>EXIT</a:t>
+            </a:r>
+          </a:p>
+        </p:txBody>
+      </p:sp>
+      <p:sp>
+        <p:nvSpPr>
+          <p:cNvPr id="992" name="AgRow5"/>
+          <p:cNvSpPr/>
+          <p:nvPr/>
+        </p:nvSpPr>
+        <p:spPr>
+          <a:xfrm>
+            <a:off x="548640" y="4086000"/>
+            <a:ext cx="8046720" cy="503999"/>
+          </a:xfrm>
+          <a:prstGeom prst="rect">
+            <a:avLst/>
+          </a:prstGeom>
+          <a:solidFill>
+            <a:srgbClr val="EEF3FB"/>
+          </a:solidFill>
+          <a:ln w="9525">
+            <a:solidFill>
+              <a:srgbClr val="D5DEEC"/>
+            </a:solidFill>
+          </a:ln>
+          <a:effectLst/>
+        </p:spPr>
+        <p:txBody>
+          <a:bodyPr rtlCol="0" anchor="ctr"/>
+          <a:lstStyle/>
+          <a:p>
+            <a:pPr algn="ctr"/>
+          </a:p>
+        </p:txBody>
+      </p:sp>
+      <p:sp>
+        <p:nvSpPr>
+          <p:cNvPr id="993" name="AgBadge5"/>
+          <p:cNvSpPr/>
+          <p:nvPr/>
+        </p:nvSpPr>
+        <p:spPr>
+          <a:xfrm>
+            <a:off x="663840" y="4161599"/>
+            <a:ext cx="352800" cy="352800"/>
+          </a:xfrm>
+          <a:prstGeom prst="ellipse">
+            <a:avLst/>
+          </a:prstGeom>
+          <a:solidFill>
+            <a:srgbClr val="1488C2"/>
+          </a:solidFill>
+          <a:ln>
+            <a:noFill/>
+          </a:ln>
+          <a:effectLst/>
+        </p:spPr>
+        <p:txBody>
+          <a:bodyPr rtlCol="0" anchor="ctr" wrap="none" lIns="0" rIns="0" tIns="0" bIns="0"/>
+          <a:lstStyle/>
+          <a:p>
+            <a:pPr algn="ctr"/>
+            <a:r>
+              <a:rPr sz="1400" b="1">
+                <a:solidFill>
+                  <a:srgbClr val="FFFFFF"/>
+                </a:solidFill>
+                <a:latin typeface="Arial"/>
+              </a:rPr>
+              <a:t>06</a:t>
+            </a:r>
+          </a:p>
+        </p:txBody>
+      </p:sp>
+      <p:sp>
+        <p:nvSpPr>
+          <p:cNvPr id="994" name="TextBox 993"/>
+          <p:cNvSpPr txBox="1"/>
+          <p:nvPr/>
+        </p:nvSpPr>
+        <p:spPr>
+          <a:xfrm>
+            <a:off x="1160640" y="4086000"/>
+            <a:ext cx="5040000" cy="503999"/>
+          </a:xfrm>
+          <a:prstGeom prst="rect">
+            <a:avLst/>
+          </a:prstGeom>
+          <a:noFill/>
+        </p:spPr>
+        <p:txBody>
+          <a:bodyPr wrap="square" anchor="ctr" lIns="0" rIns="0" tIns="0" bIns="0">
+            <a:spAutoFit/>
+          </a:bodyPr>
+          <a:lstStyle/>
+          <a:p>
+            <a:pPr algn="l"/>
+            <a:r>
+              <a:rPr sz="1600" b="1">
+                <a:solidFill>
+                  <a:srgbClr val="16263F"/>
+                </a:solidFill>
+                <a:latin typeface="Arial"/>
+              </a:rPr>
+              <a:t>リスクと備え</a:t>
+            </a:r>
+          </a:p>
+        </p:txBody>
+      </p:sp>
+      <p:sp>
+        <p:nvSpPr>
+          <p:cNvPr id="995" name="TextBox 994"/>
+          <p:cNvSpPr txBox="1"/>
+          <p:nvPr/>
+        </p:nvSpPr>
+        <p:spPr>
+          <a:xfrm>
+            <a:off x="5948640" y="4086000"/>
+            <a:ext cx="2538720" cy="503999"/>
+          </a:xfrm>
+          <a:prstGeom prst="rect">
+            <a:avLst/>
+          </a:prstGeom>
+          <a:noFill/>
+        </p:spPr>
+        <p:txBody>
+          <a:bodyPr wrap="square" anchor="ctr" lIns="0" rIns="0" tIns="0" bIns="0">
+            <a:spAutoFit/>
+          </a:bodyPr>
+          <a:lstStyle/>
+          <a:p>
+            <a:pPr algn="r"/>
+            <a:r>
+              <a:rPr sz="1050" b="1">
+                <a:solidFill>
+                  <a:srgbClr val="56627A"/>
+                </a:solidFill>
+                <a:latin typeface="Arial"/>
+              </a:rPr>
+              <a:t>RISK</a:t>
             </a:r>
           </a:p>
         </p:txBody>
@@ -6750,6 +7977,896 @@
 </file>
 
 <file path=ppt/slides/slide2.xml><?xml version="1.0" encoding="utf-8"?>
+<p:sld xmlns:a="http://schemas.openxmlformats.org/drawingml/2006/main" xmlns:p="http://schemas.openxmlformats.org/presentationml/2006/main" xmlns:r="http://schemas.openxmlformats.org/officeDocument/2006/relationships">
+  <p:cSld>
+    <p:bg>
+      <p:bgPr>
+        <a:solidFill>
+          <a:srgbClr val="FFFFFF"/>
+        </a:solidFill>
+        <a:effectLst/>
+      </p:bgPr>
+    </p:bg>
+    <p:spTree>
+      <p:nvGrpSpPr>
+        <p:cNvPr id="1" name=""/>
+        <p:cNvGrpSpPr/>
+        <p:nvPr/>
+      </p:nvGrpSpPr>
+      <p:grpSpPr/>
+      <p:sp>
+        <p:nvSpPr>
+          <p:cNvPr id="950" name="ExecTitle"/>
+          <p:cNvSpPr/>
+          <p:nvPr/>
+        </p:nvSpPr>
+        <p:spPr>
+          <a:xfrm>
+            <a:off x="548640" y="367200"/>
+            <a:ext cx="8046720" cy="566928"/>
+          </a:xfrm>
+          <a:prstGeom prst="rect">
+            <a:avLst/>
+          </a:prstGeom>
+          <a:noFill/>
+          <a:ln>
+            <a:noFill/>
+          </a:ln>
+        </p:spPr>
+        <p:txBody>
+          <a:bodyPr anchorCtr="0" anchor="ctr" bIns="0" lIns="0" spcFirstLastPara="1" rIns="0" wrap="square" tIns="0">
+            <a:noAutofit/>
+          </a:bodyPr>
+          <a:lstStyle/>
+          <a:p>
+            <a:pPr indent="0" lvl="0" marL="0" marR="0" rtl="0" algn="l">
+              <a:spcBef>
+                <a:spcPts val="0"/>
+              </a:spcBef>
+              <a:spcAft>
+                <a:spcPts val="0"/>
+              </a:spcAft>
+              <a:buClr>
+                <a:srgbClr val="16263F"/>
+              </a:buClr>
+              <a:buSzPts val="2900"/>
+              <a:buFont typeface="Arial"/>
+              <a:buNone/>
+            </a:pPr>
+            <a:r>
+              <a:rPr b="1" i="0" lang="en-US" sz="2900" u="none" cap="none" strike="noStrike">
+                <a:solidFill>
+                  <a:srgbClr val="16263F"/>
+                </a:solidFill>
+                <a:latin typeface="Arial"/>
+                <a:ea typeface="Arial"/>
+                <a:cs typeface="Arial"/>
+                <a:sym typeface="Arial"/>
+              </a:rPr>
+              <a:t>エグゼクティブサマリー</a:t>
+            </a:r>
+            <a:endParaRPr b="0" i="0" sz="2900" u="none" cap="none" strike="noStrike">
+              <a:solidFill>
+                <a:schemeClr val="dk1"/>
+              </a:solidFill>
+              <a:latin typeface="Calibri"/>
+              <a:ea typeface="Calibri"/>
+              <a:cs typeface="Calibri"/>
+              <a:sym typeface="Calibri"/>
+            </a:endParaRPr>
+          </a:p>
+        </p:txBody>
+      </p:sp>
+      <p:cxnSp>
+        <p:nvCxnSpPr>
+          <p:cNvPr id="951" name="Rule1"/>
+          <p:cNvCxnSpPr/>
+          <p:nvPr/>
+        </p:nvCxnSpPr>
+        <p:spPr>
+          <a:xfrm>
+            <a:off x="548640" y="957600"/>
+            <a:ext cx="8046720" cy="0"/>
+          </a:xfrm>
+          <a:prstGeom prst="line">
+            <a:avLst/>
+          </a:prstGeom>
+          <a:ln w="19050">
+            <a:solidFill>
+              <a:srgbClr val="9FAEC6"/>
+            </a:solidFill>
+          </a:ln>
+        </p:spPr>
+        <p:style>
+          <a:lnRef idx="2">
+            <a:schemeClr val="accent1"/>
+          </a:lnRef>
+          <a:fillRef idx="0">
+            <a:schemeClr val="accent1"/>
+          </a:fillRef>
+          <a:effectRef idx="1">
+            <a:schemeClr val="accent1"/>
+          </a:effectRef>
+          <a:fontRef idx="minor">
+            <a:schemeClr val="tx1"/>
+          </a:fontRef>
+        </p:style>
+      </p:cxnSp>
+      <p:sp>
+        <p:nvSpPr>
+          <p:cNvPr id="952" name="ExecThesis"/>
+          <p:cNvSpPr/>
+          <p:nvPr/>
+        </p:nvSpPr>
+        <p:spPr>
+          <a:xfrm>
+            <a:off x="548640" y="1029600"/>
+            <a:ext cx="8046720" cy="468000"/>
+          </a:xfrm>
+          <a:prstGeom prst="rect">
+            <a:avLst/>
+          </a:prstGeom>
+          <a:solidFill>
+            <a:srgbClr val="EEF0F4"/>
+          </a:solidFill>
+          <a:ln w="9525">
+            <a:solidFill>
+              <a:srgbClr val="D7DCE5"/>
+            </a:solidFill>
+          </a:ln>
+          <a:effectLst/>
+        </p:spPr>
+        <p:txBody>
+          <a:bodyPr rtlCol="0" anchor="ctr" wrap="square" lIns="216000" rIns="108000" tIns="21600" bIns="21600"/>
+          <a:lstStyle/>
+          <a:p>
+            <a:pPr algn="l"/>
+            <a:r>
+              <a:rPr sz="1300" b="1">
+                <a:solidFill>
+                  <a:srgbClr val="16263F"/>
+                </a:solidFill>
+                <a:latin typeface="Arial"/>
+              </a:rPr>
+              <a:t>経済安全保障 × 宇宙 × AI に「狭く深く」張る集中型ファンドで、Solafune にリードで投資する。</a:t>
+            </a:r>
+          </a:p>
+        </p:txBody>
+      </p:sp>
+      <p:sp>
+        <p:nvSpPr>
+          <p:cNvPr id="953" name="ExecThesisBar"/>
+          <p:cNvSpPr/>
+          <p:nvPr/>
+        </p:nvSpPr>
+        <p:spPr>
+          <a:xfrm>
+            <a:off x="548640" y="1029600"/>
+            <a:ext cx="54000" cy="468000"/>
+          </a:xfrm>
+          <a:prstGeom prst="rect">
+            <a:avLst/>
+          </a:prstGeom>
+          <a:solidFill>
+            <a:srgbClr val="1488C2"/>
+          </a:solidFill>
+          <a:ln>
+            <a:noFill/>
+          </a:ln>
+          <a:effectLst/>
+        </p:spPr>
+        <p:txBody>
+          <a:bodyPr rtlCol="0" anchor="ctr"/>
+          <a:lstStyle/>
+          <a:p>
+            <a:pPr algn="ctr"/>
+          </a:p>
+        </p:txBody>
+      </p:sp>
+      <p:sp>
+        <p:nvSpPr>
+          <p:cNvPr id="954" name="ExecRow0"/>
+          <p:cNvSpPr/>
+          <p:nvPr/>
+        </p:nvSpPr>
+        <p:spPr>
+          <a:xfrm>
+            <a:off x="548640" y="1655999"/>
+            <a:ext cx="8046720" cy="511200"/>
+          </a:xfrm>
+          <a:prstGeom prst="rect">
+            <a:avLst/>
+          </a:prstGeom>
+          <a:solidFill>
+            <a:srgbClr val="EEF3FB"/>
+          </a:solidFill>
+          <a:ln w="9525">
+            <a:solidFill>
+              <a:srgbClr val="D5DEEC"/>
+            </a:solidFill>
+          </a:ln>
+          <a:effectLst/>
+        </p:spPr>
+        <p:txBody>
+          <a:bodyPr rtlCol="0" anchor="ctr"/>
+          <a:lstStyle/>
+          <a:p>
+            <a:pPr algn="ctr"/>
+          </a:p>
+        </p:txBody>
+      </p:sp>
+      <p:sp>
+        <p:nvSpPr>
+          <p:cNvPr id="955" name="ExecRowBar0"/>
+          <p:cNvSpPr/>
+          <p:nvPr/>
+        </p:nvSpPr>
+        <p:spPr>
+          <a:xfrm>
+            <a:off x="548640" y="1655999"/>
+            <a:ext cx="54000" cy="511200"/>
+          </a:xfrm>
+          <a:prstGeom prst="rect">
+            <a:avLst/>
+          </a:prstGeom>
+          <a:solidFill>
+            <a:srgbClr val="1488C2"/>
+          </a:solidFill>
+          <a:ln>
+            <a:noFill/>
+          </a:ln>
+          <a:effectLst/>
+        </p:spPr>
+        <p:txBody>
+          <a:bodyPr rtlCol="0" anchor="ctr"/>
+          <a:lstStyle/>
+          <a:p>
+            <a:pPr algn="ctr"/>
+          </a:p>
+        </p:txBody>
+      </p:sp>
+      <p:sp>
+        <p:nvSpPr>
+          <p:cNvPr id="956" name="TextBox 955"/>
+          <p:cNvSpPr txBox="1"/>
+          <p:nvPr/>
+        </p:nvSpPr>
+        <p:spPr>
+          <a:xfrm>
+            <a:off x="692640" y="1655999"/>
+            <a:ext cx="1044000" cy="511200"/>
+          </a:xfrm>
+          <a:prstGeom prst="rect">
+            <a:avLst/>
+          </a:prstGeom>
+          <a:noFill/>
+        </p:spPr>
+        <p:txBody>
+          <a:bodyPr wrap="square" anchor="ctr" lIns="54000" rIns="0" tIns="0" bIns="0">
+            <a:spAutoFit/>
+          </a:bodyPr>
+          <a:lstStyle/>
+          <a:p>
+            <a:pPr algn="l"/>
+            <a:r>
+              <a:rPr sz="1300" b="1">
+                <a:solidFill>
+                  <a:srgbClr val="1488C2"/>
+                </a:solidFill>
+                <a:latin typeface="Arial"/>
+              </a:rPr>
+              <a:t>ファンド</a:t>
+            </a:r>
+          </a:p>
+        </p:txBody>
+      </p:sp>
+      <p:sp>
+        <p:nvSpPr>
+          <p:cNvPr id="957" name="TextBox 956"/>
+          <p:cNvSpPr txBox="1"/>
+          <p:nvPr/>
+        </p:nvSpPr>
+        <p:spPr>
+          <a:xfrm>
+            <a:off x="1682640" y="1655999"/>
+            <a:ext cx="6912720" cy="511200"/>
+          </a:xfrm>
+          <a:prstGeom prst="rect">
+            <a:avLst/>
+          </a:prstGeom>
+          <a:noFill/>
+        </p:spPr>
+        <p:txBody>
+          <a:bodyPr wrap="square" anchor="ctr" lIns="0" rIns="72000" tIns="0" bIns="0">
+            <a:spAutoFit/>
+          </a:bodyPr>
+          <a:lstStyle/>
+          <a:p>
+            <a:pPr algn="l"/>
+            <a:r>
+              <a:rPr sz="1150">
+                <a:solidFill>
+                  <a:srgbClr val="16263F"/>
+                </a:solidFill>
+                <a:latin typeface="Arial"/>
+              </a:rPr>
+              <a:t>総額150億円・集中10〜12社・運用10年の日本登記3号。目標ネットDPI 3.0X（グロス約4.3X）。</a:t>
+            </a:r>
+          </a:p>
+        </p:txBody>
+      </p:sp>
+      <p:sp>
+        <p:nvSpPr>
+          <p:cNvPr id="958" name="ExecRow1"/>
+          <p:cNvSpPr/>
+          <p:nvPr/>
+        </p:nvSpPr>
+        <p:spPr>
+          <a:xfrm>
+            <a:off x="548640" y="2239199"/>
+            <a:ext cx="8046720" cy="511200"/>
+          </a:xfrm>
+          <a:prstGeom prst="rect">
+            <a:avLst/>
+          </a:prstGeom>
+          <a:solidFill>
+            <a:srgbClr val="EEF3FB"/>
+          </a:solidFill>
+          <a:ln w="9525">
+            <a:solidFill>
+              <a:srgbClr val="D5DEEC"/>
+            </a:solidFill>
+          </a:ln>
+          <a:effectLst/>
+        </p:spPr>
+        <p:txBody>
+          <a:bodyPr rtlCol="0" anchor="ctr"/>
+          <a:lstStyle/>
+          <a:p>
+            <a:pPr algn="ctr"/>
+          </a:p>
+        </p:txBody>
+      </p:sp>
+      <p:sp>
+        <p:nvSpPr>
+          <p:cNvPr id="959" name="ExecRowBar1"/>
+          <p:cNvSpPr/>
+          <p:nvPr/>
+        </p:nvSpPr>
+        <p:spPr>
+          <a:xfrm>
+            <a:off x="548640" y="2239199"/>
+            <a:ext cx="54000" cy="511200"/>
+          </a:xfrm>
+          <a:prstGeom prst="rect">
+            <a:avLst/>
+          </a:prstGeom>
+          <a:solidFill>
+            <a:srgbClr val="1488C2"/>
+          </a:solidFill>
+          <a:ln>
+            <a:noFill/>
+          </a:ln>
+          <a:effectLst/>
+        </p:spPr>
+        <p:txBody>
+          <a:bodyPr rtlCol="0" anchor="ctr"/>
+          <a:lstStyle/>
+          <a:p>
+            <a:pPr algn="ctr"/>
+          </a:p>
+        </p:txBody>
+      </p:sp>
+      <p:sp>
+        <p:nvSpPr>
+          <p:cNvPr id="960" name="TextBox 959"/>
+          <p:cNvSpPr txBox="1"/>
+          <p:nvPr/>
+        </p:nvSpPr>
+        <p:spPr>
+          <a:xfrm>
+            <a:off x="692640" y="2239199"/>
+            <a:ext cx="1044000" cy="511200"/>
+          </a:xfrm>
+          <a:prstGeom prst="rect">
+            <a:avLst/>
+          </a:prstGeom>
+          <a:noFill/>
+        </p:spPr>
+        <p:txBody>
+          <a:bodyPr wrap="square" anchor="ctr" lIns="54000" rIns="0" tIns="0" bIns="0">
+            <a:spAutoFit/>
+          </a:bodyPr>
+          <a:lstStyle/>
+          <a:p>
+            <a:pPr algn="l"/>
+            <a:r>
+              <a:rPr sz="1300" b="1">
+                <a:solidFill>
+                  <a:srgbClr val="1488C2"/>
+                </a:solidFill>
+                <a:latin typeface="Arial"/>
+              </a:rPr>
+              <a:t>なぜ今</a:t>
+            </a:r>
+          </a:p>
+        </p:txBody>
+      </p:sp>
+      <p:sp>
+        <p:nvSpPr>
+          <p:cNvPr id="961" name="TextBox 960"/>
+          <p:cNvSpPr txBox="1"/>
+          <p:nvPr/>
+        </p:nvSpPr>
+        <p:spPr>
+          <a:xfrm>
+            <a:off x="1682640" y="2239199"/>
+            <a:ext cx="6912720" cy="511200"/>
+          </a:xfrm>
+          <a:prstGeom prst="rect">
+            <a:avLst/>
+          </a:prstGeom>
+          <a:noFill/>
+        </p:spPr>
+        <p:txBody>
+          <a:bodyPr wrap="square" anchor="ctr" lIns="0" rIns="72000" tIns="0" bIns="0">
+            <a:spAutoFit/>
+          </a:bodyPr>
+          <a:lstStyle/>
+          <a:p>
+            <a:pPr algn="l"/>
+            <a:r>
+              <a:rPr sz="1150">
+                <a:solidFill>
+                  <a:srgbClr val="16263F"/>
+                </a:solidFill>
+                <a:latin typeface="Arial"/>
+              </a:rPr>
+              <a:t>重要鉱物の主権争いで、防衛・宇宙の公的需要が構造的に拡大（防衛8.8兆円・宇宙戦略基金1兆円）。</a:t>
+            </a:r>
+          </a:p>
+        </p:txBody>
+      </p:sp>
+      <p:sp>
+        <p:nvSpPr>
+          <p:cNvPr id="962" name="ExecRow2"/>
+          <p:cNvSpPr/>
+          <p:nvPr/>
+        </p:nvSpPr>
+        <p:spPr>
+          <a:xfrm>
+            <a:off x="548640" y="2822399"/>
+            <a:ext cx="8046720" cy="511200"/>
+          </a:xfrm>
+          <a:prstGeom prst="rect">
+            <a:avLst/>
+          </a:prstGeom>
+          <a:solidFill>
+            <a:srgbClr val="EEF3FB"/>
+          </a:solidFill>
+          <a:ln w="9525">
+            <a:solidFill>
+              <a:srgbClr val="D5DEEC"/>
+            </a:solidFill>
+          </a:ln>
+          <a:effectLst/>
+        </p:spPr>
+        <p:txBody>
+          <a:bodyPr rtlCol="0" anchor="ctr"/>
+          <a:lstStyle/>
+          <a:p>
+            <a:pPr algn="ctr"/>
+          </a:p>
+        </p:txBody>
+      </p:sp>
+      <p:sp>
+        <p:nvSpPr>
+          <p:cNvPr id="963" name="ExecRowBar2"/>
+          <p:cNvSpPr/>
+          <p:nvPr/>
+        </p:nvSpPr>
+        <p:spPr>
+          <a:xfrm>
+            <a:off x="548640" y="2822399"/>
+            <a:ext cx="54000" cy="511200"/>
+          </a:xfrm>
+          <a:prstGeom prst="rect">
+            <a:avLst/>
+          </a:prstGeom>
+          <a:solidFill>
+            <a:srgbClr val="1488C2"/>
+          </a:solidFill>
+          <a:ln>
+            <a:noFill/>
+          </a:ln>
+          <a:effectLst/>
+        </p:spPr>
+        <p:txBody>
+          <a:bodyPr rtlCol="0" anchor="ctr"/>
+          <a:lstStyle/>
+          <a:p>
+            <a:pPr algn="ctr"/>
+          </a:p>
+        </p:txBody>
+      </p:sp>
+      <p:sp>
+        <p:nvSpPr>
+          <p:cNvPr id="964" name="TextBox 963"/>
+          <p:cNvSpPr txBox="1"/>
+          <p:nvPr/>
+        </p:nvSpPr>
+        <p:spPr>
+          <a:xfrm>
+            <a:off x="692640" y="2822399"/>
+            <a:ext cx="1044000" cy="511200"/>
+          </a:xfrm>
+          <a:prstGeom prst="rect">
+            <a:avLst/>
+          </a:prstGeom>
+          <a:noFill/>
+        </p:spPr>
+        <p:txBody>
+          <a:bodyPr wrap="square" anchor="ctr" lIns="54000" rIns="0" tIns="0" bIns="0">
+            <a:spAutoFit/>
+          </a:bodyPr>
+          <a:lstStyle/>
+          <a:p>
+            <a:pPr algn="l"/>
+            <a:r>
+              <a:rPr sz="1300" b="1">
+                <a:solidFill>
+                  <a:srgbClr val="1488C2"/>
+                </a:solidFill>
+                <a:latin typeface="Arial"/>
+              </a:rPr>
+              <a:t>投資対象</a:t>
+            </a:r>
+          </a:p>
+        </p:txBody>
+      </p:sp>
+      <p:sp>
+        <p:nvSpPr>
+          <p:cNvPr id="965" name="TextBox 964"/>
+          <p:cNvSpPr txBox="1"/>
+          <p:nvPr/>
+        </p:nvSpPr>
+        <p:spPr>
+          <a:xfrm>
+            <a:off x="1682640" y="2822399"/>
+            <a:ext cx="6912720" cy="511200"/>
+          </a:xfrm>
+          <a:prstGeom prst="rect">
+            <a:avLst/>
+          </a:prstGeom>
+          <a:noFill/>
+        </p:spPr>
+        <p:txBody>
+          <a:bodyPr wrap="square" anchor="ctr" lIns="0" rIns="72000" tIns="0" bIns="0">
+            <a:spAutoFit/>
+          </a:bodyPr>
+          <a:lstStyle/>
+          <a:p>
+            <a:pPr algn="l"/>
+            <a:r>
+              <a:rPr sz="1150">
+                <a:solidFill>
+                  <a:srgbClr val="16263F"/>
+                </a:solidFill>
+                <a:latin typeface="Arial"/>
+              </a:rPr>
+              <a:t>Solafune＝衛星×AIで地球を解析する「Planetary Intelligence OS」。120カ国超の開発者基盤。</a:t>
+            </a:r>
+          </a:p>
+        </p:txBody>
+      </p:sp>
+      <p:sp>
+        <p:nvSpPr>
+          <p:cNvPr id="966" name="ExecRow3"/>
+          <p:cNvSpPr/>
+          <p:nvPr/>
+        </p:nvSpPr>
+        <p:spPr>
+          <a:xfrm>
+            <a:off x="548640" y="3405599"/>
+            <a:ext cx="8046720" cy="511200"/>
+          </a:xfrm>
+          <a:prstGeom prst="rect">
+            <a:avLst/>
+          </a:prstGeom>
+          <a:solidFill>
+            <a:srgbClr val="EEF3FB"/>
+          </a:solidFill>
+          <a:ln w="9525">
+            <a:solidFill>
+              <a:srgbClr val="D5DEEC"/>
+            </a:solidFill>
+          </a:ln>
+          <a:effectLst/>
+        </p:spPr>
+        <p:txBody>
+          <a:bodyPr rtlCol="0" anchor="ctr"/>
+          <a:lstStyle/>
+          <a:p>
+            <a:pPr algn="ctr"/>
+          </a:p>
+        </p:txBody>
+      </p:sp>
+      <p:sp>
+        <p:nvSpPr>
+          <p:cNvPr id="967" name="ExecRowBar3"/>
+          <p:cNvSpPr/>
+          <p:nvPr/>
+        </p:nvSpPr>
+        <p:spPr>
+          <a:xfrm>
+            <a:off x="548640" y="3405599"/>
+            <a:ext cx="54000" cy="511200"/>
+          </a:xfrm>
+          <a:prstGeom prst="rect">
+            <a:avLst/>
+          </a:prstGeom>
+          <a:solidFill>
+            <a:srgbClr val="1488C2"/>
+          </a:solidFill>
+          <a:ln>
+            <a:noFill/>
+          </a:ln>
+          <a:effectLst/>
+        </p:spPr>
+        <p:txBody>
+          <a:bodyPr rtlCol="0" anchor="ctr"/>
+          <a:lstStyle/>
+          <a:p>
+            <a:pPr algn="ctr"/>
+          </a:p>
+        </p:txBody>
+      </p:sp>
+      <p:sp>
+        <p:nvSpPr>
+          <p:cNvPr id="968" name="TextBox 967"/>
+          <p:cNvSpPr txBox="1"/>
+          <p:nvPr/>
+        </p:nvSpPr>
+        <p:spPr>
+          <a:xfrm>
+            <a:off x="692640" y="3405599"/>
+            <a:ext cx="1044000" cy="511200"/>
+          </a:xfrm>
+          <a:prstGeom prst="rect">
+            <a:avLst/>
+          </a:prstGeom>
+          <a:noFill/>
+        </p:spPr>
+        <p:txBody>
+          <a:bodyPr wrap="square" anchor="ctr" lIns="54000" rIns="0" tIns="0" bIns="0">
+            <a:spAutoFit/>
+          </a:bodyPr>
+          <a:lstStyle/>
+          <a:p>
+            <a:pPr algn="l"/>
+            <a:r>
+              <a:rPr sz="1300" b="1">
+                <a:solidFill>
+                  <a:srgbClr val="1488C2"/>
+                </a:solidFill>
+                <a:latin typeface="Arial"/>
+              </a:rPr>
+              <a:t>勝ち筋</a:t>
+            </a:r>
+          </a:p>
+        </p:txBody>
+      </p:sp>
+      <p:sp>
+        <p:nvSpPr>
+          <p:cNvPr id="969" name="TextBox 968"/>
+          <p:cNvSpPr txBox="1"/>
+          <p:nvPr/>
+        </p:nvSpPr>
+        <p:spPr>
+          <a:xfrm>
+            <a:off x="1682640" y="3405599"/>
+            <a:ext cx="6912720" cy="511200"/>
+          </a:xfrm>
+          <a:prstGeom prst="rect">
+            <a:avLst/>
+          </a:prstGeom>
+          <a:noFill/>
+        </p:spPr>
+        <p:txBody>
+          <a:bodyPr wrap="square" anchor="ctr" lIns="0" rIns="72000" tIns="0" bIns="0">
+            <a:spAutoFit/>
+          </a:bodyPr>
+          <a:lstStyle/>
+          <a:p>
+            <a:pPr algn="l"/>
+            <a:r>
+              <a:rPr sz="1150">
+                <a:solidFill>
+                  <a:srgbClr val="16263F"/>
+                </a:solidFill>
+                <a:latin typeface="Arial"/>
+              </a:rPr>
+              <a:t>衛星を持たず解析レイヤーに特化。ネットワーク効果と政府・国際機関の信認が参入障壁。</a:t>
+            </a:r>
+          </a:p>
+        </p:txBody>
+      </p:sp>
+      <p:sp>
+        <p:nvSpPr>
+          <p:cNvPr id="970" name="ExecRow4"/>
+          <p:cNvSpPr/>
+          <p:nvPr/>
+        </p:nvSpPr>
+        <p:spPr>
+          <a:xfrm>
+            <a:off x="548640" y="3988799"/>
+            <a:ext cx="8046720" cy="511200"/>
+          </a:xfrm>
+          <a:prstGeom prst="rect">
+            <a:avLst/>
+          </a:prstGeom>
+          <a:solidFill>
+            <a:srgbClr val="EEF3FB"/>
+          </a:solidFill>
+          <a:ln w="9525">
+            <a:solidFill>
+              <a:srgbClr val="D5DEEC"/>
+            </a:solidFill>
+          </a:ln>
+          <a:effectLst/>
+        </p:spPr>
+        <p:txBody>
+          <a:bodyPr rtlCol="0" anchor="ctr"/>
+          <a:lstStyle/>
+          <a:p>
+            <a:pPr algn="ctr"/>
+          </a:p>
+        </p:txBody>
+      </p:sp>
+      <p:sp>
+        <p:nvSpPr>
+          <p:cNvPr id="971" name="ExecRowBar4"/>
+          <p:cNvSpPr/>
+          <p:nvPr/>
+        </p:nvSpPr>
+        <p:spPr>
+          <a:xfrm>
+            <a:off x="548640" y="3988799"/>
+            <a:ext cx="54000" cy="511200"/>
+          </a:xfrm>
+          <a:prstGeom prst="rect">
+            <a:avLst/>
+          </a:prstGeom>
+          <a:solidFill>
+            <a:srgbClr val="1488C2"/>
+          </a:solidFill>
+          <a:ln>
+            <a:noFill/>
+          </a:ln>
+          <a:effectLst/>
+        </p:spPr>
+        <p:txBody>
+          <a:bodyPr rtlCol="0" anchor="ctr"/>
+          <a:lstStyle/>
+          <a:p>
+            <a:pPr algn="ctr"/>
+          </a:p>
+        </p:txBody>
+      </p:sp>
+      <p:sp>
+        <p:nvSpPr>
+          <p:cNvPr id="972" name="TextBox 971"/>
+          <p:cNvSpPr txBox="1"/>
+          <p:nvPr/>
+        </p:nvSpPr>
+        <p:spPr>
+          <a:xfrm>
+            <a:off x="692640" y="3988799"/>
+            <a:ext cx="1044000" cy="511200"/>
+          </a:xfrm>
+          <a:prstGeom prst="rect">
+            <a:avLst/>
+          </a:prstGeom>
+          <a:noFill/>
+        </p:spPr>
+        <p:txBody>
+          <a:bodyPr wrap="square" anchor="ctr" lIns="54000" rIns="0" tIns="0" bIns="0">
+            <a:spAutoFit/>
+          </a:bodyPr>
+          <a:lstStyle/>
+          <a:p>
+            <a:pPr algn="l"/>
+            <a:r>
+              <a:rPr sz="1300" b="1">
+                <a:solidFill>
+                  <a:srgbClr val="1488C2"/>
+                </a:solidFill>
+                <a:latin typeface="Arial"/>
+              </a:rPr>
+              <a:t>リターン</a:t>
+            </a:r>
+          </a:p>
+        </p:txBody>
+      </p:sp>
+      <p:sp>
+        <p:nvSpPr>
+          <p:cNvPr id="973" name="TextBox 972"/>
+          <p:cNvSpPr txBox="1"/>
+          <p:nvPr/>
+        </p:nvSpPr>
+        <p:spPr>
+          <a:xfrm>
+            <a:off x="1682640" y="3988799"/>
+            <a:ext cx="6912720" cy="511200"/>
+          </a:xfrm>
+          <a:prstGeom prst="rect">
+            <a:avLst/>
+          </a:prstGeom>
+          <a:noFill/>
+        </p:spPr>
+        <p:txBody>
+          <a:bodyPr wrap="square" anchor="ctr" lIns="0" rIns="72000" tIns="0" bIns="0">
+            <a:spAutoFit/>
+          </a:bodyPr>
+          <a:lstStyle/>
+          <a:p>
+            <a:pPr algn="l"/>
+            <a:r>
+              <a:rPr sz="1150">
+                <a:solidFill>
+                  <a:srgbClr val="16263F"/>
+                </a:solidFill>
+                <a:latin typeface="Arial"/>
+              </a:rPr>
+              <a:t>Solafune 1社のExit（企業価値1,500〜1,800億円）で150億円ファンドを回収（約1.3X）。</a:t>
+            </a:r>
+          </a:p>
+        </p:txBody>
+      </p:sp>
+      <p:sp>
+        <p:nvSpPr>
+          <p:cNvPr id="974" name="TextBox 973"/>
+          <p:cNvSpPr txBox="1"/>
+          <p:nvPr/>
+        </p:nvSpPr>
+        <p:spPr>
+          <a:xfrm>
+            <a:off x="548640" y="4589999"/>
+            <a:ext cx="8046720" cy="251999"/>
+          </a:xfrm>
+          <a:prstGeom prst="rect">
+            <a:avLst/>
+          </a:prstGeom>
+          <a:noFill/>
+        </p:spPr>
+        <p:txBody>
+          <a:bodyPr wrap="square" anchor="ctr" lIns="18000" rIns="0" tIns="0" bIns="0">
+            <a:spAutoFit/>
+          </a:bodyPr>
+          <a:lstStyle/>
+          <a:p>
+            <a:pPr algn="l"/>
+            <a:r>
+              <a:rPr sz="1000">
+                <a:solidFill>
+                  <a:srgbClr val="56627A"/>
+                </a:solidFill>
+                <a:latin typeface="Arial"/>
+              </a:rPr>
+              <a:t>守り：出口未実証・政府依存・評価非開示のリスクは、契約条項（トランシェ払込・希薄化防止・取締役指名権）と保守的前提で先回りして潰す。</a:t>
+            </a:r>
+          </a:p>
+        </p:txBody>
+      </p:sp>
+    </p:spTree>
+  </p:cSld>
+  <p:clrMapOvr>
+    <a:masterClrMapping/>
+  </p:clrMapOvr>
+</p:sld>
+</file>
+
+<file path=ppt/slides/slide3.xml><?xml version="1.0" encoding="utf-8"?>
 <p:sld xmlns:a="http://schemas.openxmlformats.org/drawingml/2006/main" xmlns:r="http://schemas.openxmlformats.org/officeDocument/2006/relationships" xmlns:mc="http://schemas.openxmlformats.org/markup-compatibility/2006" xmlns:mv="urn:schemas-microsoft-com:mac:vml" xmlns:p="http://schemas.openxmlformats.org/presentationml/2006/main" xmlns:c="http://schemas.openxmlformats.org/drawingml/2006/chart" xmlns:dgm="http://schemas.openxmlformats.org/drawingml/2006/diagram" xmlns:o="urn:schemas-microsoft-com:office:office" xmlns:v="urn:schemas-microsoft-com:vml" xmlns:pvml="urn:schemas-microsoft-com:office:powerpoint" xmlns:com="http://schemas.openxmlformats.org/drawingml/2006/compatibility" xmlns:p14="http://schemas.microsoft.com/office/powerpoint/2010/main" xmlns:p15="http://schemas.microsoft.com/office/powerpoint/2012/main" xmlns:ahyp="http://schemas.microsoft.com/office/drawing/2018/hyperlinkcolor">
   <p:cSld>
     <p:bg>
@@ -7796,7 +9913,7 @@
 </p:sld>
 </file>
 
-<file path=ppt/slides/slide3.xml><?xml version="1.0" encoding="utf-8"?>
+<file path=ppt/slides/slide4.xml><?xml version="1.0" encoding="utf-8"?>
 <p:sld xmlns:a="http://schemas.openxmlformats.org/drawingml/2006/main" xmlns:r="http://schemas.openxmlformats.org/officeDocument/2006/relationships" xmlns:mc="http://schemas.openxmlformats.org/markup-compatibility/2006" xmlns:mv="urn:schemas-microsoft-com:mac:vml" xmlns:p="http://schemas.openxmlformats.org/presentationml/2006/main" xmlns:c="http://schemas.openxmlformats.org/drawingml/2006/chart" xmlns:dgm="http://schemas.openxmlformats.org/drawingml/2006/diagram" xmlns:o="urn:schemas-microsoft-com:office:office" xmlns:v="urn:schemas-microsoft-com:vml" xmlns:pvml="urn:schemas-microsoft-com:office:powerpoint" xmlns:com="http://schemas.openxmlformats.org/drawingml/2006/compatibility" xmlns:p14="http://schemas.microsoft.com/office/powerpoint/2010/main" xmlns:p15="http://schemas.microsoft.com/office/powerpoint/2012/main" xmlns:ahyp="http://schemas.microsoft.com/office/drawing/2018/hyperlinkcolor">
   <p:cSld>
     <p:bg>
@@ -9243,7 +11360,7 @@
 </p:sld>
 </file>
 
-<file path=ppt/slides/slide4.xml><?xml version="1.0" encoding="utf-8"?>
+<file path=ppt/slides/slide5.xml><?xml version="1.0" encoding="utf-8"?>
 <p:sld xmlns:a="http://schemas.openxmlformats.org/drawingml/2006/main" xmlns:r="http://schemas.openxmlformats.org/officeDocument/2006/relationships" xmlns:mc="http://schemas.openxmlformats.org/markup-compatibility/2006" xmlns:mv="urn:schemas-microsoft-com:mac:vml" xmlns:p="http://schemas.openxmlformats.org/presentationml/2006/main" xmlns:c="http://schemas.openxmlformats.org/drawingml/2006/chart" xmlns:dgm="http://schemas.openxmlformats.org/drawingml/2006/diagram" xmlns:o="urn:schemas-microsoft-com:office:office" xmlns:v="urn:schemas-microsoft-com:vml" xmlns:pvml="urn:schemas-microsoft-com:office:powerpoint" xmlns:com="http://schemas.openxmlformats.org/drawingml/2006/compatibility" xmlns:p14="http://schemas.microsoft.com/office/powerpoint/2010/main" xmlns:p15="http://schemas.microsoft.com/office/powerpoint/2012/main" xmlns:ahyp="http://schemas.microsoft.com/office/drawing/2018/hyperlinkcolor">
   <p:cSld>
     <p:bg>
@@ -10423,7 +12540,7 @@
 </p:sld>
 </file>
 
-<file path=ppt/slides/slide5.xml><?xml version="1.0" encoding="utf-8"?>
+<file path=ppt/slides/slide6.xml><?xml version="1.0" encoding="utf-8"?>
 <p:sld xmlns:a="http://schemas.openxmlformats.org/drawingml/2006/main" xmlns:r="http://schemas.openxmlformats.org/officeDocument/2006/relationships" xmlns:mc="http://schemas.openxmlformats.org/markup-compatibility/2006" xmlns:mv="urn:schemas-microsoft-com:mac:vml" xmlns:p="http://schemas.openxmlformats.org/presentationml/2006/main" xmlns:c="http://schemas.openxmlformats.org/drawingml/2006/chart" xmlns:dgm="http://schemas.openxmlformats.org/drawingml/2006/diagram" xmlns:o="urn:schemas-microsoft-com:office:office" xmlns:v="urn:schemas-microsoft-com:vml" xmlns:pvml="urn:schemas-microsoft-com:office:powerpoint" xmlns:com="http://schemas.openxmlformats.org/drawingml/2006/compatibility" xmlns:p14="http://schemas.microsoft.com/office/powerpoint/2010/main" xmlns:p15="http://schemas.microsoft.com/office/powerpoint/2012/main" xmlns:ahyp="http://schemas.microsoft.com/office/drawing/2018/hyperlinkcolor">
   <p:cSld>
     <p:bg>
@@ -11977,7 +14094,7 @@
 </p:sld>
 </file>
 
-<file path=ppt/slides/slide6.xml><?xml version="1.0" encoding="utf-8"?>
+<file path=ppt/slides/slide7.xml><?xml version="1.0" encoding="utf-8"?>
 <p:sld xmlns:a="http://schemas.openxmlformats.org/drawingml/2006/main" xmlns:r="http://schemas.openxmlformats.org/officeDocument/2006/relationships" xmlns:mc="http://schemas.openxmlformats.org/markup-compatibility/2006" xmlns:mv="urn:schemas-microsoft-com:mac:vml" xmlns:p="http://schemas.openxmlformats.org/presentationml/2006/main" xmlns:c="http://schemas.openxmlformats.org/drawingml/2006/chart" xmlns:dgm="http://schemas.openxmlformats.org/drawingml/2006/diagram" xmlns:o="urn:schemas-microsoft-com:office:office" xmlns:v="urn:schemas-microsoft-com:vml" xmlns:pvml="urn:schemas-microsoft-com:office:powerpoint" xmlns:com="http://schemas.openxmlformats.org/drawingml/2006/compatibility" xmlns:p14="http://schemas.microsoft.com/office/powerpoint/2010/main" xmlns:p15="http://schemas.microsoft.com/office/powerpoint/2012/main" xmlns:ahyp="http://schemas.microsoft.com/office/drawing/2018/hyperlinkcolor">
   <p:cSld>
     <p:bg>
@@ -13674,7 +15791,7 @@
 </p:sld>
 </file>
 
-<file path=ppt/slides/slide7.xml><?xml version="1.0" encoding="utf-8"?>
+<file path=ppt/slides/slide8.xml><?xml version="1.0" encoding="utf-8"?>
 <p:sld xmlns:a="http://schemas.openxmlformats.org/drawingml/2006/main" xmlns:r="http://schemas.openxmlformats.org/officeDocument/2006/relationships" xmlns:mc="http://schemas.openxmlformats.org/markup-compatibility/2006" xmlns:mv="urn:schemas-microsoft-com:mac:vml" xmlns:p="http://schemas.openxmlformats.org/presentationml/2006/main" xmlns:c="http://schemas.openxmlformats.org/drawingml/2006/chart" xmlns:dgm="http://schemas.openxmlformats.org/drawingml/2006/diagram" xmlns:o="urn:schemas-microsoft-com:office:office" xmlns:v="urn:schemas-microsoft-com:vml" xmlns:pvml="urn:schemas-microsoft-com:office:powerpoint" xmlns:com="http://schemas.openxmlformats.org/drawingml/2006/compatibility" xmlns:p14="http://schemas.microsoft.com/office/powerpoint/2010/main" xmlns:p15="http://schemas.microsoft.com/office/powerpoint/2012/main" xmlns:ahyp="http://schemas.microsoft.com/office/drawing/2018/hyperlinkcolor">
   <p:cSld>
     <p:bg>
@@ -14524,7 +16641,7 @@
 </p:sld>
 </file>
 
-<file path=ppt/slides/slide8.xml><?xml version="1.0" encoding="utf-8"?>
+<file path=ppt/slides/slide9.xml><?xml version="1.0" encoding="utf-8"?>
 <p:sld xmlns:a="http://schemas.openxmlformats.org/drawingml/2006/main" xmlns:r="http://schemas.openxmlformats.org/officeDocument/2006/relationships" xmlns:mc="http://schemas.openxmlformats.org/markup-compatibility/2006" xmlns:mv="urn:schemas-microsoft-com:mac:vml" xmlns:p="http://schemas.openxmlformats.org/presentationml/2006/main" xmlns:c="http://schemas.openxmlformats.org/drawingml/2006/chart" xmlns:dgm="http://schemas.openxmlformats.org/drawingml/2006/diagram" xmlns:o="urn:schemas-microsoft-com:office:office" xmlns:v="urn:schemas-microsoft-com:vml" xmlns:pvml="urn:schemas-microsoft-com:office:powerpoint" xmlns:com="http://schemas.openxmlformats.org/drawingml/2006/compatibility" xmlns:p14="http://schemas.microsoft.com/office/powerpoint/2010/main" xmlns:p15="http://schemas.microsoft.com/office/powerpoint/2012/main" xmlns:ahyp="http://schemas.microsoft.com/office/drawing/2018/hyperlinkcolor">
   <p:cSld>
     <p:bg>
@@ -15339,1152 +17456,6 @@
       <p:sp>
         <p:nvSpPr>
           <p:cNvPr id="195" name="KeyBar8"/>
-          <p:cNvSpPr/>
-          <p:nvPr/>
-        </p:nvSpPr>
-        <p:spPr>
-          <a:xfrm>
-            <a:off x="548640" y="1029600"/>
-            <a:ext cx="54000" cy="691200"/>
-          </a:xfrm>
-          <a:prstGeom prst="rect">
-            <a:avLst/>
-          </a:prstGeom>
-          <a:solidFill>
-            <a:srgbClr val="1488C2"/>
-          </a:solidFill>
-          <a:ln>
-            <a:noFill/>
-          </a:ln>
-          <a:effectLst/>
-        </p:spPr>
-        <p:txBody>
-          <a:bodyPr rtlCol="0" anchor="ctr"/>
-          <a:lstStyle/>
-          <a:p>
-            <a:pPr algn="ctr"/>
-          </a:p>
-        </p:txBody>
-      </p:sp>
-    </p:spTree>
-  </p:cSld>
-  <p:clrMapOvr>
-    <a:masterClrMapping/>
-  </p:clrMapOvr>
-</p:sld>
-</file>
-
-<file path=ppt/slides/slide9.xml><?xml version="1.0" encoding="utf-8"?>
-<p:sld xmlns:a="http://schemas.openxmlformats.org/drawingml/2006/main" xmlns:r="http://schemas.openxmlformats.org/officeDocument/2006/relationships" xmlns:mc="http://schemas.openxmlformats.org/markup-compatibility/2006" xmlns:mv="urn:schemas-microsoft-com:mac:vml" xmlns:p="http://schemas.openxmlformats.org/presentationml/2006/main" xmlns:c="http://schemas.openxmlformats.org/drawingml/2006/chart" xmlns:dgm="http://schemas.openxmlformats.org/drawingml/2006/diagram" xmlns:o="urn:schemas-microsoft-com:office:office" xmlns:v="urn:schemas-microsoft-com:vml" xmlns:pvml="urn:schemas-microsoft-com:office:powerpoint" xmlns:com="http://schemas.openxmlformats.org/drawingml/2006/compatibility" xmlns:p14="http://schemas.microsoft.com/office/powerpoint/2010/main" xmlns:p15="http://schemas.microsoft.com/office/powerpoint/2012/main" xmlns:ahyp="http://schemas.microsoft.com/office/drawing/2018/hyperlinkcolor">
-  <p:cSld>
-    <p:bg>
-      <p:bgPr>
-        <a:solidFill>
-          <a:srgbClr val="FFFFFF"/>
-        </a:solidFill>
-        <a:effectLst/>
-      </p:bgPr>
-    </p:bg>
-    <p:spTree>
-      <p:nvGrpSpPr>
-        <p:cNvPr id="197" name="Shape 197"/>
-        <p:cNvGrpSpPr/>
-        <p:nvPr/>
-      </p:nvGrpSpPr>
-      <p:grpSpPr>
-        <a:xfrm>
-          <a:off x="0" y="0"/>
-          <a:ext cx="0" cy="0"/>
-          <a:chOff x="0" y="0"/>
-          <a:chExt cx="0" cy="0"/>
-        </a:xfrm>
-      </p:grpSpPr>
-      <p:sp>
-        <p:nvSpPr>
-          <p:cNvPr id="199" name="Google Shape;199;p11"/>
-          <p:cNvSpPr/>
-          <p:nvPr/>
-        </p:nvSpPr>
-        <p:spPr>
-          <a:xfrm>
-            <a:off x="548640" y="367200"/>
-            <a:ext cx="8046720" cy="566928"/>
-          </a:xfrm>
-          <a:prstGeom prst="rect">
-            <a:avLst/>
-          </a:prstGeom>
-          <a:noFill/>
-          <a:ln>
-            <a:noFill/>
-          </a:ln>
-        </p:spPr>
-        <p:txBody>
-          <a:bodyPr anchorCtr="0" anchor="ctr" bIns="0" lIns="0" spcFirstLastPara="1" rIns="0" wrap="square" tIns="0">
-            <a:noAutofit/>
-          </a:bodyPr>
-          <a:lstStyle/>
-          <a:p>
-            <a:pPr indent="0" lvl="0" marL="0" marR="0" rtl="0" algn="l">
-              <a:spcBef>
-                <a:spcPts val="0"/>
-              </a:spcBef>
-              <a:spcAft>
-                <a:spcPts val="0"/>
-              </a:spcAft>
-              <a:buClr>
-                <a:srgbClr val="16263F"/>
-              </a:buClr>
-              <a:buSzPts val="2900"/>
-              <a:buFont typeface="Arial"/>
-              <a:buNone/>
-            </a:pPr>
-            <a:r>
-              <a:rPr b="1" i="0" lang="en-US" sz="2900" u="none" cap="none" strike="noStrike">
-                <a:solidFill>
-                  <a:srgbClr val="16263F"/>
-                </a:solidFill>
-                <a:latin typeface="Arial"/>
-                <a:ea typeface="Arial"/>
-                <a:cs typeface="Arial"/>
-                <a:sym typeface="Arial"/>
-              </a:rPr>
-              <a:t>1社でファンドを返す</a:t>
-            </a:r>
-            <a:endParaRPr b="0" i="0" sz="2900" u="none" cap="none" strike="noStrike">
-              <a:solidFill>
-                <a:schemeClr val="dk1"/>
-              </a:solidFill>
-              <a:latin typeface="Calibri"/>
-              <a:ea typeface="Calibri"/>
-              <a:cs typeface="Calibri"/>
-              <a:sym typeface="Calibri"/>
-            </a:endParaRPr>
-          </a:p>
-        </p:txBody>
-      </p:sp>
-      <p:sp>
-        <p:nvSpPr>
-          <p:cNvPr id="200" name="Google Shape;200;p11"/>
-          <p:cNvSpPr/>
-          <p:nvPr/>
-        </p:nvSpPr>
-        <p:spPr>
-          <a:xfrm>
-            <a:off x="548640" y="1800000"/>
-            <a:ext cx="2514600" cy="1051560"/>
-          </a:xfrm>
-          <a:prstGeom prst="roundRect">
-            <a:avLst>
-              <a:gd fmla="val 7826" name="adj"/>
-            </a:avLst>
-          </a:prstGeom>
-          <a:solidFill>
-            <a:srgbClr val="EEF3FB"/>
-          </a:solidFill>
-          <a:ln cap="flat" cmpd="sng" w="12700">
-            <a:solidFill>
-              <a:srgbClr val="D5DEEC"/>
-            </a:solidFill>
-            <a:prstDash val="solid"/>
-            <a:round/>
-            <a:headEnd len="sm" w="sm" type="none"/>
-            <a:tailEnd len="sm" w="sm" type="none"/>
-          </a:ln>
-          <a:effectLst>
-            <a:outerShdw blurRad="114300" rotWithShape="0" algn="bl" dir="5400000" dist="38100">
-              <a:srgbClr val="16263F">
-                <a:alpha val="13000"/>
-              </a:srgbClr>
-            </a:outerShdw>
-          </a:effectLst>
-        </p:spPr>
-        <p:txBody>
-          <a:bodyPr anchorCtr="0" anchor="ctr" bIns="91425" lIns="91425" spcFirstLastPara="1" rIns="91425" wrap="square" tIns="91425">
-            <a:noAutofit/>
-          </a:bodyPr>
-          <a:lstStyle/>
-          <a:p>
-            <a:pPr indent="0" lvl="0" marL="0" rtl="0" algn="l">
-              <a:spcBef>
-                <a:spcPts val="0"/>
-              </a:spcBef>
-              <a:spcAft>
-                <a:spcPts val="0"/>
-              </a:spcAft>
-              <a:buNone/>
-            </a:pPr>
-            <a:r>
-              <a:t/>
-            </a:r>
-            <a:endParaRPr/>
-          </a:p>
-        </p:txBody>
-      </p:sp>
-      <p:sp>
-        <p:nvSpPr>
-          <p:cNvPr id="201" name="Google Shape;201;p11"/>
-          <p:cNvSpPr/>
-          <p:nvPr/>
-        </p:nvSpPr>
-        <p:spPr>
-          <a:xfrm>
-            <a:off x="749808" y="1955448"/>
-            <a:ext cx="2148840" cy="457200"/>
-          </a:xfrm>
-          <a:prstGeom prst="rect">
-            <a:avLst/>
-          </a:prstGeom>
-          <a:noFill/>
-          <a:ln>
-            <a:noFill/>
-          </a:ln>
-        </p:spPr>
-        <p:txBody>
-          <a:bodyPr anchorCtr="0" anchor="ctr" bIns="0" lIns="0" spcFirstLastPara="1" rIns="0" wrap="square" tIns="0">
-            <a:noAutofit/>
-          </a:bodyPr>
-          <a:lstStyle/>
-          <a:p>
-            <a:pPr indent="0" lvl="0" marL="0" marR="0" rtl="0" algn="l">
-              <a:spcBef>
-                <a:spcPts val="0"/>
-              </a:spcBef>
-              <a:spcAft>
-                <a:spcPts val="0"/>
-              </a:spcAft>
-              <a:buClr>
-                <a:srgbClr val="1488C2"/>
-              </a:buClr>
-              <a:buSzPts val="1800"/>
-              <a:buFont typeface="Arial"/>
-              <a:buNone/>
-            </a:pPr>
-            <a:r>
-              <a:rPr b="1" i="0" lang="en-US" sz="1800" u="none" cap="none" strike="noStrike">
-                <a:solidFill>
-                  <a:srgbClr val="1488C2"/>
-                </a:solidFill>
-                <a:latin typeface="Arial"/>
-                <a:ea typeface="Arial"/>
-                <a:cs typeface="Arial"/>
-                <a:sym typeface="Arial"/>
-              </a:rPr>
-              <a:t>売上 ¥85億</a:t>
-            </a:r>
-            <a:endParaRPr b="0" i="0" sz="1800" u="none" cap="none" strike="noStrike">
-              <a:solidFill>
-                <a:schemeClr val="dk1"/>
-              </a:solidFill>
-              <a:latin typeface="Calibri"/>
-              <a:ea typeface="Calibri"/>
-              <a:cs typeface="Calibri"/>
-              <a:sym typeface="Calibri"/>
-            </a:endParaRPr>
-          </a:p>
-        </p:txBody>
-      </p:sp>
-      <p:sp>
-        <p:nvSpPr>
-          <p:cNvPr id="202" name="Google Shape;202;p11"/>
-          <p:cNvSpPr/>
-          <p:nvPr/>
-        </p:nvSpPr>
-        <p:spPr>
-          <a:xfrm>
-            <a:off x="749808" y="2449224"/>
-            <a:ext cx="2148840" cy="274320"/>
-          </a:xfrm>
-          <a:prstGeom prst="rect">
-            <a:avLst/>
-          </a:prstGeom>
-          <a:noFill/>
-          <a:ln>
-            <a:noFill/>
-          </a:ln>
-        </p:spPr>
-        <p:txBody>
-          <a:bodyPr anchorCtr="0" anchor="ctr" bIns="0" lIns="0" spcFirstLastPara="1" rIns="0" wrap="square" tIns="0">
-            <a:noAutofit/>
-          </a:bodyPr>
-          <a:lstStyle/>
-          <a:p>
-            <a:pPr indent="0" lvl="0" marL="0" marR="0" rtl="0" algn="l">
-              <a:spcBef>
-                <a:spcPts val="0"/>
-              </a:spcBef>
-              <a:spcAft>
-                <a:spcPts val="0"/>
-              </a:spcAft>
-              <a:buClr>
-                <a:srgbClr val="56627A"/>
-              </a:buClr>
-              <a:buSzPts val="1050"/>
-              <a:buFont typeface="Arial"/>
-              <a:buNone/>
-            </a:pPr>
-            <a:r>
-              <a:rPr b="0" i="0" lang="en-US" sz="1050" u="none" cap="none" strike="noStrike">
-                <a:solidFill>
-                  <a:srgbClr val="56627A"/>
-                </a:solidFill>
-                <a:latin typeface="Arial"/>
-                <a:ea typeface="Arial"/>
-                <a:cs typeface="Arial"/>
-                <a:sym typeface="Arial"/>
-              </a:rPr>
-              <a:t>2030</a:t>
-            </a:r>
-            <a:endParaRPr b="0" i="0" sz="1050" u="none" cap="none" strike="noStrike">
-              <a:solidFill>
-                <a:schemeClr val="dk1"/>
-              </a:solidFill>
-              <a:latin typeface="Calibri"/>
-              <a:ea typeface="Calibri"/>
-              <a:cs typeface="Calibri"/>
-              <a:sym typeface="Calibri"/>
-            </a:endParaRPr>
-          </a:p>
-        </p:txBody>
-      </p:sp>
-      <p:cxnSp>
-        <p:nvCxnSpPr>
-          <p:cNvPr id="203" name="Google Shape;203;p11"/>
-          <p:cNvCxnSpPr/>
-          <p:nvPr/>
-        </p:nvCxnSpPr>
-        <p:spPr>
-          <a:xfrm>
-            <a:off x="3090672" y="2321208"/>
-            <a:ext cx="182880" cy="0"/>
-          </a:xfrm>
-          <a:prstGeom prst="straightConnector1">
-            <a:avLst/>
-          </a:prstGeom>
-          <a:noFill/>
-          <a:ln cap="flat" cmpd="sng" w="25400">
-            <a:solidFill>
-              <a:srgbClr val="1488C2"/>
-            </a:solidFill>
-            <a:prstDash val="solid"/>
-            <a:round/>
-            <a:headEnd len="sm" w="sm" type="none"/>
-            <a:tailEnd len="sm" w="sm" type="none"/>
-          </a:ln>
-        </p:spPr>
-      </p:cxnSp>
-      <p:sp>
-        <p:nvSpPr>
-          <p:cNvPr id="204" name="Google Shape;204;p11"/>
-          <p:cNvSpPr/>
-          <p:nvPr/>
-        </p:nvSpPr>
-        <p:spPr>
-          <a:xfrm>
-            <a:off x="3291840" y="1800000"/>
-            <a:ext cx="2514600" cy="1051560"/>
-          </a:xfrm>
-          <a:prstGeom prst="roundRect">
-            <a:avLst>
-              <a:gd fmla="val 7826" name="adj"/>
-            </a:avLst>
-          </a:prstGeom>
-          <a:solidFill>
-            <a:srgbClr val="EEF3FB"/>
-          </a:solidFill>
-          <a:ln cap="flat" cmpd="sng" w="12700">
-            <a:solidFill>
-              <a:srgbClr val="D5DEEC"/>
-            </a:solidFill>
-            <a:prstDash val="solid"/>
-            <a:round/>
-            <a:headEnd len="sm" w="sm" type="none"/>
-            <a:tailEnd len="sm" w="sm" type="none"/>
-          </a:ln>
-          <a:effectLst>
-            <a:outerShdw blurRad="114300" rotWithShape="0" algn="bl" dir="5400000" dist="38100">
-              <a:srgbClr val="16263F">
-                <a:alpha val="13000"/>
-              </a:srgbClr>
-            </a:outerShdw>
-          </a:effectLst>
-        </p:spPr>
-        <p:txBody>
-          <a:bodyPr anchorCtr="0" anchor="ctr" bIns="91425" lIns="91425" spcFirstLastPara="1" rIns="91425" wrap="square" tIns="91425">
-            <a:noAutofit/>
-          </a:bodyPr>
-          <a:lstStyle/>
-          <a:p>
-            <a:pPr indent="0" lvl="0" marL="0" rtl="0" algn="l">
-              <a:spcBef>
-                <a:spcPts val="0"/>
-              </a:spcBef>
-              <a:spcAft>
-                <a:spcPts val="0"/>
-              </a:spcAft>
-              <a:buNone/>
-            </a:pPr>
-            <a:r>
-              <a:t/>
-            </a:r>
-            <a:endParaRPr/>
-          </a:p>
-        </p:txBody>
-      </p:sp>
-      <p:sp>
-        <p:nvSpPr>
-          <p:cNvPr id="205" name="Google Shape;205;p11"/>
-          <p:cNvSpPr/>
-          <p:nvPr/>
-        </p:nvSpPr>
-        <p:spPr>
-          <a:xfrm>
-            <a:off x="3493008" y="1955448"/>
-            <a:ext cx="2148840" cy="457200"/>
-          </a:xfrm>
-          <a:prstGeom prst="rect">
-            <a:avLst/>
-          </a:prstGeom>
-          <a:noFill/>
-          <a:ln>
-            <a:noFill/>
-          </a:ln>
-        </p:spPr>
-        <p:txBody>
-          <a:bodyPr anchorCtr="0" anchor="ctr" bIns="0" lIns="0" spcFirstLastPara="1" rIns="0" wrap="square" tIns="0">
-            <a:noAutofit/>
-          </a:bodyPr>
-          <a:lstStyle/>
-          <a:p>
-            <a:pPr indent="0" lvl="0" marL="0" marR="0" rtl="0" algn="l">
-              <a:spcBef>
-                <a:spcPts val="0"/>
-              </a:spcBef>
-              <a:spcAft>
-                <a:spcPts val="0"/>
-              </a:spcAft>
-              <a:buClr>
-                <a:srgbClr val="56627A"/>
-              </a:buClr>
-              <a:buSzPts val="1800"/>
-              <a:buFont typeface="Arial"/>
-              <a:buNone/>
-            </a:pPr>
-            <a:r>
-              <a:rPr b="1" i="0" lang="en-US" sz="1800" u="none" cap="none" strike="noStrike">
-                <a:solidFill>
-                  <a:srgbClr val="56627A"/>
-                </a:solidFill>
-                <a:latin typeface="Arial"/>
-                <a:ea typeface="Arial"/>
-                <a:cs typeface="Arial"/>
-                <a:sym typeface="Arial"/>
-              </a:rPr>
-              <a:t>× 15–18倍</a:t>
-            </a:r>
-            <a:endParaRPr b="0" i="0" sz="1800" u="none" cap="none" strike="noStrike">
-              <a:solidFill>
-                <a:schemeClr val="dk1"/>
-              </a:solidFill>
-              <a:latin typeface="Calibri"/>
-              <a:ea typeface="Calibri"/>
-              <a:cs typeface="Calibri"/>
-              <a:sym typeface="Calibri"/>
-            </a:endParaRPr>
-          </a:p>
-        </p:txBody>
-      </p:sp>
-      <p:sp>
-        <p:nvSpPr>
-          <p:cNvPr id="206" name="Google Shape;206;p11"/>
-          <p:cNvSpPr/>
-          <p:nvPr/>
-        </p:nvSpPr>
-        <p:spPr>
-          <a:xfrm>
-            <a:off x="3493008" y="2449224"/>
-            <a:ext cx="2148840" cy="274320"/>
-          </a:xfrm>
-          <a:prstGeom prst="rect">
-            <a:avLst/>
-          </a:prstGeom>
-          <a:noFill/>
-          <a:ln>
-            <a:noFill/>
-          </a:ln>
-        </p:spPr>
-        <p:txBody>
-          <a:bodyPr anchorCtr="0" anchor="ctr" bIns="0" lIns="0" spcFirstLastPara="1" rIns="0" wrap="square" tIns="0">
-            <a:noAutofit/>
-          </a:bodyPr>
-          <a:lstStyle/>
-          <a:p>
-            <a:pPr indent="0" lvl="0" marL="0" marR="0" rtl="0" algn="l">
-              <a:spcBef>
-                <a:spcPts val="0"/>
-              </a:spcBef>
-              <a:spcAft>
-                <a:spcPts val="0"/>
-              </a:spcAft>
-              <a:buClr>
-                <a:srgbClr val="56627A"/>
-              </a:buClr>
-              <a:buSzPts val="1050"/>
-              <a:buFont typeface="Arial"/>
-              <a:buNone/>
-            </a:pPr>
-            <a:r>
-              <a:rPr b="0" i="0" lang="en-US" sz="1050" u="none" cap="none" strike="noStrike">
-                <a:solidFill>
-                  <a:srgbClr val="56627A"/>
-                </a:solidFill>
-                <a:latin typeface="Arial"/>
-                <a:ea typeface="Arial"/>
-                <a:cs typeface="Arial"/>
-                <a:sym typeface="Arial"/>
-              </a:rPr>
-              <a:t>ソフト・マルチプル</a:t>
-            </a:r>
-            <a:endParaRPr b="0" i="0" sz="1050" u="none" cap="none" strike="noStrike">
-              <a:solidFill>
-                <a:schemeClr val="dk1"/>
-              </a:solidFill>
-              <a:latin typeface="Calibri"/>
-              <a:ea typeface="Calibri"/>
-              <a:cs typeface="Calibri"/>
-              <a:sym typeface="Calibri"/>
-            </a:endParaRPr>
-          </a:p>
-        </p:txBody>
-      </p:sp>
-      <p:cxnSp>
-        <p:nvCxnSpPr>
-          <p:cNvPr id="207" name="Google Shape;207;p11"/>
-          <p:cNvCxnSpPr/>
-          <p:nvPr/>
-        </p:nvCxnSpPr>
-        <p:spPr>
-          <a:xfrm>
-            <a:off x="5833872" y="2321208"/>
-            <a:ext cx="182880" cy="0"/>
-          </a:xfrm>
-          <a:prstGeom prst="straightConnector1">
-            <a:avLst/>
-          </a:prstGeom>
-          <a:noFill/>
-          <a:ln cap="flat" cmpd="sng" w="25400">
-            <a:solidFill>
-              <a:srgbClr val="1488C2"/>
-            </a:solidFill>
-            <a:prstDash val="solid"/>
-            <a:round/>
-            <a:headEnd len="sm" w="sm" type="none"/>
-            <a:tailEnd len="sm" w="sm" type="none"/>
-          </a:ln>
-        </p:spPr>
-      </p:cxnSp>
-      <p:sp>
-        <p:nvSpPr>
-          <p:cNvPr id="208" name="Google Shape;208;p11"/>
-          <p:cNvSpPr/>
-          <p:nvPr/>
-        </p:nvSpPr>
-        <p:spPr>
-          <a:xfrm>
-            <a:off x="6035040" y="1800000"/>
-            <a:ext cx="2514600" cy="1051560"/>
-          </a:xfrm>
-          <a:prstGeom prst="roundRect">
-            <a:avLst>
-              <a:gd fmla="val 7826" name="adj"/>
-            </a:avLst>
-          </a:prstGeom>
-          <a:solidFill>
-            <a:srgbClr val="EEF3FB"/>
-          </a:solidFill>
-          <a:ln cap="flat" cmpd="sng" w="12700">
-            <a:solidFill>
-              <a:srgbClr val="D5DEEC"/>
-            </a:solidFill>
-            <a:prstDash val="solid"/>
-            <a:round/>
-            <a:headEnd len="sm" w="sm" type="none"/>
-            <a:tailEnd len="sm" w="sm" type="none"/>
-          </a:ln>
-          <a:effectLst>
-            <a:outerShdw blurRad="114300" rotWithShape="0" algn="bl" dir="5400000" dist="38100">
-              <a:srgbClr val="16263F">
-                <a:alpha val="13000"/>
-              </a:srgbClr>
-            </a:outerShdw>
-          </a:effectLst>
-        </p:spPr>
-        <p:txBody>
-          <a:bodyPr anchorCtr="0" anchor="ctr" bIns="91425" lIns="91425" spcFirstLastPara="1" rIns="91425" wrap="square" tIns="91425">
-            <a:noAutofit/>
-          </a:bodyPr>
-          <a:lstStyle/>
-          <a:p>
-            <a:pPr indent="0" lvl="0" marL="0" rtl="0" algn="l">
-              <a:spcBef>
-                <a:spcPts val="0"/>
-              </a:spcBef>
-              <a:spcAft>
-                <a:spcPts val="0"/>
-              </a:spcAft>
-              <a:buNone/>
-            </a:pPr>
-            <a:r>
-              <a:t/>
-            </a:r>
-            <a:endParaRPr/>
-          </a:p>
-        </p:txBody>
-      </p:sp>
-      <p:sp>
-        <p:nvSpPr>
-          <p:cNvPr id="209" name="Google Shape;209;p11"/>
-          <p:cNvSpPr/>
-          <p:nvPr/>
-        </p:nvSpPr>
-        <p:spPr>
-          <a:xfrm>
-            <a:off x="6236208" y="1955448"/>
-            <a:ext cx="2148840" cy="457200"/>
-          </a:xfrm>
-          <a:prstGeom prst="rect">
-            <a:avLst/>
-          </a:prstGeom>
-          <a:noFill/>
-          <a:ln>
-            <a:noFill/>
-          </a:ln>
-        </p:spPr>
-        <p:txBody>
-          <a:bodyPr anchorCtr="0" anchor="ctr" bIns="0" lIns="0" spcFirstLastPara="1" rIns="0" wrap="square" tIns="0">
-            <a:noAutofit/>
-          </a:bodyPr>
-          <a:lstStyle/>
-          <a:p>
-            <a:pPr indent="0" lvl="0" marL="0" marR="0" rtl="0" algn="l">
-              <a:spcBef>
-                <a:spcPts val="0"/>
-              </a:spcBef>
-              <a:spcAft>
-                <a:spcPts val="0"/>
-              </a:spcAft>
-              <a:buClr>
-                <a:srgbClr val="D9881C"/>
-              </a:buClr>
-              <a:buSzPts val="1500"/>
-              <a:buFont typeface="Arial"/>
-              <a:buNone/>
-            </a:pPr>
-            <a:r>
-              <a:rPr b="1" i="0" lang="en-US" sz="1500" u="none" cap="none" strike="noStrike">
-                <a:solidFill>
-                  <a:srgbClr val="D9881C"/>
-                </a:solidFill>
-                <a:latin typeface="Arial"/>
-                <a:ea typeface="Arial"/>
-                <a:cs typeface="Arial"/>
-                <a:sym typeface="Arial"/>
-              </a:rPr>
-              <a:t>企業価値 ¥1,500–1,800億</a:t>
-            </a:r>
-            <a:endParaRPr b="0" i="0" sz="1500" u="none" cap="none" strike="noStrike">
-              <a:solidFill>
-                <a:schemeClr val="dk1"/>
-              </a:solidFill>
-              <a:latin typeface="Calibri"/>
-              <a:ea typeface="Calibri"/>
-              <a:cs typeface="Calibri"/>
-              <a:sym typeface="Calibri"/>
-            </a:endParaRPr>
-          </a:p>
-        </p:txBody>
-      </p:sp>
-      <p:sp>
-        <p:nvSpPr>
-          <p:cNvPr id="210" name="Google Shape;210;p11"/>
-          <p:cNvSpPr/>
-          <p:nvPr/>
-        </p:nvSpPr>
-        <p:spPr>
-          <a:xfrm>
-            <a:off x="6236208" y="2449224"/>
-            <a:ext cx="2148840" cy="274320"/>
-          </a:xfrm>
-          <a:prstGeom prst="rect">
-            <a:avLst/>
-          </a:prstGeom>
-          <a:noFill/>
-          <a:ln>
-            <a:noFill/>
-          </a:ln>
-        </p:spPr>
-        <p:txBody>
-          <a:bodyPr anchorCtr="0" anchor="ctr" bIns="0" lIns="0" spcFirstLastPara="1" rIns="0" wrap="square" tIns="0">
-            <a:noAutofit/>
-          </a:bodyPr>
-          <a:lstStyle/>
-          <a:p>
-            <a:pPr indent="0" lvl="0" marL="0" marR="0" rtl="0" algn="l">
-              <a:spcBef>
-                <a:spcPts val="0"/>
-              </a:spcBef>
-              <a:spcAft>
-                <a:spcPts val="0"/>
-              </a:spcAft>
-              <a:buClr>
-                <a:srgbClr val="56627A"/>
-              </a:buClr>
-              <a:buSzPts val="1050"/>
-              <a:buFont typeface="Arial"/>
-              <a:buNone/>
-            </a:pPr>
-            <a:r>
-              <a:rPr b="0" i="0" lang="en-US" sz="1050" u="none" cap="none" strike="noStrike">
-                <a:solidFill>
-                  <a:srgbClr val="56627A"/>
-                </a:solidFill>
-                <a:latin typeface="Arial"/>
-                <a:ea typeface="Arial"/>
-                <a:cs typeface="Arial"/>
-                <a:sym typeface="Arial"/>
-              </a:rPr>
-              <a:t>Exit 2032・IPO/M&amp;A</a:t>
-            </a:r>
-            <a:endParaRPr b="0" i="0" sz="1050" u="none" cap="none" strike="noStrike">
-              <a:solidFill>
-                <a:schemeClr val="dk1"/>
-              </a:solidFill>
-              <a:latin typeface="Calibri"/>
-              <a:ea typeface="Calibri"/>
-              <a:cs typeface="Calibri"/>
-              <a:sym typeface="Calibri"/>
-            </a:endParaRPr>
-          </a:p>
-        </p:txBody>
-      </p:sp>
-      <p:sp>
-        <p:nvSpPr>
-          <p:cNvPr id="211" name="Google Shape;211;p11"/>
-          <p:cNvSpPr/>
-          <p:nvPr/>
-        </p:nvSpPr>
-        <p:spPr>
-          <a:xfrm>
-            <a:off x="548640" y="3171600"/>
-            <a:ext cx="8046720" cy="1600200"/>
-          </a:xfrm>
-          <a:prstGeom prst="roundRect">
-            <a:avLst>
-              <a:gd fmla="val 5143" name="adj"/>
-            </a:avLst>
-          </a:prstGeom>
-          <a:solidFill>
-            <a:srgbClr val="E4ECF8"/>
-          </a:solidFill>
-          <a:ln cap="flat" cmpd="sng" w="12700">
-            <a:solidFill>
-              <a:srgbClr val="D5DEEC"/>
-            </a:solidFill>
-            <a:prstDash val="solid"/>
-            <a:round/>
-            <a:headEnd len="sm" w="sm" type="none"/>
-            <a:tailEnd len="sm" w="sm" type="none"/>
-          </a:ln>
-          <a:effectLst>
-            <a:outerShdw blurRad="114300" rotWithShape="0" algn="bl" dir="5400000" dist="38100">
-              <a:srgbClr val="16263F">
-                <a:alpha val="13000"/>
-              </a:srgbClr>
-            </a:outerShdw>
-          </a:effectLst>
-        </p:spPr>
-        <p:txBody>
-          <a:bodyPr anchorCtr="0" anchor="ctr" bIns="91425" lIns="91425" spcFirstLastPara="1" rIns="91425" wrap="square" tIns="91425">
-            <a:noAutofit/>
-          </a:bodyPr>
-          <a:lstStyle/>
-          <a:p>
-            <a:pPr indent="0" lvl="0" marL="0" rtl="0" algn="l">
-              <a:spcBef>
-                <a:spcPts val="0"/>
-              </a:spcBef>
-              <a:spcAft>
-                <a:spcPts val="0"/>
-              </a:spcAft>
-              <a:buNone/>
-            </a:pPr>
-            <a:r>
-              <a:t/>
-            </a:r>
-            <a:endParaRPr/>
-          </a:p>
-        </p:txBody>
-      </p:sp>
-      <p:sp>
-        <p:nvSpPr>
-          <p:cNvPr id="212" name="Google Shape;212;p11"/>
-          <p:cNvSpPr/>
-          <p:nvPr/>
-        </p:nvSpPr>
-        <p:spPr>
-          <a:xfrm>
-            <a:off x="914400" y="3400200"/>
-            <a:ext cx="7315200" cy="457200"/>
-          </a:xfrm>
-          <a:prstGeom prst="rect">
-            <a:avLst/>
-          </a:prstGeom>
-          <a:noFill/>
-          <a:ln>
-            <a:noFill/>
-          </a:ln>
-        </p:spPr>
-        <p:txBody>
-          <a:bodyPr anchorCtr="0" anchor="ctr" bIns="0" lIns="0" spcFirstLastPara="1" rIns="0" wrap="square" tIns="0">
-            <a:noAutofit/>
-          </a:bodyPr>
-          <a:lstStyle/>
-          <a:p>
-            <a:pPr indent="0" lvl="0" marL="0" marR="0" rtl="0" algn="l">
-              <a:spcBef>
-                <a:spcPts val="0"/>
-              </a:spcBef>
-              <a:spcAft>
-                <a:spcPts val="0"/>
-              </a:spcAft>
-              <a:buClr>
-                <a:srgbClr val="16263F"/>
-              </a:buClr>
-              <a:buSzPts val="2000"/>
-              <a:buFont typeface="Arial"/>
-              <a:buNone/>
-            </a:pPr>
-            <a:r>
-              <a:rPr b="1" i="0" lang="en-US" sz="2000" u="none" cap="none" strike="noStrike">
-                <a:solidFill>
-                  <a:srgbClr val="16263F"/>
-                </a:solidFill>
-                <a:latin typeface="Arial"/>
-                <a:ea typeface="Arial"/>
-                <a:cs typeface="Arial"/>
-                <a:sym typeface="Arial"/>
-              </a:rPr>
-              <a:t>持分 11%  ×  Exit ¥1,800億  =  </a:t>
-            </a:r>
-            <a:r>
-              <a:rPr b="1" i="0" lang="en-US" sz="2000" u="none" cap="none" strike="noStrike">
-                <a:solidFill>
-                  <a:srgbClr val="D9881C"/>
-                </a:solidFill>
-                <a:latin typeface="Arial"/>
-                <a:ea typeface="Arial"/>
-                <a:cs typeface="Arial"/>
-                <a:sym typeface="Arial"/>
-              </a:rPr>
-              <a:t>¥約200億</a:t>
-            </a:r>
-            <a:endParaRPr b="0" i="0" sz="2000" u="none" cap="none" strike="noStrike">
-              <a:solidFill>
-                <a:schemeClr val="dk1"/>
-              </a:solidFill>
-              <a:latin typeface="Calibri"/>
-              <a:ea typeface="Calibri"/>
-              <a:cs typeface="Calibri"/>
-              <a:sym typeface="Calibri"/>
-            </a:endParaRPr>
-          </a:p>
-        </p:txBody>
-      </p:sp>
-      <p:sp>
-        <p:nvSpPr>
-          <p:cNvPr id="213" name="Google Shape;213;p11"/>
-          <p:cNvSpPr/>
-          <p:nvPr/>
-        </p:nvSpPr>
-        <p:spPr>
-          <a:xfrm>
-            <a:off x="914400" y="3903120"/>
-            <a:ext cx="7315200" cy="365760"/>
-          </a:xfrm>
-          <a:prstGeom prst="rect">
-            <a:avLst/>
-          </a:prstGeom>
-          <a:noFill/>
-          <a:ln>
-            <a:noFill/>
-          </a:ln>
-        </p:spPr>
-        <p:txBody>
-          <a:bodyPr anchorCtr="0" anchor="ctr" bIns="0" lIns="0" spcFirstLastPara="1" rIns="0" wrap="square" tIns="0">
-            <a:noAutofit/>
-          </a:bodyPr>
-          <a:lstStyle/>
-          <a:p>
-            <a:pPr indent="0" lvl="0" marL="0" marR="0" rtl="0" algn="l">
-              <a:spcBef>
-                <a:spcPts val="0"/>
-              </a:spcBef>
-              <a:spcAft>
-                <a:spcPts val="0"/>
-              </a:spcAft>
-              <a:buClr>
-                <a:srgbClr val="56627A"/>
-              </a:buClr>
-              <a:buSzPts val="1400"/>
-              <a:buFont typeface="Arial"/>
-              <a:buNone/>
-            </a:pPr>
-            <a:r>
-              <a:rPr b="0" i="0" lang="en-US" sz="1400" u="none" cap="none" strike="noStrike">
-                <a:solidFill>
-                  <a:srgbClr val="56627A"/>
-                </a:solidFill>
-                <a:latin typeface="Arial"/>
-                <a:ea typeface="Arial"/>
-                <a:cs typeface="Arial"/>
-                <a:sym typeface="Arial"/>
-              </a:rPr>
-              <a:t>＝ ファンド(¥150億)の 約1.3倍 を1社で回収。  </a:t>
-            </a:r>
-            <a:r>
-              <a:rPr b="1" i="0" lang="en-US" sz="1400" u="none" cap="none" strike="noStrike">
-                <a:solidFill>
-                  <a:srgbClr val="1488C2"/>
-                </a:solidFill>
-                <a:latin typeface="Arial"/>
-                <a:ea typeface="Arial"/>
-                <a:cs typeface="Arial"/>
-                <a:sym typeface="Arial"/>
-              </a:rPr>
-              <a:t>持分 × Exit ≧ ファンド総額 ✓</a:t>
-            </a:r>
-            <a:endParaRPr b="0" i="0" sz="1400" u="none" cap="none" strike="noStrike">
-              <a:solidFill>
-                <a:schemeClr val="dk1"/>
-              </a:solidFill>
-              <a:latin typeface="Calibri"/>
-              <a:ea typeface="Calibri"/>
-              <a:cs typeface="Calibri"/>
-              <a:sym typeface="Calibri"/>
-            </a:endParaRPr>
-          </a:p>
-        </p:txBody>
-      </p:sp>
-      <p:sp>
-        <p:nvSpPr>
-          <p:cNvPr id="214" name="Google Shape;214;p11"/>
-          <p:cNvSpPr/>
-          <p:nvPr/>
-        </p:nvSpPr>
-        <p:spPr>
-          <a:xfrm>
-            <a:off x="914400" y="4314600"/>
-            <a:ext cx="7315200" cy="320040"/>
-          </a:xfrm>
-          <a:prstGeom prst="rect">
-            <a:avLst/>
-          </a:prstGeom>
-          <a:noFill/>
-          <a:ln>
-            <a:noFill/>
-          </a:ln>
-        </p:spPr>
-        <p:txBody>
-          <a:bodyPr anchorCtr="0" anchor="ctr" bIns="0" lIns="0" spcFirstLastPara="1" rIns="0" wrap="square" tIns="0">
-            <a:noAutofit/>
-          </a:bodyPr>
-          <a:lstStyle/>
-          <a:p>
-            <a:pPr indent="0" lvl="0" marL="0" marR="0" rtl="0" algn="l">
-              <a:spcBef>
-                <a:spcPts val="0"/>
-              </a:spcBef>
-              <a:spcAft>
-                <a:spcPts val="0"/>
-              </a:spcAft>
-              <a:buClr>
-                <a:srgbClr val="D9881C"/>
-              </a:buClr>
-              <a:buSzPts val="1200"/>
-              <a:buFont typeface="Arial"/>
-              <a:buNone/>
-            </a:pPr>
-            <a:r>
-              <a:rPr b="1" i="0" lang="en-US" sz="1200" u="none" cap="none" strike="noStrike">
-                <a:solidFill>
-                  <a:srgbClr val="D9881C"/>
-                </a:solidFill>
-                <a:latin typeface="Arial"/>
-                <a:ea typeface="Arial"/>
-                <a:cs typeface="Arial"/>
-                <a:sym typeface="Arial"/>
-              </a:rPr>
-              <a:t>1.3X  FUND RETURNED BY ONE COMPANY</a:t>
-            </a:r>
-            <a:endParaRPr b="0" i="0" sz="1200" u="none" cap="none" strike="noStrike">
-              <a:solidFill>
-                <a:schemeClr val="dk1"/>
-              </a:solidFill>
-              <a:latin typeface="Calibri"/>
-              <a:ea typeface="Calibri"/>
-              <a:cs typeface="Calibri"/>
-              <a:sym typeface="Calibri"/>
-            </a:endParaRPr>
-          </a:p>
-        </p:txBody>
-      </p:sp>
-      <p:cxnSp>
-        <p:nvCxnSpPr>
-          <p:cNvPr id="215" name="Rule9"/>
-          <p:cNvCxnSpPr/>
-          <p:nvPr/>
-        </p:nvCxnSpPr>
-        <p:spPr>
-          <a:xfrm>
-            <a:off x="548640" y="957600"/>
-            <a:ext cx="8046720" cy="0"/>
-          </a:xfrm>
-          <a:prstGeom prst="line">
-            <a:avLst/>
-          </a:prstGeom>
-          <a:ln w="19050">
-            <a:solidFill>
-              <a:srgbClr val="9FAEC6"/>
-            </a:solidFill>
-          </a:ln>
-        </p:spPr>
-        <p:style>
-          <a:lnRef idx="2">
-            <a:schemeClr val="accent1"/>
-          </a:lnRef>
-          <a:fillRef idx="0">
-            <a:schemeClr val="accent1"/>
-          </a:fillRef>
-          <a:effectRef idx="1">
-            <a:schemeClr val="accent1"/>
-          </a:effectRef>
-          <a:fontRef idx="minor">
-            <a:schemeClr val="tx1"/>
-          </a:fontRef>
-        </p:style>
-      </p:cxnSp>
-      <p:sp>
-        <p:nvSpPr>
-          <p:cNvPr id="216" name="KeyBox9"/>
-          <p:cNvSpPr/>
-          <p:nvPr/>
-        </p:nvSpPr>
-        <p:spPr>
-          <a:xfrm>
-            <a:off x="548640" y="1029600"/>
-            <a:ext cx="8046720" cy="691200"/>
-          </a:xfrm>
-          <a:prstGeom prst="rect">
-            <a:avLst/>
-          </a:prstGeom>
-          <a:solidFill>
-            <a:srgbClr val="EEF0F4"/>
-          </a:solidFill>
-          <a:ln w="9525">
-            <a:solidFill>
-              <a:srgbClr val="D7DCE5"/>
-            </a:solidFill>
-          </a:ln>
-          <a:effectLst/>
-        </p:spPr>
-        <p:txBody>
-          <a:bodyPr rtlCol="0" anchor="ctr" wrap="square" lIns="216000" rIns="108000" tIns="28800" bIns="28800"/>
-          <a:lstStyle/>
-          <a:p>
-            <a:pPr algn="l" marL="198000" indent="-162000">
-              <a:lnSpc>
-                <a:spcPct val="105000"/>
-              </a:lnSpc>
-              <a:spcBef>
-                <a:spcPts val="300"/>
-              </a:spcBef>
-              <a:spcAft>
-                <a:spcPts val="300"/>
-              </a:spcAft>
-              <a:buClr>
-                <a:srgbClr val="1488C2"/>
-              </a:buClr>
-              <a:buFont typeface="Arial"/>
-              <a:buChar char="▪"/>
-            </a:pPr>
-            <a:r>
-              <a:rPr sz="1100" b="0">
-                <a:solidFill>
-                  <a:srgbClr val="16263F"/>
-                </a:solidFill>
-                <a:latin typeface="Arial"/>
-              </a:rPr>
-              <a:t>売上85億円×ソフトマルチプル15〜18倍＝企業価値1,500〜1,800億円。</a:t>
-            </a:r>
-          </a:p>
-          <a:p>
-            <a:pPr algn="l" marL="198000" indent="-162000">
-              <a:lnSpc>
-                <a:spcPct val="105000"/>
-              </a:lnSpc>
-              <a:spcBef>
-                <a:spcPts val="300"/>
-              </a:spcBef>
-              <a:spcAft>
-                <a:spcPts val="300"/>
-              </a:spcAft>
-              <a:buClr>
-                <a:srgbClr val="1488C2"/>
-              </a:buClr>
-              <a:buFont typeface="Arial"/>
-              <a:buChar char="▪"/>
-            </a:pPr>
-            <a:r>
-              <a:rPr sz="1100" b="0">
-                <a:solidFill>
-                  <a:srgbClr val="16263F"/>
-                </a:solidFill>
-                <a:latin typeface="Arial"/>
-              </a:rPr>
-              <a:t>持分11%×Exit1,800億円＝約200億円。1社でファンドの約1.3倍を回収。</a:t>
-            </a:r>
-          </a:p>
-          <a:p>
-            <a:pPr algn="l" marL="198000" indent="-162000">
-              <a:lnSpc>
-                <a:spcPct val="105000"/>
-              </a:lnSpc>
-              <a:spcBef>
-                <a:spcPts val="300"/>
-              </a:spcBef>
-              <a:spcAft>
-                <a:spcPts val="300"/>
-              </a:spcAft>
-              <a:buClr>
-                <a:srgbClr val="1488C2"/>
-              </a:buClr>
-              <a:buFont typeface="Arial"/>
-              <a:buChar char="▪"/>
-            </a:pPr>
-            <a:r>
-              <a:rPr sz="1100" b="0">
-                <a:solidFill>
-                  <a:srgbClr val="16263F"/>
-                </a:solidFill>
-                <a:latin typeface="Arial"/>
-              </a:rPr>
-              <a:t>「持分×Exit ≧ ファンド総額」を満たすファンドリターナー。</a:t>
-            </a:r>
-          </a:p>
-        </p:txBody>
-      </p:sp>
-      <p:sp>
-        <p:nvSpPr>
-          <p:cNvPr id="217" name="KeyBar9"/>
           <p:cNvSpPr/>
           <p:nvPr/>
         </p:nvSpPr>
